--- a/output/wordlabs-dic-3day.pptx
+++ b/output/wordlabs-dic-3day.pptx
@@ -4240,7 +4240,7 @@
                 <a:ea typeface="Calibri" pitchFamily="34" charset="-122"/>
                 <a:cs typeface="Calibri" pitchFamily="34" charset="-120"/>
               </a:rPr>
-              <a:t>"say, speak, or declare"</a:t>
+              <a:t>"say, speak, proclaim"</a:t>
             </a:r>
             <a:endParaRPr lang="en-US" sz="2200" dirty="0"/>
           </a:p>
@@ -5288,7 +5288,7 @@
                 <a:ea typeface="Calibri" pitchFamily="34" charset="-122"/>
                 <a:cs typeface="Calibri" pitchFamily="34" charset="-120"/>
               </a:rPr>
-              <a:t>Word Labs  •  wordlabs.app  •  Root: 'dic' = say, speak, or declare</a:t>
+              <a:t>Word Labs  •  wordlabs.app  •  Root: 'dic' = say, speak, proclaim</a:t>
             </a:r>
             <a:endParaRPr lang="en-US" sz="800" dirty="0"/>
           </a:p>
@@ -5622,7 +5622,7 @@
                 <a:ea typeface="Trebuchet MS" pitchFamily="34" charset="-122"/>
                 <a:cs typeface="Trebuchet MS" pitchFamily="34" charset="-120"/>
               </a:rPr>
-              <a:t>1</a:t>
+              <a:t>2</a:t>
             </a:r>
             <a:pPr algn="ctr" indent="0" marL="0">
               <a:buNone/>
@@ -5636,7 +5636,7 @@
                 <a:ea typeface="Trebuchet MS" pitchFamily="34" charset="-122"/>
                 <a:cs typeface="Trebuchet MS" pitchFamily="34" charset="-120"/>
               </a:rPr>
-              <a:t>  punctuation mark</a:t>
+              <a:t>  punctuation marks</a:t>
             </a:r>
             <a:endParaRPr lang="en-US" sz="2800" dirty="0"/>
           </a:p>
@@ -5928,7 +5928,7 @@
                 <a:ea typeface="Calibri" pitchFamily="34" charset="-122"/>
                 <a:cs typeface="Calibri" pitchFamily="34" charset="-120"/>
               </a:rPr>
-              <a:t>Word Labs  •  wordlabs.app  •  Root: 'dic' = say, speak, or declare</a:t>
+              <a:t>Word Labs  •  wordlabs.app  •  Root: 'dic' = say, speak, proclaim</a:t>
             </a:r>
             <a:endParaRPr lang="en-US" sz="800" dirty="0"/>
           </a:p>
@@ -6071,7 +6071,7 @@
                 <a:ea typeface="Calibri" pitchFamily="34" charset="-122"/>
                 <a:cs typeface="Calibri" pitchFamily="34" charset="-120"/>
               </a:rPr>
-              <a:t> what the </a:t>
+              <a:t> what will happen next, or does the evidence </a:t>
             </a:r>
             <a:pPr algn="l" indent="0" marL="0">
               <a:buNone/>
@@ -6088,7 +6088,7 @@
                 <a:ea typeface="Calibri" pitchFamily="34" charset="-122"/>
                 <a:cs typeface="Calibri" pitchFamily="34" charset="-120"/>
               </a:rPr>
-              <a:t>dictator</a:t>
+              <a:t>indicate</a:t>
             </a:r>
             <a:pPr algn="l" indent="0" marL="0">
               <a:buNone/>
@@ -6102,7 +6102,7 @@
                 <a:ea typeface="Calibri" pitchFamily="34" charset="-122"/>
                 <a:cs typeface="Calibri" pitchFamily="34" charset="-120"/>
               </a:rPr>
-              <a:t> will announce to the crowd?</a:t>
+              <a:t> something unexpected?</a:t>
             </a:r>
             <a:endParaRPr lang="en-US" sz="1800" dirty="0"/>
           </a:p>
@@ -6385,7 +6385,7 @@
                 <a:ea typeface="Trebuchet MS" pitchFamily="34" charset="-122"/>
                 <a:cs typeface="Trebuchet MS" pitchFamily="34" charset="-120"/>
               </a:rPr>
-              <a:t>dictator</a:t>
+              <a:t>indicate</a:t>
             </a:r>
             <a:endParaRPr lang="en-US" sz="1400" dirty="0"/>
           </a:p>
@@ -6716,7 +6716,7 @@
                 <a:ea typeface="Calibri" pitchFamily="34" charset="-122"/>
                 <a:cs typeface="Calibri" pitchFamily="34" charset="-120"/>
               </a:rPr>
-              <a:t>Word Labs  •  wordlabs.app  •  Root: 'dic' = say, speak, or declare</a:t>
+              <a:t>Word Labs  •  wordlabs.app  •  Root: 'dic' = say, speak, proclaim</a:t>
             </a:r>
             <a:endParaRPr lang="en-US" sz="800" dirty="0"/>
           </a:p>
@@ -7543,7 +7543,7 @@
                 <a:ea typeface="Calibri" pitchFamily="34" charset="-122"/>
                 <a:cs typeface="Calibri" pitchFamily="34" charset="-120"/>
               </a:rPr>
-              <a:t>Word Labs  •  wordlabs.app  •  Root: 'dic' = say, speak, or declare</a:t>
+              <a:t>Word Labs  •  wordlabs.app  •  Root: 'dic' = say, speak, proclaim</a:t>
             </a:r>
             <a:endParaRPr lang="en-US" sz="800" dirty="0"/>
           </a:p>
@@ -8084,7 +8084,7 @@
                 <a:ea typeface="Calibri" pitchFamily="34" charset="-122"/>
                 <a:cs typeface="Calibri" pitchFamily="34" charset="-120"/>
               </a:rPr>
-              <a:t>word-forming element</a:t>
+              <a:t>word-forming consonant</a:t>
             </a:r>
             <a:endParaRPr lang="en-US" sz="850" dirty="0"/>
           </a:p>
@@ -8640,7 +8640,7 @@
                 <a:ea typeface="Calibri" pitchFamily="34" charset="-122"/>
                 <a:cs typeface="Calibri" pitchFamily="34" charset="-120"/>
               </a:rPr>
-              <a:t>Word Labs  •  wordlabs.app  •  Root: 'dic' = say, speak, or declare</a:t>
+              <a:t>Word Labs  •  wordlabs.app  •  Root: 'dic' = say, speak, proclaim</a:t>
             </a:r>
             <a:endParaRPr lang="en-US" sz="800" dirty="0"/>
           </a:p>
@@ -9181,7 +9181,7 @@
                 <a:ea typeface="Calibri" pitchFamily="34" charset="-122"/>
                 <a:cs typeface="Calibri" pitchFamily="34" charset="-120"/>
               </a:rPr>
-              <a:t>word-forming element</a:t>
+              <a:t>word-forming consonant</a:t>
             </a:r>
             <a:endParaRPr lang="en-US" sz="850" dirty="0"/>
           </a:p>
@@ -9869,7 +9869,7 @@
                 <a:ea typeface="Calibri" pitchFamily="34" charset="-122"/>
                 <a:cs typeface="Calibri" pitchFamily="34" charset="-120"/>
               </a:rPr>
-              <a:t>Word Labs  •  wordlabs.app  •  Root: 'dic' = say, speak, or declare</a:t>
+              <a:t>Word Labs  •  wordlabs.app  •  Root: 'dic' = say, speak, proclaim</a:t>
             </a:r>
             <a:endParaRPr lang="en-US" sz="800" dirty="0"/>
           </a:p>
@@ -10410,7 +10410,7 @@
                 <a:ea typeface="Calibri" pitchFamily="34" charset="-122"/>
                 <a:cs typeface="Calibri" pitchFamily="34" charset="-120"/>
               </a:rPr>
-              <a:t>word-forming element</a:t>
+              <a:t>word-forming consonant</a:t>
             </a:r>
             <a:endParaRPr lang="en-US" sz="850" dirty="0"/>
           </a:p>
@@ -11560,7 +11560,7 @@
                 <a:ea typeface="Calibri" pitchFamily="34" charset="-122"/>
                 <a:cs typeface="Calibri" pitchFamily="34" charset="-120"/>
               </a:rPr>
-              <a:t>Word Labs  •  wordlabs.app  •  Root: 'dic' = say, speak, or declare</a:t>
+              <a:t>Word Labs  •  wordlabs.app  •  Root: 'dic' = say, speak, proclaim</a:t>
             </a:r>
             <a:endParaRPr lang="en-US" sz="800" dirty="0"/>
           </a:p>
@@ -11699,7 +11699,7 @@
                 <a:ea typeface="Trebuchet MS" pitchFamily="34" charset="-122"/>
                 <a:cs typeface="Trebuchet MS" pitchFamily="34" charset="-120"/>
               </a:rPr>
-              <a:t>dictator</a:t>
+              <a:t>indicate</a:t>
             </a:r>
             <a:endParaRPr lang="en-US" sz="2800" dirty="0"/>
           </a:p>
@@ -12387,7 +12387,7 @@
                 <a:ea typeface="Calibri" pitchFamily="34" charset="-122"/>
                 <a:cs typeface="Calibri" pitchFamily="34" charset="-120"/>
               </a:rPr>
-              <a:t>Word Labs  •  wordlabs.app  •  Root: 'dic' = say, speak, or declare</a:t>
+              <a:t>Word Labs  •  wordlabs.app  •  Root: 'dic' = say, speak, proclaim</a:t>
             </a:r>
             <a:endParaRPr lang="en-US" sz="800" dirty="0"/>
           </a:p>
@@ -12526,7 +12526,7 @@
                 <a:ea typeface="Trebuchet MS" pitchFamily="34" charset="-122"/>
                 <a:cs typeface="Trebuchet MS" pitchFamily="34" charset="-120"/>
               </a:rPr>
-              <a:t>dictator</a:t>
+              <a:t>indicate</a:t>
             </a:r>
             <a:endParaRPr lang="en-US" sz="2800" dirty="0"/>
           </a:p>
@@ -12606,8 +12606,8 @@
         </p:nvSpPr>
         <p:spPr>
           <a:xfrm>
-            <a:off x="1989734" y="2258568"/>
-            <a:ext cx="1581912" cy="292608"/>
+            <a:off x="2221992" y="2258568"/>
+            <a:ext cx="1828800" cy="292608"/>
           </a:xfrm>
           <a:prstGeom prst="rect">
             <a:avLst>
@@ -12615,11 +12615,11 @@
             </a:avLst>
           </a:prstGeom>
           <a:solidFill>
-            <a:srgbClr val="CCFBF1"/>
+            <a:srgbClr val="DDD6FE"/>
           </a:solidFill>
           <a:ln w="19050">
             <a:solidFill>
-              <a:srgbClr val="0D9488"/>
+              <a:srgbClr val="7C3AED"/>
             </a:solidFill>
             <a:prstDash val="solid"/>
           </a:ln>
@@ -12640,8 +12640,8 @@
         </p:nvSpPr>
         <p:spPr>
           <a:xfrm>
-            <a:off x="1989734" y="2258568"/>
-            <a:ext cx="1581912" cy="292608"/>
+            <a:off x="2221992" y="2258568"/>
+            <a:ext cx="1828800" cy="292608"/>
           </a:xfrm>
           <a:prstGeom prst="rect">
             <a:avLst/>
@@ -12659,13 +12659,13 @@
             <a:r>
               <a:rPr lang="en-US" sz="1300" b="1" dirty="0">
                 <a:solidFill>
-                  <a:srgbClr val="0F766E"/>
+                  <a:srgbClr val="4C1D95"/>
                 </a:solidFill>
                 <a:latin typeface="Trebuchet MS" pitchFamily="34" charset="0"/>
                 <a:ea typeface="Trebuchet MS" pitchFamily="34" charset="-122"/>
                 <a:cs typeface="Trebuchet MS" pitchFamily="34" charset="-120"/>
               </a:rPr>
-              <a:t>dic</a:t>
+              <a:t>in</a:t>
             </a:r>
             <a:endParaRPr lang="en-US" sz="1300" dirty="0"/>
           </a:p>
@@ -12679,8 +12679,8 @@
         </p:nvSpPr>
         <p:spPr>
           <a:xfrm>
-            <a:off x="1989734" y="2569464"/>
-            <a:ext cx="1581912" cy="201168"/>
+            <a:off x="2221992" y="2569464"/>
+            <a:ext cx="1828800" cy="201168"/>
           </a:xfrm>
           <a:prstGeom prst="rect">
             <a:avLst/>
@@ -12704,7 +12704,7 @@
                 <a:ea typeface="Calibri" pitchFamily="34" charset="-122"/>
                 <a:cs typeface="Calibri" pitchFamily="34" charset="-120"/>
               </a:rPr>
-              <a:t>say, speak</a:t>
+              <a:t>into, towards</a:t>
             </a:r>
             <a:endParaRPr lang="en-US" sz="850" dirty="0"/>
           </a:p>
@@ -12718,8 +12718,8 @@
         </p:nvSpPr>
         <p:spPr>
           <a:xfrm>
-            <a:off x="3659429" y="2258568"/>
-            <a:ext cx="1581912" cy="292608"/>
+            <a:off x="4370832" y="2258568"/>
+            <a:ext cx="1828800" cy="292608"/>
           </a:xfrm>
           <a:prstGeom prst="rect">
             <a:avLst>
@@ -12727,11 +12727,11 @@
             </a:avLst>
           </a:prstGeom>
           <a:solidFill>
-            <a:srgbClr val="FCE7F3"/>
+            <a:srgbClr val="CCFBF1"/>
           </a:solidFill>
           <a:ln w="19050">
             <a:solidFill>
-              <a:srgbClr val="DB2777"/>
+              <a:srgbClr val="0D9488"/>
             </a:solidFill>
             <a:prstDash val="solid"/>
           </a:ln>
@@ -12752,8 +12752,8 @@
         </p:nvSpPr>
         <p:spPr>
           <a:xfrm>
-            <a:off x="3659429" y="2258568"/>
-            <a:ext cx="1581912" cy="292608"/>
+            <a:off x="4370832" y="2258568"/>
+            <a:ext cx="1828800" cy="292608"/>
           </a:xfrm>
           <a:prstGeom prst="rect">
             <a:avLst/>
@@ -12771,13 +12771,13 @@
             <a:r>
               <a:rPr lang="en-US" sz="1300" b="1" dirty="0">
                 <a:solidFill>
-                  <a:srgbClr val="9D174D"/>
+                  <a:srgbClr val="0F766E"/>
                 </a:solidFill>
                 <a:latin typeface="Trebuchet MS" pitchFamily="34" charset="0"/>
                 <a:ea typeface="Trebuchet MS" pitchFamily="34" charset="-122"/>
                 <a:cs typeface="Trebuchet MS" pitchFamily="34" charset="-120"/>
               </a:rPr>
-              <a:t>t</a:t>
+              <a:t>dic</a:t>
             </a:r>
             <a:endParaRPr lang="en-US" sz="1300" dirty="0"/>
           </a:p>
@@ -12791,8 +12791,8 @@
         </p:nvSpPr>
         <p:spPr>
           <a:xfrm>
-            <a:off x="3659429" y="2569464"/>
-            <a:ext cx="1581912" cy="201168"/>
+            <a:off x="4370832" y="2569464"/>
+            <a:ext cx="1828800" cy="201168"/>
           </a:xfrm>
           <a:prstGeom prst="rect">
             <a:avLst/>
@@ -12816,7 +12816,7 @@
                 <a:ea typeface="Calibri" pitchFamily="34" charset="-122"/>
                 <a:cs typeface="Calibri" pitchFamily="34" charset="-120"/>
               </a:rPr>
-              <a:t>word-forming element</a:t>
+              <a:t>say, speak</a:t>
             </a:r>
             <a:endParaRPr lang="en-US" sz="850" dirty="0"/>
           </a:p>
@@ -12830,8 +12830,8 @@
         </p:nvSpPr>
         <p:spPr>
           <a:xfrm>
-            <a:off x="5329123" y="2258568"/>
-            <a:ext cx="1581912" cy="292608"/>
+            <a:off x="6519672" y="2258568"/>
+            <a:ext cx="1828800" cy="292608"/>
           </a:xfrm>
           <a:prstGeom prst="rect">
             <a:avLst>
@@ -12864,8 +12864,8 @@
         </p:nvSpPr>
         <p:spPr>
           <a:xfrm>
-            <a:off x="5329123" y="2258568"/>
-            <a:ext cx="1581912" cy="292608"/>
+            <a:off x="6519672" y="2258568"/>
+            <a:ext cx="1828800" cy="292608"/>
           </a:xfrm>
           <a:prstGeom prst="rect">
             <a:avLst/>
@@ -12889,7 +12889,7 @@
                 <a:ea typeface="Trebuchet MS" pitchFamily="34" charset="-122"/>
                 <a:cs typeface="Trebuchet MS" pitchFamily="34" charset="-120"/>
               </a:rPr>
-              <a:t>at</a:t>
+              <a:t>ate</a:t>
             </a:r>
             <a:endParaRPr lang="en-US" sz="1300" dirty="0"/>
           </a:p>
@@ -12903,8 +12903,8 @@
         </p:nvSpPr>
         <p:spPr>
           <a:xfrm>
-            <a:off x="5329123" y="2569464"/>
-            <a:ext cx="1581912" cy="201168"/>
+            <a:off x="6519672" y="2569464"/>
+            <a:ext cx="1828800" cy="201168"/>
           </a:xfrm>
           <a:prstGeom prst="rect">
             <a:avLst/>
@@ -12928,7 +12928,7 @@
                 <a:ea typeface="Calibri" pitchFamily="34" charset="-122"/>
                 <a:cs typeface="Calibri" pitchFamily="34" charset="-120"/>
               </a:rPr>
-              <a:t>action or process</a:t>
+              <a:t>to make or do</a:t>
             </a:r>
             <a:endParaRPr lang="en-US" sz="850" dirty="0"/>
           </a:p>
@@ -12942,30 +12942,23 @@
         </p:nvSpPr>
         <p:spPr>
           <a:xfrm>
-            <a:off x="6998818" y="2258568"/>
-            <a:ext cx="1581912" cy="292608"/>
+            <a:off x="365760" y="3273552"/>
+            <a:ext cx="1371600" cy="658368"/>
           </a:xfrm>
           <a:prstGeom prst="rect">
             <a:avLst>
-              <a:gd name="adj" fmla="val 25000"/>
+              <a:gd name="adj" fmla="val 8333"/>
             </a:avLst>
           </a:prstGeom>
           <a:solidFill>
-            <a:srgbClr val="FCE7F3"/>
-          </a:solidFill>
-          <a:ln w="19050">
-            <a:solidFill>
-              <a:srgbClr val="DB2777"/>
-            </a:solidFill>
-            <a:prstDash val="solid"/>
-          </a:ln>
-          <a:effectLst>
-            <a:outerShdw sx="100000" sy="100000" kx="0" ky="0" algn="bl" rotWithShape="0" blurRad="101600" dist="38100" dir="8100000">
-              <a:srgbClr val="000000">
-                <a:alpha val="12000"/>
-              </a:srgbClr>
-            </a:outerShdw>
-          </a:effectLst>
+            <a:srgbClr val="E2E8F0"/>
+          </a:solidFill>
+          <a:ln w="12700">
+            <a:solidFill>
+              <a:srgbClr val="E2E8F0"/>
+            </a:solidFill>
+            <a:prstDash val="solid"/>
+          </a:ln>
         </p:spPr>
       </p:sp>
       <p:sp>
@@ -12976,90 +12969,117 @@
         </p:nvSpPr>
         <p:spPr>
           <a:xfrm>
-            <a:off x="6998818" y="2258568"/>
-            <a:ext cx="1581912" cy="292608"/>
-          </a:xfrm>
-          <a:prstGeom prst="rect">
-            <a:avLst/>
-          </a:prstGeom>
-          <a:noFill/>
-          <a:ln/>
-        </p:spPr>
-        <p:txBody>
-          <a:bodyPr wrap="square" lIns="0" tIns="0" rIns="0" bIns="0" rtlCol="0" anchor="ctr"/>
-          <a:lstStyle/>
-          <a:p>
-            <a:pPr algn="ctr" indent="0" marL="0">
-              <a:buNone/>
-            </a:pPr>
-            <a:r>
-              <a:rPr lang="en-US" sz="1300" b="1" dirty="0">
-                <a:solidFill>
-                  <a:srgbClr val="9D174D"/>
+            <a:off x="365760" y="3273552"/>
+            <a:ext cx="1371600" cy="658368"/>
+          </a:xfrm>
+          <a:prstGeom prst="rect">
+            <a:avLst/>
+          </a:prstGeom>
+          <a:noFill/>
+          <a:ln/>
+        </p:spPr>
+        <p:txBody>
+          <a:bodyPr wrap="square" lIns="0" tIns="0" rIns="0" bIns="0" rtlCol="0" anchor="ctr"/>
+          <a:lstStyle/>
+          <a:p>
+            <a:pPr algn="ctr" indent="0" marL="0">
+              <a:buNone/>
+            </a:pPr>
+            <a:r>
+              <a:rPr lang="en-US" sz="1100" b="1" dirty="0">
+                <a:solidFill>
+                  <a:srgbClr val="475569"/>
                 </a:solidFill>
                 <a:latin typeface="Trebuchet MS" pitchFamily="34" charset="0"/>
                 <a:ea typeface="Trebuchet MS" pitchFamily="34" charset="-122"/>
                 <a:cs typeface="Trebuchet MS" pitchFamily="34" charset="-120"/>
               </a:rPr>
-              <a:t>or</a:t>
-            </a:r>
-            <a:endParaRPr lang="en-US" sz="1300" dirty="0"/>
-          </a:p>
-        </p:txBody>
-      </p:sp>
-      <p:sp>
-        <p:nvSpPr>
-          <p:cNvPr id="27" name="Text 25"/>
-          <p:cNvSpPr/>
-          <p:nvPr/>
-        </p:nvSpPr>
-        <p:spPr>
-          <a:xfrm>
-            <a:off x="6998818" y="2569464"/>
-            <a:ext cx="1581912" cy="201168"/>
-          </a:xfrm>
-          <a:prstGeom prst="rect">
-            <a:avLst/>
-          </a:prstGeom>
-          <a:noFill/>
-          <a:ln/>
-        </p:spPr>
-        <p:txBody>
-          <a:bodyPr wrap="square" lIns="0" tIns="0" rIns="0" bIns="0" rtlCol="0" anchor="t"/>
-          <a:lstStyle/>
-          <a:p>
-            <a:pPr algn="ctr" indent="0" marL="0">
-              <a:buNone/>
-            </a:pPr>
-            <a:r>
-              <a:rPr lang="en-US" sz="850" dirty="0">
-                <a:solidFill>
-                  <a:srgbClr val="475569"/>
+              <a:t>Syllables</a:t>
+            </a:r>
+            <a:endParaRPr lang="en-US" sz="1100" dirty="0"/>
+          </a:p>
+        </p:txBody>
+      </p:sp>
+      <p:sp>
+        <p:nvSpPr>
+          <p:cNvPr id="27" name="Shape 25"/>
+          <p:cNvSpPr/>
+          <p:nvPr/>
+        </p:nvSpPr>
+        <p:spPr>
+          <a:xfrm>
+            <a:off x="1874520" y="3273552"/>
+            <a:ext cx="6903720" cy="658368"/>
+          </a:xfrm>
+          <a:prstGeom prst="rect">
+            <a:avLst>
+              <a:gd name="adj" fmla="val 8333"/>
+            </a:avLst>
+          </a:prstGeom>
+          <a:solidFill>
+            <a:srgbClr val="F8FAFC"/>
+          </a:solidFill>
+          <a:ln w="12700">
+            <a:solidFill>
+              <a:srgbClr val="E2E8F0"/>
+            </a:solidFill>
+            <a:prstDash val="dash"/>
+          </a:ln>
+        </p:spPr>
+      </p:sp>
+      <p:sp>
+        <p:nvSpPr>
+          <p:cNvPr id="28" name="Text 26"/>
+          <p:cNvSpPr/>
+          <p:nvPr/>
+        </p:nvSpPr>
+        <p:spPr>
+          <a:xfrm>
+            <a:off x="1874520" y="3273552"/>
+            <a:ext cx="6903720" cy="658368"/>
+          </a:xfrm>
+          <a:prstGeom prst="rect">
+            <a:avLst/>
+          </a:prstGeom>
+          <a:noFill/>
+          <a:ln/>
+        </p:spPr>
+        <p:txBody>
+          <a:bodyPr wrap="square" rtlCol="0" anchor="ctr"/>
+          <a:lstStyle/>
+          <a:p>
+            <a:pPr algn="ctr" indent="0" marL="0">
+              <a:buNone/>
+            </a:pPr>
+            <a:r>
+              <a:rPr lang="en-US" sz="1100" i="1" dirty="0">
+                <a:solidFill>
+                  <a:srgbClr val="CBD5E1"/>
                 </a:solidFill>
                 <a:latin typeface="Calibri" pitchFamily="34" charset="0"/>
                 <a:ea typeface="Calibri" pitchFamily="34" charset="-122"/>
                 <a:cs typeface="Calibri" pitchFamily="34" charset="-120"/>
               </a:rPr>
-              <a:t>person who does something</a:t>
-            </a:r>
-            <a:endParaRPr lang="en-US" sz="850" dirty="0"/>
-          </a:p>
-        </p:txBody>
-      </p:sp>
-      <p:sp>
-        <p:nvSpPr>
-          <p:cNvPr id="28" name="Shape 26"/>
-          <p:cNvSpPr/>
-          <p:nvPr/>
-        </p:nvSpPr>
-        <p:spPr>
-          <a:xfrm>
-            <a:off x="365760" y="3273552"/>
-            <a:ext cx="1371600" cy="658368"/>
+              <a:t>Write here...</a:t>
+            </a:r>
+            <a:endParaRPr lang="en-US" sz="1100" dirty="0"/>
+          </a:p>
+        </p:txBody>
+      </p:sp>
+      <p:sp>
+        <p:nvSpPr>
+          <p:cNvPr id="29" name="Shape 27"/>
+          <p:cNvSpPr/>
+          <p:nvPr/>
+        </p:nvSpPr>
+        <p:spPr>
+          <a:xfrm>
+            <a:off x="365760" y="4096512"/>
+            <a:ext cx="1371600" cy="804672"/>
           </a:xfrm>
           <a:prstGeom prst="rect">
             <a:avLst>
-              <a:gd name="adj" fmla="val 8333"/>
+              <a:gd name="adj" fmla="val 6818"/>
             </a:avLst>
           </a:prstGeom>
           <a:solidFill>
@@ -13075,14 +13095,14 @@
       </p:sp>
       <p:sp>
         <p:nvSpPr>
-          <p:cNvPr id="29" name="Text 27"/>
-          <p:cNvSpPr/>
-          <p:nvPr/>
-        </p:nvSpPr>
-        <p:spPr>
-          <a:xfrm>
-            <a:off x="365760" y="3273552"/>
-            <a:ext cx="1371600" cy="658368"/>
+          <p:cNvPr id="30" name="Text 28"/>
+          <p:cNvSpPr/>
+          <p:nvPr/>
+        </p:nvSpPr>
+        <p:spPr>
+          <a:xfrm>
+            <a:off x="365760" y="4096512"/>
+            <a:ext cx="1371600" cy="804672"/>
           </a:xfrm>
           <a:prstGeom prst="rect">
             <a:avLst/>
@@ -13106,7 +13126,7 @@
                 <a:ea typeface="Trebuchet MS" pitchFamily="34" charset="-122"/>
                 <a:cs typeface="Trebuchet MS" pitchFamily="34" charset="-120"/>
               </a:rPr>
-              <a:t>Syllables</a:t>
+              <a:t>Phonemes</a:t>
             </a:r>
             <a:endParaRPr lang="en-US" sz="1100" dirty="0"/>
           </a:p>
@@ -13114,80 +13134,14 @@
       </p:sp>
       <p:sp>
         <p:nvSpPr>
-          <p:cNvPr id="30" name="Shape 28"/>
-          <p:cNvSpPr/>
-          <p:nvPr/>
-        </p:nvSpPr>
-        <p:spPr>
-          <a:xfrm>
-            <a:off x="1874520" y="3273552"/>
-            <a:ext cx="6903720" cy="658368"/>
-          </a:xfrm>
-          <a:prstGeom prst="rect">
-            <a:avLst>
-              <a:gd name="adj" fmla="val 8333"/>
-            </a:avLst>
-          </a:prstGeom>
-          <a:solidFill>
-            <a:srgbClr val="F8FAFC"/>
-          </a:solidFill>
-          <a:ln w="12700">
-            <a:solidFill>
-              <a:srgbClr val="E2E8F0"/>
-            </a:solidFill>
-            <a:prstDash val="dash"/>
-          </a:ln>
-        </p:spPr>
-      </p:sp>
-      <p:sp>
-        <p:nvSpPr>
-          <p:cNvPr id="31" name="Text 29"/>
-          <p:cNvSpPr/>
-          <p:nvPr/>
-        </p:nvSpPr>
-        <p:spPr>
-          <a:xfrm>
-            <a:off x="1874520" y="3273552"/>
-            <a:ext cx="6903720" cy="658368"/>
-          </a:xfrm>
-          <a:prstGeom prst="rect">
-            <a:avLst/>
-          </a:prstGeom>
-          <a:noFill/>
-          <a:ln/>
-        </p:spPr>
-        <p:txBody>
-          <a:bodyPr wrap="square" rtlCol="0" anchor="ctr"/>
-          <a:lstStyle/>
-          <a:p>
-            <a:pPr algn="ctr" indent="0" marL="0">
-              <a:buNone/>
-            </a:pPr>
-            <a:r>
-              <a:rPr lang="en-US" sz="1100" i="1" dirty="0">
-                <a:solidFill>
-                  <a:srgbClr val="CBD5E1"/>
-                </a:solidFill>
-                <a:latin typeface="Calibri" pitchFamily="34" charset="0"/>
-                <a:ea typeface="Calibri" pitchFamily="34" charset="-122"/>
-                <a:cs typeface="Calibri" pitchFamily="34" charset="-120"/>
-              </a:rPr>
-              <a:t>Write here...</a:t>
-            </a:r>
-            <a:endParaRPr lang="en-US" sz="1100" dirty="0"/>
-          </a:p>
-        </p:txBody>
-      </p:sp>
-      <p:sp>
-        <p:nvSpPr>
-          <p:cNvPr id="32" name="Shape 30"/>
-          <p:cNvSpPr/>
-          <p:nvPr/>
-        </p:nvSpPr>
-        <p:spPr>
-          <a:xfrm>
-            <a:off x="365760" y="4096512"/>
-            <a:ext cx="1371600" cy="804672"/>
+          <p:cNvPr id="31" name="Shape 29"/>
+          <p:cNvSpPr/>
+          <p:nvPr/>
+        </p:nvSpPr>
+        <p:spPr>
+          <a:xfrm>
+            <a:off x="1874520" y="4096512"/>
+            <a:ext cx="6903720" cy="804672"/>
           </a:xfrm>
           <a:prstGeom prst="rect">
             <a:avLst>
@@ -13195,85 +13149,19 @@
             </a:avLst>
           </a:prstGeom>
           <a:solidFill>
-            <a:srgbClr val="E2E8F0"/>
+            <a:srgbClr val="F8FAFC"/>
           </a:solidFill>
           <a:ln w="12700">
             <a:solidFill>
               <a:srgbClr val="E2E8F0"/>
             </a:solidFill>
-            <a:prstDash val="solid"/>
-          </a:ln>
-        </p:spPr>
-      </p:sp>
-      <p:sp>
-        <p:nvSpPr>
-          <p:cNvPr id="33" name="Text 31"/>
-          <p:cNvSpPr/>
-          <p:nvPr/>
-        </p:nvSpPr>
-        <p:spPr>
-          <a:xfrm>
-            <a:off x="365760" y="4096512"/>
-            <a:ext cx="1371600" cy="804672"/>
-          </a:xfrm>
-          <a:prstGeom prst="rect">
-            <a:avLst/>
-          </a:prstGeom>
-          <a:noFill/>
-          <a:ln/>
-        </p:spPr>
-        <p:txBody>
-          <a:bodyPr wrap="square" lIns="0" tIns="0" rIns="0" bIns="0" rtlCol="0" anchor="ctr"/>
-          <a:lstStyle/>
-          <a:p>
-            <a:pPr algn="ctr" indent="0" marL="0">
-              <a:buNone/>
-            </a:pPr>
-            <a:r>
-              <a:rPr lang="en-US" sz="1100" b="1" dirty="0">
-                <a:solidFill>
-                  <a:srgbClr val="475569"/>
-                </a:solidFill>
-                <a:latin typeface="Trebuchet MS" pitchFamily="34" charset="0"/>
-                <a:ea typeface="Trebuchet MS" pitchFamily="34" charset="-122"/>
-                <a:cs typeface="Trebuchet MS" pitchFamily="34" charset="-120"/>
-              </a:rPr>
-              <a:t>Phonemes</a:t>
-            </a:r>
-            <a:endParaRPr lang="en-US" sz="1100" dirty="0"/>
-          </a:p>
-        </p:txBody>
-      </p:sp>
-      <p:sp>
-        <p:nvSpPr>
-          <p:cNvPr id="34" name="Shape 32"/>
-          <p:cNvSpPr/>
-          <p:nvPr/>
-        </p:nvSpPr>
-        <p:spPr>
-          <a:xfrm>
-            <a:off x="1874520" y="4096512"/>
-            <a:ext cx="6903720" cy="804672"/>
-          </a:xfrm>
-          <a:prstGeom prst="rect">
-            <a:avLst>
-              <a:gd name="adj" fmla="val 6818"/>
-            </a:avLst>
-          </a:prstGeom>
-          <a:solidFill>
-            <a:srgbClr val="F8FAFC"/>
-          </a:solidFill>
-          <a:ln w="12700">
-            <a:solidFill>
-              <a:srgbClr val="E2E8F0"/>
-            </a:solidFill>
             <a:prstDash val="dash"/>
           </a:ln>
         </p:spPr>
       </p:sp>
       <p:sp>
         <p:nvSpPr>
-          <p:cNvPr id="35" name="Text 33"/>
+          <p:cNvPr id="32" name="Text 30"/>
           <p:cNvSpPr/>
           <p:nvPr/>
         </p:nvSpPr>
@@ -13596,7 +13484,7 @@
                 <a:ea typeface="Calibri" pitchFamily="34" charset="-122"/>
                 <a:cs typeface="Calibri" pitchFamily="34" charset="-120"/>
               </a:rPr>
-              <a:t>Word Labs  •  wordlabs.app  •  Root: 'dic' = say, speak, or declare</a:t>
+              <a:t>Word Labs  •  wordlabs.app  •  Root: 'dic' = say, speak, proclaim</a:t>
             </a:r>
             <a:endParaRPr lang="en-US" sz="800" dirty="0"/>
           </a:p>
@@ -13735,7 +13623,7 @@
                 <a:ea typeface="Trebuchet MS" pitchFamily="34" charset="-122"/>
                 <a:cs typeface="Trebuchet MS" pitchFamily="34" charset="-120"/>
               </a:rPr>
-              <a:t>dictator</a:t>
+              <a:t>indicate</a:t>
             </a:r>
             <a:endParaRPr lang="en-US" sz="2800" dirty="0"/>
           </a:p>
@@ -13815,8 +13703,8 @@
         </p:nvSpPr>
         <p:spPr>
           <a:xfrm>
-            <a:off x="1989734" y="2258568"/>
-            <a:ext cx="1581912" cy="292608"/>
+            <a:off x="2221992" y="2258568"/>
+            <a:ext cx="1828800" cy="292608"/>
           </a:xfrm>
           <a:prstGeom prst="rect">
             <a:avLst>
@@ -13824,11 +13712,11 @@
             </a:avLst>
           </a:prstGeom>
           <a:solidFill>
-            <a:srgbClr val="CCFBF1"/>
+            <a:srgbClr val="DDD6FE"/>
           </a:solidFill>
           <a:ln w="19050">
             <a:solidFill>
-              <a:srgbClr val="0D9488"/>
+              <a:srgbClr val="7C3AED"/>
             </a:solidFill>
             <a:prstDash val="solid"/>
           </a:ln>
@@ -13849,8 +13737,8 @@
         </p:nvSpPr>
         <p:spPr>
           <a:xfrm>
-            <a:off x="1989734" y="2258568"/>
-            <a:ext cx="1581912" cy="292608"/>
+            <a:off x="2221992" y="2258568"/>
+            <a:ext cx="1828800" cy="292608"/>
           </a:xfrm>
           <a:prstGeom prst="rect">
             <a:avLst/>
@@ -13868,13 +13756,13 @@
             <a:r>
               <a:rPr lang="en-US" sz="1300" b="1" dirty="0">
                 <a:solidFill>
-                  <a:srgbClr val="0F766E"/>
+                  <a:srgbClr val="4C1D95"/>
                 </a:solidFill>
                 <a:latin typeface="Trebuchet MS" pitchFamily="34" charset="0"/>
                 <a:ea typeface="Trebuchet MS" pitchFamily="34" charset="-122"/>
                 <a:cs typeface="Trebuchet MS" pitchFamily="34" charset="-120"/>
               </a:rPr>
-              <a:t>dic</a:t>
+              <a:t>in</a:t>
             </a:r>
             <a:endParaRPr lang="en-US" sz="1300" dirty="0"/>
           </a:p>
@@ -13888,8 +13776,8 @@
         </p:nvSpPr>
         <p:spPr>
           <a:xfrm>
-            <a:off x="1989734" y="2569464"/>
-            <a:ext cx="1581912" cy="201168"/>
+            <a:off x="2221992" y="2569464"/>
+            <a:ext cx="1828800" cy="201168"/>
           </a:xfrm>
           <a:prstGeom prst="rect">
             <a:avLst/>
@@ -13913,7 +13801,7 @@
                 <a:ea typeface="Calibri" pitchFamily="34" charset="-122"/>
                 <a:cs typeface="Calibri" pitchFamily="34" charset="-120"/>
               </a:rPr>
-              <a:t>say, speak</a:t>
+              <a:t>into, towards</a:t>
             </a:r>
             <a:endParaRPr lang="en-US" sz="850" dirty="0"/>
           </a:p>
@@ -13927,8 +13815,8 @@
         </p:nvSpPr>
         <p:spPr>
           <a:xfrm>
-            <a:off x="3659429" y="2258568"/>
-            <a:ext cx="1581912" cy="292608"/>
+            <a:off x="4370832" y="2258568"/>
+            <a:ext cx="1828800" cy="292608"/>
           </a:xfrm>
           <a:prstGeom prst="rect">
             <a:avLst>
@@ -13936,11 +13824,11 @@
             </a:avLst>
           </a:prstGeom>
           <a:solidFill>
-            <a:srgbClr val="FCE7F3"/>
+            <a:srgbClr val="CCFBF1"/>
           </a:solidFill>
           <a:ln w="19050">
             <a:solidFill>
-              <a:srgbClr val="DB2777"/>
+              <a:srgbClr val="0D9488"/>
             </a:solidFill>
             <a:prstDash val="solid"/>
           </a:ln>
@@ -13961,8 +13849,8 @@
         </p:nvSpPr>
         <p:spPr>
           <a:xfrm>
-            <a:off x="3659429" y="2258568"/>
-            <a:ext cx="1581912" cy="292608"/>
+            <a:off x="4370832" y="2258568"/>
+            <a:ext cx="1828800" cy="292608"/>
           </a:xfrm>
           <a:prstGeom prst="rect">
             <a:avLst/>
@@ -13980,13 +13868,13 @@
             <a:r>
               <a:rPr lang="en-US" sz="1300" b="1" dirty="0">
                 <a:solidFill>
-                  <a:srgbClr val="9D174D"/>
+                  <a:srgbClr val="0F766E"/>
                 </a:solidFill>
                 <a:latin typeface="Trebuchet MS" pitchFamily="34" charset="0"/>
                 <a:ea typeface="Trebuchet MS" pitchFamily="34" charset="-122"/>
                 <a:cs typeface="Trebuchet MS" pitchFamily="34" charset="-120"/>
               </a:rPr>
-              <a:t>t</a:t>
+              <a:t>dic</a:t>
             </a:r>
             <a:endParaRPr lang="en-US" sz="1300" dirty="0"/>
           </a:p>
@@ -14000,8 +13888,8 @@
         </p:nvSpPr>
         <p:spPr>
           <a:xfrm>
-            <a:off x="3659429" y="2569464"/>
-            <a:ext cx="1581912" cy="201168"/>
+            <a:off x="4370832" y="2569464"/>
+            <a:ext cx="1828800" cy="201168"/>
           </a:xfrm>
           <a:prstGeom prst="rect">
             <a:avLst/>
@@ -14025,7 +13913,7 @@
                 <a:ea typeface="Calibri" pitchFamily="34" charset="-122"/>
                 <a:cs typeface="Calibri" pitchFamily="34" charset="-120"/>
               </a:rPr>
-              <a:t>word-forming element</a:t>
+              <a:t>say, speak</a:t>
             </a:r>
             <a:endParaRPr lang="en-US" sz="850" dirty="0"/>
           </a:p>
@@ -14039,8 +13927,8 @@
         </p:nvSpPr>
         <p:spPr>
           <a:xfrm>
-            <a:off x="5329123" y="2258568"/>
-            <a:ext cx="1581912" cy="292608"/>
+            <a:off x="6519672" y="2258568"/>
+            <a:ext cx="1828800" cy="292608"/>
           </a:xfrm>
           <a:prstGeom prst="rect">
             <a:avLst>
@@ -14073,8 +13961,8 @@
         </p:nvSpPr>
         <p:spPr>
           <a:xfrm>
-            <a:off x="5329123" y="2258568"/>
-            <a:ext cx="1581912" cy="292608"/>
+            <a:off x="6519672" y="2258568"/>
+            <a:ext cx="1828800" cy="292608"/>
           </a:xfrm>
           <a:prstGeom prst="rect">
             <a:avLst/>
@@ -14098,7 +13986,7 @@
                 <a:ea typeface="Trebuchet MS" pitchFamily="34" charset="-122"/>
                 <a:cs typeface="Trebuchet MS" pitchFamily="34" charset="-120"/>
               </a:rPr>
-              <a:t>at</a:t>
+              <a:t>ate</a:t>
             </a:r>
             <a:endParaRPr lang="en-US" sz="1300" dirty="0"/>
           </a:p>
@@ -14112,8 +14000,8 @@
         </p:nvSpPr>
         <p:spPr>
           <a:xfrm>
-            <a:off x="5329123" y="2569464"/>
-            <a:ext cx="1581912" cy="201168"/>
+            <a:off x="6519672" y="2569464"/>
+            <a:ext cx="1828800" cy="201168"/>
           </a:xfrm>
           <a:prstGeom prst="rect">
             <a:avLst/>
@@ -14137,7 +14025,7 @@
                 <a:ea typeface="Calibri" pitchFamily="34" charset="-122"/>
                 <a:cs typeface="Calibri" pitchFamily="34" charset="-120"/>
               </a:rPr>
-              <a:t>action or process</a:t>
+              <a:t>to make or do</a:t>
             </a:r>
             <a:endParaRPr lang="en-US" sz="850" dirty="0"/>
           </a:p>
@@ -14151,30 +14039,23 @@
         </p:nvSpPr>
         <p:spPr>
           <a:xfrm>
-            <a:off x="6998818" y="2258568"/>
-            <a:ext cx="1581912" cy="292608"/>
+            <a:off x="365760" y="3273552"/>
+            <a:ext cx="1371600" cy="658368"/>
           </a:xfrm>
           <a:prstGeom prst="rect">
             <a:avLst>
-              <a:gd name="adj" fmla="val 25000"/>
+              <a:gd name="adj" fmla="val 8333"/>
             </a:avLst>
           </a:prstGeom>
           <a:solidFill>
-            <a:srgbClr val="FCE7F3"/>
-          </a:solidFill>
-          <a:ln w="19050">
-            <a:solidFill>
-              <a:srgbClr val="DB2777"/>
-            </a:solidFill>
-            <a:prstDash val="solid"/>
-          </a:ln>
-          <a:effectLst>
-            <a:outerShdw sx="100000" sy="100000" kx="0" ky="0" algn="bl" rotWithShape="0" blurRad="101600" dist="38100" dir="8100000">
-              <a:srgbClr val="000000">
-                <a:alpha val="12000"/>
-              </a:srgbClr>
-            </a:outerShdw>
-          </a:effectLst>
+            <a:srgbClr val="E2E8F0"/>
+          </a:solidFill>
+          <a:ln w="12700">
+            <a:solidFill>
+              <a:srgbClr val="E2E8F0"/>
+            </a:solidFill>
+            <a:prstDash val="solid"/>
+          </a:ln>
         </p:spPr>
       </p:sp>
       <p:sp>
@@ -14185,86 +14066,47 @@
         </p:nvSpPr>
         <p:spPr>
           <a:xfrm>
-            <a:off x="6998818" y="2258568"/>
-            <a:ext cx="1581912" cy="292608"/>
-          </a:xfrm>
-          <a:prstGeom prst="rect">
-            <a:avLst/>
-          </a:prstGeom>
-          <a:noFill/>
-          <a:ln/>
-        </p:spPr>
-        <p:txBody>
-          <a:bodyPr wrap="square" lIns="0" tIns="0" rIns="0" bIns="0" rtlCol="0" anchor="ctr"/>
-          <a:lstStyle/>
-          <a:p>
-            <a:pPr algn="ctr" indent="0" marL="0">
-              <a:buNone/>
-            </a:pPr>
-            <a:r>
-              <a:rPr lang="en-US" sz="1300" b="1" dirty="0">
-                <a:solidFill>
-                  <a:srgbClr val="9D174D"/>
+            <a:off x="365760" y="3273552"/>
+            <a:ext cx="1371600" cy="658368"/>
+          </a:xfrm>
+          <a:prstGeom prst="rect">
+            <a:avLst/>
+          </a:prstGeom>
+          <a:noFill/>
+          <a:ln/>
+        </p:spPr>
+        <p:txBody>
+          <a:bodyPr wrap="square" lIns="0" tIns="0" rIns="0" bIns="0" rtlCol="0" anchor="ctr"/>
+          <a:lstStyle/>
+          <a:p>
+            <a:pPr algn="ctr" indent="0" marL="0">
+              <a:buNone/>
+            </a:pPr>
+            <a:r>
+              <a:rPr lang="en-US" sz="1100" b="1" dirty="0">
+                <a:solidFill>
+                  <a:srgbClr val="475569"/>
                 </a:solidFill>
                 <a:latin typeface="Trebuchet MS" pitchFamily="34" charset="0"/>
                 <a:ea typeface="Trebuchet MS" pitchFamily="34" charset="-122"/>
                 <a:cs typeface="Trebuchet MS" pitchFamily="34" charset="-120"/>
               </a:rPr>
-              <a:t>or</a:t>
-            </a:r>
-            <a:endParaRPr lang="en-US" sz="1300" dirty="0"/>
-          </a:p>
-        </p:txBody>
-      </p:sp>
-      <p:sp>
-        <p:nvSpPr>
-          <p:cNvPr id="27" name="Text 25"/>
-          <p:cNvSpPr/>
-          <p:nvPr/>
-        </p:nvSpPr>
-        <p:spPr>
-          <a:xfrm>
-            <a:off x="6998818" y="2569464"/>
-            <a:ext cx="1581912" cy="201168"/>
-          </a:xfrm>
-          <a:prstGeom prst="rect">
-            <a:avLst/>
-          </a:prstGeom>
-          <a:noFill/>
-          <a:ln/>
-        </p:spPr>
-        <p:txBody>
-          <a:bodyPr wrap="square" lIns="0" tIns="0" rIns="0" bIns="0" rtlCol="0" anchor="t"/>
-          <a:lstStyle/>
-          <a:p>
-            <a:pPr algn="ctr" indent="0" marL="0">
-              <a:buNone/>
-            </a:pPr>
-            <a:r>
-              <a:rPr lang="en-US" sz="850" dirty="0">
-                <a:solidFill>
-                  <a:srgbClr val="475569"/>
-                </a:solidFill>
-                <a:latin typeface="Calibri" pitchFamily="34" charset="0"/>
-                <a:ea typeface="Calibri" pitchFamily="34" charset="-122"/>
-                <a:cs typeface="Calibri" pitchFamily="34" charset="-120"/>
-              </a:rPr>
-              <a:t>person who does something</a:t>
-            </a:r>
-            <a:endParaRPr lang="en-US" sz="850" dirty="0"/>
-          </a:p>
-        </p:txBody>
-      </p:sp>
-      <p:sp>
-        <p:nvSpPr>
-          <p:cNvPr id="28" name="Shape 26"/>
-          <p:cNvSpPr/>
-          <p:nvPr/>
-        </p:nvSpPr>
-        <p:spPr>
-          <a:xfrm>
-            <a:off x="365760" y="3273552"/>
-            <a:ext cx="1371600" cy="658368"/>
+              <a:t>Syllables</a:t>
+            </a:r>
+            <a:endParaRPr lang="en-US" sz="1100" dirty="0"/>
+          </a:p>
+        </p:txBody>
+      </p:sp>
+      <p:sp>
+        <p:nvSpPr>
+          <p:cNvPr id="27" name="Shape 25"/>
+          <p:cNvSpPr/>
+          <p:nvPr/>
+        </p:nvSpPr>
+        <p:spPr>
+          <a:xfrm>
+            <a:off x="1874520" y="3273552"/>
+            <a:ext cx="6903720" cy="658368"/>
           </a:xfrm>
           <a:prstGeom prst="rect">
             <a:avLst>
@@ -14272,11 +14114,38 @@
             </a:avLst>
           </a:prstGeom>
           <a:solidFill>
-            <a:srgbClr val="E2E8F0"/>
-          </a:solidFill>
-          <a:ln w="12700">
-            <a:solidFill>
-              <a:srgbClr val="E2E8F0"/>
+            <a:srgbClr val="CCFBF1"/>
+          </a:solidFill>
+          <a:ln w="12700">
+            <a:solidFill>
+              <a:srgbClr val="0D9488"/>
+            </a:solidFill>
+            <a:prstDash val="solid"/>
+          </a:ln>
+        </p:spPr>
+      </p:sp>
+      <p:sp>
+        <p:nvSpPr>
+          <p:cNvPr id="28" name="Shape 26"/>
+          <p:cNvSpPr/>
+          <p:nvPr/>
+        </p:nvSpPr>
+        <p:spPr>
+          <a:xfrm>
+            <a:off x="2313432" y="3364992"/>
+            <a:ext cx="1645920" cy="475488"/>
+          </a:xfrm>
+          <a:prstGeom prst="rect">
+            <a:avLst>
+              <a:gd name="adj" fmla="val 9615"/>
+            </a:avLst>
+          </a:prstGeom>
+          <a:solidFill>
+            <a:srgbClr val="FFFFFF"/>
+          </a:solidFill>
+          <a:ln w="12700">
+            <a:solidFill>
+              <a:srgbClr val="0D9488"/>
             </a:solidFill>
             <a:prstDash val="solid"/>
           </a:ln>
@@ -14290,63 +14159,75 @@
         </p:nvSpPr>
         <p:spPr>
           <a:xfrm>
-            <a:off x="365760" y="3273552"/>
-            <a:ext cx="1371600" cy="658368"/>
-          </a:xfrm>
-          <a:prstGeom prst="rect">
-            <a:avLst/>
-          </a:prstGeom>
-          <a:noFill/>
-          <a:ln/>
-        </p:spPr>
-        <p:txBody>
-          <a:bodyPr wrap="square" lIns="0" tIns="0" rIns="0" bIns="0" rtlCol="0" anchor="ctr"/>
-          <a:lstStyle/>
-          <a:p>
-            <a:pPr algn="ctr" indent="0" marL="0">
-              <a:buNone/>
-            </a:pPr>
-            <a:r>
-              <a:rPr lang="en-US" sz="1100" b="1" dirty="0">
-                <a:solidFill>
-                  <a:srgbClr val="475569"/>
+            <a:off x="2313432" y="3364992"/>
+            <a:ext cx="1645920" cy="475488"/>
+          </a:xfrm>
+          <a:prstGeom prst="rect">
+            <a:avLst/>
+          </a:prstGeom>
+          <a:noFill/>
+          <a:ln/>
+        </p:spPr>
+        <p:txBody>
+          <a:bodyPr wrap="square" lIns="0" tIns="0" rIns="0" bIns="0" rtlCol="0" anchor="ctr"/>
+          <a:lstStyle/>
+          <a:p>
+            <a:pPr algn="ctr" indent="0" marL="0">
+              <a:buNone/>
+            </a:pPr>
+            <a:r>
+              <a:rPr lang="en-US" sz="1400" b="1" dirty="0">
+                <a:solidFill>
+                  <a:srgbClr val="0D9488"/>
                 </a:solidFill>
                 <a:latin typeface="Trebuchet MS" pitchFamily="34" charset="0"/>
                 <a:ea typeface="Trebuchet MS" pitchFamily="34" charset="-122"/>
                 <a:cs typeface="Trebuchet MS" pitchFamily="34" charset="-120"/>
               </a:rPr>
-              <a:t>Syllables</a:t>
-            </a:r>
-            <a:endParaRPr lang="en-US" sz="1100" dirty="0"/>
-          </a:p>
-        </p:txBody>
-      </p:sp>
-      <p:sp>
-        <p:nvSpPr>
-          <p:cNvPr id="30" name="Shape 28"/>
-          <p:cNvSpPr/>
-          <p:nvPr/>
-        </p:nvSpPr>
-        <p:spPr>
-          <a:xfrm>
-            <a:off x="1874520" y="3273552"/>
-            <a:ext cx="6903720" cy="658368"/>
-          </a:xfrm>
-          <a:prstGeom prst="rect">
-            <a:avLst>
-              <a:gd name="adj" fmla="val 8333"/>
-            </a:avLst>
-          </a:prstGeom>
-          <a:solidFill>
-            <a:srgbClr val="CCFBF1"/>
-          </a:solidFill>
-          <a:ln w="12700">
-            <a:solidFill>
-              <a:srgbClr val="0D9488"/>
-            </a:solidFill>
-            <a:prstDash val="solid"/>
-          </a:ln>
-        </p:spPr>
+              <a:t>in</a:t>
+            </a:r>
+            <a:endParaRPr lang="en-US" sz="1400" dirty="0"/>
+          </a:p>
+        </p:txBody>
+      </p:sp>
+      <p:sp>
+        <p:nvSpPr>
+          <p:cNvPr id="30" name="Text 28"/>
+          <p:cNvSpPr/>
+          <p:nvPr/>
+        </p:nvSpPr>
+        <p:spPr>
+          <a:xfrm>
+            <a:off x="3959352" y="3364992"/>
+            <a:ext cx="411480" cy="475488"/>
+          </a:xfrm>
+          <a:prstGeom prst="rect">
+            <a:avLst/>
+          </a:prstGeom>
+          <a:noFill/>
+          <a:ln/>
+        </p:spPr>
+        <p:txBody>
+          <a:bodyPr wrap="square" lIns="0" tIns="0" rIns="0" bIns="0" rtlCol="0" anchor="ctr"/>
+          <a:lstStyle/>
+          <a:p>
+            <a:pPr algn="ctr" indent="0" marL="0">
+              <a:buNone/>
+            </a:pPr>
+            <a:r>
+              <a:rPr lang="en-US" sz="1600" b="1" dirty="0">
+                <a:solidFill>
+                  <a:srgbClr val="0D9488"/>
+                </a:solidFill>
+                <a:latin typeface="Trebuchet MS" pitchFamily="34" charset="0"/>
+                <a:ea typeface="Trebuchet MS" pitchFamily="34" charset="-122"/>
+                <a:cs typeface="Trebuchet MS" pitchFamily="34" charset="-120"/>
+              </a:rPr>
+              <a:t>·</a:t>
+            </a:r>
+            <a:endParaRPr lang="en-US" sz="1600" dirty="0"/>
+          </a:p>
+        </p:txBody>
       </p:sp>
       <p:sp>
         <p:nvSpPr>
@@ -14356,7 +14237,7 @@
         </p:nvSpPr>
         <p:spPr>
           <a:xfrm>
-            <a:off x="2313432" y="3364992"/>
+            <a:off x="4370832" y="3364992"/>
             <a:ext cx="1645920" cy="475488"/>
           </a:xfrm>
           <a:prstGeom prst="rect">
@@ -14383,7 +14264,7 @@
         </p:nvSpPr>
         <p:spPr>
           <a:xfrm>
-            <a:off x="2313432" y="3364992"/>
+            <a:off x="4370832" y="3364992"/>
             <a:ext cx="1645920" cy="475488"/>
           </a:xfrm>
           <a:prstGeom prst="rect">
@@ -14408,7 +14289,7 @@
                 <a:ea typeface="Trebuchet MS" pitchFamily="34" charset="-122"/>
                 <a:cs typeface="Trebuchet MS" pitchFamily="34" charset="-120"/>
               </a:rPr>
-              <a:t>dic</a:t>
+              <a:t>di</a:t>
             </a:r>
             <a:endParaRPr lang="en-US" sz="1400" dirty="0"/>
           </a:p>
@@ -14422,7 +14303,7 @@
         </p:nvSpPr>
         <p:spPr>
           <a:xfrm>
-            <a:off x="3959352" y="3364992"/>
+            <a:off x="6016752" y="3364992"/>
             <a:ext cx="411480" cy="475488"/>
           </a:xfrm>
           <a:prstGeom prst="rect">
@@ -14461,7 +14342,7 @@
         </p:nvSpPr>
         <p:spPr>
           <a:xfrm>
-            <a:off x="4370832" y="3364992"/>
+            <a:off x="6428232" y="3364992"/>
             <a:ext cx="1645920" cy="475488"/>
           </a:xfrm>
           <a:prstGeom prst="rect">
@@ -14488,7 +14369,7 @@
         </p:nvSpPr>
         <p:spPr>
           <a:xfrm>
-            <a:off x="4370832" y="3364992"/>
+            <a:off x="6428232" y="3364992"/>
             <a:ext cx="1645920" cy="475488"/>
           </a:xfrm>
           <a:prstGeom prst="rect">
@@ -14513,7 +14394,7 @@
                 <a:ea typeface="Trebuchet MS" pitchFamily="34" charset="-122"/>
                 <a:cs typeface="Trebuchet MS" pitchFamily="34" charset="-120"/>
               </a:rPr>
-              <a:t>ta</a:t>
+              <a:t>cate</a:t>
             </a:r>
             <a:endParaRPr lang="en-US" sz="1400" dirty="0"/>
           </a:p>
@@ -14521,119 +14402,80 @@
       </p:sp>
       <p:sp>
         <p:nvSpPr>
-          <p:cNvPr id="36" name="Text 34"/>
-          <p:cNvSpPr/>
-          <p:nvPr/>
-        </p:nvSpPr>
-        <p:spPr>
-          <a:xfrm>
-            <a:off x="6016752" y="3364992"/>
-            <a:ext cx="411480" cy="475488"/>
-          </a:xfrm>
-          <a:prstGeom prst="rect">
-            <a:avLst/>
-          </a:prstGeom>
-          <a:noFill/>
-          <a:ln/>
-        </p:spPr>
-        <p:txBody>
-          <a:bodyPr wrap="square" lIns="0" tIns="0" rIns="0" bIns="0" rtlCol="0" anchor="ctr"/>
-          <a:lstStyle/>
-          <a:p>
-            <a:pPr algn="ctr" indent="0" marL="0">
-              <a:buNone/>
-            </a:pPr>
-            <a:r>
-              <a:rPr lang="en-US" sz="1600" b="1" dirty="0">
-                <a:solidFill>
-                  <a:srgbClr val="0D9488"/>
+          <p:cNvPr id="36" name="Shape 34"/>
+          <p:cNvSpPr/>
+          <p:nvPr/>
+        </p:nvSpPr>
+        <p:spPr>
+          <a:xfrm>
+            <a:off x="365760" y="4096512"/>
+            <a:ext cx="1371600" cy="804672"/>
+          </a:xfrm>
+          <a:prstGeom prst="rect">
+            <a:avLst>
+              <a:gd name="adj" fmla="val 6818"/>
+            </a:avLst>
+          </a:prstGeom>
+          <a:solidFill>
+            <a:srgbClr val="E2E8F0"/>
+          </a:solidFill>
+          <a:ln w="12700">
+            <a:solidFill>
+              <a:srgbClr val="E2E8F0"/>
+            </a:solidFill>
+            <a:prstDash val="solid"/>
+          </a:ln>
+        </p:spPr>
+      </p:sp>
+      <p:sp>
+        <p:nvSpPr>
+          <p:cNvPr id="37" name="Text 35"/>
+          <p:cNvSpPr/>
+          <p:nvPr/>
+        </p:nvSpPr>
+        <p:spPr>
+          <a:xfrm>
+            <a:off x="365760" y="4096512"/>
+            <a:ext cx="1371600" cy="804672"/>
+          </a:xfrm>
+          <a:prstGeom prst="rect">
+            <a:avLst/>
+          </a:prstGeom>
+          <a:noFill/>
+          <a:ln/>
+        </p:spPr>
+        <p:txBody>
+          <a:bodyPr wrap="square" lIns="0" tIns="0" rIns="0" bIns="0" rtlCol="0" anchor="ctr"/>
+          <a:lstStyle/>
+          <a:p>
+            <a:pPr algn="ctr" indent="0" marL="0">
+              <a:buNone/>
+            </a:pPr>
+            <a:r>
+              <a:rPr lang="en-US" sz="1100" b="1" dirty="0">
+                <a:solidFill>
+                  <a:srgbClr val="475569"/>
                 </a:solidFill>
                 <a:latin typeface="Trebuchet MS" pitchFamily="34" charset="0"/>
                 <a:ea typeface="Trebuchet MS" pitchFamily="34" charset="-122"/>
                 <a:cs typeface="Trebuchet MS" pitchFamily="34" charset="-120"/>
               </a:rPr>
-              <a:t>·</a:t>
-            </a:r>
-            <a:endParaRPr lang="en-US" sz="1600" dirty="0"/>
-          </a:p>
-        </p:txBody>
-      </p:sp>
-      <p:sp>
-        <p:nvSpPr>
-          <p:cNvPr id="37" name="Shape 35"/>
-          <p:cNvSpPr/>
-          <p:nvPr/>
-        </p:nvSpPr>
-        <p:spPr>
-          <a:xfrm>
-            <a:off x="6428232" y="3364992"/>
-            <a:ext cx="1645920" cy="475488"/>
-          </a:xfrm>
-          <a:prstGeom prst="rect">
-            <a:avLst>
-              <a:gd name="adj" fmla="val 9615"/>
-            </a:avLst>
-          </a:prstGeom>
-          <a:solidFill>
-            <a:srgbClr val="FFFFFF"/>
-          </a:solidFill>
-          <a:ln w="12700">
-            <a:solidFill>
-              <a:srgbClr val="0D9488"/>
-            </a:solidFill>
-            <a:prstDash val="solid"/>
-          </a:ln>
-        </p:spPr>
-      </p:sp>
-      <p:sp>
-        <p:nvSpPr>
-          <p:cNvPr id="38" name="Text 36"/>
-          <p:cNvSpPr/>
-          <p:nvPr/>
-        </p:nvSpPr>
-        <p:spPr>
-          <a:xfrm>
-            <a:off x="6428232" y="3364992"/>
-            <a:ext cx="1645920" cy="475488"/>
-          </a:xfrm>
-          <a:prstGeom prst="rect">
-            <a:avLst/>
-          </a:prstGeom>
-          <a:noFill/>
-          <a:ln/>
-        </p:spPr>
-        <p:txBody>
-          <a:bodyPr wrap="square" lIns="0" tIns="0" rIns="0" bIns="0" rtlCol="0" anchor="ctr"/>
-          <a:lstStyle/>
-          <a:p>
-            <a:pPr algn="ctr" indent="0" marL="0">
-              <a:buNone/>
-            </a:pPr>
-            <a:r>
-              <a:rPr lang="en-US" sz="1400" b="1" dirty="0">
-                <a:solidFill>
-                  <a:srgbClr val="0D9488"/>
-                </a:solidFill>
-                <a:latin typeface="Trebuchet MS" pitchFamily="34" charset="0"/>
-                <a:ea typeface="Trebuchet MS" pitchFamily="34" charset="-122"/>
-                <a:cs typeface="Trebuchet MS" pitchFamily="34" charset="-120"/>
-              </a:rPr>
-              <a:t>tor</a:t>
-            </a:r>
-            <a:endParaRPr lang="en-US" sz="1400" dirty="0"/>
-          </a:p>
-        </p:txBody>
-      </p:sp>
-      <p:sp>
-        <p:nvSpPr>
-          <p:cNvPr id="39" name="Shape 37"/>
-          <p:cNvSpPr/>
-          <p:nvPr/>
-        </p:nvSpPr>
-        <p:spPr>
-          <a:xfrm>
-            <a:off x="365760" y="4096512"/>
-            <a:ext cx="1371600" cy="804672"/>
+              <a:t>Phonemes</a:t>
+            </a:r>
+            <a:endParaRPr lang="en-US" sz="1100" dirty="0"/>
+          </a:p>
+        </p:txBody>
+      </p:sp>
+      <p:sp>
+        <p:nvSpPr>
+          <p:cNvPr id="38" name="Shape 36"/>
+          <p:cNvSpPr/>
+          <p:nvPr/>
+        </p:nvSpPr>
+        <p:spPr>
+          <a:xfrm>
+            <a:off x="1874520" y="4096512"/>
+            <a:ext cx="6903720" cy="804672"/>
           </a:xfrm>
           <a:prstGeom prst="rect">
             <a:avLst>
@@ -14641,85 +14483,19 @@
             </a:avLst>
           </a:prstGeom>
           <a:solidFill>
-            <a:srgbClr val="E2E8F0"/>
+            <a:srgbClr val="F8FAFC"/>
           </a:solidFill>
           <a:ln w="12700">
             <a:solidFill>
               <a:srgbClr val="E2E8F0"/>
             </a:solidFill>
-            <a:prstDash val="solid"/>
-          </a:ln>
-        </p:spPr>
-      </p:sp>
-      <p:sp>
-        <p:nvSpPr>
-          <p:cNvPr id="40" name="Text 38"/>
-          <p:cNvSpPr/>
-          <p:nvPr/>
-        </p:nvSpPr>
-        <p:spPr>
-          <a:xfrm>
-            <a:off x="365760" y="4096512"/>
-            <a:ext cx="1371600" cy="804672"/>
-          </a:xfrm>
-          <a:prstGeom prst="rect">
-            <a:avLst/>
-          </a:prstGeom>
-          <a:noFill/>
-          <a:ln/>
-        </p:spPr>
-        <p:txBody>
-          <a:bodyPr wrap="square" lIns="0" tIns="0" rIns="0" bIns="0" rtlCol="0" anchor="ctr"/>
-          <a:lstStyle/>
-          <a:p>
-            <a:pPr algn="ctr" indent="0" marL="0">
-              <a:buNone/>
-            </a:pPr>
-            <a:r>
-              <a:rPr lang="en-US" sz="1100" b="1" dirty="0">
-                <a:solidFill>
-                  <a:srgbClr val="475569"/>
-                </a:solidFill>
-                <a:latin typeface="Trebuchet MS" pitchFamily="34" charset="0"/>
-                <a:ea typeface="Trebuchet MS" pitchFamily="34" charset="-122"/>
-                <a:cs typeface="Trebuchet MS" pitchFamily="34" charset="-120"/>
-              </a:rPr>
-              <a:t>Phonemes</a:t>
-            </a:r>
-            <a:endParaRPr lang="en-US" sz="1100" dirty="0"/>
-          </a:p>
-        </p:txBody>
-      </p:sp>
-      <p:sp>
-        <p:nvSpPr>
-          <p:cNvPr id="41" name="Shape 39"/>
-          <p:cNvSpPr/>
-          <p:nvPr/>
-        </p:nvSpPr>
-        <p:spPr>
-          <a:xfrm>
-            <a:off x="1874520" y="4096512"/>
-            <a:ext cx="6903720" cy="804672"/>
-          </a:xfrm>
-          <a:prstGeom prst="rect">
-            <a:avLst>
-              <a:gd name="adj" fmla="val 6818"/>
-            </a:avLst>
-          </a:prstGeom>
-          <a:solidFill>
-            <a:srgbClr val="F8FAFC"/>
-          </a:solidFill>
-          <a:ln w="12700">
-            <a:solidFill>
-              <a:srgbClr val="E2E8F0"/>
-            </a:solidFill>
             <a:prstDash val="dash"/>
           </a:ln>
         </p:spPr>
       </p:sp>
       <p:sp>
         <p:nvSpPr>
-          <p:cNvPr id="42" name="Text 40"/>
+          <p:cNvPr id="39" name="Text 37"/>
           <p:cNvSpPr/>
           <p:nvPr/>
         </p:nvSpPr>
@@ -14951,7 +14727,7 @@
                 <a:ea typeface="Calibri" pitchFamily="34" charset="-122"/>
                 <a:cs typeface="Calibri" pitchFamily="34" charset="-120"/>
               </a:rPr>
-              <a:t>Root 'dic' — say, speak, or declare</a:t>
+              <a:t>Root 'dic' — say, speak, proclaim</a:t>
             </a:r>
             <a:endParaRPr lang="en-US" sz="1600" dirty="0"/>
           </a:p>
@@ -15307,7 +15083,7 @@
                 <a:ea typeface="Calibri" pitchFamily="34" charset="-122"/>
                 <a:cs typeface="Calibri" pitchFamily="34" charset="-120"/>
               </a:rPr>
-              <a:t>Word Labs  •  wordlabs.app  •  Root: 'dic' = say, speak, or declare</a:t>
+              <a:t>Word Labs  •  wordlabs.app  •  Root: 'dic' = say, speak, proclaim</a:t>
             </a:r>
             <a:endParaRPr lang="en-US" sz="800" dirty="0"/>
           </a:p>
@@ -15446,7 +15222,7 @@
                 <a:ea typeface="Trebuchet MS" pitchFamily="34" charset="-122"/>
                 <a:cs typeface="Trebuchet MS" pitchFamily="34" charset="-120"/>
               </a:rPr>
-              <a:t>dictator</a:t>
+              <a:t>indicate</a:t>
             </a:r>
             <a:endParaRPr lang="en-US" sz="2800" dirty="0"/>
           </a:p>
@@ -15526,8 +15302,8 @@
         </p:nvSpPr>
         <p:spPr>
           <a:xfrm>
-            <a:off x="1989734" y="2258568"/>
-            <a:ext cx="1581912" cy="292608"/>
+            <a:off x="2221992" y="2258568"/>
+            <a:ext cx="1828800" cy="292608"/>
           </a:xfrm>
           <a:prstGeom prst="rect">
             <a:avLst>
@@ -15535,11 +15311,11 @@
             </a:avLst>
           </a:prstGeom>
           <a:solidFill>
-            <a:srgbClr val="CCFBF1"/>
+            <a:srgbClr val="DDD6FE"/>
           </a:solidFill>
           <a:ln w="19050">
             <a:solidFill>
-              <a:srgbClr val="0D9488"/>
+              <a:srgbClr val="7C3AED"/>
             </a:solidFill>
             <a:prstDash val="solid"/>
           </a:ln>
@@ -15560,8 +15336,8 @@
         </p:nvSpPr>
         <p:spPr>
           <a:xfrm>
-            <a:off x="1989734" y="2258568"/>
-            <a:ext cx="1581912" cy="292608"/>
+            <a:off x="2221992" y="2258568"/>
+            <a:ext cx="1828800" cy="292608"/>
           </a:xfrm>
           <a:prstGeom prst="rect">
             <a:avLst/>
@@ -15579,13 +15355,13 @@
             <a:r>
               <a:rPr lang="en-US" sz="1300" b="1" dirty="0">
                 <a:solidFill>
-                  <a:srgbClr val="0F766E"/>
+                  <a:srgbClr val="4C1D95"/>
                 </a:solidFill>
                 <a:latin typeface="Trebuchet MS" pitchFamily="34" charset="0"/>
                 <a:ea typeface="Trebuchet MS" pitchFamily="34" charset="-122"/>
                 <a:cs typeface="Trebuchet MS" pitchFamily="34" charset="-120"/>
               </a:rPr>
-              <a:t>dic</a:t>
+              <a:t>in</a:t>
             </a:r>
             <a:endParaRPr lang="en-US" sz="1300" dirty="0"/>
           </a:p>
@@ -15599,8 +15375,8 @@
         </p:nvSpPr>
         <p:spPr>
           <a:xfrm>
-            <a:off x="1989734" y="2569464"/>
-            <a:ext cx="1581912" cy="201168"/>
+            <a:off x="2221992" y="2569464"/>
+            <a:ext cx="1828800" cy="201168"/>
           </a:xfrm>
           <a:prstGeom prst="rect">
             <a:avLst/>
@@ -15624,7 +15400,7 @@
                 <a:ea typeface="Calibri" pitchFamily="34" charset="-122"/>
                 <a:cs typeface="Calibri" pitchFamily="34" charset="-120"/>
               </a:rPr>
-              <a:t>say, speak</a:t>
+              <a:t>into, towards</a:t>
             </a:r>
             <a:endParaRPr lang="en-US" sz="850" dirty="0"/>
           </a:p>
@@ -15638,8 +15414,8 @@
         </p:nvSpPr>
         <p:spPr>
           <a:xfrm>
-            <a:off x="3659429" y="2258568"/>
-            <a:ext cx="1581912" cy="292608"/>
+            <a:off x="4370832" y="2258568"/>
+            <a:ext cx="1828800" cy="292608"/>
           </a:xfrm>
           <a:prstGeom prst="rect">
             <a:avLst>
@@ -15647,11 +15423,11 @@
             </a:avLst>
           </a:prstGeom>
           <a:solidFill>
-            <a:srgbClr val="FCE7F3"/>
+            <a:srgbClr val="CCFBF1"/>
           </a:solidFill>
           <a:ln w="19050">
             <a:solidFill>
-              <a:srgbClr val="DB2777"/>
+              <a:srgbClr val="0D9488"/>
             </a:solidFill>
             <a:prstDash val="solid"/>
           </a:ln>
@@ -15672,8 +15448,8 @@
         </p:nvSpPr>
         <p:spPr>
           <a:xfrm>
-            <a:off x="3659429" y="2258568"/>
-            <a:ext cx="1581912" cy="292608"/>
+            <a:off x="4370832" y="2258568"/>
+            <a:ext cx="1828800" cy="292608"/>
           </a:xfrm>
           <a:prstGeom prst="rect">
             <a:avLst/>
@@ -15691,13 +15467,13 @@
             <a:r>
               <a:rPr lang="en-US" sz="1300" b="1" dirty="0">
                 <a:solidFill>
-                  <a:srgbClr val="9D174D"/>
+                  <a:srgbClr val="0F766E"/>
                 </a:solidFill>
                 <a:latin typeface="Trebuchet MS" pitchFamily="34" charset="0"/>
                 <a:ea typeface="Trebuchet MS" pitchFamily="34" charset="-122"/>
                 <a:cs typeface="Trebuchet MS" pitchFamily="34" charset="-120"/>
               </a:rPr>
-              <a:t>t</a:t>
+              <a:t>dic</a:t>
             </a:r>
             <a:endParaRPr lang="en-US" sz="1300" dirty="0"/>
           </a:p>
@@ -15711,8 +15487,8 @@
         </p:nvSpPr>
         <p:spPr>
           <a:xfrm>
-            <a:off x="3659429" y="2569464"/>
-            <a:ext cx="1581912" cy="201168"/>
+            <a:off x="4370832" y="2569464"/>
+            <a:ext cx="1828800" cy="201168"/>
           </a:xfrm>
           <a:prstGeom prst="rect">
             <a:avLst/>
@@ -15736,7 +15512,7 @@
                 <a:ea typeface="Calibri" pitchFamily="34" charset="-122"/>
                 <a:cs typeface="Calibri" pitchFamily="34" charset="-120"/>
               </a:rPr>
-              <a:t>word-forming element</a:t>
+              <a:t>say, speak</a:t>
             </a:r>
             <a:endParaRPr lang="en-US" sz="850" dirty="0"/>
           </a:p>
@@ -15750,8 +15526,8 @@
         </p:nvSpPr>
         <p:spPr>
           <a:xfrm>
-            <a:off x="5329123" y="2258568"/>
-            <a:ext cx="1581912" cy="292608"/>
+            <a:off x="6519672" y="2258568"/>
+            <a:ext cx="1828800" cy="292608"/>
           </a:xfrm>
           <a:prstGeom prst="rect">
             <a:avLst>
@@ -15784,8 +15560,8 @@
         </p:nvSpPr>
         <p:spPr>
           <a:xfrm>
-            <a:off x="5329123" y="2258568"/>
-            <a:ext cx="1581912" cy="292608"/>
+            <a:off x="6519672" y="2258568"/>
+            <a:ext cx="1828800" cy="292608"/>
           </a:xfrm>
           <a:prstGeom prst="rect">
             <a:avLst/>
@@ -15809,7 +15585,7 @@
                 <a:ea typeface="Trebuchet MS" pitchFamily="34" charset="-122"/>
                 <a:cs typeface="Trebuchet MS" pitchFamily="34" charset="-120"/>
               </a:rPr>
-              <a:t>at</a:t>
+              <a:t>ate</a:t>
             </a:r>
             <a:endParaRPr lang="en-US" sz="1300" dirty="0"/>
           </a:p>
@@ -15823,8 +15599,8 @@
         </p:nvSpPr>
         <p:spPr>
           <a:xfrm>
-            <a:off x="5329123" y="2569464"/>
-            <a:ext cx="1581912" cy="201168"/>
+            <a:off x="6519672" y="2569464"/>
+            <a:ext cx="1828800" cy="201168"/>
           </a:xfrm>
           <a:prstGeom prst="rect">
             <a:avLst/>
@@ -15848,7 +15624,7 @@
                 <a:ea typeface="Calibri" pitchFamily="34" charset="-122"/>
                 <a:cs typeface="Calibri" pitchFamily="34" charset="-120"/>
               </a:rPr>
-              <a:t>action or process</a:t>
+              <a:t>to make or do</a:t>
             </a:r>
             <a:endParaRPr lang="en-US" sz="850" dirty="0"/>
           </a:p>
@@ -15862,30 +15638,23 @@
         </p:nvSpPr>
         <p:spPr>
           <a:xfrm>
-            <a:off x="6998818" y="2258568"/>
-            <a:ext cx="1581912" cy="292608"/>
+            <a:off x="365760" y="3273552"/>
+            <a:ext cx="1371600" cy="658368"/>
           </a:xfrm>
           <a:prstGeom prst="rect">
             <a:avLst>
-              <a:gd name="adj" fmla="val 25000"/>
+              <a:gd name="adj" fmla="val 8333"/>
             </a:avLst>
           </a:prstGeom>
           <a:solidFill>
-            <a:srgbClr val="FCE7F3"/>
-          </a:solidFill>
-          <a:ln w="19050">
-            <a:solidFill>
-              <a:srgbClr val="DB2777"/>
-            </a:solidFill>
-            <a:prstDash val="solid"/>
-          </a:ln>
-          <a:effectLst>
-            <a:outerShdw sx="100000" sy="100000" kx="0" ky="0" algn="bl" rotWithShape="0" blurRad="101600" dist="38100" dir="8100000">
-              <a:srgbClr val="000000">
-                <a:alpha val="12000"/>
-              </a:srgbClr>
-            </a:outerShdw>
-          </a:effectLst>
+            <a:srgbClr val="E2E8F0"/>
+          </a:solidFill>
+          <a:ln w="12700">
+            <a:solidFill>
+              <a:srgbClr val="E2E8F0"/>
+            </a:solidFill>
+            <a:prstDash val="solid"/>
+          </a:ln>
         </p:spPr>
       </p:sp>
       <p:sp>
@@ -15896,47 +15665,773 @@
         </p:nvSpPr>
         <p:spPr>
           <a:xfrm>
-            <a:off x="6998818" y="2258568"/>
-            <a:ext cx="1581912" cy="292608"/>
-          </a:xfrm>
-          <a:prstGeom prst="rect">
-            <a:avLst/>
-          </a:prstGeom>
-          <a:noFill/>
-          <a:ln/>
-        </p:spPr>
-        <p:txBody>
-          <a:bodyPr wrap="square" lIns="0" tIns="0" rIns="0" bIns="0" rtlCol="0" anchor="ctr"/>
-          <a:lstStyle/>
-          <a:p>
-            <a:pPr algn="ctr" indent="0" marL="0">
-              <a:buNone/>
-            </a:pPr>
-            <a:r>
-              <a:rPr lang="en-US" sz="1300" b="1" dirty="0">
-                <a:solidFill>
-                  <a:srgbClr val="9D174D"/>
+            <a:off x="365760" y="3273552"/>
+            <a:ext cx="1371600" cy="658368"/>
+          </a:xfrm>
+          <a:prstGeom prst="rect">
+            <a:avLst/>
+          </a:prstGeom>
+          <a:noFill/>
+          <a:ln/>
+        </p:spPr>
+        <p:txBody>
+          <a:bodyPr wrap="square" lIns="0" tIns="0" rIns="0" bIns="0" rtlCol="0" anchor="ctr"/>
+          <a:lstStyle/>
+          <a:p>
+            <a:pPr algn="ctr" indent="0" marL="0">
+              <a:buNone/>
+            </a:pPr>
+            <a:r>
+              <a:rPr lang="en-US" sz="1100" b="1" dirty="0">
+                <a:solidFill>
+                  <a:srgbClr val="475569"/>
                 </a:solidFill>
                 <a:latin typeface="Trebuchet MS" pitchFamily="34" charset="0"/>
                 <a:ea typeface="Trebuchet MS" pitchFamily="34" charset="-122"/>
                 <a:cs typeface="Trebuchet MS" pitchFamily="34" charset="-120"/>
               </a:rPr>
-              <a:t>or</a:t>
-            </a:r>
-            <a:endParaRPr lang="en-US" sz="1300" dirty="0"/>
-          </a:p>
-        </p:txBody>
-      </p:sp>
-      <p:sp>
-        <p:nvSpPr>
-          <p:cNvPr id="27" name="Text 25"/>
-          <p:cNvSpPr/>
-          <p:nvPr/>
-        </p:nvSpPr>
-        <p:spPr>
-          <a:xfrm>
-            <a:off x="6998818" y="2569464"/>
-            <a:ext cx="1581912" cy="201168"/>
+              <a:t>Syllables</a:t>
+            </a:r>
+            <a:endParaRPr lang="en-US" sz="1100" dirty="0"/>
+          </a:p>
+        </p:txBody>
+      </p:sp>
+      <p:sp>
+        <p:nvSpPr>
+          <p:cNvPr id="27" name="Shape 25"/>
+          <p:cNvSpPr/>
+          <p:nvPr/>
+        </p:nvSpPr>
+        <p:spPr>
+          <a:xfrm>
+            <a:off x="1874520" y="3273552"/>
+            <a:ext cx="6903720" cy="658368"/>
+          </a:xfrm>
+          <a:prstGeom prst="rect">
+            <a:avLst>
+              <a:gd name="adj" fmla="val 8333"/>
+            </a:avLst>
+          </a:prstGeom>
+          <a:solidFill>
+            <a:srgbClr val="CCFBF1"/>
+          </a:solidFill>
+          <a:ln w="12700">
+            <a:solidFill>
+              <a:srgbClr val="0D9488"/>
+            </a:solidFill>
+            <a:prstDash val="solid"/>
+          </a:ln>
+        </p:spPr>
+      </p:sp>
+      <p:sp>
+        <p:nvSpPr>
+          <p:cNvPr id="28" name="Shape 26"/>
+          <p:cNvSpPr/>
+          <p:nvPr/>
+        </p:nvSpPr>
+        <p:spPr>
+          <a:xfrm>
+            <a:off x="2313432" y="3364992"/>
+            <a:ext cx="1645920" cy="475488"/>
+          </a:xfrm>
+          <a:prstGeom prst="rect">
+            <a:avLst>
+              <a:gd name="adj" fmla="val 9615"/>
+            </a:avLst>
+          </a:prstGeom>
+          <a:solidFill>
+            <a:srgbClr val="FFFFFF"/>
+          </a:solidFill>
+          <a:ln w="12700">
+            <a:solidFill>
+              <a:srgbClr val="0D9488"/>
+            </a:solidFill>
+            <a:prstDash val="solid"/>
+          </a:ln>
+        </p:spPr>
+      </p:sp>
+      <p:sp>
+        <p:nvSpPr>
+          <p:cNvPr id="29" name="Text 27"/>
+          <p:cNvSpPr/>
+          <p:nvPr/>
+        </p:nvSpPr>
+        <p:spPr>
+          <a:xfrm>
+            <a:off x="2313432" y="3364992"/>
+            <a:ext cx="1645920" cy="475488"/>
+          </a:xfrm>
+          <a:prstGeom prst="rect">
+            <a:avLst/>
+          </a:prstGeom>
+          <a:noFill/>
+          <a:ln/>
+        </p:spPr>
+        <p:txBody>
+          <a:bodyPr wrap="square" lIns="0" tIns="0" rIns="0" bIns="0" rtlCol="0" anchor="ctr"/>
+          <a:lstStyle/>
+          <a:p>
+            <a:pPr algn="ctr" indent="0" marL="0">
+              <a:buNone/>
+            </a:pPr>
+            <a:r>
+              <a:rPr lang="en-US" sz="1400" b="1" dirty="0">
+                <a:solidFill>
+                  <a:srgbClr val="0D9488"/>
+                </a:solidFill>
+                <a:latin typeface="Trebuchet MS" pitchFamily="34" charset="0"/>
+                <a:ea typeface="Trebuchet MS" pitchFamily="34" charset="-122"/>
+                <a:cs typeface="Trebuchet MS" pitchFamily="34" charset="-120"/>
+              </a:rPr>
+              <a:t>in</a:t>
+            </a:r>
+            <a:endParaRPr lang="en-US" sz="1400" dirty="0"/>
+          </a:p>
+        </p:txBody>
+      </p:sp>
+      <p:sp>
+        <p:nvSpPr>
+          <p:cNvPr id="30" name="Text 28"/>
+          <p:cNvSpPr/>
+          <p:nvPr/>
+        </p:nvSpPr>
+        <p:spPr>
+          <a:xfrm>
+            <a:off x="3959352" y="3364992"/>
+            <a:ext cx="411480" cy="475488"/>
+          </a:xfrm>
+          <a:prstGeom prst="rect">
+            <a:avLst/>
+          </a:prstGeom>
+          <a:noFill/>
+          <a:ln/>
+        </p:spPr>
+        <p:txBody>
+          <a:bodyPr wrap="square" lIns="0" tIns="0" rIns="0" bIns="0" rtlCol="0" anchor="ctr"/>
+          <a:lstStyle/>
+          <a:p>
+            <a:pPr algn="ctr" indent="0" marL="0">
+              <a:buNone/>
+            </a:pPr>
+            <a:r>
+              <a:rPr lang="en-US" sz="1600" b="1" dirty="0">
+                <a:solidFill>
+                  <a:srgbClr val="0D9488"/>
+                </a:solidFill>
+                <a:latin typeface="Trebuchet MS" pitchFamily="34" charset="0"/>
+                <a:ea typeface="Trebuchet MS" pitchFamily="34" charset="-122"/>
+                <a:cs typeface="Trebuchet MS" pitchFamily="34" charset="-120"/>
+              </a:rPr>
+              <a:t>·</a:t>
+            </a:r>
+            <a:endParaRPr lang="en-US" sz="1600" dirty="0"/>
+          </a:p>
+        </p:txBody>
+      </p:sp>
+      <p:sp>
+        <p:nvSpPr>
+          <p:cNvPr id="31" name="Shape 29"/>
+          <p:cNvSpPr/>
+          <p:nvPr/>
+        </p:nvSpPr>
+        <p:spPr>
+          <a:xfrm>
+            <a:off x="4370832" y="3364992"/>
+            <a:ext cx="1645920" cy="475488"/>
+          </a:xfrm>
+          <a:prstGeom prst="rect">
+            <a:avLst>
+              <a:gd name="adj" fmla="val 9615"/>
+            </a:avLst>
+          </a:prstGeom>
+          <a:solidFill>
+            <a:srgbClr val="FFFFFF"/>
+          </a:solidFill>
+          <a:ln w="12700">
+            <a:solidFill>
+              <a:srgbClr val="0D9488"/>
+            </a:solidFill>
+            <a:prstDash val="solid"/>
+          </a:ln>
+        </p:spPr>
+      </p:sp>
+      <p:sp>
+        <p:nvSpPr>
+          <p:cNvPr id="32" name="Text 30"/>
+          <p:cNvSpPr/>
+          <p:nvPr/>
+        </p:nvSpPr>
+        <p:spPr>
+          <a:xfrm>
+            <a:off x="4370832" y="3364992"/>
+            <a:ext cx="1645920" cy="475488"/>
+          </a:xfrm>
+          <a:prstGeom prst="rect">
+            <a:avLst/>
+          </a:prstGeom>
+          <a:noFill/>
+          <a:ln/>
+        </p:spPr>
+        <p:txBody>
+          <a:bodyPr wrap="square" lIns="0" tIns="0" rIns="0" bIns="0" rtlCol="0" anchor="ctr"/>
+          <a:lstStyle/>
+          <a:p>
+            <a:pPr algn="ctr" indent="0" marL="0">
+              <a:buNone/>
+            </a:pPr>
+            <a:r>
+              <a:rPr lang="en-US" sz="1400" b="1" dirty="0">
+                <a:solidFill>
+                  <a:srgbClr val="0D9488"/>
+                </a:solidFill>
+                <a:latin typeface="Trebuchet MS" pitchFamily="34" charset="0"/>
+                <a:ea typeface="Trebuchet MS" pitchFamily="34" charset="-122"/>
+                <a:cs typeface="Trebuchet MS" pitchFamily="34" charset="-120"/>
+              </a:rPr>
+              <a:t>di</a:t>
+            </a:r>
+            <a:endParaRPr lang="en-US" sz="1400" dirty="0"/>
+          </a:p>
+        </p:txBody>
+      </p:sp>
+      <p:sp>
+        <p:nvSpPr>
+          <p:cNvPr id="33" name="Text 31"/>
+          <p:cNvSpPr/>
+          <p:nvPr/>
+        </p:nvSpPr>
+        <p:spPr>
+          <a:xfrm>
+            <a:off x="6016752" y="3364992"/>
+            <a:ext cx="411480" cy="475488"/>
+          </a:xfrm>
+          <a:prstGeom prst="rect">
+            <a:avLst/>
+          </a:prstGeom>
+          <a:noFill/>
+          <a:ln/>
+        </p:spPr>
+        <p:txBody>
+          <a:bodyPr wrap="square" lIns="0" tIns="0" rIns="0" bIns="0" rtlCol="0" anchor="ctr"/>
+          <a:lstStyle/>
+          <a:p>
+            <a:pPr algn="ctr" indent="0" marL="0">
+              <a:buNone/>
+            </a:pPr>
+            <a:r>
+              <a:rPr lang="en-US" sz="1600" b="1" dirty="0">
+                <a:solidFill>
+                  <a:srgbClr val="0D9488"/>
+                </a:solidFill>
+                <a:latin typeface="Trebuchet MS" pitchFamily="34" charset="0"/>
+                <a:ea typeface="Trebuchet MS" pitchFamily="34" charset="-122"/>
+                <a:cs typeface="Trebuchet MS" pitchFamily="34" charset="-120"/>
+              </a:rPr>
+              <a:t>·</a:t>
+            </a:r>
+            <a:endParaRPr lang="en-US" sz="1600" dirty="0"/>
+          </a:p>
+        </p:txBody>
+      </p:sp>
+      <p:sp>
+        <p:nvSpPr>
+          <p:cNvPr id="34" name="Shape 32"/>
+          <p:cNvSpPr/>
+          <p:nvPr/>
+        </p:nvSpPr>
+        <p:spPr>
+          <a:xfrm>
+            <a:off x="6428232" y="3364992"/>
+            <a:ext cx="1645920" cy="475488"/>
+          </a:xfrm>
+          <a:prstGeom prst="rect">
+            <a:avLst>
+              <a:gd name="adj" fmla="val 9615"/>
+            </a:avLst>
+          </a:prstGeom>
+          <a:solidFill>
+            <a:srgbClr val="FFFFFF"/>
+          </a:solidFill>
+          <a:ln w="12700">
+            <a:solidFill>
+              <a:srgbClr val="0D9488"/>
+            </a:solidFill>
+            <a:prstDash val="solid"/>
+          </a:ln>
+        </p:spPr>
+      </p:sp>
+      <p:sp>
+        <p:nvSpPr>
+          <p:cNvPr id="35" name="Text 33"/>
+          <p:cNvSpPr/>
+          <p:nvPr/>
+        </p:nvSpPr>
+        <p:spPr>
+          <a:xfrm>
+            <a:off x="6428232" y="3364992"/>
+            <a:ext cx="1645920" cy="475488"/>
+          </a:xfrm>
+          <a:prstGeom prst="rect">
+            <a:avLst/>
+          </a:prstGeom>
+          <a:noFill/>
+          <a:ln/>
+        </p:spPr>
+        <p:txBody>
+          <a:bodyPr wrap="square" lIns="0" tIns="0" rIns="0" bIns="0" rtlCol="0" anchor="ctr"/>
+          <a:lstStyle/>
+          <a:p>
+            <a:pPr algn="ctr" indent="0" marL="0">
+              <a:buNone/>
+            </a:pPr>
+            <a:r>
+              <a:rPr lang="en-US" sz="1400" b="1" dirty="0">
+                <a:solidFill>
+                  <a:srgbClr val="0D9488"/>
+                </a:solidFill>
+                <a:latin typeface="Trebuchet MS" pitchFamily="34" charset="0"/>
+                <a:ea typeface="Trebuchet MS" pitchFamily="34" charset="-122"/>
+                <a:cs typeface="Trebuchet MS" pitchFamily="34" charset="-120"/>
+              </a:rPr>
+              <a:t>cate</a:t>
+            </a:r>
+            <a:endParaRPr lang="en-US" sz="1400" dirty="0"/>
+          </a:p>
+        </p:txBody>
+      </p:sp>
+      <p:sp>
+        <p:nvSpPr>
+          <p:cNvPr id="36" name="Shape 34"/>
+          <p:cNvSpPr/>
+          <p:nvPr/>
+        </p:nvSpPr>
+        <p:spPr>
+          <a:xfrm>
+            <a:off x="365760" y="4096512"/>
+            <a:ext cx="1371600" cy="804672"/>
+          </a:xfrm>
+          <a:prstGeom prst="rect">
+            <a:avLst>
+              <a:gd name="adj" fmla="val 6818"/>
+            </a:avLst>
+          </a:prstGeom>
+          <a:solidFill>
+            <a:srgbClr val="E2E8F0"/>
+          </a:solidFill>
+          <a:ln w="12700">
+            <a:solidFill>
+              <a:srgbClr val="E2E8F0"/>
+            </a:solidFill>
+            <a:prstDash val="solid"/>
+          </a:ln>
+        </p:spPr>
+      </p:sp>
+      <p:sp>
+        <p:nvSpPr>
+          <p:cNvPr id="37" name="Text 35"/>
+          <p:cNvSpPr/>
+          <p:nvPr/>
+        </p:nvSpPr>
+        <p:spPr>
+          <a:xfrm>
+            <a:off x="365760" y="4096512"/>
+            <a:ext cx="1371600" cy="804672"/>
+          </a:xfrm>
+          <a:prstGeom prst="rect">
+            <a:avLst/>
+          </a:prstGeom>
+          <a:noFill/>
+          <a:ln/>
+        </p:spPr>
+        <p:txBody>
+          <a:bodyPr wrap="square" lIns="0" tIns="0" rIns="0" bIns="0" rtlCol="0" anchor="ctr"/>
+          <a:lstStyle/>
+          <a:p>
+            <a:pPr algn="ctr" indent="0" marL="0">
+              <a:buNone/>
+            </a:pPr>
+            <a:r>
+              <a:rPr lang="en-US" sz="1100" b="1" dirty="0">
+                <a:solidFill>
+                  <a:srgbClr val="475569"/>
+                </a:solidFill>
+                <a:latin typeface="Trebuchet MS" pitchFamily="34" charset="0"/>
+                <a:ea typeface="Trebuchet MS" pitchFamily="34" charset="-122"/>
+                <a:cs typeface="Trebuchet MS" pitchFamily="34" charset="-120"/>
+              </a:rPr>
+              <a:t>Phonemes</a:t>
+            </a:r>
+            <a:endParaRPr lang="en-US" sz="1100" dirty="0"/>
+          </a:p>
+        </p:txBody>
+      </p:sp>
+      <p:sp>
+        <p:nvSpPr>
+          <p:cNvPr id="38" name="Shape 36"/>
+          <p:cNvSpPr/>
+          <p:nvPr/>
+        </p:nvSpPr>
+        <p:spPr>
+          <a:xfrm>
+            <a:off x="1874520" y="4096512"/>
+            <a:ext cx="6903720" cy="804672"/>
+          </a:xfrm>
+          <a:prstGeom prst="rect">
+            <a:avLst>
+              <a:gd name="adj" fmla="val 6818"/>
+            </a:avLst>
+          </a:prstGeom>
+          <a:solidFill>
+            <a:srgbClr val="FCE7F3"/>
+          </a:solidFill>
+          <a:ln w="12700">
+            <a:solidFill>
+              <a:srgbClr val="DB2777"/>
+            </a:solidFill>
+            <a:prstDash val="solid"/>
+          </a:ln>
+        </p:spPr>
+      </p:sp>
+      <p:sp>
+        <p:nvSpPr>
+          <p:cNvPr id="39" name="Shape 37"/>
+          <p:cNvSpPr/>
+          <p:nvPr/>
+        </p:nvSpPr>
+        <p:spPr>
+          <a:xfrm>
+            <a:off x="2254649" y="4169664"/>
+            <a:ext cx="685800" cy="384048"/>
+          </a:xfrm>
+          <a:prstGeom prst="rect">
+            <a:avLst>
+              <a:gd name="adj" fmla="val 9524"/>
+            </a:avLst>
+          </a:prstGeom>
+          <a:solidFill>
+            <a:srgbClr val="FFFFFF"/>
+          </a:solidFill>
+          <a:ln w="12700">
+            <a:solidFill>
+              <a:srgbClr val="DB2777"/>
+            </a:solidFill>
+            <a:prstDash val="solid"/>
+          </a:ln>
+        </p:spPr>
+      </p:sp>
+      <p:sp>
+        <p:nvSpPr>
+          <p:cNvPr id="40" name="Text 38"/>
+          <p:cNvSpPr/>
+          <p:nvPr/>
+        </p:nvSpPr>
+        <p:spPr>
+          <a:xfrm>
+            <a:off x="2254649" y="4169664"/>
+            <a:ext cx="685800" cy="384048"/>
+          </a:xfrm>
+          <a:prstGeom prst="rect">
+            <a:avLst/>
+          </a:prstGeom>
+          <a:noFill/>
+          <a:ln/>
+        </p:spPr>
+        <p:txBody>
+          <a:bodyPr wrap="square" lIns="0" tIns="0" rIns="0" bIns="0" rtlCol="0" anchor="ctr"/>
+          <a:lstStyle/>
+          <a:p>
+            <a:pPr algn="ctr" indent="0" marL="0">
+              <a:buNone/>
+            </a:pPr>
+            <a:r>
+              <a:rPr lang="en-US" sz="900" b="1" dirty="0">
+                <a:solidFill>
+                  <a:srgbClr val="9D174D"/>
+                </a:solidFill>
+                <a:latin typeface="Trebuchet MS" pitchFamily="34" charset="0"/>
+                <a:ea typeface="Trebuchet MS" pitchFamily="34" charset="-122"/>
+                <a:cs typeface="Trebuchet MS" pitchFamily="34" charset="-120"/>
+              </a:rPr>
+              <a:t>i</a:t>
+            </a:r>
+            <a:endParaRPr lang="en-US" sz="900" dirty="0"/>
+          </a:p>
+        </p:txBody>
+      </p:sp>
+      <p:sp>
+        <p:nvSpPr>
+          <p:cNvPr id="41" name="Shape 39"/>
+          <p:cNvSpPr/>
+          <p:nvPr/>
+        </p:nvSpPr>
+        <p:spPr>
+          <a:xfrm>
+            <a:off x="3293146" y="4169664"/>
+            <a:ext cx="685800" cy="384048"/>
+          </a:xfrm>
+          <a:prstGeom prst="rect">
+            <a:avLst>
+              <a:gd name="adj" fmla="val 9524"/>
+            </a:avLst>
+          </a:prstGeom>
+          <a:solidFill>
+            <a:srgbClr val="FFFFFF"/>
+          </a:solidFill>
+          <a:ln w="12700">
+            <a:solidFill>
+              <a:srgbClr val="DB2777"/>
+            </a:solidFill>
+            <a:prstDash val="solid"/>
+          </a:ln>
+        </p:spPr>
+      </p:sp>
+      <p:sp>
+        <p:nvSpPr>
+          <p:cNvPr id="42" name="Text 40"/>
+          <p:cNvSpPr/>
+          <p:nvPr/>
+        </p:nvSpPr>
+        <p:spPr>
+          <a:xfrm>
+            <a:off x="3293146" y="4169664"/>
+            <a:ext cx="685800" cy="384048"/>
+          </a:xfrm>
+          <a:prstGeom prst="rect">
+            <a:avLst/>
+          </a:prstGeom>
+          <a:noFill/>
+          <a:ln/>
+        </p:spPr>
+        <p:txBody>
+          <a:bodyPr wrap="square" lIns="0" tIns="0" rIns="0" bIns="0" rtlCol="0" anchor="ctr"/>
+          <a:lstStyle/>
+          <a:p>
+            <a:pPr algn="ctr" indent="0" marL="0">
+              <a:buNone/>
+            </a:pPr>
+            <a:r>
+              <a:rPr lang="en-US" sz="900" b="1" dirty="0">
+                <a:solidFill>
+                  <a:srgbClr val="9D174D"/>
+                </a:solidFill>
+                <a:latin typeface="Trebuchet MS" pitchFamily="34" charset="0"/>
+                <a:ea typeface="Trebuchet MS" pitchFamily="34" charset="-122"/>
+                <a:cs typeface="Trebuchet MS" pitchFamily="34" charset="-120"/>
+              </a:rPr>
+              <a:t>n</a:t>
+            </a:r>
+            <a:endParaRPr lang="en-US" sz="900" dirty="0"/>
+          </a:p>
+        </p:txBody>
+      </p:sp>
+      <p:sp>
+        <p:nvSpPr>
+          <p:cNvPr id="43" name="Shape 41"/>
+          <p:cNvSpPr/>
+          <p:nvPr/>
+        </p:nvSpPr>
+        <p:spPr>
+          <a:xfrm>
+            <a:off x="4331643" y="4169664"/>
+            <a:ext cx="685800" cy="384048"/>
+          </a:xfrm>
+          <a:prstGeom prst="rect">
+            <a:avLst>
+              <a:gd name="adj" fmla="val 9524"/>
+            </a:avLst>
+          </a:prstGeom>
+          <a:solidFill>
+            <a:srgbClr val="FFFFFF"/>
+          </a:solidFill>
+          <a:ln w="12700">
+            <a:solidFill>
+              <a:srgbClr val="DB2777"/>
+            </a:solidFill>
+            <a:prstDash val="solid"/>
+          </a:ln>
+        </p:spPr>
+      </p:sp>
+      <p:sp>
+        <p:nvSpPr>
+          <p:cNvPr id="44" name="Text 42"/>
+          <p:cNvSpPr/>
+          <p:nvPr/>
+        </p:nvSpPr>
+        <p:spPr>
+          <a:xfrm>
+            <a:off x="4331643" y="4169664"/>
+            <a:ext cx="685800" cy="384048"/>
+          </a:xfrm>
+          <a:prstGeom prst="rect">
+            <a:avLst/>
+          </a:prstGeom>
+          <a:noFill/>
+          <a:ln/>
+        </p:spPr>
+        <p:txBody>
+          <a:bodyPr wrap="square" lIns="0" tIns="0" rIns="0" bIns="0" rtlCol="0" anchor="ctr"/>
+          <a:lstStyle/>
+          <a:p>
+            <a:pPr algn="ctr" indent="0" marL="0">
+              <a:buNone/>
+            </a:pPr>
+            <a:r>
+              <a:rPr lang="en-US" sz="900" b="1" dirty="0">
+                <a:solidFill>
+                  <a:srgbClr val="9D174D"/>
+                </a:solidFill>
+                <a:latin typeface="Trebuchet MS" pitchFamily="34" charset="0"/>
+                <a:ea typeface="Trebuchet MS" pitchFamily="34" charset="-122"/>
+                <a:cs typeface="Trebuchet MS" pitchFamily="34" charset="-120"/>
+              </a:rPr>
+              <a:t>d</a:t>
+            </a:r>
+            <a:endParaRPr lang="en-US" sz="900" dirty="0"/>
+          </a:p>
+        </p:txBody>
+      </p:sp>
+      <p:sp>
+        <p:nvSpPr>
+          <p:cNvPr id="45" name="Shape 43"/>
+          <p:cNvSpPr/>
+          <p:nvPr/>
+        </p:nvSpPr>
+        <p:spPr>
+          <a:xfrm>
+            <a:off x="5370141" y="4169664"/>
+            <a:ext cx="685800" cy="384048"/>
+          </a:xfrm>
+          <a:prstGeom prst="rect">
+            <a:avLst>
+              <a:gd name="adj" fmla="val 9524"/>
+            </a:avLst>
+          </a:prstGeom>
+          <a:solidFill>
+            <a:srgbClr val="FFFFFF"/>
+          </a:solidFill>
+          <a:ln w="12700">
+            <a:solidFill>
+              <a:srgbClr val="DB2777"/>
+            </a:solidFill>
+            <a:prstDash val="solid"/>
+          </a:ln>
+        </p:spPr>
+      </p:sp>
+      <p:sp>
+        <p:nvSpPr>
+          <p:cNvPr id="46" name="Text 44"/>
+          <p:cNvSpPr/>
+          <p:nvPr/>
+        </p:nvSpPr>
+        <p:spPr>
+          <a:xfrm>
+            <a:off x="5370141" y="4169664"/>
+            <a:ext cx="685800" cy="384048"/>
+          </a:xfrm>
+          <a:prstGeom prst="rect">
+            <a:avLst/>
+          </a:prstGeom>
+          <a:noFill/>
+          <a:ln/>
+        </p:spPr>
+        <p:txBody>
+          <a:bodyPr wrap="square" lIns="0" tIns="0" rIns="0" bIns="0" rtlCol="0" anchor="ctr"/>
+          <a:lstStyle/>
+          <a:p>
+            <a:pPr algn="ctr" indent="0" marL="0">
+              <a:buNone/>
+            </a:pPr>
+            <a:r>
+              <a:rPr lang="en-US" sz="900" b="1" dirty="0">
+                <a:solidFill>
+                  <a:srgbClr val="9D174D"/>
+                </a:solidFill>
+                <a:latin typeface="Trebuchet MS" pitchFamily="34" charset="0"/>
+                <a:ea typeface="Trebuchet MS" pitchFamily="34" charset="-122"/>
+                <a:cs typeface="Trebuchet MS" pitchFamily="34" charset="-120"/>
+              </a:rPr>
+              <a:t>i</a:t>
+            </a:r>
+            <a:endParaRPr lang="en-US" sz="900" dirty="0"/>
+          </a:p>
+        </p:txBody>
+      </p:sp>
+      <p:sp>
+        <p:nvSpPr>
+          <p:cNvPr id="47" name="Shape 45"/>
+          <p:cNvSpPr/>
+          <p:nvPr/>
+        </p:nvSpPr>
+        <p:spPr>
+          <a:xfrm>
+            <a:off x="6408638" y="4169664"/>
+            <a:ext cx="685800" cy="384048"/>
+          </a:xfrm>
+          <a:prstGeom prst="rect">
+            <a:avLst>
+              <a:gd name="adj" fmla="val 9524"/>
+            </a:avLst>
+          </a:prstGeom>
+          <a:solidFill>
+            <a:srgbClr val="FFFFFF"/>
+          </a:solidFill>
+          <a:ln w="12700">
+            <a:solidFill>
+              <a:srgbClr val="DB2777"/>
+            </a:solidFill>
+            <a:prstDash val="solid"/>
+          </a:ln>
+        </p:spPr>
+      </p:sp>
+      <p:sp>
+        <p:nvSpPr>
+          <p:cNvPr id="48" name="Text 46"/>
+          <p:cNvSpPr/>
+          <p:nvPr/>
+        </p:nvSpPr>
+        <p:spPr>
+          <a:xfrm>
+            <a:off x="6408638" y="4169664"/>
+            <a:ext cx="685800" cy="384048"/>
+          </a:xfrm>
+          <a:prstGeom prst="rect">
+            <a:avLst/>
+          </a:prstGeom>
+          <a:noFill/>
+          <a:ln/>
+        </p:spPr>
+        <p:txBody>
+          <a:bodyPr wrap="square" lIns="0" tIns="0" rIns="0" bIns="0" rtlCol="0" anchor="ctr"/>
+          <a:lstStyle/>
+          <a:p>
+            <a:pPr algn="ctr" indent="0" marL="0">
+              <a:buNone/>
+            </a:pPr>
+            <a:r>
+              <a:rPr lang="en-US" sz="900" b="1" dirty="0">
+                <a:solidFill>
+                  <a:srgbClr val="9D174D"/>
+                </a:solidFill>
+                <a:latin typeface="Trebuchet MS" pitchFamily="34" charset="0"/>
+                <a:ea typeface="Trebuchet MS" pitchFamily="34" charset="-122"/>
+                <a:cs typeface="Trebuchet MS" pitchFamily="34" charset="-120"/>
+              </a:rPr>
+              <a:t>c</a:t>
+            </a:r>
+            <a:endParaRPr lang="en-US" sz="900" dirty="0"/>
+          </a:p>
+        </p:txBody>
+      </p:sp>
+      <p:sp>
+        <p:nvSpPr>
+          <p:cNvPr id="49" name="Text 47"/>
+          <p:cNvSpPr/>
+          <p:nvPr/>
+        </p:nvSpPr>
+        <p:spPr>
+          <a:xfrm>
+            <a:off x="6408638" y="4572000"/>
+            <a:ext cx="685800" cy="219456"/>
           </a:xfrm>
           <a:prstGeom prst="rect">
             <a:avLst/>
@@ -15952,978 +16447,81 @@
               <a:buNone/>
             </a:pPr>
             <a:r>
-              <a:rPr lang="en-US" sz="850" dirty="0">
-                <a:solidFill>
-                  <a:srgbClr val="475569"/>
+              <a:rPr lang="en-US" sz="750" i="1" dirty="0">
+                <a:solidFill>
+                  <a:srgbClr val="94A3B8"/>
                 </a:solidFill>
                 <a:latin typeface="Calibri" pitchFamily="34" charset="0"/>
                 <a:ea typeface="Calibri" pitchFamily="34" charset="-122"/>
                 <a:cs typeface="Calibri" pitchFamily="34" charset="-120"/>
               </a:rPr>
-              <a:t>person who does something</a:t>
-            </a:r>
-            <a:endParaRPr lang="en-US" sz="850" dirty="0"/>
-          </a:p>
-        </p:txBody>
-      </p:sp>
-      <p:sp>
-        <p:nvSpPr>
-          <p:cNvPr id="28" name="Shape 26"/>
-          <p:cNvSpPr/>
-          <p:nvPr/>
-        </p:nvSpPr>
-        <p:spPr>
-          <a:xfrm>
-            <a:off x="365760" y="3273552"/>
-            <a:ext cx="1371600" cy="658368"/>
+              <a:t>/k/</a:t>
+            </a:r>
+            <a:endParaRPr lang="en-US" sz="750" dirty="0"/>
+          </a:p>
+        </p:txBody>
+      </p:sp>
+      <p:sp>
+        <p:nvSpPr>
+          <p:cNvPr id="50" name="Shape 48"/>
+          <p:cNvSpPr/>
+          <p:nvPr/>
+        </p:nvSpPr>
+        <p:spPr>
+          <a:xfrm>
+            <a:off x="7447135" y="4169664"/>
+            <a:ext cx="685800" cy="384048"/>
           </a:xfrm>
           <a:prstGeom prst="rect">
             <a:avLst>
-              <a:gd name="adj" fmla="val 8333"/>
+              <a:gd name="adj" fmla="val 9524"/>
             </a:avLst>
           </a:prstGeom>
           <a:solidFill>
-            <a:srgbClr val="E2E8F0"/>
-          </a:solidFill>
-          <a:ln w="12700">
-            <a:solidFill>
-              <a:srgbClr val="E2E8F0"/>
-            </a:solidFill>
-            <a:prstDash val="solid"/>
-          </a:ln>
-        </p:spPr>
-      </p:sp>
-      <p:sp>
-        <p:nvSpPr>
-          <p:cNvPr id="29" name="Text 27"/>
-          <p:cNvSpPr/>
-          <p:nvPr/>
-        </p:nvSpPr>
-        <p:spPr>
-          <a:xfrm>
-            <a:off x="365760" y="3273552"/>
-            <a:ext cx="1371600" cy="658368"/>
-          </a:xfrm>
-          <a:prstGeom prst="rect">
-            <a:avLst/>
-          </a:prstGeom>
-          <a:noFill/>
-          <a:ln/>
-        </p:spPr>
-        <p:txBody>
-          <a:bodyPr wrap="square" lIns="0" tIns="0" rIns="0" bIns="0" rtlCol="0" anchor="ctr"/>
-          <a:lstStyle/>
-          <a:p>
-            <a:pPr algn="ctr" indent="0" marL="0">
-              <a:buNone/>
-            </a:pPr>
-            <a:r>
-              <a:rPr lang="en-US" sz="1100" b="1" dirty="0">
-                <a:solidFill>
-                  <a:srgbClr val="475569"/>
+            <a:srgbClr val="FFFFFF"/>
+          </a:solidFill>
+          <a:ln w="12700">
+            <a:solidFill>
+              <a:srgbClr val="DB2777"/>
+            </a:solidFill>
+            <a:prstDash val="solid"/>
+          </a:ln>
+        </p:spPr>
+      </p:sp>
+      <p:sp>
+        <p:nvSpPr>
+          <p:cNvPr id="51" name="Text 49"/>
+          <p:cNvSpPr/>
+          <p:nvPr/>
+        </p:nvSpPr>
+        <p:spPr>
+          <a:xfrm>
+            <a:off x="7447135" y="4169664"/>
+            <a:ext cx="685800" cy="384048"/>
+          </a:xfrm>
+          <a:prstGeom prst="rect">
+            <a:avLst/>
+          </a:prstGeom>
+          <a:noFill/>
+          <a:ln/>
+        </p:spPr>
+        <p:txBody>
+          <a:bodyPr wrap="square" lIns="0" tIns="0" rIns="0" bIns="0" rtlCol="0" anchor="ctr"/>
+          <a:lstStyle/>
+          <a:p>
+            <a:pPr algn="ctr" indent="0" marL="0">
+              <a:buNone/>
+            </a:pPr>
+            <a:r>
+              <a:rPr lang="en-US" sz="900" b="1" dirty="0">
+                <a:solidFill>
+                  <a:srgbClr val="9D174D"/>
                 </a:solidFill>
                 <a:latin typeface="Trebuchet MS" pitchFamily="34" charset="0"/>
                 <a:ea typeface="Trebuchet MS" pitchFamily="34" charset="-122"/>
                 <a:cs typeface="Trebuchet MS" pitchFamily="34" charset="-120"/>
               </a:rPr>
-              <a:t>Syllables</a:t>
-            </a:r>
-            <a:endParaRPr lang="en-US" sz="1100" dirty="0"/>
-          </a:p>
-        </p:txBody>
-      </p:sp>
-      <p:sp>
-        <p:nvSpPr>
-          <p:cNvPr id="30" name="Shape 28"/>
-          <p:cNvSpPr/>
-          <p:nvPr/>
-        </p:nvSpPr>
-        <p:spPr>
-          <a:xfrm>
-            <a:off x="1874520" y="3273552"/>
-            <a:ext cx="6903720" cy="658368"/>
-          </a:xfrm>
-          <a:prstGeom prst="rect">
-            <a:avLst>
-              <a:gd name="adj" fmla="val 8333"/>
-            </a:avLst>
-          </a:prstGeom>
-          <a:solidFill>
-            <a:srgbClr val="CCFBF1"/>
-          </a:solidFill>
-          <a:ln w="12700">
-            <a:solidFill>
-              <a:srgbClr val="0D9488"/>
-            </a:solidFill>
-            <a:prstDash val="solid"/>
-          </a:ln>
-        </p:spPr>
-      </p:sp>
-      <p:sp>
-        <p:nvSpPr>
-          <p:cNvPr id="31" name="Shape 29"/>
-          <p:cNvSpPr/>
-          <p:nvPr/>
-        </p:nvSpPr>
-        <p:spPr>
-          <a:xfrm>
-            <a:off x="2313432" y="3364992"/>
-            <a:ext cx="1645920" cy="475488"/>
-          </a:xfrm>
-          <a:prstGeom prst="rect">
-            <a:avLst>
-              <a:gd name="adj" fmla="val 9615"/>
-            </a:avLst>
-          </a:prstGeom>
-          <a:solidFill>
-            <a:srgbClr val="FFFFFF"/>
-          </a:solidFill>
-          <a:ln w="12700">
-            <a:solidFill>
-              <a:srgbClr val="0D9488"/>
-            </a:solidFill>
-            <a:prstDash val="solid"/>
-          </a:ln>
-        </p:spPr>
-      </p:sp>
-      <p:sp>
-        <p:nvSpPr>
-          <p:cNvPr id="32" name="Text 30"/>
-          <p:cNvSpPr/>
-          <p:nvPr/>
-        </p:nvSpPr>
-        <p:spPr>
-          <a:xfrm>
-            <a:off x="2313432" y="3364992"/>
-            <a:ext cx="1645920" cy="475488"/>
-          </a:xfrm>
-          <a:prstGeom prst="rect">
-            <a:avLst/>
-          </a:prstGeom>
-          <a:noFill/>
-          <a:ln/>
-        </p:spPr>
-        <p:txBody>
-          <a:bodyPr wrap="square" lIns="0" tIns="0" rIns="0" bIns="0" rtlCol="0" anchor="ctr"/>
-          <a:lstStyle/>
-          <a:p>
-            <a:pPr algn="ctr" indent="0" marL="0">
-              <a:buNone/>
-            </a:pPr>
-            <a:r>
-              <a:rPr lang="en-US" sz="1400" b="1" dirty="0">
-                <a:solidFill>
-                  <a:srgbClr val="0D9488"/>
-                </a:solidFill>
-                <a:latin typeface="Trebuchet MS" pitchFamily="34" charset="0"/>
-                <a:ea typeface="Trebuchet MS" pitchFamily="34" charset="-122"/>
-                <a:cs typeface="Trebuchet MS" pitchFamily="34" charset="-120"/>
-              </a:rPr>
-              <a:t>dic</a:t>
-            </a:r>
-            <a:endParaRPr lang="en-US" sz="1400" dirty="0"/>
-          </a:p>
-        </p:txBody>
-      </p:sp>
-      <p:sp>
-        <p:nvSpPr>
-          <p:cNvPr id="33" name="Text 31"/>
-          <p:cNvSpPr/>
-          <p:nvPr/>
-        </p:nvSpPr>
-        <p:spPr>
-          <a:xfrm>
-            <a:off x="3959352" y="3364992"/>
-            <a:ext cx="411480" cy="475488"/>
-          </a:xfrm>
-          <a:prstGeom prst="rect">
-            <a:avLst/>
-          </a:prstGeom>
-          <a:noFill/>
-          <a:ln/>
-        </p:spPr>
-        <p:txBody>
-          <a:bodyPr wrap="square" lIns="0" tIns="0" rIns="0" bIns="0" rtlCol="0" anchor="ctr"/>
-          <a:lstStyle/>
-          <a:p>
-            <a:pPr algn="ctr" indent="0" marL="0">
-              <a:buNone/>
-            </a:pPr>
-            <a:r>
-              <a:rPr lang="en-US" sz="1600" b="1" dirty="0">
-                <a:solidFill>
-                  <a:srgbClr val="0D9488"/>
-                </a:solidFill>
-                <a:latin typeface="Trebuchet MS" pitchFamily="34" charset="0"/>
-                <a:ea typeface="Trebuchet MS" pitchFamily="34" charset="-122"/>
-                <a:cs typeface="Trebuchet MS" pitchFamily="34" charset="-120"/>
-              </a:rPr>
-              <a:t>·</a:t>
-            </a:r>
-            <a:endParaRPr lang="en-US" sz="1600" dirty="0"/>
-          </a:p>
-        </p:txBody>
-      </p:sp>
-      <p:sp>
-        <p:nvSpPr>
-          <p:cNvPr id="34" name="Shape 32"/>
-          <p:cNvSpPr/>
-          <p:nvPr/>
-        </p:nvSpPr>
-        <p:spPr>
-          <a:xfrm>
-            <a:off x="4370832" y="3364992"/>
-            <a:ext cx="1645920" cy="475488"/>
-          </a:xfrm>
-          <a:prstGeom prst="rect">
-            <a:avLst>
-              <a:gd name="adj" fmla="val 9615"/>
-            </a:avLst>
-          </a:prstGeom>
-          <a:solidFill>
-            <a:srgbClr val="FFFFFF"/>
-          </a:solidFill>
-          <a:ln w="12700">
-            <a:solidFill>
-              <a:srgbClr val="0D9488"/>
-            </a:solidFill>
-            <a:prstDash val="solid"/>
-          </a:ln>
-        </p:spPr>
-      </p:sp>
-      <p:sp>
-        <p:nvSpPr>
-          <p:cNvPr id="35" name="Text 33"/>
-          <p:cNvSpPr/>
-          <p:nvPr/>
-        </p:nvSpPr>
-        <p:spPr>
-          <a:xfrm>
-            <a:off x="4370832" y="3364992"/>
-            <a:ext cx="1645920" cy="475488"/>
-          </a:xfrm>
-          <a:prstGeom prst="rect">
-            <a:avLst/>
-          </a:prstGeom>
-          <a:noFill/>
-          <a:ln/>
-        </p:spPr>
-        <p:txBody>
-          <a:bodyPr wrap="square" lIns="0" tIns="0" rIns="0" bIns="0" rtlCol="0" anchor="ctr"/>
-          <a:lstStyle/>
-          <a:p>
-            <a:pPr algn="ctr" indent="0" marL="0">
-              <a:buNone/>
-            </a:pPr>
-            <a:r>
-              <a:rPr lang="en-US" sz="1400" b="1" dirty="0">
-                <a:solidFill>
-                  <a:srgbClr val="0D9488"/>
-                </a:solidFill>
-                <a:latin typeface="Trebuchet MS" pitchFamily="34" charset="0"/>
-                <a:ea typeface="Trebuchet MS" pitchFamily="34" charset="-122"/>
-                <a:cs typeface="Trebuchet MS" pitchFamily="34" charset="-120"/>
-              </a:rPr>
-              <a:t>ta</a:t>
-            </a:r>
-            <a:endParaRPr lang="en-US" sz="1400" dirty="0"/>
-          </a:p>
-        </p:txBody>
-      </p:sp>
-      <p:sp>
-        <p:nvSpPr>
-          <p:cNvPr id="36" name="Text 34"/>
-          <p:cNvSpPr/>
-          <p:nvPr/>
-        </p:nvSpPr>
-        <p:spPr>
-          <a:xfrm>
-            <a:off x="6016752" y="3364992"/>
-            <a:ext cx="411480" cy="475488"/>
-          </a:xfrm>
-          <a:prstGeom prst="rect">
-            <a:avLst/>
-          </a:prstGeom>
-          <a:noFill/>
-          <a:ln/>
-        </p:spPr>
-        <p:txBody>
-          <a:bodyPr wrap="square" lIns="0" tIns="0" rIns="0" bIns="0" rtlCol="0" anchor="ctr"/>
-          <a:lstStyle/>
-          <a:p>
-            <a:pPr algn="ctr" indent="0" marL="0">
-              <a:buNone/>
-            </a:pPr>
-            <a:r>
-              <a:rPr lang="en-US" sz="1600" b="1" dirty="0">
-                <a:solidFill>
-                  <a:srgbClr val="0D9488"/>
-                </a:solidFill>
-                <a:latin typeface="Trebuchet MS" pitchFamily="34" charset="0"/>
-                <a:ea typeface="Trebuchet MS" pitchFamily="34" charset="-122"/>
-                <a:cs typeface="Trebuchet MS" pitchFamily="34" charset="-120"/>
-              </a:rPr>
-              <a:t>·</a:t>
-            </a:r>
-            <a:endParaRPr lang="en-US" sz="1600" dirty="0"/>
-          </a:p>
-        </p:txBody>
-      </p:sp>
-      <p:sp>
-        <p:nvSpPr>
-          <p:cNvPr id="37" name="Shape 35"/>
-          <p:cNvSpPr/>
-          <p:nvPr/>
-        </p:nvSpPr>
-        <p:spPr>
-          <a:xfrm>
-            <a:off x="6428232" y="3364992"/>
-            <a:ext cx="1645920" cy="475488"/>
-          </a:xfrm>
-          <a:prstGeom prst="rect">
-            <a:avLst>
-              <a:gd name="adj" fmla="val 9615"/>
-            </a:avLst>
-          </a:prstGeom>
-          <a:solidFill>
-            <a:srgbClr val="FFFFFF"/>
-          </a:solidFill>
-          <a:ln w="12700">
-            <a:solidFill>
-              <a:srgbClr val="0D9488"/>
-            </a:solidFill>
-            <a:prstDash val="solid"/>
-          </a:ln>
-        </p:spPr>
-      </p:sp>
-      <p:sp>
-        <p:nvSpPr>
-          <p:cNvPr id="38" name="Text 36"/>
-          <p:cNvSpPr/>
-          <p:nvPr/>
-        </p:nvSpPr>
-        <p:spPr>
-          <a:xfrm>
-            <a:off x="6428232" y="3364992"/>
-            <a:ext cx="1645920" cy="475488"/>
-          </a:xfrm>
-          <a:prstGeom prst="rect">
-            <a:avLst/>
-          </a:prstGeom>
-          <a:noFill/>
-          <a:ln/>
-        </p:spPr>
-        <p:txBody>
-          <a:bodyPr wrap="square" lIns="0" tIns="0" rIns="0" bIns="0" rtlCol="0" anchor="ctr"/>
-          <a:lstStyle/>
-          <a:p>
-            <a:pPr algn="ctr" indent="0" marL="0">
-              <a:buNone/>
-            </a:pPr>
-            <a:r>
-              <a:rPr lang="en-US" sz="1400" b="1" dirty="0">
-                <a:solidFill>
-                  <a:srgbClr val="0D9488"/>
-                </a:solidFill>
-                <a:latin typeface="Trebuchet MS" pitchFamily="34" charset="0"/>
-                <a:ea typeface="Trebuchet MS" pitchFamily="34" charset="-122"/>
-                <a:cs typeface="Trebuchet MS" pitchFamily="34" charset="-120"/>
-              </a:rPr>
-              <a:t>tor</a:t>
-            </a:r>
-            <a:endParaRPr lang="en-US" sz="1400" dirty="0"/>
-          </a:p>
-        </p:txBody>
-      </p:sp>
-      <p:sp>
-        <p:nvSpPr>
-          <p:cNvPr id="39" name="Shape 37"/>
-          <p:cNvSpPr/>
-          <p:nvPr/>
-        </p:nvSpPr>
-        <p:spPr>
-          <a:xfrm>
-            <a:off x="365760" y="4096512"/>
-            <a:ext cx="1371600" cy="804672"/>
-          </a:xfrm>
-          <a:prstGeom prst="rect">
-            <a:avLst>
-              <a:gd name="adj" fmla="val 6818"/>
-            </a:avLst>
-          </a:prstGeom>
-          <a:solidFill>
-            <a:srgbClr val="E2E8F0"/>
-          </a:solidFill>
-          <a:ln w="12700">
-            <a:solidFill>
-              <a:srgbClr val="E2E8F0"/>
-            </a:solidFill>
-            <a:prstDash val="solid"/>
-          </a:ln>
-        </p:spPr>
-      </p:sp>
-      <p:sp>
-        <p:nvSpPr>
-          <p:cNvPr id="40" name="Text 38"/>
-          <p:cNvSpPr/>
-          <p:nvPr/>
-        </p:nvSpPr>
-        <p:spPr>
-          <a:xfrm>
-            <a:off x="365760" y="4096512"/>
-            <a:ext cx="1371600" cy="804672"/>
-          </a:xfrm>
-          <a:prstGeom prst="rect">
-            <a:avLst/>
-          </a:prstGeom>
-          <a:noFill/>
-          <a:ln/>
-        </p:spPr>
-        <p:txBody>
-          <a:bodyPr wrap="square" lIns="0" tIns="0" rIns="0" bIns="0" rtlCol="0" anchor="ctr"/>
-          <a:lstStyle/>
-          <a:p>
-            <a:pPr algn="ctr" indent="0" marL="0">
-              <a:buNone/>
-            </a:pPr>
-            <a:r>
-              <a:rPr lang="en-US" sz="1100" b="1" dirty="0">
-                <a:solidFill>
-                  <a:srgbClr val="475569"/>
-                </a:solidFill>
-                <a:latin typeface="Trebuchet MS" pitchFamily="34" charset="0"/>
-                <a:ea typeface="Trebuchet MS" pitchFamily="34" charset="-122"/>
-                <a:cs typeface="Trebuchet MS" pitchFamily="34" charset="-120"/>
-              </a:rPr>
-              <a:t>Phonemes</a:t>
-            </a:r>
-            <a:endParaRPr lang="en-US" sz="1100" dirty="0"/>
-          </a:p>
-        </p:txBody>
-      </p:sp>
-      <p:sp>
-        <p:nvSpPr>
-          <p:cNvPr id="41" name="Shape 39"/>
-          <p:cNvSpPr/>
-          <p:nvPr/>
-        </p:nvSpPr>
-        <p:spPr>
-          <a:xfrm>
-            <a:off x="1874520" y="4096512"/>
-            <a:ext cx="6903720" cy="804672"/>
-          </a:xfrm>
-          <a:prstGeom prst="rect">
-            <a:avLst>
-              <a:gd name="adj" fmla="val 6818"/>
-            </a:avLst>
-          </a:prstGeom>
-          <a:solidFill>
-            <a:srgbClr val="FCE7F3"/>
-          </a:solidFill>
-          <a:ln w="12700">
-            <a:solidFill>
-              <a:srgbClr val="DB2777"/>
-            </a:solidFill>
-            <a:prstDash val="solid"/>
-          </a:ln>
-        </p:spPr>
-      </p:sp>
-      <p:sp>
-        <p:nvSpPr>
-          <p:cNvPr id="42" name="Shape 40"/>
-          <p:cNvSpPr/>
-          <p:nvPr/>
-        </p:nvSpPr>
-        <p:spPr>
-          <a:xfrm>
-            <a:off x="2124837" y="4169664"/>
-            <a:ext cx="685800" cy="384048"/>
-          </a:xfrm>
-          <a:prstGeom prst="rect">
-            <a:avLst>
-              <a:gd name="adj" fmla="val 9524"/>
-            </a:avLst>
-          </a:prstGeom>
-          <a:solidFill>
-            <a:srgbClr val="FFFFFF"/>
-          </a:solidFill>
-          <a:ln w="12700">
-            <a:solidFill>
-              <a:srgbClr val="DB2777"/>
-            </a:solidFill>
-            <a:prstDash val="solid"/>
-          </a:ln>
-        </p:spPr>
-      </p:sp>
-      <p:sp>
-        <p:nvSpPr>
-          <p:cNvPr id="43" name="Text 41"/>
-          <p:cNvSpPr/>
-          <p:nvPr/>
-        </p:nvSpPr>
-        <p:spPr>
-          <a:xfrm>
-            <a:off x="2124837" y="4169664"/>
-            <a:ext cx="685800" cy="384048"/>
-          </a:xfrm>
-          <a:prstGeom prst="rect">
-            <a:avLst/>
-          </a:prstGeom>
-          <a:noFill/>
-          <a:ln/>
-        </p:spPr>
-        <p:txBody>
-          <a:bodyPr wrap="square" lIns="0" tIns="0" rIns="0" bIns="0" rtlCol="0" anchor="ctr"/>
-          <a:lstStyle/>
-          <a:p>
-            <a:pPr algn="ctr" indent="0" marL="0">
-              <a:buNone/>
-            </a:pPr>
-            <a:r>
-              <a:rPr lang="en-US" sz="900" b="1" dirty="0">
-                <a:solidFill>
-                  <a:srgbClr val="9D174D"/>
-                </a:solidFill>
-                <a:latin typeface="Trebuchet MS" pitchFamily="34" charset="0"/>
-                <a:ea typeface="Trebuchet MS" pitchFamily="34" charset="-122"/>
-                <a:cs typeface="Trebuchet MS" pitchFamily="34" charset="-120"/>
-              </a:rPr>
-              <a:t>d</a:t>
-            </a:r>
-            <a:endParaRPr lang="en-US" sz="900" dirty="0"/>
-          </a:p>
-        </p:txBody>
-      </p:sp>
-      <p:sp>
-        <p:nvSpPr>
-          <p:cNvPr id="44" name="Shape 42"/>
-          <p:cNvSpPr/>
-          <p:nvPr/>
-        </p:nvSpPr>
-        <p:spPr>
-          <a:xfrm>
-            <a:off x="3033522" y="4169664"/>
-            <a:ext cx="685800" cy="384048"/>
-          </a:xfrm>
-          <a:prstGeom prst="rect">
-            <a:avLst>
-              <a:gd name="adj" fmla="val 9524"/>
-            </a:avLst>
-          </a:prstGeom>
-          <a:solidFill>
-            <a:srgbClr val="FFFFFF"/>
-          </a:solidFill>
-          <a:ln w="12700">
-            <a:solidFill>
-              <a:srgbClr val="DB2777"/>
-            </a:solidFill>
-            <a:prstDash val="solid"/>
-          </a:ln>
-        </p:spPr>
-      </p:sp>
-      <p:sp>
-        <p:nvSpPr>
-          <p:cNvPr id="45" name="Text 43"/>
-          <p:cNvSpPr/>
-          <p:nvPr/>
-        </p:nvSpPr>
-        <p:spPr>
-          <a:xfrm>
-            <a:off x="3033522" y="4169664"/>
-            <a:ext cx="685800" cy="384048"/>
-          </a:xfrm>
-          <a:prstGeom prst="rect">
-            <a:avLst/>
-          </a:prstGeom>
-          <a:noFill/>
-          <a:ln/>
-        </p:spPr>
-        <p:txBody>
-          <a:bodyPr wrap="square" lIns="0" tIns="0" rIns="0" bIns="0" rtlCol="0" anchor="ctr"/>
-          <a:lstStyle/>
-          <a:p>
-            <a:pPr algn="ctr" indent="0" marL="0">
-              <a:buNone/>
-            </a:pPr>
-            <a:r>
-              <a:rPr lang="en-US" sz="900" b="1" dirty="0">
-                <a:solidFill>
-                  <a:srgbClr val="9D174D"/>
-                </a:solidFill>
-                <a:latin typeface="Trebuchet MS" pitchFamily="34" charset="0"/>
-                <a:ea typeface="Trebuchet MS" pitchFamily="34" charset="-122"/>
-                <a:cs typeface="Trebuchet MS" pitchFamily="34" charset="-120"/>
-              </a:rPr>
-              <a:t>i</a:t>
-            </a:r>
-            <a:endParaRPr lang="en-US" sz="900" dirty="0"/>
-          </a:p>
-        </p:txBody>
-      </p:sp>
-      <p:sp>
-        <p:nvSpPr>
-          <p:cNvPr id="46" name="Shape 44"/>
-          <p:cNvSpPr/>
-          <p:nvPr/>
-        </p:nvSpPr>
-        <p:spPr>
-          <a:xfrm>
-            <a:off x="3942207" y="4169664"/>
-            <a:ext cx="685800" cy="384048"/>
-          </a:xfrm>
-          <a:prstGeom prst="rect">
-            <a:avLst>
-              <a:gd name="adj" fmla="val 9524"/>
-            </a:avLst>
-          </a:prstGeom>
-          <a:solidFill>
-            <a:srgbClr val="FFFFFF"/>
-          </a:solidFill>
-          <a:ln w="12700">
-            <a:solidFill>
-              <a:srgbClr val="DB2777"/>
-            </a:solidFill>
-            <a:prstDash val="solid"/>
-          </a:ln>
-        </p:spPr>
-      </p:sp>
-      <p:sp>
-        <p:nvSpPr>
-          <p:cNvPr id="47" name="Text 45"/>
-          <p:cNvSpPr/>
-          <p:nvPr/>
-        </p:nvSpPr>
-        <p:spPr>
-          <a:xfrm>
-            <a:off x="3942207" y="4169664"/>
-            <a:ext cx="685800" cy="384048"/>
-          </a:xfrm>
-          <a:prstGeom prst="rect">
-            <a:avLst/>
-          </a:prstGeom>
-          <a:noFill/>
-          <a:ln/>
-        </p:spPr>
-        <p:txBody>
-          <a:bodyPr wrap="square" lIns="0" tIns="0" rIns="0" bIns="0" rtlCol="0" anchor="ctr"/>
-          <a:lstStyle/>
-          <a:p>
-            <a:pPr algn="ctr" indent="0" marL="0">
-              <a:buNone/>
-            </a:pPr>
-            <a:r>
-              <a:rPr lang="en-US" sz="900" b="1" dirty="0">
-                <a:solidFill>
-                  <a:srgbClr val="9D174D"/>
-                </a:solidFill>
-                <a:latin typeface="Trebuchet MS" pitchFamily="34" charset="0"/>
-                <a:ea typeface="Trebuchet MS" pitchFamily="34" charset="-122"/>
-                <a:cs typeface="Trebuchet MS" pitchFamily="34" charset="-120"/>
-              </a:rPr>
-              <a:t>c</a:t>
-            </a:r>
-            <a:endParaRPr lang="en-US" sz="900" dirty="0"/>
-          </a:p>
-        </p:txBody>
-      </p:sp>
-      <p:sp>
-        <p:nvSpPr>
-          <p:cNvPr id="48" name="Text 46"/>
-          <p:cNvSpPr/>
-          <p:nvPr/>
-        </p:nvSpPr>
-        <p:spPr>
-          <a:xfrm>
-            <a:off x="3942207" y="4572000"/>
-            <a:ext cx="685800" cy="219456"/>
-          </a:xfrm>
-          <a:prstGeom prst="rect">
-            <a:avLst/>
-          </a:prstGeom>
-          <a:noFill/>
-          <a:ln/>
-        </p:spPr>
-        <p:txBody>
-          <a:bodyPr wrap="square" lIns="0" tIns="0" rIns="0" bIns="0" rtlCol="0" anchor="t"/>
-          <a:lstStyle/>
-          <a:p>
-            <a:pPr algn="ctr" indent="0" marL="0">
-              <a:buNone/>
-            </a:pPr>
-            <a:r>
-              <a:rPr lang="en-US" sz="750" i="1" dirty="0">
-                <a:solidFill>
-                  <a:srgbClr val="94A3B8"/>
-                </a:solidFill>
-                <a:latin typeface="Calibri" pitchFamily="34" charset="0"/>
-                <a:ea typeface="Calibri" pitchFamily="34" charset="-122"/>
-                <a:cs typeface="Calibri" pitchFamily="34" charset="-120"/>
-              </a:rPr>
-              <a:t>/k/</a:t>
-            </a:r>
-            <a:endParaRPr lang="en-US" sz="750" dirty="0"/>
-          </a:p>
-        </p:txBody>
-      </p:sp>
-      <p:sp>
-        <p:nvSpPr>
-          <p:cNvPr id="49" name="Shape 47"/>
-          <p:cNvSpPr/>
-          <p:nvPr/>
-        </p:nvSpPr>
-        <p:spPr>
-          <a:xfrm>
-            <a:off x="4850892" y="4169664"/>
-            <a:ext cx="685800" cy="384048"/>
-          </a:xfrm>
-          <a:prstGeom prst="rect">
-            <a:avLst>
-              <a:gd name="adj" fmla="val 9524"/>
-            </a:avLst>
-          </a:prstGeom>
-          <a:solidFill>
-            <a:srgbClr val="FFFFFF"/>
-          </a:solidFill>
-          <a:ln w="12700">
-            <a:solidFill>
-              <a:srgbClr val="DB2777"/>
-            </a:solidFill>
-            <a:prstDash val="solid"/>
-          </a:ln>
-        </p:spPr>
-      </p:sp>
-      <p:sp>
-        <p:nvSpPr>
-          <p:cNvPr id="50" name="Text 48"/>
-          <p:cNvSpPr/>
-          <p:nvPr/>
-        </p:nvSpPr>
-        <p:spPr>
-          <a:xfrm>
-            <a:off x="4850892" y="4169664"/>
-            <a:ext cx="685800" cy="384048"/>
-          </a:xfrm>
-          <a:prstGeom prst="rect">
-            <a:avLst/>
-          </a:prstGeom>
-          <a:noFill/>
-          <a:ln/>
-        </p:spPr>
-        <p:txBody>
-          <a:bodyPr wrap="square" lIns="0" tIns="0" rIns="0" bIns="0" rtlCol="0" anchor="ctr"/>
-          <a:lstStyle/>
-          <a:p>
-            <a:pPr algn="ctr" indent="0" marL="0">
-              <a:buNone/>
-            </a:pPr>
-            <a:r>
-              <a:rPr lang="en-US" sz="900" b="1" dirty="0">
-                <a:solidFill>
-                  <a:srgbClr val="9D174D"/>
-                </a:solidFill>
-                <a:latin typeface="Trebuchet MS" pitchFamily="34" charset="0"/>
-                <a:ea typeface="Trebuchet MS" pitchFamily="34" charset="-122"/>
-                <a:cs typeface="Trebuchet MS" pitchFamily="34" charset="-120"/>
-              </a:rPr>
-              <a:t>t</a:t>
-            </a:r>
-            <a:endParaRPr lang="en-US" sz="900" dirty="0"/>
-          </a:p>
-        </p:txBody>
-      </p:sp>
-      <p:sp>
-        <p:nvSpPr>
-          <p:cNvPr id="51" name="Shape 49"/>
-          <p:cNvSpPr/>
-          <p:nvPr/>
-        </p:nvSpPr>
-        <p:spPr>
-          <a:xfrm>
-            <a:off x="5759577" y="4169664"/>
-            <a:ext cx="685800" cy="384048"/>
-          </a:xfrm>
-          <a:prstGeom prst="rect">
-            <a:avLst>
-              <a:gd name="adj" fmla="val 9524"/>
-            </a:avLst>
-          </a:prstGeom>
-          <a:solidFill>
-            <a:srgbClr val="FFFFFF"/>
-          </a:solidFill>
-          <a:ln w="12700">
-            <a:solidFill>
-              <a:srgbClr val="DB2777"/>
-            </a:solidFill>
-            <a:prstDash val="solid"/>
-          </a:ln>
-        </p:spPr>
-      </p:sp>
-      <p:sp>
-        <p:nvSpPr>
-          <p:cNvPr id="52" name="Text 50"/>
-          <p:cNvSpPr/>
-          <p:nvPr/>
-        </p:nvSpPr>
-        <p:spPr>
-          <a:xfrm>
-            <a:off x="5759577" y="4169664"/>
-            <a:ext cx="685800" cy="384048"/>
-          </a:xfrm>
-          <a:prstGeom prst="rect">
-            <a:avLst/>
-          </a:prstGeom>
-          <a:noFill/>
-          <a:ln/>
-        </p:spPr>
-        <p:txBody>
-          <a:bodyPr wrap="square" lIns="0" tIns="0" rIns="0" bIns="0" rtlCol="0" anchor="ctr"/>
-          <a:lstStyle/>
-          <a:p>
-            <a:pPr algn="ctr" indent="0" marL="0">
-              <a:buNone/>
-            </a:pPr>
-            <a:r>
-              <a:rPr lang="en-US" sz="900" b="1" dirty="0">
-                <a:solidFill>
-                  <a:srgbClr val="9D174D"/>
-                </a:solidFill>
-                <a:latin typeface="Trebuchet MS" pitchFamily="34" charset="0"/>
-                <a:ea typeface="Trebuchet MS" pitchFamily="34" charset="-122"/>
-                <a:cs typeface="Trebuchet MS" pitchFamily="34" charset="-120"/>
-              </a:rPr>
-              <a:t>a</a:t>
-            </a:r>
-            <a:endParaRPr lang="en-US" sz="900" dirty="0"/>
-          </a:p>
-        </p:txBody>
-      </p:sp>
-      <p:sp>
-        <p:nvSpPr>
-          <p:cNvPr id="53" name="Shape 51"/>
-          <p:cNvSpPr/>
-          <p:nvPr/>
-        </p:nvSpPr>
-        <p:spPr>
-          <a:xfrm>
-            <a:off x="6668262" y="4169664"/>
-            <a:ext cx="685800" cy="384048"/>
-          </a:xfrm>
-          <a:prstGeom prst="rect">
-            <a:avLst>
-              <a:gd name="adj" fmla="val 9524"/>
-            </a:avLst>
-          </a:prstGeom>
-          <a:solidFill>
-            <a:srgbClr val="FFFFFF"/>
-          </a:solidFill>
-          <a:ln w="12700">
-            <a:solidFill>
-              <a:srgbClr val="DB2777"/>
-            </a:solidFill>
-            <a:prstDash val="solid"/>
-          </a:ln>
-        </p:spPr>
-      </p:sp>
-      <p:sp>
-        <p:nvSpPr>
-          <p:cNvPr id="54" name="Text 52"/>
-          <p:cNvSpPr/>
-          <p:nvPr/>
-        </p:nvSpPr>
-        <p:spPr>
-          <a:xfrm>
-            <a:off x="6668262" y="4169664"/>
-            <a:ext cx="685800" cy="384048"/>
-          </a:xfrm>
-          <a:prstGeom prst="rect">
-            <a:avLst/>
-          </a:prstGeom>
-          <a:noFill/>
-          <a:ln/>
-        </p:spPr>
-        <p:txBody>
-          <a:bodyPr wrap="square" lIns="0" tIns="0" rIns="0" bIns="0" rtlCol="0" anchor="ctr"/>
-          <a:lstStyle/>
-          <a:p>
-            <a:pPr algn="ctr" indent="0" marL="0">
-              <a:buNone/>
-            </a:pPr>
-            <a:r>
-              <a:rPr lang="en-US" sz="900" b="1" dirty="0">
-                <a:solidFill>
-                  <a:srgbClr val="9D174D"/>
-                </a:solidFill>
-                <a:latin typeface="Trebuchet MS" pitchFamily="34" charset="0"/>
-                <a:ea typeface="Trebuchet MS" pitchFamily="34" charset="-122"/>
-                <a:cs typeface="Trebuchet MS" pitchFamily="34" charset="-120"/>
-              </a:rPr>
-              <a:t>t</a:t>
-            </a:r>
-            <a:endParaRPr lang="en-US" sz="900" dirty="0"/>
-          </a:p>
-        </p:txBody>
-      </p:sp>
-      <p:sp>
-        <p:nvSpPr>
-          <p:cNvPr id="55" name="Shape 53"/>
-          <p:cNvSpPr/>
-          <p:nvPr/>
-        </p:nvSpPr>
-        <p:spPr>
-          <a:xfrm>
-            <a:off x="7576947" y="4169664"/>
-            <a:ext cx="685800" cy="384048"/>
-          </a:xfrm>
-          <a:prstGeom prst="rect">
-            <a:avLst>
-              <a:gd name="adj" fmla="val 9524"/>
-            </a:avLst>
-          </a:prstGeom>
-          <a:solidFill>
-            <a:srgbClr val="FFFFFF"/>
-          </a:solidFill>
-          <a:ln w="12700">
-            <a:solidFill>
-              <a:srgbClr val="DB2777"/>
-            </a:solidFill>
-            <a:prstDash val="solid"/>
-          </a:ln>
-        </p:spPr>
-      </p:sp>
-      <p:sp>
-        <p:nvSpPr>
-          <p:cNvPr id="56" name="Text 54"/>
-          <p:cNvSpPr/>
-          <p:nvPr/>
-        </p:nvSpPr>
-        <p:spPr>
-          <a:xfrm>
-            <a:off x="7576947" y="4169664"/>
-            <a:ext cx="685800" cy="384048"/>
-          </a:xfrm>
-          <a:prstGeom prst="rect">
-            <a:avLst/>
-          </a:prstGeom>
-          <a:noFill/>
-          <a:ln/>
-        </p:spPr>
-        <p:txBody>
-          <a:bodyPr wrap="square" lIns="0" tIns="0" rIns="0" bIns="0" rtlCol="0" anchor="ctr"/>
-          <a:lstStyle/>
-          <a:p>
-            <a:pPr algn="ctr" indent="0" marL="0">
-              <a:buNone/>
-            </a:pPr>
-            <a:r>
-              <a:rPr lang="en-US" sz="900" b="1" dirty="0">
-                <a:solidFill>
-                  <a:srgbClr val="9D174D"/>
-                </a:solidFill>
-                <a:latin typeface="Trebuchet MS" pitchFamily="34" charset="0"/>
-                <a:ea typeface="Trebuchet MS" pitchFamily="34" charset="-122"/>
-                <a:cs typeface="Trebuchet MS" pitchFamily="34" charset="-120"/>
-              </a:rPr>
-              <a:t>or</a:t>
+              <a:t>ate</a:t>
             </a:r>
             <a:endParaRPr lang="en-US" sz="900" dirty="0"/>
           </a:p>
@@ -17497,7 +17095,7 @@
                 <a:ea typeface="Calibri" pitchFamily="34" charset="-122"/>
                 <a:cs typeface="Calibri" pitchFamily="34" charset="-120"/>
               </a:rPr>
-              <a:t>Word Labs  •  wordlabs.app  •  Root: 'dic' = say, speak, or declare</a:t>
+              <a:t>Word Labs  •  wordlabs.app  •  Root: 'dic' = say, speak, proclaim</a:t>
             </a:r>
             <a:endParaRPr lang="en-US" sz="800" dirty="0"/>
           </a:p>
@@ -18137,7 +17735,7 @@
                 <a:ea typeface="Calibri" pitchFamily="34" charset="-122"/>
                 <a:cs typeface="Calibri" pitchFamily="34" charset="-120"/>
               </a:rPr>
-              <a:t>Word Labs  •  wordlabs.app  •  Root: 'dic' = say, speak, or declare</a:t>
+              <a:t>Word Labs  •  wordlabs.app  •  Root: 'dic' = say, speak, proclaim</a:t>
             </a:r>
             <a:endParaRPr lang="en-US" sz="800" dirty="0"/>
           </a:p>
@@ -18249,7 +17847,7 @@
                 <a:ea typeface="Calibri" pitchFamily="34" charset="-122"/>
                 <a:cs typeface="Calibri" pitchFamily="34" charset="-120"/>
               </a:rPr>
-              <a:t>The king decided to </a:t>
+              <a:t>The queen chose to </a:t>
             </a:r>
             <a:pPr algn="l" indent="0" marL="0">
               <a:buNone/>
@@ -18280,7 +17878,7 @@
                 <a:ea typeface="Calibri" pitchFamily="34" charset="-122"/>
                 <a:cs typeface="Calibri" pitchFamily="34" charset="-120"/>
               </a:rPr>
-              <a:t>, but his </a:t>
+              <a:t> her throne, but her </a:t>
             </a:r>
             <a:pPr algn="l" indent="0" marL="0">
               <a:buNone/>
@@ -18297,7 +17895,7 @@
                 <a:ea typeface="Calibri" pitchFamily="34" charset="-122"/>
                 <a:cs typeface="Calibri" pitchFamily="34" charset="-120"/>
               </a:rPr>
-              <a:t>edict</a:t>
+              <a:t>verdict</a:t>
             </a:r>
             <a:pPr algn="l" indent="0" marL="0">
               <a:buNone/>
@@ -18311,7 +17909,7 @@
                 <a:ea typeface="Calibri" pitchFamily="34" charset="-122"/>
                 <a:cs typeface="Calibri" pitchFamily="34" charset="-120"/>
               </a:rPr>
-              <a:t> still forced people to follow the new </a:t>
+              <a:t> was that a </a:t>
             </a:r>
             <a:pPr algn="l" indent="0" marL="0">
               <a:buNone/>
@@ -18328,7 +17926,7 @@
                 <a:ea typeface="Calibri" pitchFamily="34" charset="-122"/>
                 <a:cs typeface="Calibri" pitchFamily="34" charset="-120"/>
               </a:rPr>
-              <a:t>dictator</a:t>
+              <a:t>dictionary</a:t>
             </a:r>
             <a:pPr algn="l" indent="0" marL="0">
               <a:buNone/>
@@ -18342,7 +17940,7 @@
                 <a:ea typeface="Calibri" pitchFamily="34" charset="-122"/>
                 <a:cs typeface="Calibri" pitchFamily="34" charset="-120"/>
               </a:rPr>
-              <a:t>'s orders.</a:t>
+              <a:t> of new laws should guide the kingdom.</a:t>
             </a:r>
             <a:endParaRPr lang="en-US" sz="1800" dirty="0"/>
           </a:p>
@@ -18625,7 +18223,7 @@
                 <a:ea typeface="Trebuchet MS" pitchFamily="34" charset="-122"/>
                 <a:cs typeface="Trebuchet MS" pitchFamily="34" charset="-120"/>
               </a:rPr>
-              <a:t>edict</a:t>
+              <a:t>verdict</a:t>
             </a:r>
             <a:endParaRPr lang="en-US" sz="1400" dirty="0"/>
           </a:p>
@@ -18753,7 +18351,7 @@
                 <a:ea typeface="Trebuchet MS" pitchFamily="34" charset="-122"/>
                 <a:cs typeface="Trebuchet MS" pitchFamily="34" charset="-120"/>
               </a:rPr>
-              <a:t>dictator</a:t>
+              <a:t>dictionary</a:t>
             </a:r>
             <a:endParaRPr lang="en-US" sz="1400" dirty="0"/>
           </a:p>
@@ -19084,7 +18682,7 @@
                 <a:ea typeface="Calibri" pitchFamily="34" charset="-122"/>
                 <a:cs typeface="Calibri" pitchFamily="34" charset="-120"/>
               </a:rPr>
-              <a:t>Word Labs  •  wordlabs.app  •  Root: 'dic' = say, speak, or declare</a:t>
+              <a:t>Word Labs  •  wordlabs.app  •  Root: 'dic' = say, speak, proclaim</a:t>
             </a:r>
             <a:endParaRPr lang="en-US" sz="800" dirty="0"/>
           </a:p>
@@ -19911,7 +19509,7 @@
                 <a:ea typeface="Calibri" pitchFamily="34" charset="-122"/>
                 <a:cs typeface="Calibri" pitchFamily="34" charset="-120"/>
               </a:rPr>
-              <a:t>Word Labs  •  wordlabs.app  •  Root: 'dic' = say, speak, or declare</a:t>
+              <a:t>Word Labs  •  wordlabs.app  •  Root: 'dic' = say, speak, proclaim</a:t>
             </a:r>
             <a:endParaRPr lang="en-US" sz="800" dirty="0"/>
           </a:p>
@@ -20340,7 +19938,7 @@
                 <a:ea typeface="Calibri" pitchFamily="34" charset="-122"/>
                 <a:cs typeface="Calibri" pitchFamily="34" charset="-120"/>
               </a:rPr>
-              <a:t>say, speak, declare</a:t>
+              <a:t>say, speak, proclaim</a:t>
             </a:r>
             <a:endParaRPr lang="en-US" sz="850" dirty="0"/>
           </a:p>
@@ -20452,7 +20050,7 @@
                 <a:ea typeface="Calibri" pitchFamily="34" charset="-122"/>
                 <a:cs typeface="Calibri" pitchFamily="34" charset="-120"/>
               </a:rPr>
-              <a:t>to do or perform</a:t>
+              <a:t>to make or do</a:t>
             </a:r>
             <a:endParaRPr lang="en-US" sz="850" dirty="0"/>
           </a:p>
@@ -21008,7 +20606,7 @@
                 <a:ea typeface="Calibri" pitchFamily="34" charset="-122"/>
                 <a:cs typeface="Calibri" pitchFamily="34" charset="-120"/>
               </a:rPr>
-              <a:t>Word Labs  •  wordlabs.app  •  Root: 'dic' = say, speak, or declare</a:t>
+              <a:t>Word Labs  •  wordlabs.app  •  Root: 'dic' = say, speak, proclaim</a:t>
             </a:r>
             <a:endParaRPr lang="en-US" sz="800" dirty="0"/>
           </a:p>
@@ -21437,7 +21035,7 @@
                 <a:ea typeface="Calibri" pitchFamily="34" charset="-122"/>
                 <a:cs typeface="Calibri" pitchFamily="34" charset="-120"/>
               </a:rPr>
-              <a:t>say, speak, declare</a:t>
+              <a:t>say, speak, proclaim</a:t>
             </a:r>
             <a:endParaRPr lang="en-US" sz="850" dirty="0"/>
           </a:p>
@@ -21549,7 +21147,7 @@
                 <a:ea typeface="Calibri" pitchFamily="34" charset="-122"/>
                 <a:cs typeface="Calibri" pitchFamily="34" charset="-120"/>
               </a:rPr>
-              <a:t>to do or perform</a:t>
+              <a:t>to make or do</a:t>
             </a:r>
             <a:endParaRPr lang="en-US" sz="850" dirty="0"/>
           </a:p>
@@ -22342,7 +21940,7 @@
                 <a:ea typeface="Calibri" pitchFamily="34" charset="-122"/>
                 <a:cs typeface="Calibri" pitchFamily="34" charset="-120"/>
               </a:rPr>
-              <a:t>Word Labs  •  wordlabs.app  •  Root: 'dic' = say, speak, or declare</a:t>
+              <a:t>Word Labs  •  wordlabs.app  •  Root: 'dic' = say, speak, proclaim</a:t>
             </a:r>
             <a:endParaRPr lang="en-US" sz="800" dirty="0"/>
           </a:p>
@@ -22771,7 +22369,7 @@
                 <a:ea typeface="Calibri" pitchFamily="34" charset="-122"/>
                 <a:cs typeface="Calibri" pitchFamily="34" charset="-120"/>
               </a:rPr>
-              <a:t>say, speak, declare</a:t>
+              <a:t>say, speak, proclaim</a:t>
             </a:r>
             <a:endParaRPr lang="en-US" sz="850" dirty="0"/>
           </a:p>
@@ -22883,7 +22481,7 @@
                 <a:ea typeface="Calibri" pitchFamily="34" charset="-122"/>
                 <a:cs typeface="Calibri" pitchFamily="34" charset="-120"/>
               </a:rPr>
-              <a:t>to do or perform</a:t>
+              <a:t>to make or do</a:t>
             </a:r>
             <a:endParaRPr lang="en-US" sz="850" dirty="0"/>
           </a:p>
@@ -24072,7 +23670,7 @@
                 <a:ea typeface="Calibri" pitchFamily="34" charset="-122"/>
                 <a:cs typeface="Calibri" pitchFamily="34" charset="-120"/>
               </a:rPr>
-              <a:t>Word Labs  •  wordlabs.app  •  Root: 'dic' = say, speak, or declare</a:t>
+              <a:t>Word Labs  •  wordlabs.app  •  Root: 'dic' = say, speak, proclaim</a:t>
             </a:r>
             <a:endParaRPr lang="en-US" sz="800" dirty="0"/>
           </a:p>
@@ -24211,7 +23809,7 @@
                 <a:ea typeface="Trebuchet MS" pitchFamily="34" charset="-122"/>
                 <a:cs typeface="Trebuchet MS" pitchFamily="34" charset="-120"/>
               </a:rPr>
-              <a:t>edict</a:t>
+              <a:t>verdict</a:t>
             </a:r>
             <a:endParaRPr lang="en-US" sz="2800" dirty="0"/>
           </a:p>
@@ -24899,7 +24497,7 @@
                 <a:ea typeface="Calibri" pitchFamily="34" charset="-122"/>
                 <a:cs typeface="Calibri" pitchFamily="34" charset="-120"/>
               </a:rPr>
-              <a:t>Word Labs  •  wordlabs.app  •  Root: 'dic' = say, speak, or declare</a:t>
+              <a:t>Word Labs  •  wordlabs.app  •  Root: 'dic' = say, speak, proclaim</a:t>
             </a:r>
             <a:endParaRPr lang="en-US" sz="800" dirty="0"/>
           </a:p>
@@ -25038,7 +24636,7 @@
                 <a:ea typeface="Trebuchet MS" pitchFamily="34" charset="-122"/>
                 <a:cs typeface="Trebuchet MS" pitchFamily="34" charset="-120"/>
               </a:rPr>
-              <a:t>edict</a:t>
+              <a:t>verdict</a:t>
             </a:r>
             <a:endParaRPr lang="en-US" sz="2800" dirty="0"/>
           </a:p>
@@ -25177,7 +24775,7 @@
                 <a:ea typeface="Trebuchet MS" pitchFamily="34" charset="-122"/>
                 <a:cs typeface="Trebuchet MS" pitchFamily="34" charset="-120"/>
               </a:rPr>
-              <a:t>e</a:t>
+              <a:t>ver</a:t>
             </a:r>
             <a:endParaRPr lang="en-US" sz="1300" dirty="0"/>
           </a:p>
@@ -25216,7 +24814,7 @@
                 <a:ea typeface="Calibri" pitchFamily="34" charset="-122"/>
                 <a:cs typeface="Calibri" pitchFamily="34" charset="-120"/>
               </a:rPr>
-              <a:t>out, from</a:t>
+              <a:t>true</a:t>
             </a:r>
             <a:endParaRPr lang="en-US" sz="850" dirty="0"/>
           </a:p>
@@ -25328,7 +24926,7 @@
                 <a:ea typeface="Calibri" pitchFamily="34" charset="-122"/>
                 <a:cs typeface="Calibri" pitchFamily="34" charset="-120"/>
               </a:rPr>
-              <a:t>say, speak, declare</a:t>
+              <a:t>say, speak</a:t>
             </a:r>
             <a:endParaRPr lang="en-US" sz="850" dirty="0"/>
           </a:p>
@@ -25440,7 +25038,7 @@
                 <a:ea typeface="Calibri" pitchFamily="34" charset="-122"/>
                 <a:cs typeface="Calibri" pitchFamily="34" charset="-120"/>
               </a:rPr>
-              <a:t>word-forming element</a:t>
+              <a:t>word-forming consonant</a:t>
             </a:r>
             <a:endParaRPr lang="en-US" sz="850" dirty="0"/>
           </a:p>
@@ -25996,7 +25594,7 @@
                 <a:ea typeface="Calibri" pitchFamily="34" charset="-122"/>
                 <a:cs typeface="Calibri" pitchFamily="34" charset="-120"/>
               </a:rPr>
-              <a:t>Word Labs  •  wordlabs.app  •  Root: 'dic' = say, speak, or declare</a:t>
+              <a:t>Word Labs  •  wordlabs.app  •  Root: 'dic' = say, speak, proclaim</a:t>
             </a:r>
             <a:endParaRPr lang="en-US" sz="800" dirty="0"/>
           </a:p>
@@ -26069,7 +25667,7 @@
                 <a:ea typeface="Trebuchet MS" pitchFamily="34" charset="-122"/>
                 <a:cs typeface="Trebuchet MS" pitchFamily="34" charset="-120"/>
               </a:rPr>
-              <a:t>We are learning that the root 'dic' means 'say, speak, or declare'.</a:t>
+              <a:t>We are learning that the root 'dic' means 'say, speak, proclaim'.</a:t>
             </a:r>
             <a:endParaRPr lang="en-US" sz="2000" dirty="0"/>
           </a:p>
@@ -26715,7 +26313,7 @@
                 <a:ea typeface="Calibri" pitchFamily="34" charset="-122"/>
                 <a:cs typeface="Calibri" pitchFamily="34" charset="-120"/>
               </a:rPr>
-              <a:t>Word Labs  •  wordlabs.app  •  Root: 'dic' = say, speak, or declare</a:t>
+              <a:t>Word Labs  •  wordlabs.app  •  Root: 'dic' = say, speak, proclaim</a:t>
             </a:r>
             <a:endParaRPr lang="en-US" sz="800" dirty="0"/>
           </a:p>
@@ -26854,7 +26452,7 @@
                 <a:ea typeface="Trebuchet MS" pitchFamily="34" charset="-122"/>
                 <a:cs typeface="Trebuchet MS" pitchFamily="34" charset="-120"/>
               </a:rPr>
-              <a:t>edict</a:t>
+              <a:t>verdict</a:t>
             </a:r>
             <a:endParaRPr lang="en-US" sz="2800" dirty="0"/>
           </a:p>
@@ -26993,7 +26591,7 @@
                 <a:ea typeface="Trebuchet MS" pitchFamily="34" charset="-122"/>
                 <a:cs typeface="Trebuchet MS" pitchFamily="34" charset="-120"/>
               </a:rPr>
-              <a:t>e</a:t>
+              <a:t>ver</a:t>
             </a:r>
             <a:endParaRPr lang="en-US" sz="1300" dirty="0"/>
           </a:p>
@@ -27032,7 +26630,7 @@
                 <a:ea typeface="Calibri" pitchFamily="34" charset="-122"/>
                 <a:cs typeface="Calibri" pitchFamily="34" charset="-120"/>
               </a:rPr>
-              <a:t>out, from</a:t>
+              <a:t>true</a:t>
             </a:r>
             <a:endParaRPr lang="en-US" sz="850" dirty="0"/>
           </a:p>
@@ -27144,7 +26742,7 @@
                 <a:ea typeface="Calibri" pitchFamily="34" charset="-122"/>
                 <a:cs typeface="Calibri" pitchFamily="34" charset="-120"/>
               </a:rPr>
-              <a:t>say, speak, declare</a:t>
+              <a:t>say, speak</a:t>
             </a:r>
             <a:endParaRPr lang="en-US" sz="850" dirty="0"/>
           </a:p>
@@ -27256,7 +26854,7 @@
                 <a:ea typeface="Calibri" pitchFamily="34" charset="-122"/>
                 <a:cs typeface="Calibri" pitchFamily="34" charset="-120"/>
               </a:rPr>
-              <a:t>word-forming element</a:t>
+              <a:t>word-forming consonant</a:t>
             </a:r>
             <a:endParaRPr lang="en-US" sz="850" dirty="0"/>
           </a:p>
@@ -27415,7 +27013,7 @@
                 <a:ea typeface="Trebuchet MS" pitchFamily="34" charset="-122"/>
                 <a:cs typeface="Trebuchet MS" pitchFamily="34" charset="-120"/>
               </a:rPr>
-              <a:t>e</a:t>
+              <a:t>ver</a:t>
             </a:r>
             <a:endParaRPr lang="en-US" sz="1400" dirty="0"/>
           </a:p>
@@ -27944,7 +27542,7 @@
                 <a:ea typeface="Calibri" pitchFamily="34" charset="-122"/>
                 <a:cs typeface="Calibri" pitchFamily="34" charset="-120"/>
               </a:rPr>
-              <a:t>Word Labs  •  wordlabs.app  •  Root: 'dic' = say, speak, or declare</a:t>
+              <a:t>Word Labs  •  wordlabs.app  •  Root: 'dic' = say, speak, proclaim</a:t>
             </a:r>
             <a:endParaRPr lang="en-US" sz="800" dirty="0"/>
           </a:p>
@@ -28083,7 +27681,7 @@
                 <a:ea typeface="Trebuchet MS" pitchFamily="34" charset="-122"/>
                 <a:cs typeface="Trebuchet MS" pitchFamily="34" charset="-120"/>
               </a:rPr>
-              <a:t>edict</a:t>
+              <a:t>verdict</a:t>
             </a:r>
             <a:endParaRPr lang="en-US" sz="2800" dirty="0"/>
           </a:p>
@@ -28222,7 +27820,7 @@
                 <a:ea typeface="Trebuchet MS" pitchFamily="34" charset="-122"/>
                 <a:cs typeface="Trebuchet MS" pitchFamily="34" charset="-120"/>
               </a:rPr>
-              <a:t>e</a:t>
+              <a:t>ver</a:t>
             </a:r>
             <a:endParaRPr lang="en-US" sz="1300" dirty="0"/>
           </a:p>
@@ -28261,7 +27859,7 @@
                 <a:ea typeface="Calibri" pitchFamily="34" charset="-122"/>
                 <a:cs typeface="Calibri" pitchFamily="34" charset="-120"/>
               </a:rPr>
-              <a:t>out, from</a:t>
+              <a:t>true</a:t>
             </a:r>
             <a:endParaRPr lang="en-US" sz="850" dirty="0"/>
           </a:p>
@@ -28373,7 +27971,7 @@
                 <a:ea typeface="Calibri" pitchFamily="34" charset="-122"/>
                 <a:cs typeface="Calibri" pitchFamily="34" charset="-120"/>
               </a:rPr>
-              <a:t>say, speak, declare</a:t>
+              <a:t>say, speak</a:t>
             </a:r>
             <a:endParaRPr lang="en-US" sz="850" dirty="0"/>
           </a:p>
@@ -28485,7 +28083,7 @@
                 <a:ea typeface="Calibri" pitchFamily="34" charset="-122"/>
                 <a:cs typeface="Calibri" pitchFamily="34" charset="-120"/>
               </a:rPr>
-              <a:t>word-forming element</a:t>
+              <a:t>word-forming consonant</a:t>
             </a:r>
             <a:endParaRPr lang="en-US" sz="850" dirty="0"/>
           </a:p>
@@ -28644,7 +28242,7 @@
                 <a:ea typeface="Trebuchet MS" pitchFamily="34" charset="-122"/>
                 <a:cs typeface="Trebuchet MS" pitchFamily="34" charset="-120"/>
               </a:rPr>
-              <a:t>e</a:t>
+              <a:t>ver</a:t>
             </a:r>
             <a:endParaRPr lang="en-US" sz="1400" dirty="0"/>
           </a:p>
@@ -28856,7 +28454,7 @@
         </p:nvSpPr>
         <p:spPr>
           <a:xfrm>
-            <a:off x="2427732" y="4169664"/>
+            <a:off x="2254649" y="4169664"/>
             <a:ext cx="685800" cy="384048"/>
           </a:xfrm>
           <a:prstGeom prst="rect">
@@ -28883,7 +28481,7 @@
         </p:nvSpPr>
         <p:spPr>
           <a:xfrm>
-            <a:off x="2427732" y="4169664"/>
+            <a:off x="2254649" y="4169664"/>
             <a:ext cx="685800" cy="384048"/>
           </a:xfrm>
           <a:prstGeom prst="rect">
@@ -28908,7 +28506,7 @@
                 <a:ea typeface="Trebuchet MS" pitchFamily="34" charset="-122"/>
                 <a:cs typeface="Trebuchet MS" pitchFamily="34" charset="-120"/>
               </a:rPr>
-              <a:t>e</a:t>
+              <a:t>v</a:t>
             </a:r>
             <a:endParaRPr lang="en-US" sz="900" dirty="0"/>
           </a:p>
@@ -28922,7 +28520,7 @@
         </p:nvSpPr>
         <p:spPr>
           <a:xfrm>
-            <a:off x="3639312" y="4169664"/>
+            <a:off x="3293146" y="4169664"/>
             <a:ext cx="685800" cy="384048"/>
           </a:xfrm>
           <a:prstGeom prst="rect">
@@ -28949,7 +28547,7 @@
         </p:nvSpPr>
         <p:spPr>
           <a:xfrm>
-            <a:off x="3639312" y="4169664"/>
+            <a:off x="3293146" y="4169664"/>
             <a:ext cx="685800" cy="384048"/>
           </a:xfrm>
           <a:prstGeom prst="rect">
@@ -28974,7 +28572,7 @@
                 <a:ea typeface="Trebuchet MS" pitchFamily="34" charset="-122"/>
                 <a:cs typeface="Trebuchet MS" pitchFamily="34" charset="-120"/>
               </a:rPr>
-              <a:t>d</a:t>
+              <a:t>er</a:t>
             </a:r>
             <a:endParaRPr lang="en-US" sz="900" dirty="0"/>
           </a:p>
@@ -28988,7 +28586,7 @@
         </p:nvSpPr>
         <p:spPr>
           <a:xfrm>
-            <a:off x="4850892" y="4169664"/>
+            <a:off x="4331643" y="4169664"/>
             <a:ext cx="685800" cy="384048"/>
           </a:xfrm>
           <a:prstGeom prst="rect">
@@ -29015,7 +28613,7 @@
         </p:nvSpPr>
         <p:spPr>
           <a:xfrm>
-            <a:off x="4850892" y="4169664"/>
+            <a:off x="4331643" y="4169664"/>
             <a:ext cx="685800" cy="384048"/>
           </a:xfrm>
           <a:prstGeom prst="rect">
@@ -29040,7 +28638,7 @@
                 <a:ea typeface="Trebuchet MS" pitchFamily="34" charset="-122"/>
                 <a:cs typeface="Trebuchet MS" pitchFamily="34" charset="-120"/>
               </a:rPr>
-              <a:t>i</a:t>
+              <a:t>d</a:t>
             </a:r>
             <a:endParaRPr lang="en-US" sz="900" dirty="0"/>
           </a:p>
@@ -29054,7 +28652,7 @@
         </p:nvSpPr>
         <p:spPr>
           <a:xfrm>
-            <a:off x="6062472" y="4169664"/>
+            <a:off x="5370141" y="4169664"/>
             <a:ext cx="685800" cy="384048"/>
           </a:xfrm>
           <a:prstGeom prst="rect">
@@ -29081,7 +28679,7 @@
         </p:nvSpPr>
         <p:spPr>
           <a:xfrm>
-            <a:off x="6062472" y="4169664"/>
+            <a:off x="5370141" y="4169664"/>
             <a:ext cx="685800" cy="384048"/>
           </a:xfrm>
           <a:prstGeom prst="rect">
@@ -29106,6 +28704,72 @@
                 <a:ea typeface="Trebuchet MS" pitchFamily="34" charset="-122"/>
                 <a:cs typeface="Trebuchet MS" pitchFamily="34" charset="-120"/>
               </a:rPr>
+              <a:t>i</a:t>
+            </a:r>
+            <a:endParaRPr lang="en-US" sz="900" dirty="0"/>
+          </a:p>
+        </p:txBody>
+      </p:sp>
+      <p:sp>
+        <p:nvSpPr>
+          <p:cNvPr id="44" name="Shape 42"/>
+          <p:cNvSpPr/>
+          <p:nvPr/>
+        </p:nvSpPr>
+        <p:spPr>
+          <a:xfrm>
+            <a:off x="6408638" y="4169664"/>
+            <a:ext cx="685800" cy="384048"/>
+          </a:xfrm>
+          <a:prstGeom prst="rect">
+            <a:avLst>
+              <a:gd name="adj" fmla="val 9524"/>
+            </a:avLst>
+          </a:prstGeom>
+          <a:solidFill>
+            <a:srgbClr val="FFFFFF"/>
+          </a:solidFill>
+          <a:ln w="12700">
+            <a:solidFill>
+              <a:srgbClr val="DB2777"/>
+            </a:solidFill>
+            <a:prstDash val="solid"/>
+          </a:ln>
+        </p:spPr>
+      </p:sp>
+      <p:sp>
+        <p:nvSpPr>
+          <p:cNvPr id="45" name="Text 43"/>
+          <p:cNvSpPr/>
+          <p:nvPr/>
+        </p:nvSpPr>
+        <p:spPr>
+          <a:xfrm>
+            <a:off x="6408638" y="4169664"/>
+            <a:ext cx="685800" cy="384048"/>
+          </a:xfrm>
+          <a:prstGeom prst="rect">
+            <a:avLst/>
+          </a:prstGeom>
+          <a:noFill/>
+          <a:ln/>
+        </p:spPr>
+        <p:txBody>
+          <a:bodyPr wrap="square" lIns="0" tIns="0" rIns="0" bIns="0" rtlCol="0" anchor="ctr"/>
+          <a:lstStyle/>
+          <a:p>
+            <a:pPr algn="ctr" indent="0" marL="0">
+              <a:buNone/>
+            </a:pPr>
+            <a:r>
+              <a:rPr lang="en-US" sz="900" b="1" dirty="0">
+                <a:solidFill>
+                  <a:srgbClr val="9D174D"/>
+                </a:solidFill>
+                <a:latin typeface="Trebuchet MS" pitchFamily="34" charset="0"/>
+                <a:ea typeface="Trebuchet MS" pitchFamily="34" charset="-122"/>
+                <a:cs typeface="Trebuchet MS" pitchFamily="34" charset="-120"/>
+              </a:rPr>
               <a:t>c</a:t>
             </a:r>
             <a:endParaRPr lang="en-US" sz="900" dirty="0"/>
@@ -29114,13 +28778,13 @@
       </p:sp>
       <p:sp>
         <p:nvSpPr>
-          <p:cNvPr id="44" name="Text 42"/>
-          <p:cNvSpPr/>
-          <p:nvPr/>
-        </p:nvSpPr>
-        <p:spPr>
-          <a:xfrm>
-            <a:off x="6062472" y="4572000"/>
+          <p:cNvPr id="46" name="Text 44"/>
+          <p:cNvSpPr/>
+          <p:nvPr/>
+        </p:nvSpPr>
+        <p:spPr>
+          <a:xfrm>
+            <a:off x="6408638" y="4572000"/>
             <a:ext cx="685800" cy="219456"/>
           </a:xfrm>
           <a:prstGeom prst="rect">
@@ -29153,13 +28817,13 @@
       </p:sp>
       <p:sp>
         <p:nvSpPr>
-          <p:cNvPr id="45" name="Shape 43"/>
-          <p:cNvSpPr/>
-          <p:nvPr/>
-        </p:nvSpPr>
-        <p:spPr>
-          <a:xfrm>
-            <a:off x="7274052" y="4169664"/>
+          <p:cNvPr id="47" name="Shape 45"/>
+          <p:cNvSpPr/>
+          <p:nvPr/>
+        </p:nvSpPr>
+        <p:spPr>
+          <a:xfrm>
+            <a:off x="7447135" y="4169664"/>
             <a:ext cx="685800" cy="384048"/>
           </a:xfrm>
           <a:prstGeom prst="rect">
@@ -29180,13 +28844,13 @@
       </p:sp>
       <p:sp>
         <p:nvSpPr>
-          <p:cNvPr id="46" name="Text 44"/>
-          <p:cNvSpPr/>
-          <p:nvPr/>
-        </p:nvSpPr>
-        <p:spPr>
-          <a:xfrm>
-            <a:off x="7274052" y="4169664"/>
+          <p:cNvPr id="48" name="Text 46"/>
+          <p:cNvSpPr/>
+          <p:nvPr/>
+        </p:nvSpPr>
+        <p:spPr>
+          <a:xfrm>
+            <a:off x="7447135" y="4169664"/>
             <a:ext cx="685800" cy="384048"/>
           </a:xfrm>
           <a:prstGeom prst="rect">
@@ -29503,7 +29167,7 @@
                 <a:ea typeface="Calibri" pitchFamily="34" charset="-122"/>
                 <a:cs typeface="Calibri" pitchFamily="34" charset="-120"/>
               </a:rPr>
-              <a:t>Word Labs  •  wordlabs.app  •  Root: 'dic' = say, speak, or declare</a:t>
+              <a:t>Word Labs  •  wordlabs.app  •  Root: 'dic' = say, speak, proclaim</a:t>
             </a:r>
             <a:endParaRPr lang="en-US" sz="800" dirty="0"/>
           </a:p>
@@ -29642,7 +29306,7 @@
                 <a:ea typeface="Trebuchet MS" pitchFamily="34" charset="-122"/>
                 <a:cs typeface="Trebuchet MS" pitchFamily="34" charset="-120"/>
               </a:rPr>
-              <a:t>dictator</a:t>
+              <a:t>dictionary</a:t>
             </a:r>
             <a:endParaRPr lang="en-US" sz="2800" dirty="0"/>
           </a:p>
@@ -30330,7 +29994,7 @@
                 <a:ea typeface="Calibri" pitchFamily="34" charset="-122"/>
                 <a:cs typeface="Calibri" pitchFamily="34" charset="-120"/>
               </a:rPr>
-              <a:t>Word Labs  •  wordlabs.app  •  Root: 'dic' = say, speak, or declare</a:t>
+              <a:t>Word Labs  •  wordlabs.app  •  Root: 'dic' = say, speak, proclaim</a:t>
             </a:r>
             <a:endParaRPr lang="en-US" sz="800" dirty="0"/>
           </a:p>
@@ -30469,7 +30133,7 @@
                 <a:ea typeface="Trebuchet MS" pitchFamily="34" charset="-122"/>
                 <a:cs typeface="Trebuchet MS" pitchFamily="34" charset="-120"/>
               </a:rPr>
-              <a:t>dictator</a:t>
+              <a:t>dictionary</a:t>
             </a:r>
             <a:endParaRPr lang="en-US" sz="2800" dirty="0"/>
           </a:p>
@@ -30549,8 +30213,8 @@
         </p:nvSpPr>
         <p:spPr>
           <a:xfrm>
-            <a:off x="1989734" y="2258568"/>
-            <a:ext cx="1581912" cy="292608"/>
+            <a:off x="2221992" y="2258568"/>
+            <a:ext cx="1828800" cy="292608"/>
           </a:xfrm>
           <a:prstGeom prst="rect">
             <a:avLst>
@@ -30583,8 +30247,8 @@
         </p:nvSpPr>
         <p:spPr>
           <a:xfrm>
-            <a:off x="1989734" y="2258568"/>
-            <a:ext cx="1581912" cy="292608"/>
+            <a:off x="2221992" y="2258568"/>
+            <a:ext cx="1828800" cy="292608"/>
           </a:xfrm>
           <a:prstGeom prst="rect">
             <a:avLst/>
@@ -30622,8 +30286,8 @@
         </p:nvSpPr>
         <p:spPr>
           <a:xfrm>
-            <a:off x="1989734" y="2569464"/>
-            <a:ext cx="1581912" cy="201168"/>
+            <a:off x="2221992" y="2569464"/>
+            <a:ext cx="1828800" cy="201168"/>
           </a:xfrm>
           <a:prstGeom prst="rect">
             <a:avLst/>
@@ -30647,7 +30311,7 @@
                 <a:ea typeface="Calibri" pitchFamily="34" charset="-122"/>
                 <a:cs typeface="Calibri" pitchFamily="34" charset="-120"/>
               </a:rPr>
-              <a:t>say, speak, declare</a:t>
+              <a:t>say, speak</a:t>
             </a:r>
             <a:endParaRPr lang="en-US" sz="850" dirty="0"/>
           </a:p>
@@ -30661,8 +30325,8 @@
         </p:nvSpPr>
         <p:spPr>
           <a:xfrm>
-            <a:off x="3659429" y="2258568"/>
-            <a:ext cx="1581912" cy="292608"/>
+            <a:off x="4370832" y="2258568"/>
+            <a:ext cx="1828800" cy="292608"/>
           </a:xfrm>
           <a:prstGeom prst="rect">
             <a:avLst>
@@ -30695,8 +30359,8 @@
         </p:nvSpPr>
         <p:spPr>
           <a:xfrm>
-            <a:off x="3659429" y="2258568"/>
-            <a:ext cx="1581912" cy="292608"/>
+            <a:off x="4370832" y="2258568"/>
+            <a:ext cx="1828800" cy="292608"/>
           </a:xfrm>
           <a:prstGeom prst="rect">
             <a:avLst/>
@@ -30720,7 +30384,7 @@
                 <a:ea typeface="Trebuchet MS" pitchFamily="34" charset="-122"/>
                 <a:cs typeface="Trebuchet MS" pitchFamily="34" charset="-120"/>
               </a:rPr>
-              <a:t>t</a:t>
+              <a:t>tion</a:t>
             </a:r>
             <a:endParaRPr lang="en-US" sz="1300" dirty="0"/>
           </a:p>
@@ -30734,8 +30398,8 @@
         </p:nvSpPr>
         <p:spPr>
           <a:xfrm>
-            <a:off x="3659429" y="2569464"/>
-            <a:ext cx="1581912" cy="201168"/>
+            <a:off x="4370832" y="2569464"/>
+            <a:ext cx="1828800" cy="201168"/>
           </a:xfrm>
           <a:prstGeom prst="rect">
             <a:avLst/>
@@ -30759,7 +30423,7 @@
                 <a:ea typeface="Calibri" pitchFamily="34" charset="-122"/>
                 <a:cs typeface="Calibri" pitchFamily="34" charset="-120"/>
               </a:rPr>
-              <a:t>word-forming element</a:t>
+              <a:t>act or state of</a:t>
             </a:r>
             <a:endParaRPr lang="en-US" sz="850" dirty="0"/>
           </a:p>
@@ -30773,8 +30437,8 @@
         </p:nvSpPr>
         <p:spPr>
           <a:xfrm>
-            <a:off x="5329123" y="2258568"/>
-            <a:ext cx="1581912" cy="292608"/>
+            <a:off x="6519672" y="2258568"/>
+            <a:ext cx="1828800" cy="292608"/>
           </a:xfrm>
           <a:prstGeom prst="rect">
             <a:avLst>
@@ -30807,8 +30471,8 @@
         </p:nvSpPr>
         <p:spPr>
           <a:xfrm>
-            <a:off x="5329123" y="2258568"/>
-            <a:ext cx="1581912" cy="292608"/>
+            <a:off x="6519672" y="2258568"/>
+            <a:ext cx="1828800" cy="292608"/>
           </a:xfrm>
           <a:prstGeom prst="rect">
             <a:avLst/>
@@ -30832,7 +30496,7 @@
                 <a:ea typeface="Trebuchet MS" pitchFamily="34" charset="-122"/>
                 <a:cs typeface="Trebuchet MS" pitchFamily="34" charset="-120"/>
               </a:rPr>
-              <a:t>at</a:t>
+              <a:t>ary</a:t>
             </a:r>
             <a:endParaRPr lang="en-US" sz="1300" dirty="0"/>
           </a:p>
@@ -30846,8 +30510,8 @@
         </p:nvSpPr>
         <p:spPr>
           <a:xfrm>
-            <a:off x="5329123" y="2569464"/>
-            <a:ext cx="1581912" cy="201168"/>
+            <a:off x="6519672" y="2569464"/>
+            <a:ext cx="1828800" cy="201168"/>
           </a:xfrm>
           <a:prstGeom prst="rect">
             <a:avLst/>
@@ -30871,7 +30535,7 @@
                 <a:ea typeface="Calibri" pitchFamily="34" charset="-122"/>
                 <a:cs typeface="Calibri" pitchFamily="34" charset="-120"/>
               </a:rPr>
-              <a:t>action or process</a:t>
+              <a:t>relating to, a place for</a:t>
             </a:r>
             <a:endParaRPr lang="en-US" sz="850" dirty="0"/>
           </a:p>
@@ -30885,30 +30549,23 @@
         </p:nvSpPr>
         <p:spPr>
           <a:xfrm>
-            <a:off x="6998818" y="2258568"/>
-            <a:ext cx="1581912" cy="292608"/>
+            <a:off x="365760" y="3273552"/>
+            <a:ext cx="1371600" cy="658368"/>
           </a:xfrm>
           <a:prstGeom prst="rect">
             <a:avLst>
-              <a:gd name="adj" fmla="val 25000"/>
+              <a:gd name="adj" fmla="val 8333"/>
             </a:avLst>
           </a:prstGeom>
           <a:solidFill>
-            <a:srgbClr val="FCE7F3"/>
-          </a:solidFill>
-          <a:ln w="19050">
-            <a:solidFill>
-              <a:srgbClr val="DB2777"/>
-            </a:solidFill>
-            <a:prstDash val="solid"/>
-          </a:ln>
-          <a:effectLst>
-            <a:outerShdw sx="100000" sy="100000" kx="0" ky="0" algn="bl" rotWithShape="0" blurRad="101600" dist="38100" dir="8100000">
-              <a:srgbClr val="000000">
-                <a:alpha val="12000"/>
-              </a:srgbClr>
-            </a:outerShdw>
-          </a:effectLst>
+            <a:srgbClr val="E2E8F0"/>
+          </a:solidFill>
+          <a:ln w="12700">
+            <a:solidFill>
+              <a:srgbClr val="E2E8F0"/>
+            </a:solidFill>
+            <a:prstDash val="solid"/>
+          </a:ln>
         </p:spPr>
       </p:sp>
       <p:sp>
@@ -30919,90 +30576,117 @@
         </p:nvSpPr>
         <p:spPr>
           <a:xfrm>
-            <a:off x="6998818" y="2258568"/>
-            <a:ext cx="1581912" cy="292608"/>
-          </a:xfrm>
-          <a:prstGeom prst="rect">
-            <a:avLst/>
-          </a:prstGeom>
-          <a:noFill/>
-          <a:ln/>
-        </p:spPr>
-        <p:txBody>
-          <a:bodyPr wrap="square" lIns="0" tIns="0" rIns="0" bIns="0" rtlCol="0" anchor="ctr"/>
-          <a:lstStyle/>
-          <a:p>
-            <a:pPr algn="ctr" indent="0" marL="0">
-              <a:buNone/>
-            </a:pPr>
-            <a:r>
-              <a:rPr lang="en-US" sz="1300" b="1" dirty="0">
-                <a:solidFill>
-                  <a:srgbClr val="9D174D"/>
+            <a:off x="365760" y="3273552"/>
+            <a:ext cx="1371600" cy="658368"/>
+          </a:xfrm>
+          <a:prstGeom prst="rect">
+            <a:avLst/>
+          </a:prstGeom>
+          <a:noFill/>
+          <a:ln/>
+        </p:spPr>
+        <p:txBody>
+          <a:bodyPr wrap="square" lIns="0" tIns="0" rIns="0" bIns="0" rtlCol="0" anchor="ctr"/>
+          <a:lstStyle/>
+          <a:p>
+            <a:pPr algn="ctr" indent="0" marL="0">
+              <a:buNone/>
+            </a:pPr>
+            <a:r>
+              <a:rPr lang="en-US" sz="1100" b="1" dirty="0">
+                <a:solidFill>
+                  <a:srgbClr val="475569"/>
                 </a:solidFill>
                 <a:latin typeface="Trebuchet MS" pitchFamily="34" charset="0"/>
                 <a:ea typeface="Trebuchet MS" pitchFamily="34" charset="-122"/>
                 <a:cs typeface="Trebuchet MS" pitchFamily="34" charset="-120"/>
               </a:rPr>
-              <a:t>or</a:t>
-            </a:r>
-            <a:endParaRPr lang="en-US" sz="1300" dirty="0"/>
-          </a:p>
-        </p:txBody>
-      </p:sp>
-      <p:sp>
-        <p:nvSpPr>
-          <p:cNvPr id="27" name="Text 25"/>
-          <p:cNvSpPr/>
-          <p:nvPr/>
-        </p:nvSpPr>
-        <p:spPr>
-          <a:xfrm>
-            <a:off x="6998818" y="2569464"/>
-            <a:ext cx="1581912" cy="201168"/>
-          </a:xfrm>
-          <a:prstGeom prst="rect">
-            <a:avLst/>
-          </a:prstGeom>
-          <a:noFill/>
-          <a:ln/>
-        </p:spPr>
-        <p:txBody>
-          <a:bodyPr wrap="square" lIns="0" tIns="0" rIns="0" bIns="0" rtlCol="0" anchor="t"/>
-          <a:lstStyle/>
-          <a:p>
-            <a:pPr algn="ctr" indent="0" marL="0">
-              <a:buNone/>
-            </a:pPr>
-            <a:r>
-              <a:rPr lang="en-US" sz="850" dirty="0">
-                <a:solidFill>
-                  <a:srgbClr val="475569"/>
+              <a:t>Syllables</a:t>
+            </a:r>
+            <a:endParaRPr lang="en-US" sz="1100" dirty="0"/>
+          </a:p>
+        </p:txBody>
+      </p:sp>
+      <p:sp>
+        <p:nvSpPr>
+          <p:cNvPr id="27" name="Shape 25"/>
+          <p:cNvSpPr/>
+          <p:nvPr/>
+        </p:nvSpPr>
+        <p:spPr>
+          <a:xfrm>
+            <a:off x="1874520" y="3273552"/>
+            <a:ext cx="6903720" cy="658368"/>
+          </a:xfrm>
+          <a:prstGeom prst="rect">
+            <a:avLst>
+              <a:gd name="adj" fmla="val 8333"/>
+            </a:avLst>
+          </a:prstGeom>
+          <a:solidFill>
+            <a:srgbClr val="F8FAFC"/>
+          </a:solidFill>
+          <a:ln w="12700">
+            <a:solidFill>
+              <a:srgbClr val="E2E8F0"/>
+            </a:solidFill>
+            <a:prstDash val="dash"/>
+          </a:ln>
+        </p:spPr>
+      </p:sp>
+      <p:sp>
+        <p:nvSpPr>
+          <p:cNvPr id="28" name="Text 26"/>
+          <p:cNvSpPr/>
+          <p:nvPr/>
+        </p:nvSpPr>
+        <p:spPr>
+          <a:xfrm>
+            <a:off x="1874520" y="3273552"/>
+            <a:ext cx="6903720" cy="658368"/>
+          </a:xfrm>
+          <a:prstGeom prst="rect">
+            <a:avLst/>
+          </a:prstGeom>
+          <a:noFill/>
+          <a:ln/>
+        </p:spPr>
+        <p:txBody>
+          <a:bodyPr wrap="square" rtlCol="0" anchor="ctr"/>
+          <a:lstStyle/>
+          <a:p>
+            <a:pPr algn="ctr" indent="0" marL="0">
+              <a:buNone/>
+            </a:pPr>
+            <a:r>
+              <a:rPr lang="en-US" sz="1100" i="1" dirty="0">
+                <a:solidFill>
+                  <a:srgbClr val="CBD5E1"/>
                 </a:solidFill>
                 <a:latin typeface="Calibri" pitchFamily="34" charset="0"/>
                 <a:ea typeface="Calibri" pitchFamily="34" charset="-122"/>
                 <a:cs typeface="Calibri" pitchFamily="34" charset="-120"/>
               </a:rPr>
-              <a:t>person who does something</a:t>
-            </a:r>
-            <a:endParaRPr lang="en-US" sz="850" dirty="0"/>
-          </a:p>
-        </p:txBody>
-      </p:sp>
-      <p:sp>
-        <p:nvSpPr>
-          <p:cNvPr id="28" name="Shape 26"/>
-          <p:cNvSpPr/>
-          <p:nvPr/>
-        </p:nvSpPr>
-        <p:spPr>
-          <a:xfrm>
-            <a:off x="365760" y="3273552"/>
-            <a:ext cx="1371600" cy="658368"/>
+              <a:t>Write here...</a:t>
+            </a:r>
+            <a:endParaRPr lang="en-US" sz="1100" dirty="0"/>
+          </a:p>
+        </p:txBody>
+      </p:sp>
+      <p:sp>
+        <p:nvSpPr>
+          <p:cNvPr id="29" name="Shape 27"/>
+          <p:cNvSpPr/>
+          <p:nvPr/>
+        </p:nvSpPr>
+        <p:spPr>
+          <a:xfrm>
+            <a:off x="365760" y="4096512"/>
+            <a:ext cx="1371600" cy="804672"/>
           </a:xfrm>
           <a:prstGeom prst="rect">
             <a:avLst>
-              <a:gd name="adj" fmla="val 8333"/>
+              <a:gd name="adj" fmla="val 6818"/>
             </a:avLst>
           </a:prstGeom>
           <a:solidFill>
@@ -31018,14 +30702,14 @@
       </p:sp>
       <p:sp>
         <p:nvSpPr>
-          <p:cNvPr id="29" name="Text 27"/>
-          <p:cNvSpPr/>
-          <p:nvPr/>
-        </p:nvSpPr>
-        <p:spPr>
-          <a:xfrm>
-            <a:off x="365760" y="3273552"/>
-            <a:ext cx="1371600" cy="658368"/>
+          <p:cNvPr id="30" name="Text 28"/>
+          <p:cNvSpPr/>
+          <p:nvPr/>
+        </p:nvSpPr>
+        <p:spPr>
+          <a:xfrm>
+            <a:off x="365760" y="4096512"/>
+            <a:ext cx="1371600" cy="804672"/>
           </a:xfrm>
           <a:prstGeom prst="rect">
             <a:avLst/>
@@ -31049,7 +30733,7 @@
                 <a:ea typeface="Trebuchet MS" pitchFamily="34" charset="-122"/>
                 <a:cs typeface="Trebuchet MS" pitchFamily="34" charset="-120"/>
               </a:rPr>
-              <a:t>Syllables</a:t>
+              <a:t>Phonemes</a:t>
             </a:r>
             <a:endParaRPr lang="en-US" sz="1100" dirty="0"/>
           </a:p>
@@ -31057,80 +30741,14 @@
       </p:sp>
       <p:sp>
         <p:nvSpPr>
-          <p:cNvPr id="30" name="Shape 28"/>
-          <p:cNvSpPr/>
-          <p:nvPr/>
-        </p:nvSpPr>
-        <p:spPr>
-          <a:xfrm>
-            <a:off x="1874520" y="3273552"/>
-            <a:ext cx="6903720" cy="658368"/>
-          </a:xfrm>
-          <a:prstGeom prst="rect">
-            <a:avLst>
-              <a:gd name="adj" fmla="val 8333"/>
-            </a:avLst>
-          </a:prstGeom>
-          <a:solidFill>
-            <a:srgbClr val="F8FAFC"/>
-          </a:solidFill>
-          <a:ln w="12700">
-            <a:solidFill>
-              <a:srgbClr val="E2E8F0"/>
-            </a:solidFill>
-            <a:prstDash val="dash"/>
-          </a:ln>
-        </p:spPr>
-      </p:sp>
-      <p:sp>
-        <p:nvSpPr>
-          <p:cNvPr id="31" name="Text 29"/>
-          <p:cNvSpPr/>
-          <p:nvPr/>
-        </p:nvSpPr>
-        <p:spPr>
-          <a:xfrm>
-            <a:off x="1874520" y="3273552"/>
-            <a:ext cx="6903720" cy="658368"/>
-          </a:xfrm>
-          <a:prstGeom prst="rect">
-            <a:avLst/>
-          </a:prstGeom>
-          <a:noFill/>
-          <a:ln/>
-        </p:spPr>
-        <p:txBody>
-          <a:bodyPr wrap="square" rtlCol="0" anchor="ctr"/>
-          <a:lstStyle/>
-          <a:p>
-            <a:pPr algn="ctr" indent="0" marL="0">
-              <a:buNone/>
-            </a:pPr>
-            <a:r>
-              <a:rPr lang="en-US" sz="1100" i="1" dirty="0">
-                <a:solidFill>
-                  <a:srgbClr val="CBD5E1"/>
-                </a:solidFill>
-                <a:latin typeface="Calibri" pitchFamily="34" charset="0"/>
-                <a:ea typeface="Calibri" pitchFamily="34" charset="-122"/>
-                <a:cs typeface="Calibri" pitchFamily="34" charset="-120"/>
-              </a:rPr>
-              <a:t>Write here...</a:t>
-            </a:r>
-            <a:endParaRPr lang="en-US" sz="1100" dirty="0"/>
-          </a:p>
-        </p:txBody>
-      </p:sp>
-      <p:sp>
-        <p:nvSpPr>
-          <p:cNvPr id="32" name="Shape 30"/>
-          <p:cNvSpPr/>
-          <p:nvPr/>
-        </p:nvSpPr>
-        <p:spPr>
-          <a:xfrm>
-            <a:off x="365760" y="4096512"/>
-            <a:ext cx="1371600" cy="804672"/>
+          <p:cNvPr id="31" name="Shape 29"/>
+          <p:cNvSpPr/>
+          <p:nvPr/>
+        </p:nvSpPr>
+        <p:spPr>
+          <a:xfrm>
+            <a:off x="1874520" y="4096512"/>
+            <a:ext cx="6903720" cy="804672"/>
           </a:xfrm>
           <a:prstGeom prst="rect">
             <a:avLst>
@@ -31138,85 +30756,19 @@
             </a:avLst>
           </a:prstGeom>
           <a:solidFill>
-            <a:srgbClr val="E2E8F0"/>
+            <a:srgbClr val="F8FAFC"/>
           </a:solidFill>
           <a:ln w="12700">
             <a:solidFill>
               <a:srgbClr val="E2E8F0"/>
             </a:solidFill>
-            <a:prstDash val="solid"/>
-          </a:ln>
-        </p:spPr>
-      </p:sp>
-      <p:sp>
-        <p:nvSpPr>
-          <p:cNvPr id="33" name="Text 31"/>
-          <p:cNvSpPr/>
-          <p:nvPr/>
-        </p:nvSpPr>
-        <p:spPr>
-          <a:xfrm>
-            <a:off x="365760" y="4096512"/>
-            <a:ext cx="1371600" cy="804672"/>
-          </a:xfrm>
-          <a:prstGeom prst="rect">
-            <a:avLst/>
-          </a:prstGeom>
-          <a:noFill/>
-          <a:ln/>
-        </p:spPr>
-        <p:txBody>
-          <a:bodyPr wrap="square" lIns="0" tIns="0" rIns="0" bIns="0" rtlCol="0" anchor="ctr"/>
-          <a:lstStyle/>
-          <a:p>
-            <a:pPr algn="ctr" indent="0" marL="0">
-              <a:buNone/>
-            </a:pPr>
-            <a:r>
-              <a:rPr lang="en-US" sz="1100" b="1" dirty="0">
-                <a:solidFill>
-                  <a:srgbClr val="475569"/>
-                </a:solidFill>
-                <a:latin typeface="Trebuchet MS" pitchFamily="34" charset="0"/>
-                <a:ea typeface="Trebuchet MS" pitchFamily="34" charset="-122"/>
-                <a:cs typeface="Trebuchet MS" pitchFamily="34" charset="-120"/>
-              </a:rPr>
-              <a:t>Phonemes</a:t>
-            </a:r>
-            <a:endParaRPr lang="en-US" sz="1100" dirty="0"/>
-          </a:p>
-        </p:txBody>
-      </p:sp>
-      <p:sp>
-        <p:nvSpPr>
-          <p:cNvPr id="34" name="Shape 32"/>
-          <p:cNvSpPr/>
-          <p:nvPr/>
-        </p:nvSpPr>
-        <p:spPr>
-          <a:xfrm>
-            <a:off x="1874520" y="4096512"/>
-            <a:ext cx="6903720" cy="804672"/>
-          </a:xfrm>
-          <a:prstGeom prst="rect">
-            <a:avLst>
-              <a:gd name="adj" fmla="val 6818"/>
-            </a:avLst>
-          </a:prstGeom>
-          <a:solidFill>
-            <a:srgbClr val="F8FAFC"/>
-          </a:solidFill>
-          <a:ln w="12700">
-            <a:solidFill>
-              <a:srgbClr val="E2E8F0"/>
-            </a:solidFill>
             <a:prstDash val="dash"/>
           </a:ln>
         </p:spPr>
       </p:sp>
       <p:sp>
         <p:nvSpPr>
-          <p:cNvPr id="35" name="Text 33"/>
+          <p:cNvPr id="32" name="Text 30"/>
           <p:cNvSpPr/>
           <p:nvPr/>
         </p:nvSpPr>
@@ -31539,7 +31091,7 @@
                 <a:ea typeface="Calibri" pitchFamily="34" charset="-122"/>
                 <a:cs typeface="Calibri" pitchFamily="34" charset="-120"/>
               </a:rPr>
-              <a:t>Word Labs  •  wordlabs.app  •  Root: 'dic' = say, speak, or declare</a:t>
+              <a:t>Word Labs  •  wordlabs.app  •  Root: 'dic' = say, speak, proclaim</a:t>
             </a:r>
             <a:endParaRPr lang="en-US" sz="800" dirty="0"/>
           </a:p>
@@ -31678,7 +31230,7 @@
                 <a:ea typeface="Trebuchet MS" pitchFamily="34" charset="-122"/>
                 <a:cs typeface="Trebuchet MS" pitchFamily="34" charset="-120"/>
               </a:rPr>
-              <a:t>dictator</a:t>
+              <a:t>dictionary</a:t>
             </a:r>
             <a:endParaRPr lang="en-US" sz="2800" dirty="0"/>
           </a:p>
@@ -31758,8 +31310,8 @@
         </p:nvSpPr>
         <p:spPr>
           <a:xfrm>
-            <a:off x="1989734" y="2258568"/>
-            <a:ext cx="1581912" cy="292608"/>
+            <a:off x="2221992" y="2258568"/>
+            <a:ext cx="1828800" cy="292608"/>
           </a:xfrm>
           <a:prstGeom prst="rect">
             <a:avLst>
@@ -31792,8 +31344,8 @@
         </p:nvSpPr>
         <p:spPr>
           <a:xfrm>
-            <a:off x="1989734" y="2258568"/>
-            <a:ext cx="1581912" cy="292608"/>
+            <a:off x="2221992" y="2258568"/>
+            <a:ext cx="1828800" cy="292608"/>
           </a:xfrm>
           <a:prstGeom prst="rect">
             <a:avLst/>
@@ -31831,8 +31383,8 @@
         </p:nvSpPr>
         <p:spPr>
           <a:xfrm>
-            <a:off x="1989734" y="2569464"/>
-            <a:ext cx="1581912" cy="201168"/>
+            <a:off x="2221992" y="2569464"/>
+            <a:ext cx="1828800" cy="201168"/>
           </a:xfrm>
           <a:prstGeom prst="rect">
             <a:avLst/>
@@ -31856,7 +31408,7 @@
                 <a:ea typeface="Calibri" pitchFamily="34" charset="-122"/>
                 <a:cs typeface="Calibri" pitchFamily="34" charset="-120"/>
               </a:rPr>
-              <a:t>say, speak, declare</a:t>
+              <a:t>say, speak</a:t>
             </a:r>
             <a:endParaRPr lang="en-US" sz="850" dirty="0"/>
           </a:p>
@@ -31870,8 +31422,8 @@
         </p:nvSpPr>
         <p:spPr>
           <a:xfrm>
-            <a:off x="3659429" y="2258568"/>
-            <a:ext cx="1581912" cy="292608"/>
+            <a:off x="4370832" y="2258568"/>
+            <a:ext cx="1828800" cy="292608"/>
           </a:xfrm>
           <a:prstGeom prst="rect">
             <a:avLst>
@@ -31904,8 +31456,8 @@
         </p:nvSpPr>
         <p:spPr>
           <a:xfrm>
-            <a:off x="3659429" y="2258568"/>
-            <a:ext cx="1581912" cy="292608"/>
+            <a:off x="4370832" y="2258568"/>
+            <a:ext cx="1828800" cy="292608"/>
           </a:xfrm>
           <a:prstGeom prst="rect">
             <a:avLst/>
@@ -31929,7 +31481,7 @@
                 <a:ea typeface="Trebuchet MS" pitchFamily="34" charset="-122"/>
                 <a:cs typeface="Trebuchet MS" pitchFamily="34" charset="-120"/>
               </a:rPr>
-              <a:t>t</a:t>
+              <a:t>tion</a:t>
             </a:r>
             <a:endParaRPr lang="en-US" sz="1300" dirty="0"/>
           </a:p>
@@ -31943,8 +31495,8 @@
         </p:nvSpPr>
         <p:spPr>
           <a:xfrm>
-            <a:off x="3659429" y="2569464"/>
-            <a:ext cx="1581912" cy="201168"/>
+            <a:off x="4370832" y="2569464"/>
+            <a:ext cx="1828800" cy="201168"/>
           </a:xfrm>
           <a:prstGeom prst="rect">
             <a:avLst/>
@@ -31968,7 +31520,7 @@
                 <a:ea typeface="Calibri" pitchFamily="34" charset="-122"/>
                 <a:cs typeface="Calibri" pitchFamily="34" charset="-120"/>
               </a:rPr>
-              <a:t>word-forming element</a:t>
+              <a:t>act or state of</a:t>
             </a:r>
             <a:endParaRPr lang="en-US" sz="850" dirty="0"/>
           </a:p>
@@ -31982,8 +31534,8 @@
         </p:nvSpPr>
         <p:spPr>
           <a:xfrm>
-            <a:off x="5329123" y="2258568"/>
-            <a:ext cx="1581912" cy="292608"/>
+            <a:off x="6519672" y="2258568"/>
+            <a:ext cx="1828800" cy="292608"/>
           </a:xfrm>
           <a:prstGeom prst="rect">
             <a:avLst>
@@ -32016,8 +31568,8 @@
         </p:nvSpPr>
         <p:spPr>
           <a:xfrm>
-            <a:off x="5329123" y="2258568"/>
-            <a:ext cx="1581912" cy="292608"/>
+            <a:off x="6519672" y="2258568"/>
+            <a:ext cx="1828800" cy="292608"/>
           </a:xfrm>
           <a:prstGeom prst="rect">
             <a:avLst/>
@@ -32041,7 +31593,7 @@
                 <a:ea typeface="Trebuchet MS" pitchFamily="34" charset="-122"/>
                 <a:cs typeface="Trebuchet MS" pitchFamily="34" charset="-120"/>
               </a:rPr>
-              <a:t>at</a:t>
+              <a:t>ary</a:t>
             </a:r>
             <a:endParaRPr lang="en-US" sz="1300" dirty="0"/>
           </a:p>
@@ -32055,8 +31607,8 @@
         </p:nvSpPr>
         <p:spPr>
           <a:xfrm>
-            <a:off x="5329123" y="2569464"/>
-            <a:ext cx="1581912" cy="201168"/>
+            <a:off x="6519672" y="2569464"/>
+            <a:ext cx="1828800" cy="201168"/>
           </a:xfrm>
           <a:prstGeom prst="rect">
             <a:avLst/>
@@ -32080,7 +31632,7 @@
                 <a:ea typeface="Calibri" pitchFamily="34" charset="-122"/>
                 <a:cs typeface="Calibri" pitchFamily="34" charset="-120"/>
               </a:rPr>
-              <a:t>action or process</a:t>
+              <a:t>relating to, a place for</a:t>
             </a:r>
             <a:endParaRPr lang="en-US" sz="850" dirty="0"/>
           </a:p>
@@ -32094,30 +31646,23 @@
         </p:nvSpPr>
         <p:spPr>
           <a:xfrm>
-            <a:off x="6998818" y="2258568"/>
-            <a:ext cx="1581912" cy="292608"/>
+            <a:off x="365760" y="3273552"/>
+            <a:ext cx="1371600" cy="658368"/>
           </a:xfrm>
           <a:prstGeom prst="rect">
             <a:avLst>
-              <a:gd name="adj" fmla="val 25000"/>
+              <a:gd name="adj" fmla="val 8333"/>
             </a:avLst>
           </a:prstGeom>
           <a:solidFill>
-            <a:srgbClr val="FCE7F3"/>
-          </a:solidFill>
-          <a:ln w="19050">
-            <a:solidFill>
-              <a:srgbClr val="DB2777"/>
-            </a:solidFill>
-            <a:prstDash val="solid"/>
-          </a:ln>
-          <a:effectLst>
-            <a:outerShdw sx="100000" sy="100000" kx="0" ky="0" algn="bl" rotWithShape="0" blurRad="101600" dist="38100" dir="8100000">
-              <a:srgbClr val="000000">
-                <a:alpha val="12000"/>
-              </a:srgbClr>
-            </a:outerShdw>
-          </a:effectLst>
+            <a:srgbClr val="E2E8F0"/>
+          </a:solidFill>
+          <a:ln w="12700">
+            <a:solidFill>
+              <a:srgbClr val="E2E8F0"/>
+            </a:solidFill>
+            <a:prstDash val="solid"/>
+          </a:ln>
         </p:spPr>
       </p:sp>
       <p:sp>
@@ -32128,86 +31673,47 @@
         </p:nvSpPr>
         <p:spPr>
           <a:xfrm>
-            <a:off x="6998818" y="2258568"/>
-            <a:ext cx="1581912" cy="292608"/>
-          </a:xfrm>
-          <a:prstGeom prst="rect">
-            <a:avLst/>
-          </a:prstGeom>
-          <a:noFill/>
-          <a:ln/>
-        </p:spPr>
-        <p:txBody>
-          <a:bodyPr wrap="square" lIns="0" tIns="0" rIns="0" bIns="0" rtlCol="0" anchor="ctr"/>
-          <a:lstStyle/>
-          <a:p>
-            <a:pPr algn="ctr" indent="0" marL="0">
-              <a:buNone/>
-            </a:pPr>
-            <a:r>
-              <a:rPr lang="en-US" sz="1300" b="1" dirty="0">
-                <a:solidFill>
-                  <a:srgbClr val="9D174D"/>
+            <a:off x="365760" y="3273552"/>
+            <a:ext cx="1371600" cy="658368"/>
+          </a:xfrm>
+          <a:prstGeom prst="rect">
+            <a:avLst/>
+          </a:prstGeom>
+          <a:noFill/>
+          <a:ln/>
+        </p:spPr>
+        <p:txBody>
+          <a:bodyPr wrap="square" lIns="0" tIns="0" rIns="0" bIns="0" rtlCol="0" anchor="ctr"/>
+          <a:lstStyle/>
+          <a:p>
+            <a:pPr algn="ctr" indent="0" marL="0">
+              <a:buNone/>
+            </a:pPr>
+            <a:r>
+              <a:rPr lang="en-US" sz="1100" b="1" dirty="0">
+                <a:solidFill>
+                  <a:srgbClr val="475569"/>
                 </a:solidFill>
                 <a:latin typeface="Trebuchet MS" pitchFamily="34" charset="0"/>
                 <a:ea typeface="Trebuchet MS" pitchFamily="34" charset="-122"/>
                 <a:cs typeface="Trebuchet MS" pitchFamily="34" charset="-120"/>
               </a:rPr>
-              <a:t>or</a:t>
-            </a:r>
-            <a:endParaRPr lang="en-US" sz="1300" dirty="0"/>
-          </a:p>
-        </p:txBody>
-      </p:sp>
-      <p:sp>
-        <p:nvSpPr>
-          <p:cNvPr id="27" name="Text 25"/>
-          <p:cNvSpPr/>
-          <p:nvPr/>
-        </p:nvSpPr>
-        <p:spPr>
-          <a:xfrm>
-            <a:off x="6998818" y="2569464"/>
-            <a:ext cx="1581912" cy="201168"/>
-          </a:xfrm>
-          <a:prstGeom prst="rect">
-            <a:avLst/>
-          </a:prstGeom>
-          <a:noFill/>
-          <a:ln/>
-        </p:spPr>
-        <p:txBody>
-          <a:bodyPr wrap="square" lIns="0" tIns="0" rIns="0" bIns="0" rtlCol="0" anchor="t"/>
-          <a:lstStyle/>
-          <a:p>
-            <a:pPr algn="ctr" indent="0" marL="0">
-              <a:buNone/>
-            </a:pPr>
-            <a:r>
-              <a:rPr lang="en-US" sz="850" dirty="0">
-                <a:solidFill>
-                  <a:srgbClr val="475569"/>
-                </a:solidFill>
-                <a:latin typeface="Calibri" pitchFamily="34" charset="0"/>
-                <a:ea typeface="Calibri" pitchFamily="34" charset="-122"/>
-                <a:cs typeface="Calibri" pitchFamily="34" charset="-120"/>
-              </a:rPr>
-              <a:t>person who does something</a:t>
-            </a:r>
-            <a:endParaRPr lang="en-US" sz="850" dirty="0"/>
-          </a:p>
-        </p:txBody>
-      </p:sp>
-      <p:sp>
-        <p:nvSpPr>
-          <p:cNvPr id="28" name="Shape 26"/>
-          <p:cNvSpPr/>
-          <p:nvPr/>
-        </p:nvSpPr>
-        <p:spPr>
-          <a:xfrm>
-            <a:off x="365760" y="3273552"/>
-            <a:ext cx="1371600" cy="658368"/>
+              <a:t>Syllables</a:t>
+            </a:r>
+            <a:endParaRPr lang="en-US" sz="1100" dirty="0"/>
+          </a:p>
+        </p:txBody>
+      </p:sp>
+      <p:sp>
+        <p:nvSpPr>
+          <p:cNvPr id="27" name="Shape 25"/>
+          <p:cNvSpPr/>
+          <p:nvPr/>
+        </p:nvSpPr>
+        <p:spPr>
+          <a:xfrm>
+            <a:off x="1874520" y="3273552"/>
+            <a:ext cx="6903720" cy="658368"/>
           </a:xfrm>
           <a:prstGeom prst="rect">
             <a:avLst>
@@ -32215,11 +31721,38 @@
             </a:avLst>
           </a:prstGeom>
           <a:solidFill>
-            <a:srgbClr val="E2E8F0"/>
-          </a:solidFill>
-          <a:ln w="12700">
-            <a:solidFill>
-              <a:srgbClr val="E2E8F0"/>
+            <a:srgbClr val="CCFBF1"/>
+          </a:solidFill>
+          <a:ln w="12700">
+            <a:solidFill>
+              <a:srgbClr val="0D9488"/>
+            </a:solidFill>
+            <a:prstDash val="solid"/>
+          </a:ln>
+        </p:spPr>
+      </p:sp>
+      <p:sp>
+        <p:nvSpPr>
+          <p:cNvPr id="28" name="Shape 26"/>
+          <p:cNvSpPr/>
+          <p:nvPr/>
+        </p:nvSpPr>
+        <p:spPr>
+          <a:xfrm>
+            <a:off x="1975104" y="3364992"/>
+            <a:ext cx="1554480" cy="475488"/>
+          </a:xfrm>
+          <a:prstGeom prst="rect">
+            <a:avLst>
+              <a:gd name="adj" fmla="val 9615"/>
+            </a:avLst>
+          </a:prstGeom>
+          <a:solidFill>
+            <a:srgbClr val="FFFFFF"/>
+          </a:solidFill>
+          <a:ln w="12700">
+            <a:solidFill>
+              <a:srgbClr val="0D9488"/>
             </a:solidFill>
             <a:prstDash val="solid"/>
           </a:ln>
@@ -32233,63 +31766,75 @@
         </p:nvSpPr>
         <p:spPr>
           <a:xfrm>
-            <a:off x="365760" y="3273552"/>
-            <a:ext cx="1371600" cy="658368"/>
-          </a:xfrm>
-          <a:prstGeom prst="rect">
-            <a:avLst/>
-          </a:prstGeom>
-          <a:noFill/>
-          <a:ln/>
-        </p:spPr>
-        <p:txBody>
-          <a:bodyPr wrap="square" lIns="0" tIns="0" rIns="0" bIns="0" rtlCol="0" anchor="ctr"/>
-          <a:lstStyle/>
-          <a:p>
-            <a:pPr algn="ctr" indent="0" marL="0">
-              <a:buNone/>
-            </a:pPr>
-            <a:r>
-              <a:rPr lang="en-US" sz="1100" b="1" dirty="0">
-                <a:solidFill>
-                  <a:srgbClr val="475569"/>
+            <a:off x="1975104" y="3364992"/>
+            <a:ext cx="1554480" cy="475488"/>
+          </a:xfrm>
+          <a:prstGeom prst="rect">
+            <a:avLst/>
+          </a:prstGeom>
+          <a:noFill/>
+          <a:ln/>
+        </p:spPr>
+        <p:txBody>
+          <a:bodyPr wrap="square" lIns="0" tIns="0" rIns="0" bIns="0" rtlCol="0" anchor="ctr"/>
+          <a:lstStyle/>
+          <a:p>
+            <a:pPr algn="ctr" indent="0" marL="0">
+              <a:buNone/>
+            </a:pPr>
+            <a:r>
+              <a:rPr lang="en-US" sz="1400" b="1" dirty="0">
+                <a:solidFill>
+                  <a:srgbClr val="0D9488"/>
                 </a:solidFill>
                 <a:latin typeface="Trebuchet MS" pitchFamily="34" charset="0"/>
                 <a:ea typeface="Trebuchet MS" pitchFamily="34" charset="-122"/>
                 <a:cs typeface="Trebuchet MS" pitchFamily="34" charset="-120"/>
               </a:rPr>
-              <a:t>Syllables</a:t>
-            </a:r>
-            <a:endParaRPr lang="en-US" sz="1100" dirty="0"/>
-          </a:p>
-        </p:txBody>
-      </p:sp>
-      <p:sp>
-        <p:nvSpPr>
-          <p:cNvPr id="30" name="Shape 28"/>
-          <p:cNvSpPr/>
-          <p:nvPr/>
-        </p:nvSpPr>
-        <p:spPr>
-          <a:xfrm>
-            <a:off x="1874520" y="3273552"/>
-            <a:ext cx="6903720" cy="658368"/>
-          </a:xfrm>
-          <a:prstGeom prst="rect">
-            <a:avLst>
-              <a:gd name="adj" fmla="val 8333"/>
-            </a:avLst>
-          </a:prstGeom>
-          <a:solidFill>
-            <a:srgbClr val="CCFBF1"/>
-          </a:solidFill>
-          <a:ln w="12700">
-            <a:solidFill>
-              <a:srgbClr val="0D9488"/>
-            </a:solidFill>
-            <a:prstDash val="solid"/>
-          </a:ln>
-        </p:spPr>
+              <a:t>dic</a:t>
+            </a:r>
+            <a:endParaRPr lang="en-US" sz="1400" dirty="0"/>
+          </a:p>
+        </p:txBody>
+      </p:sp>
+      <p:sp>
+        <p:nvSpPr>
+          <p:cNvPr id="30" name="Text 28"/>
+          <p:cNvSpPr/>
+          <p:nvPr/>
+        </p:nvSpPr>
+        <p:spPr>
+          <a:xfrm>
+            <a:off x="3529584" y="3364992"/>
+            <a:ext cx="73152" cy="475488"/>
+          </a:xfrm>
+          <a:prstGeom prst="rect">
+            <a:avLst/>
+          </a:prstGeom>
+          <a:noFill/>
+          <a:ln/>
+        </p:spPr>
+        <p:txBody>
+          <a:bodyPr wrap="square" lIns="0" tIns="0" rIns="0" bIns="0" rtlCol="0" anchor="ctr"/>
+          <a:lstStyle/>
+          <a:p>
+            <a:pPr algn="ctr" indent="0" marL="0">
+              <a:buNone/>
+            </a:pPr>
+            <a:r>
+              <a:rPr lang="en-US" sz="1600" b="1" dirty="0">
+                <a:solidFill>
+                  <a:srgbClr val="0D9488"/>
+                </a:solidFill>
+                <a:latin typeface="Trebuchet MS" pitchFamily="34" charset="0"/>
+                <a:ea typeface="Trebuchet MS" pitchFamily="34" charset="-122"/>
+                <a:cs typeface="Trebuchet MS" pitchFamily="34" charset="-120"/>
+              </a:rPr>
+              <a:t>·</a:t>
+            </a:r>
+            <a:endParaRPr lang="en-US" sz="1600" dirty="0"/>
+          </a:p>
+        </p:txBody>
       </p:sp>
       <p:sp>
         <p:nvSpPr>
@@ -32299,8 +31844,8 @@
         </p:nvSpPr>
         <p:spPr>
           <a:xfrm>
-            <a:off x="2313432" y="3364992"/>
-            <a:ext cx="1645920" cy="475488"/>
+            <a:off x="3602736" y="3364992"/>
+            <a:ext cx="1554480" cy="475488"/>
           </a:xfrm>
           <a:prstGeom prst="rect">
             <a:avLst>
@@ -32326,8 +31871,8 @@
         </p:nvSpPr>
         <p:spPr>
           <a:xfrm>
-            <a:off x="2313432" y="3364992"/>
-            <a:ext cx="1645920" cy="475488"/>
+            <a:off x="3602736" y="3364992"/>
+            <a:ext cx="1554480" cy="475488"/>
           </a:xfrm>
           <a:prstGeom prst="rect">
             <a:avLst/>
@@ -32351,7 +31896,7 @@
                 <a:ea typeface="Trebuchet MS" pitchFamily="34" charset="-122"/>
                 <a:cs typeface="Trebuchet MS" pitchFamily="34" charset="-120"/>
               </a:rPr>
-              <a:t>dic</a:t>
+              <a:t>tion</a:t>
             </a:r>
             <a:endParaRPr lang="en-US" sz="1400" dirty="0"/>
           </a:p>
@@ -32365,8 +31910,8 @@
         </p:nvSpPr>
         <p:spPr>
           <a:xfrm>
-            <a:off x="3959352" y="3364992"/>
-            <a:ext cx="411480" cy="475488"/>
+            <a:off x="5157216" y="3364992"/>
+            <a:ext cx="73152" cy="475488"/>
           </a:xfrm>
           <a:prstGeom prst="rect">
             <a:avLst/>
@@ -32404,8 +31949,8 @@
         </p:nvSpPr>
         <p:spPr>
           <a:xfrm>
-            <a:off x="4370832" y="3364992"/>
-            <a:ext cx="1645920" cy="475488"/>
+            <a:off x="5230368" y="3364992"/>
+            <a:ext cx="1554480" cy="475488"/>
           </a:xfrm>
           <a:prstGeom prst="rect">
             <a:avLst>
@@ -32431,8 +31976,8 @@
         </p:nvSpPr>
         <p:spPr>
           <a:xfrm>
-            <a:off x="4370832" y="3364992"/>
-            <a:ext cx="1645920" cy="475488"/>
+            <a:off x="5230368" y="3364992"/>
+            <a:ext cx="1554480" cy="475488"/>
           </a:xfrm>
           <a:prstGeom prst="rect">
             <a:avLst/>
@@ -32456,7 +32001,7 @@
                 <a:ea typeface="Trebuchet MS" pitchFamily="34" charset="-122"/>
                 <a:cs typeface="Trebuchet MS" pitchFamily="34" charset="-120"/>
               </a:rPr>
-              <a:t>ta</a:t>
+              <a:t>ar</a:t>
             </a:r>
             <a:endParaRPr lang="en-US" sz="1400" dirty="0"/>
           </a:p>
@@ -32470,8 +32015,8 @@
         </p:nvSpPr>
         <p:spPr>
           <a:xfrm>
-            <a:off x="6016752" y="3364992"/>
-            <a:ext cx="411480" cy="475488"/>
+            <a:off x="6784848" y="3364992"/>
+            <a:ext cx="73152" cy="475488"/>
           </a:xfrm>
           <a:prstGeom prst="rect">
             <a:avLst/>
@@ -32509,8 +32054,8 @@
         </p:nvSpPr>
         <p:spPr>
           <a:xfrm>
-            <a:off x="6428232" y="3364992"/>
-            <a:ext cx="1645920" cy="475488"/>
+            <a:off x="6858000" y="3364992"/>
+            <a:ext cx="1554480" cy="475488"/>
           </a:xfrm>
           <a:prstGeom prst="rect">
             <a:avLst>
@@ -32536,8 +32081,8 @@
         </p:nvSpPr>
         <p:spPr>
           <a:xfrm>
-            <a:off x="6428232" y="3364992"/>
-            <a:ext cx="1645920" cy="475488"/>
+            <a:off x="6858000" y="3364992"/>
+            <a:ext cx="1554480" cy="475488"/>
           </a:xfrm>
           <a:prstGeom prst="rect">
             <a:avLst/>
@@ -32561,7 +32106,7 @@
                 <a:ea typeface="Trebuchet MS" pitchFamily="34" charset="-122"/>
                 <a:cs typeface="Trebuchet MS" pitchFamily="34" charset="-120"/>
               </a:rPr>
-              <a:t>tor</a:t>
+              <a:t>y</a:t>
             </a:r>
             <a:endParaRPr lang="en-US" sz="1400" dirty="0"/>
           </a:p>
@@ -32985,7 +32530,7 @@
                 <a:ea typeface="Calibri" pitchFamily="34" charset="-122"/>
                 <a:cs typeface="Calibri" pitchFamily="34" charset="-120"/>
               </a:rPr>
-              <a:t>Word Labs  •  wordlabs.app  •  Root: 'dic' = say, speak, or declare</a:t>
+              <a:t>Word Labs  •  wordlabs.app  •  Root: 'dic' = say, speak, proclaim</a:t>
             </a:r>
             <a:endParaRPr lang="en-US" sz="800" dirty="0"/>
           </a:p>
@@ -33124,7 +32669,7 @@
                 <a:ea typeface="Trebuchet MS" pitchFamily="34" charset="-122"/>
                 <a:cs typeface="Trebuchet MS" pitchFamily="34" charset="-120"/>
               </a:rPr>
-              <a:t>dictator</a:t>
+              <a:t>dictionary</a:t>
             </a:r>
             <a:endParaRPr lang="en-US" sz="2800" dirty="0"/>
           </a:p>
@@ -33204,8 +32749,8 @@
         </p:nvSpPr>
         <p:spPr>
           <a:xfrm>
-            <a:off x="1989734" y="2258568"/>
-            <a:ext cx="1581912" cy="292608"/>
+            <a:off x="2221992" y="2258568"/>
+            <a:ext cx="1828800" cy="292608"/>
           </a:xfrm>
           <a:prstGeom prst="rect">
             <a:avLst>
@@ -33238,8 +32783,8 @@
         </p:nvSpPr>
         <p:spPr>
           <a:xfrm>
-            <a:off x="1989734" y="2258568"/>
-            <a:ext cx="1581912" cy="292608"/>
+            <a:off x="2221992" y="2258568"/>
+            <a:ext cx="1828800" cy="292608"/>
           </a:xfrm>
           <a:prstGeom prst="rect">
             <a:avLst/>
@@ -33277,8 +32822,8 @@
         </p:nvSpPr>
         <p:spPr>
           <a:xfrm>
-            <a:off x="1989734" y="2569464"/>
-            <a:ext cx="1581912" cy="201168"/>
+            <a:off x="2221992" y="2569464"/>
+            <a:ext cx="1828800" cy="201168"/>
           </a:xfrm>
           <a:prstGeom prst="rect">
             <a:avLst/>
@@ -33302,7 +32847,7 @@
                 <a:ea typeface="Calibri" pitchFamily="34" charset="-122"/>
                 <a:cs typeface="Calibri" pitchFamily="34" charset="-120"/>
               </a:rPr>
-              <a:t>say, speak, declare</a:t>
+              <a:t>say, speak</a:t>
             </a:r>
             <a:endParaRPr lang="en-US" sz="850" dirty="0"/>
           </a:p>
@@ -33316,8 +32861,8 @@
         </p:nvSpPr>
         <p:spPr>
           <a:xfrm>
-            <a:off x="3659429" y="2258568"/>
-            <a:ext cx="1581912" cy="292608"/>
+            <a:off x="4370832" y="2258568"/>
+            <a:ext cx="1828800" cy="292608"/>
           </a:xfrm>
           <a:prstGeom prst="rect">
             <a:avLst>
@@ -33350,8 +32895,8 @@
         </p:nvSpPr>
         <p:spPr>
           <a:xfrm>
-            <a:off x="3659429" y="2258568"/>
-            <a:ext cx="1581912" cy="292608"/>
+            <a:off x="4370832" y="2258568"/>
+            <a:ext cx="1828800" cy="292608"/>
           </a:xfrm>
           <a:prstGeom prst="rect">
             <a:avLst/>
@@ -33375,7 +32920,7 @@
                 <a:ea typeface="Trebuchet MS" pitchFamily="34" charset="-122"/>
                 <a:cs typeface="Trebuchet MS" pitchFamily="34" charset="-120"/>
               </a:rPr>
-              <a:t>t</a:t>
+              <a:t>tion</a:t>
             </a:r>
             <a:endParaRPr lang="en-US" sz="1300" dirty="0"/>
           </a:p>
@@ -33389,8 +32934,8 @@
         </p:nvSpPr>
         <p:spPr>
           <a:xfrm>
-            <a:off x="3659429" y="2569464"/>
-            <a:ext cx="1581912" cy="201168"/>
+            <a:off x="4370832" y="2569464"/>
+            <a:ext cx="1828800" cy="201168"/>
           </a:xfrm>
           <a:prstGeom prst="rect">
             <a:avLst/>
@@ -33414,7 +32959,7 @@
                 <a:ea typeface="Calibri" pitchFamily="34" charset="-122"/>
                 <a:cs typeface="Calibri" pitchFamily="34" charset="-120"/>
               </a:rPr>
-              <a:t>word-forming element</a:t>
+              <a:t>act or state of</a:t>
             </a:r>
             <a:endParaRPr lang="en-US" sz="850" dirty="0"/>
           </a:p>
@@ -33428,8 +32973,8 @@
         </p:nvSpPr>
         <p:spPr>
           <a:xfrm>
-            <a:off x="5329123" y="2258568"/>
-            <a:ext cx="1581912" cy="292608"/>
+            <a:off x="6519672" y="2258568"/>
+            <a:ext cx="1828800" cy="292608"/>
           </a:xfrm>
           <a:prstGeom prst="rect">
             <a:avLst>
@@ -33462,8 +33007,8 @@
         </p:nvSpPr>
         <p:spPr>
           <a:xfrm>
-            <a:off x="5329123" y="2258568"/>
-            <a:ext cx="1581912" cy="292608"/>
+            <a:off x="6519672" y="2258568"/>
+            <a:ext cx="1828800" cy="292608"/>
           </a:xfrm>
           <a:prstGeom prst="rect">
             <a:avLst/>
@@ -33487,7 +33032,7 @@
                 <a:ea typeface="Trebuchet MS" pitchFamily="34" charset="-122"/>
                 <a:cs typeface="Trebuchet MS" pitchFamily="34" charset="-120"/>
               </a:rPr>
-              <a:t>at</a:t>
+              <a:t>ary</a:t>
             </a:r>
             <a:endParaRPr lang="en-US" sz="1300" dirty="0"/>
           </a:p>
@@ -33501,8 +33046,8 @@
         </p:nvSpPr>
         <p:spPr>
           <a:xfrm>
-            <a:off x="5329123" y="2569464"/>
-            <a:ext cx="1581912" cy="201168"/>
+            <a:off x="6519672" y="2569464"/>
+            <a:ext cx="1828800" cy="201168"/>
           </a:xfrm>
           <a:prstGeom prst="rect">
             <a:avLst/>
@@ -33526,7 +33071,7 @@
                 <a:ea typeface="Calibri" pitchFamily="34" charset="-122"/>
                 <a:cs typeface="Calibri" pitchFamily="34" charset="-120"/>
               </a:rPr>
-              <a:t>action or process</a:t>
+              <a:t>relating to, a place for</a:t>
             </a:r>
             <a:endParaRPr lang="en-US" sz="850" dirty="0"/>
           </a:p>
@@ -33540,30 +33085,23 @@
         </p:nvSpPr>
         <p:spPr>
           <a:xfrm>
-            <a:off x="6998818" y="2258568"/>
-            <a:ext cx="1581912" cy="292608"/>
+            <a:off x="365760" y="3273552"/>
+            <a:ext cx="1371600" cy="658368"/>
           </a:xfrm>
           <a:prstGeom prst="rect">
             <a:avLst>
-              <a:gd name="adj" fmla="val 25000"/>
+              <a:gd name="adj" fmla="val 8333"/>
             </a:avLst>
           </a:prstGeom>
           <a:solidFill>
-            <a:srgbClr val="FCE7F3"/>
-          </a:solidFill>
-          <a:ln w="19050">
-            <a:solidFill>
-              <a:srgbClr val="DB2777"/>
-            </a:solidFill>
-            <a:prstDash val="solid"/>
-          </a:ln>
-          <a:effectLst>
-            <a:outerShdw sx="100000" sy="100000" kx="0" ky="0" algn="bl" rotWithShape="0" blurRad="101600" dist="38100" dir="8100000">
-              <a:srgbClr val="000000">
-                <a:alpha val="12000"/>
-              </a:srgbClr>
-            </a:outerShdw>
-          </a:effectLst>
+            <a:srgbClr val="E2E8F0"/>
+          </a:solidFill>
+          <a:ln w="12700">
+            <a:solidFill>
+              <a:srgbClr val="E2E8F0"/>
+            </a:solidFill>
+            <a:prstDash val="solid"/>
+          </a:ln>
         </p:spPr>
       </p:sp>
       <p:sp>
@@ -33574,47 +33112,746 @@
         </p:nvSpPr>
         <p:spPr>
           <a:xfrm>
-            <a:off x="6998818" y="2258568"/>
-            <a:ext cx="1581912" cy="292608"/>
-          </a:xfrm>
-          <a:prstGeom prst="rect">
-            <a:avLst/>
-          </a:prstGeom>
-          <a:noFill/>
-          <a:ln/>
-        </p:spPr>
-        <p:txBody>
-          <a:bodyPr wrap="square" lIns="0" tIns="0" rIns="0" bIns="0" rtlCol="0" anchor="ctr"/>
-          <a:lstStyle/>
-          <a:p>
-            <a:pPr algn="ctr" indent="0" marL="0">
-              <a:buNone/>
-            </a:pPr>
-            <a:r>
-              <a:rPr lang="en-US" sz="1300" b="1" dirty="0">
-                <a:solidFill>
-                  <a:srgbClr val="9D174D"/>
+            <a:off x="365760" y="3273552"/>
+            <a:ext cx="1371600" cy="658368"/>
+          </a:xfrm>
+          <a:prstGeom prst="rect">
+            <a:avLst/>
+          </a:prstGeom>
+          <a:noFill/>
+          <a:ln/>
+        </p:spPr>
+        <p:txBody>
+          <a:bodyPr wrap="square" lIns="0" tIns="0" rIns="0" bIns="0" rtlCol="0" anchor="ctr"/>
+          <a:lstStyle/>
+          <a:p>
+            <a:pPr algn="ctr" indent="0" marL="0">
+              <a:buNone/>
+            </a:pPr>
+            <a:r>
+              <a:rPr lang="en-US" sz="1100" b="1" dirty="0">
+                <a:solidFill>
+                  <a:srgbClr val="475569"/>
                 </a:solidFill>
                 <a:latin typeface="Trebuchet MS" pitchFamily="34" charset="0"/>
                 <a:ea typeface="Trebuchet MS" pitchFamily="34" charset="-122"/>
                 <a:cs typeface="Trebuchet MS" pitchFamily="34" charset="-120"/>
               </a:rPr>
-              <a:t>or</a:t>
-            </a:r>
-            <a:endParaRPr lang="en-US" sz="1300" dirty="0"/>
-          </a:p>
-        </p:txBody>
-      </p:sp>
-      <p:sp>
-        <p:nvSpPr>
-          <p:cNvPr id="27" name="Text 25"/>
-          <p:cNvSpPr/>
-          <p:nvPr/>
-        </p:nvSpPr>
-        <p:spPr>
-          <a:xfrm>
-            <a:off x="6998818" y="2569464"/>
-            <a:ext cx="1581912" cy="201168"/>
+              <a:t>Syllables</a:t>
+            </a:r>
+            <a:endParaRPr lang="en-US" sz="1100" dirty="0"/>
+          </a:p>
+        </p:txBody>
+      </p:sp>
+      <p:sp>
+        <p:nvSpPr>
+          <p:cNvPr id="27" name="Shape 25"/>
+          <p:cNvSpPr/>
+          <p:nvPr/>
+        </p:nvSpPr>
+        <p:spPr>
+          <a:xfrm>
+            <a:off x="1874520" y="3273552"/>
+            <a:ext cx="6903720" cy="658368"/>
+          </a:xfrm>
+          <a:prstGeom prst="rect">
+            <a:avLst>
+              <a:gd name="adj" fmla="val 8333"/>
+            </a:avLst>
+          </a:prstGeom>
+          <a:solidFill>
+            <a:srgbClr val="CCFBF1"/>
+          </a:solidFill>
+          <a:ln w="12700">
+            <a:solidFill>
+              <a:srgbClr val="0D9488"/>
+            </a:solidFill>
+            <a:prstDash val="solid"/>
+          </a:ln>
+        </p:spPr>
+      </p:sp>
+      <p:sp>
+        <p:nvSpPr>
+          <p:cNvPr id="28" name="Shape 26"/>
+          <p:cNvSpPr/>
+          <p:nvPr/>
+        </p:nvSpPr>
+        <p:spPr>
+          <a:xfrm>
+            <a:off x="1975104" y="3364992"/>
+            <a:ext cx="1554480" cy="475488"/>
+          </a:xfrm>
+          <a:prstGeom prst="rect">
+            <a:avLst>
+              <a:gd name="adj" fmla="val 9615"/>
+            </a:avLst>
+          </a:prstGeom>
+          <a:solidFill>
+            <a:srgbClr val="FFFFFF"/>
+          </a:solidFill>
+          <a:ln w="12700">
+            <a:solidFill>
+              <a:srgbClr val="0D9488"/>
+            </a:solidFill>
+            <a:prstDash val="solid"/>
+          </a:ln>
+        </p:spPr>
+      </p:sp>
+      <p:sp>
+        <p:nvSpPr>
+          <p:cNvPr id="29" name="Text 27"/>
+          <p:cNvSpPr/>
+          <p:nvPr/>
+        </p:nvSpPr>
+        <p:spPr>
+          <a:xfrm>
+            <a:off x="1975104" y="3364992"/>
+            <a:ext cx="1554480" cy="475488"/>
+          </a:xfrm>
+          <a:prstGeom prst="rect">
+            <a:avLst/>
+          </a:prstGeom>
+          <a:noFill/>
+          <a:ln/>
+        </p:spPr>
+        <p:txBody>
+          <a:bodyPr wrap="square" lIns="0" tIns="0" rIns="0" bIns="0" rtlCol="0" anchor="ctr"/>
+          <a:lstStyle/>
+          <a:p>
+            <a:pPr algn="ctr" indent="0" marL="0">
+              <a:buNone/>
+            </a:pPr>
+            <a:r>
+              <a:rPr lang="en-US" sz="1400" b="1" dirty="0">
+                <a:solidFill>
+                  <a:srgbClr val="0D9488"/>
+                </a:solidFill>
+                <a:latin typeface="Trebuchet MS" pitchFamily="34" charset="0"/>
+                <a:ea typeface="Trebuchet MS" pitchFamily="34" charset="-122"/>
+                <a:cs typeface="Trebuchet MS" pitchFamily="34" charset="-120"/>
+              </a:rPr>
+              <a:t>dic</a:t>
+            </a:r>
+            <a:endParaRPr lang="en-US" sz="1400" dirty="0"/>
+          </a:p>
+        </p:txBody>
+      </p:sp>
+      <p:sp>
+        <p:nvSpPr>
+          <p:cNvPr id="30" name="Text 28"/>
+          <p:cNvSpPr/>
+          <p:nvPr/>
+        </p:nvSpPr>
+        <p:spPr>
+          <a:xfrm>
+            <a:off x="3529584" y="3364992"/>
+            <a:ext cx="73152" cy="475488"/>
+          </a:xfrm>
+          <a:prstGeom prst="rect">
+            <a:avLst/>
+          </a:prstGeom>
+          <a:noFill/>
+          <a:ln/>
+        </p:spPr>
+        <p:txBody>
+          <a:bodyPr wrap="square" lIns="0" tIns="0" rIns="0" bIns="0" rtlCol="0" anchor="ctr"/>
+          <a:lstStyle/>
+          <a:p>
+            <a:pPr algn="ctr" indent="0" marL="0">
+              <a:buNone/>
+            </a:pPr>
+            <a:r>
+              <a:rPr lang="en-US" sz="1600" b="1" dirty="0">
+                <a:solidFill>
+                  <a:srgbClr val="0D9488"/>
+                </a:solidFill>
+                <a:latin typeface="Trebuchet MS" pitchFamily="34" charset="0"/>
+                <a:ea typeface="Trebuchet MS" pitchFamily="34" charset="-122"/>
+                <a:cs typeface="Trebuchet MS" pitchFamily="34" charset="-120"/>
+              </a:rPr>
+              <a:t>·</a:t>
+            </a:r>
+            <a:endParaRPr lang="en-US" sz="1600" dirty="0"/>
+          </a:p>
+        </p:txBody>
+      </p:sp>
+      <p:sp>
+        <p:nvSpPr>
+          <p:cNvPr id="31" name="Shape 29"/>
+          <p:cNvSpPr/>
+          <p:nvPr/>
+        </p:nvSpPr>
+        <p:spPr>
+          <a:xfrm>
+            <a:off x="3602736" y="3364992"/>
+            <a:ext cx="1554480" cy="475488"/>
+          </a:xfrm>
+          <a:prstGeom prst="rect">
+            <a:avLst>
+              <a:gd name="adj" fmla="val 9615"/>
+            </a:avLst>
+          </a:prstGeom>
+          <a:solidFill>
+            <a:srgbClr val="FFFFFF"/>
+          </a:solidFill>
+          <a:ln w="12700">
+            <a:solidFill>
+              <a:srgbClr val="0D9488"/>
+            </a:solidFill>
+            <a:prstDash val="solid"/>
+          </a:ln>
+        </p:spPr>
+      </p:sp>
+      <p:sp>
+        <p:nvSpPr>
+          <p:cNvPr id="32" name="Text 30"/>
+          <p:cNvSpPr/>
+          <p:nvPr/>
+        </p:nvSpPr>
+        <p:spPr>
+          <a:xfrm>
+            <a:off x="3602736" y="3364992"/>
+            <a:ext cx="1554480" cy="475488"/>
+          </a:xfrm>
+          <a:prstGeom prst="rect">
+            <a:avLst/>
+          </a:prstGeom>
+          <a:noFill/>
+          <a:ln/>
+        </p:spPr>
+        <p:txBody>
+          <a:bodyPr wrap="square" lIns="0" tIns="0" rIns="0" bIns="0" rtlCol="0" anchor="ctr"/>
+          <a:lstStyle/>
+          <a:p>
+            <a:pPr algn="ctr" indent="0" marL="0">
+              <a:buNone/>
+            </a:pPr>
+            <a:r>
+              <a:rPr lang="en-US" sz="1400" b="1" dirty="0">
+                <a:solidFill>
+                  <a:srgbClr val="0D9488"/>
+                </a:solidFill>
+                <a:latin typeface="Trebuchet MS" pitchFamily="34" charset="0"/>
+                <a:ea typeface="Trebuchet MS" pitchFamily="34" charset="-122"/>
+                <a:cs typeface="Trebuchet MS" pitchFamily="34" charset="-120"/>
+              </a:rPr>
+              <a:t>tion</a:t>
+            </a:r>
+            <a:endParaRPr lang="en-US" sz="1400" dirty="0"/>
+          </a:p>
+        </p:txBody>
+      </p:sp>
+      <p:sp>
+        <p:nvSpPr>
+          <p:cNvPr id="33" name="Text 31"/>
+          <p:cNvSpPr/>
+          <p:nvPr/>
+        </p:nvSpPr>
+        <p:spPr>
+          <a:xfrm>
+            <a:off x="5157216" y="3364992"/>
+            <a:ext cx="73152" cy="475488"/>
+          </a:xfrm>
+          <a:prstGeom prst="rect">
+            <a:avLst/>
+          </a:prstGeom>
+          <a:noFill/>
+          <a:ln/>
+        </p:spPr>
+        <p:txBody>
+          <a:bodyPr wrap="square" lIns="0" tIns="0" rIns="0" bIns="0" rtlCol="0" anchor="ctr"/>
+          <a:lstStyle/>
+          <a:p>
+            <a:pPr algn="ctr" indent="0" marL="0">
+              <a:buNone/>
+            </a:pPr>
+            <a:r>
+              <a:rPr lang="en-US" sz="1600" b="1" dirty="0">
+                <a:solidFill>
+                  <a:srgbClr val="0D9488"/>
+                </a:solidFill>
+                <a:latin typeface="Trebuchet MS" pitchFamily="34" charset="0"/>
+                <a:ea typeface="Trebuchet MS" pitchFamily="34" charset="-122"/>
+                <a:cs typeface="Trebuchet MS" pitchFamily="34" charset="-120"/>
+              </a:rPr>
+              <a:t>·</a:t>
+            </a:r>
+            <a:endParaRPr lang="en-US" sz="1600" dirty="0"/>
+          </a:p>
+        </p:txBody>
+      </p:sp>
+      <p:sp>
+        <p:nvSpPr>
+          <p:cNvPr id="34" name="Shape 32"/>
+          <p:cNvSpPr/>
+          <p:nvPr/>
+        </p:nvSpPr>
+        <p:spPr>
+          <a:xfrm>
+            <a:off x="5230368" y="3364992"/>
+            <a:ext cx="1554480" cy="475488"/>
+          </a:xfrm>
+          <a:prstGeom prst="rect">
+            <a:avLst>
+              <a:gd name="adj" fmla="val 9615"/>
+            </a:avLst>
+          </a:prstGeom>
+          <a:solidFill>
+            <a:srgbClr val="FFFFFF"/>
+          </a:solidFill>
+          <a:ln w="12700">
+            <a:solidFill>
+              <a:srgbClr val="0D9488"/>
+            </a:solidFill>
+            <a:prstDash val="solid"/>
+          </a:ln>
+        </p:spPr>
+      </p:sp>
+      <p:sp>
+        <p:nvSpPr>
+          <p:cNvPr id="35" name="Text 33"/>
+          <p:cNvSpPr/>
+          <p:nvPr/>
+        </p:nvSpPr>
+        <p:spPr>
+          <a:xfrm>
+            <a:off x="5230368" y="3364992"/>
+            <a:ext cx="1554480" cy="475488"/>
+          </a:xfrm>
+          <a:prstGeom prst="rect">
+            <a:avLst/>
+          </a:prstGeom>
+          <a:noFill/>
+          <a:ln/>
+        </p:spPr>
+        <p:txBody>
+          <a:bodyPr wrap="square" lIns="0" tIns="0" rIns="0" bIns="0" rtlCol="0" anchor="ctr"/>
+          <a:lstStyle/>
+          <a:p>
+            <a:pPr algn="ctr" indent="0" marL="0">
+              <a:buNone/>
+            </a:pPr>
+            <a:r>
+              <a:rPr lang="en-US" sz="1400" b="1" dirty="0">
+                <a:solidFill>
+                  <a:srgbClr val="0D9488"/>
+                </a:solidFill>
+                <a:latin typeface="Trebuchet MS" pitchFamily="34" charset="0"/>
+                <a:ea typeface="Trebuchet MS" pitchFamily="34" charset="-122"/>
+                <a:cs typeface="Trebuchet MS" pitchFamily="34" charset="-120"/>
+              </a:rPr>
+              <a:t>ar</a:t>
+            </a:r>
+            <a:endParaRPr lang="en-US" sz="1400" dirty="0"/>
+          </a:p>
+        </p:txBody>
+      </p:sp>
+      <p:sp>
+        <p:nvSpPr>
+          <p:cNvPr id="36" name="Text 34"/>
+          <p:cNvSpPr/>
+          <p:nvPr/>
+        </p:nvSpPr>
+        <p:spPr>
+          <a:xfrm>
+            <a:off x="6784848" y="3364992"/>
+            <a:ext cx="73152" cy="475488"/>
+          </a:xfrm>
+          <a:prstGeom prst="rect">
+            <a:avLst/>
+          </a:prstGeom>
+          <a:noFill/>
+          <a:ln/>
+        </p:spPr>
+        <p:txBody>
+          <a:bodyPr wrap="square" lIns="0" tIns="0" rIns="0" bIns="0" rtlCol="0" anchor="ctr"/>
+          <a:lstStyle/>
+          <a:p>
+            <a:pPr algn="ctr" indent="0" marL="0">
+              <a:buNone/>
+            </a:pPr>
+            <a:r>
+              <a:rPr lang="en-US" sz="1600" b="1" dirty="0">
+                <a:solidFill>
+                  <a:srgbClr val="0D9488"/>
+                </a:solidFill>
+                <a:latin typeface="Trebuchet MS" pitchFamily="34" charset="0"/>
+                <a:ea typeface="Trebuchet MS" pitchFamily="34" charset="-122"/>
+                <a:cs typeface="Trebuchet MS" pitchFamily="34" charset="-120"/>
+              </a:rPr>
+              <a:t>·</a:t>
+            </a:r>
+            <a:endParaRPr lang="en-US" sz="1600" dirty="0"/>
+          </a:p>
+        </p:txBody>
+      </p:sp>
+      <p:sp>
+        <p:nvSpPr>
+          <p:cNvPr id="37" name="Shape 35"/>
+          <p:cNvSpPr/>
+          <p:nvPr/>
+        </p:nvSpPr>
+        <p:spPr>
+          <a:xfrm>
+            <a:off x="6858000" y="3364992"/>
+            <a:ext cx="1554480" cy="475488"/>
+          </a:xfrm>
+          <a:prstGeom prst="rect">
+            <a:avLst>
+              <a:gd name="adj" fmla="val 9615"/>
+            </a:avLst>
+          </a:prstGeom>
+          <a:solidFill>
+            <a:srgbClr val="FFFFFF"/>
+          </a:solidFill>
+          <a:ln w="12700">
+            <a:solidFill>
+              <a:srgbClr val="0D9488"/>
+            </a:solidFill>
+            <a:prstDash val="solid"/>
+          </a:ln>
+        </p:spPr>
+      </p:sp>
+      <p:sp>
+        <p:nvSpPr>
+          <p:cNvPr id="38" name="Text 36"/>
+          <p:cNvSpPr/>
+          <p:nvPr/>
+        </p:nvSpPr>
+        <p:spPr>
+          <a:xfrm>
+            <a:off x="6858000" y="3364992"/>
+            <a:ext cx="1554480" cy="475488"/>
+          </a:xfrm>
+          <a:prstGeom prst="rect">
+            <a:avLst/>
+          </a:prstGeom>
+          <a:noFill/>
+          <a:ln/>
+        </p:spPr>
+        <p:txBody>
+          <a:bodyPr wrap="square" lIns="0" tIns="0" rIns="0" bIns="0" rtlCol="0" anchor="ctr"/>
+          <a:lstStyle/>
+          <a:p>
+            <a:pPr algn="ctr" indent="0" marL="0">
+              <a:buNone/>
+            </a:pPr>
+            <a:r>
+              <a:rPr lang="en-US" sz="1400" b="1" dirty="0">
+                <a:solidFill>
+                  <a:srgbClr val="0D9488"/>
+                </a:solidFill>
+                <a:latin typeface="Trebuchet MS" pitchFamily="34" charset="0"/>
+                <a:ea typeface="Trebuchet MS" pitchFamily="34" charset="-122"/>
+                <a:cs typeface="Trebuchet MS" pitchFamily="34" charset="-120"/>
+              </a:rPr>
+              <a:t>y</a:t>
+            </a:r>
+            <a:endParaRPr lang="en-US" sz="1400" dirty="0"/>
+          </a:p>
+        </p:txBody>
+      </p:sp>
+      <p:sp>
+        <p:nvSpPr>
+          <p:cNvPr id="39" name="Shape 37"/>
+          <p:cNvSpPr/>
+          <p:nvPr/>
+        </p:nvSpPr>
+        <p:spPr>
+          <a:xfrm>
+            <a:off x="365760" y="4096512"/>
+            <a:ext cx="1371600" cy="804672"/>
+          </a:xfrm>
+          <a:prstGeom prst="rect">
+            <a:avLst>
+              <a:gd name="adj" fmla="val 6818"/>
+            </a:avLst>
+          </a:prstGeom>
+          <a:solidFill>
+            <a:srgbClr val="E2E8F0"/>
+          </a:solidFill>
+          <a:ln w="12700">
+            <a:solidFill>
+              <a:srgbClr val="E2E8F0"/>
+            </a:solidFill>
+            <a:prstDash val="solid"/>
+          </a:ln>
+        </p:spPr>
+      </p:sp>
+      <p:sp>
+        <p:nvSpPr>
+          <p:cNvPr id="40" name="Text 38"/>
+          <p:cNvSpPr/>
+          <p:nvPr/>
+        </p:nvSpPr>
+        <p:spPr>
+          <a:xfrm>
+            <a:off x="365760" y="4096512"/>
+            <a:ext cx="1371600" cy="804672"/>
+          </a:xfrm>
+          <a:prstGeom prst="rect">
+            <a:avLst/>
+          </a:prstGeom>
+          <a:noFill/>
+          <a:ln/>
+        </p:spPr>
+        <p:txBody>
+          <a:bodyPr wrap="square" lIns="0" tIns="0" rIns="0" bIns="0" rtlCol="0" anchor="ctr"/>
+          <a:lstStyle/>
+          <a:p>
+            <a:pPr algn="ctr" indent="0" marL="0">
+              <a:buNone/>
+            </a:pPr>
+            <a:r>
+              <a:rPr lang="en-US" sz="1100" b="1" dirty="0">
+                <a:solidFill>
+                  <a:srgbClr val="475569"/>
+                </a:solidFill>
+                <a:latin typeface="Trebuchet MS" pitchFamily="34" charset="0"/>
+                <a:ea typeface="Trebuchet MS" pitchFamily="34" charset="-122"/>
+                <a:cs typeface="Trebuchet MS" pitchFamily="34" charset="-120"/>
+              </a:rPr>
+              <a:t>Phonemes</a:t>
+            </a:r>
+            <a:endParaRPr lang="en-US" sz="1100" dirty="0"/>
+          </a:p>
+        </p:txBody>
+      </p:sp>
+      <p:sp>
+        <p:nvSpPr>
+          <p:cNvPr id="41" name="Shape 39"/>
+          <p:cNvSpPr/>
+          <p:nvPr/>
+        </p:nvSpPr>
+        <p:spPr>
+          <a:xfrm>
+            <a:off x="1874520" y="4096512"/>
+            <a:ext cx="6903720" cy="804672"/>
+          </a:xfrm>
+          <a:prstGeom prst="rect">
+            <a:avLst>
+              <a:gd name="adj" fmla="val 6818"/>
+            </a:avLst>
+          </a:prstGeom>
+          <a:solidFill>
+            <a:srgbClr val="FCE7F3"/>
+          </a:solidFill>
+          <a:ln w="12700">
+            <a:solidFill>
+              <a:srgbClr val="DB2777"/>
+            </a:solidFill>
+            <a:prstDash val="solid"/>
+          </a:ln>
+        </p:spPr>
+      </p:sp>
+      <p:sp>
+        <p:nvSpPr>
+          <p:cNvPr id="42" name="Shape 40"/>
+          <p:cNvSpPr/>
+          <p:nvPr/>
+        </p:nvSpPr>
+        <p:spPr>
+          <a:xfrm>
+            <a:off x="2023872" y="4169664"/>
+            <a:ext cx="685800" cy="384048"/>
+          </a:xfrm>
+          <a:prstGeom prst="rect">
+            <a:avLst>
+              <a:gd name="adj" fmla="val 9524"/>
+            </a:avLst>
+          </a:prstGeom>
+          <a:solidFill>
+            <a:srgbClr val="FFFFFF"/>
+          </a:solidFill>
+          <a:ln w="12700">
+            <a:solidFill>
+              <a:srgbClr val="DB2777"/>
+            </a:solidFill>
+            <a:prstDash val="solid"/>
+          </a:ln>
+        </p:spPr>
+      </p:sp>
+      <p:sp>
+        <p:nvSpPr>
+          <p:cNvPr id="43" name="Text 41"/>
+          <p:cNvSpPr/>
+          <p:nvPr/>
+        </p:nvSpPr>
+        <p:spPr>
+          <a:xfrm>
+            <a:off x="2023872" y="4169664"/>
+            <a:ext cx="685800" cy="384048"/>
+          </a:xfrm>
+          <a:prstGeom prst="rect">
+            <a:avLst/>
+          </a:prstGeom>
+          <a:noFill/>
+          <a:ln/>
+        </p:spPr>
+        <p:txBody>
+          <a:bodyPr wrap="square" lIns="0" tIns="0" rIns="0" bIns="0" rtlCol="0" anchor="ctr"/>
+          <a:lstStyle/>
+          <a:p>
+            <a:pPr algn="ctr" indent="0" marL="0">
+              <a:buNone/>
+            </a:pPr>
+            <a:r>
+              <a:rPr lang="en-US" sz="900" b="1" dirty="0">
+                <a:solidFill>
+                  <a:srgbClr val="9D174D"/>
+                </a:solidFill>
+                <a:latin typeface="Trebuchet MS" pitchFamily="34" charset="0"/>
+                <a:ea typeface="Trebuchet MS" pitchFamily="34" charset="-122"/>
+                <a:cs typeface="Trebuchet MS" pitchFamily="34" charset="-120"/>
+              </a:rPr>
+              <a:t>d</a:t>
+            </a:r>
+            <a:endParaRPr lang="en-US" sz="900" dirty="0"/>
+          </a:p>
+        </p:txBody>
+      </p:sp>
+      <p:sp>
+        <p:nvSpPr>
+          <p:cNvPr id="44" name="Shape 42"/>
+          <p:cNvSpPr/>
+          <p:nvPr/>
+        </p:nvSpPr>
+        <p:spPr>
+          <a:xfrm>
+            <a:off x="2831592" y="4169664"/>
+            <a:ext cx="685800" cy="384048"/>
+          </a:xfrm>
+          <a:prstGeom prst="rect">
+            <a:avLst>
+              <a:gd name="adj" fmla="val 9524"/>
+            </a:avLst>
+          </a:prstGeom>
+          <a:solidFill>
+            <a:srgbClr val="FFFFFF"/>
+          </a:solidFill>
+          <a:ln w="12700">
+            <a:solidFill>
+              <a:srgbClr val="DB2777"/>
+            </a:solidFill>
+            <a:prstDash val="solid"/>
+          </a:ln>
+        </p:spPr>
+      </p:sp>
+      <p:sp>
+        <p:nvSpPr>
+          <p:cNvPr id="45" name="Text 43"/>
+          <p:cNvSpPr/>
+          <p:nvPr/>
+        </p:nvSpPr>
+        <p:spPr>
+          <a:xfrm>
+            <a:off x="2831592" y="4169664"/>
+            <a:ext cx="685800" cy="384048"/>
+          </a:xfrm>
+          <a:prstGeom prst="rect">
+            <a:avLst/>
+          </a:prstGeom>
+          <a:noFill/>
+          <a:ln/>
+        </p:spPr>
+        <p:txBody>
+          <a:bodyPr wrap="square" lIns="0" tIns="0" rIns="0" bIns="0" rtlCol="0" anchor="ctr"/>
+          <a:lstStyle/>
+          <a:p>
+            <a:pPr algn="ctr" indent="0" marL="0">
+              <a:buNone/>
+            </a:pPr>
+            <a:r>
+              <a:rPr lang="en-US" sz="900" b="1" dirty="0">
+                <a:solidFill>
+                  <a:srgbClr val="9D174D"/>
+                </a:solidFill>
+                <a:latin typeface="Trebuchet MS" pitchFamily="34" charset="0"/>
+                <a:ea typeface="Trebuchet MS" pitchFamily="34" charset="-122"/>
+                <a:cs typeface="Trebuchet MS" pitchFamily="34" charset="-120"/>
+              </a:rPr>
+              <a:t>i</a:t>
+            </a:r>
+            <a:endParaRPr lang="en-US" sz="900" dirty="0"/>
+          </a:p>
+        </p:txBody>
+      </p:sp>
+      <p:sp>
+        <p:nvSpPr>
+          <p:cNvPr id="46" name="Shape 44"/>
+          <p:cNvSpPr/>
+          <p:nvPr/>
+        </p:nvSpPr>
+        <p:spPr>
+          <a:xfrm>
+            <a:off x="3639312" y="4169664"/>
+            <a:ext cx="685800" cy="384048"/>
+          </a:xfrm>
+          <a:prstGeom prst="rect">
+            <a:avLst>
+              <a:gd name="adj" fmla="val 9524"/>
+            </a:avLst>
+          </a:prstGeom>
+          <a:solidFill>
+            <a:srgbClr val="FFFFFF"/>
+          </a:solidFill>
+          <a:ln w="12700">
+            <a:solidFill>
+              <a:srgbClr val="DB2777"/>
+            </a:solidFill>
+            <a:prstDash val="solid"/>
+          </a:ln>
+        </p:spPr>
+      </p:sp>
+      <p:sp>
+        <p:nvSpPr>
+          <p:cNvPr id="47" name="Text 45"/>
+          <p:cNvSpPr/>
+          <p:nvPr/>
+        </p:nvSpPr>
+        <p:spPr>
+          <a:xfrm>
+            <a:off x="3639312" y="4169664"/>
+            <a:ext cx="685800" cy="384048"/>
+          </a:xfrm>
+          <a:prstGeom prst="rect">
+            <a:avLst/>
+          </a:prstGeom>
+          <a:noFill/>
+          <a:ln/>
+        </p:spPr>
+        <p:txBody>
+          <a:bodyPr wrap="square" lIns="0" tIns="0" rIns="0" bIns="0" rtlCol="0" anchor="ctr"/>
+          <a:lstStyle/>
+          <a:p>
+            <a:pPr algn="ctr" indent="0" marL="0">
+              <a:buNone/>
+            </a:pPr>
+            <a:r>
+              <a:rPr lang="en-US" sz="900" b="1" dirty="0">
+                <a:solidFill>
+                  <a:srgbClr val="9D174D"/>
+                </a:solidFill>
+                <a:latin typeface="Trebuchet MS" pitchFamily="34" charset="0"/>
+                <a:ea typeface="Trebuchet MS" pitchFamily="34" charset="-122"/>
+                <a:cs typeface="Trebuchet MS" pitchFamily="34" charset="-120"/>
+              </a:rPr>
+              <a:t>c</a:t>
+            </a:r>
+            <a:endParaRPr lang="en-US" sz="900" dirty="0"/>
+          </a:p>
+        </p:txBody>
+      </p:sp>
+      <p:sp>
+        <p:nvSpPr>
+          <p:cNvPr id="48" name="Text 46"/>
+          <p:cNvSpPr/>
+          <p:nvPr/>
+        </p:nvSpPr>
+        <p:spPr>
+          <a:xfrm>
+            <a:off x="3639312" y="4572000"/>
+            <a:ext cx="685800" cy="219456"/>
           </a:xfrm>
           <a:prstGeom prst="rect">
             <a:avLst/>
@@ -33630,232 +33867,271 @@
               <a:buNone/>
             </a:pPr>
             <a:r>
-              <a:rPr lang="en-US" sz="850" dirty="0">
-                <a:solidFill>
-                  <a:srgbClr val="475569"/>
+              <a:rPr lang="en-US" sz="750" i="1" dirty="0">
+                <a:solidFill>
+                  <a:srgbClr val="94A3B8"/>
                 </a:solidFill>
                 <a:latin typeface="Calibri" pitchFamily="34" charset="0"/>
                 <a:ea typeface="Calibri" pitchFamily="34" charset="-122"/>
                 <a:cs typeface="Calibri" pitchFamily="34" charset="-120"/>
               </a:rPr>
-              <a:t>person who does something</a:t>
-            </a:r>
-            <a:endParaRPr lang="en-US" sz="850" dirty="0"/>
-          </a:p>
-        </p:txBody>
-      </p:sp>
-      <p:sp>
-        <p:nvSpPr>
-          <p:cNvPr id="28" name="Shape 26"/>
-          <p:cNvSpPr/>
-          <p:nvPr/>
-        </p:nvSpPr>
-        <p:spPr>
-          <a:xfrm>
-            <a:off x="365760" y="3273552"/>
-            <a:ext cx="1371600" cy="658368"/>
+              <a:t>/k/</a:t>
+            </a:r>
+            <a:endParaRPr lang="en-US" sz="750" dirty="0"/>
+          </a:p>
+        </p:txBody>
+      </p:sp>
+      <p:sp>
+        <p:nvSpPr>
+          <p:cNvPr id="49" name="Shape 47"/>
+          <p:cNvSpPr/>
+          <p:nvPr/>
+        </p:nvSpPr>
+        <p:spPr>
+          <a:xfrm>
+            <a:off x="4447032" y="4169664"/>
+            <a:ext cx="685800" cy="384048"/>
           </a:xfrm>
           <a:prstGeom prst="rect">
             <a:avLst>
-              <a:gd name="adj" fmla="val 8333"/>
+              <a:gd name="adj" fmla="val 9524"/>
             </a:avLst>
           </a:prstGeom>
           <a:solidFill>
-            <a:srgbClr val="E2E8F0"/>
-          </a:solidFill>
-          <a:ln w="12700">
-            <a:solidFill>
-              <a:srgbClr val="E2E8F0"/>
-            </a:solidFill>
-            <a:prstDash val="solid"/>
-          </a:ln>
-        </p:spPr>
-      </p:sp>
-      <p:sp>
-        <p:nvSpPr>
-          <p:cNvPr id="29" name="Text 27"/>
-          <p:cNvSpPr/>
-          <p:nvPr/>
-        </p:nvSpPr>
-        <p:spPr>
-          <a:xfrm>
-            <a:off x="365760" y="3273552"/>
-            <a:ext cx="1371600" cy="658368"/>
-          </a:xfrm>
-          <a:prstGeom prst="rect">
-            <a:avLst/>
-          </a:prstGeom>
-          <a:noFill/>
-          <a:ln/>
-        </p:spPr>
-        <p:txBody>
-          <a:bodyPr wrap="square" lIns="0" tIns="0" rIns="0" bIns="0" rtlCol="0" anchor="ctr"/>
-          <a:lstStyle/>
-          <a:p>
-            <a:pPr algn="ctr" indent="0" marL="0">
-              <a:buNone/>
-            </a:pPr>
-            <a:r>
-              <a:rPr lang="en-US" sz="1100" b="1" dirty="0">
-                <a:solidFill>
-                  <a:srgbClr val="475569"/>
+            <a:srgbClr val="FFFFFF"/>
+          </a:solidFill>
+          <a:ln w="12700">
+            <a:solidFill>
+              <a:srgbClr val="DB2777"/>
+            </a:solidFill>
+            <a:prstDash val="solid"/>
+          </a:ln>
+        </p:spPr>
+      </p:sp>
+      <p:sp>
+        <p:nvSpPr>
+          <p:cNvPr id="50" name="Text 48"/>
+          <p:cNvSpPr/>
+          <p:nvPr/>
+        </p:nvSpPr>
+        <p:spPr>
+          <a:xfrm>
+            <a:off x="4447032" y="4169664"/>
+            <a:ext cx="685800" cy="384048"/>
+          </a:xfrm>
+          <a:prstGeom prst="rect">
+            <a:avLst/>
+          </a:prstGeom>
+          <a:noFill/>
+          <a:ln/>
+        </p:spPr>
+        <p:txBody>
+          <a:bodyPr wrap="square" lIns="0" tIns="0" rIns="0" bIns="0" rtlCol="0" anchor="ctr"/>
+          <a:lstStyle/>
+          <a:p>
+            <a:pPr algn="ctr" indent="0" marL="0">
+              <a:buNone/>
+            </a:pPr>
+            <a:r>
+              <a:rPr lang="en-US" sz="900" b="1" dirty="0">
+                <a:solidFill>
+                  <a:srgbClr val="9D174D"/>
                 </a:solidFill>
                 <a:latin typeface="Trebuchet MS" pitchFamily="34" charset="0"/>
                 <a:ea typeface="Trebuchet MS" pitchFamily="34" charset="-122"/>
                 <a:cs typeface="Trebuchet MS" pitchFamily="34" charset="-120"/>
               </a:rPr>
-              <a:t>Syllables</a:t>
-            </a:r>
-            <a:endParaRPr lang="en-US" sz="1100" dirty="0"/>
-          </a:p>
-        </p:txBody>
-      </p:sp>
-      <p:sp>
-        <p:nvSpPr>
-          <p:cNvPr id="30" name="Shape 28"/>
-          <p:cNvSpPr/>
-          <p:nvPr/>
-        </p:nvSpPr>
-        <p:spPr>
-          <a:xfrm>
-            <a:off x="1874520" y="3273552"/>
-            <a:ext cx="6903720" cy="658368"/>
+              <a:t>t</a:t>
+            </a:r>
+            <a:endParaRPr lang="en-US" sz="900" dirty="0"/>
+          </a:p>
+        </p:txBody>
+      </p:sp>
+      <p:sp>
+        <p:nvSpPr>
+          <p:cNvPr id="51" name="Text 49"/>
+          <p:cNvSpPr/>
+          <p:nvPr/>
+        </p:nvSpPr>
+        <p:spPr>
+          <a:xfrm>
+            <a:off x="4447032" y="4572000"/>
+            <a:ext cx="685800" cy="219456"/>
+          </a:xfrm>
+          <a:prstGeom prst="rect">
+            <a:avLst/>
+          </a:prstGeom>
+          <a:noFill/>
+          <a:ln/>
+        </p:spPr>
+        <p:txBody>
+          <a:bodyPr wrap="square" lIns="0" tIns="0" rIns="0" bIns="0" rtlCol="0" anchor="t"/>
+          <a:lstStyle/>
+          <a:p>
+            <a:pPr algn="ctr" indent="0" marL="0">
+              <a:buNone/>
+            </a:pPr>
+            <a:r>
+              <a:rPr lang="en-US" sz="750" i="1" dirty="0">
+                <a:solidFill>
+                  <a:srgbClr val="94A3B8"/>
+                </a:solidFill>
+                <a:latin typeface="Calibri" pitchFamily="34" charset="0"/>
+                <a:ea typeface="Calibri" pitchFamily="34" charset="-122"/>
+                <a:cs typeface="Calibri" pitchFamily="34" charset="-120"/>
+              </a:rPr>
+              <a:t>/sh/</a:t>
+            </a:r>
+            <a:endParaRPr lang="en-US" sz="750" dirty="0"/>
+          </a:p>
+        </p:txBody>
+      </p:sp>
+      <p:sp>
+        <p:nvSpPr>
+          <p:cNvPr id="52" name="Shape 50"/>
+          <p:cNvSpPr/>
+          <p:nvPr/>
+        </p:nvSpPr>
+        <p:spPr>
+          <a:xfrm>
+            <a:off x="5254752" y="4169664"/>
+            <a:ext cx="685800" cy="384048"/>
           </a:xfrm>
           <a:prstGeom prst="rect">
             <a:avLst>
-              <a:gd name="adj" fmla="val 8333"/>
+              <a:gd name="adj" fmla="val 9524"/>
             </a:avLst>
           </a:prstGeom>
           <a:solidFill>
-            <a:srgbClr val="CCFBF1"/>
-          </a:solidFill>
-          <a:ln w="12700">
-            <a:solidFill>
-              <a:srgbClr val="0D9488"/>
-            </a:solidFill>
-            <a:prstDash val="solid"/>
-          </a:ln>
-        </p:spPr>
-      </p:sp>
-      <p:sp>
-        <p:nvSpPr>
-          <p:cNvPr id="31" name="Shape 29"/>
-          <p:cNvSpPr/>
-          <p:nvPr/>
-        </p:nvSpPr>
-        <p:spPr>
-          <a:xfrm>
-            <a:off x="2313432" y="3364992"/>
-            <a:ext cx="1645920" cy="475488"/>
-          </a:xfrm>
-          <a:prstGeom prst="rect">
-            <a:avLst>
-              <a:gd name="adj" fmla="val 9615"/>
-            </a:avLst>
-          </a:prstGeom>
-          <a:solidFill>
             <a:srgbClr val="FFFFFF"/>
           </a:solidFill>
           <a:ln w="12700">
             <a:solidFill>
-              <a:srgbClr val="0D9488"/>
-            </a:solidFill>
-            <a:prstDash val="solid"/>
-          </a:ln>
-        </p:spPr>
-      </p:sp>
-      <p:sp>
-        <p:nvSpPr>
-          <p:cNvPr id="32" name="Text 30"/>
-          <p:cNvSpPr/>
-          <p:nvPr/>
-        </p:nvSpPr>
-        <p:spPr>
-          <a:xfrm>
-            <a:off x="2313432" y="3364992"/>
-            <a:ext cx="1645920" cy="475488"/>
-          </a:xfrm>
-          <a:prstGeom prst="rect">
-            <a:avLst/>
-          </a:prstGeom>
-          <a:noFill/>
-          <a:ln/>
-        </p:spPr>
-        <p:txBody>
-          <a:bodyPr wrap="square" lIns="0" tIns="0" rIns="0" bIns="0" rtlCol="0" anchor="ctr"/>
-          <a:lstStyle/>
-          <a:p>
-            <a:pPr algn="ctr" indent="0" marL="0">
-              <a:buNone/>
-            </a:pPr>
-            <a:r>
-              <a:rPr lang="en-US" sz="1400" b="1" dirty="0">
-                <a:solidFill>
-                  <a:srgbClr val="0D9488"/>
+              <a:srgbClr val="DB2777"/>
+            </a:solidFill>
+            <a:prstDash val="solid"/>
+          </a:ln>
+        </p:spPr>
+      </p:sp>
+      <p:sp>
+        <p:nvSpPr>
+          <p:cNvPr id="53" name="Text 51"/>
+          <p:cNvSpPr/>
+          <p:nvPr/>
+        </p:nvSpPr>
+        <p:spPr>
+          <a:xfrm>
+            <a:off x="5254752" y="4169664"/>
+            <a:ext cx="685800" cy="384048"/>
+          </a:xfrm>
+          <a:prstGeom prst="rect">
+            <a:avLst/>
+          </a:prstGeom>
+          <a:noFill/>
+          <a:ln/>
+        </p:spPr>
+        <p:txBody>
+          <a:bodyPr wrap="square" lIns="0" tIns="0" rIns="0" bIns="0" rtlCol="0" anchor="ctr"/>
+          <a:lstStyle/>
+          <a:p>
+            <a:pPr algn="ctr" indent="0" marL="0">
+              <a:buNone/>
+            </a:pPr>
+            <a:r>
+              <a:rPr lang="en-US" sz="900" b="1" dirty="0">
+                <a:solidFill>
+                  <a:srgbClr val="9D174D"/>
                 </a:solidFill>
                 <a:latin typeface="Trebuchet MS" pitchFamily="34" charset="0"/>
                 <a:ea typeface="Trebuchet MS" pitchFamily="34" charset="-122"/>
                 <a:cs typeface="Trebuchet MS" pitchFamily="34" charset="-120"/>
               </a:rPr>
-              <a:t>dic</a:t>
-            </a:r>
-            <a:endParaRPr lang="en-US" sz="1400" dirty="0"/>
-          </a:p>
-        </p:txBody>
-      </p:sp>
-      <p:sp>
-        <p:nvSpPr>
-          <p:cNvPr id="33" name="Text 31"/>
-          <p:cNvSpPr/>
-          <p:nvPr/>
-        </p:nvSpPr>
-        <p:spPr>
-          <a:xfrm>
-            <a:off x="3959352" y="3364992"/>
-            <a:ext cx="411480" cy="475488"/>
-          </a:xfrm>
-          <a:prstGeom prst="rect">
-            <a:avLst/>
-          </a:prstGeom>
-          <a:noFill/>
-          <a:ln/>
-        </p:spPr>
-        <p:txBody>
-          <a:bodyPr wrap="square" lIns="0" tIns="0" rIns="0" bIns="0" rtlCol="0" anchor="ctr"/>
-          <a:lstStyle/>
-          <a:p>
-            <a:pPr algn="ctr" indent="0" marL="0">
-              <a:buNone/>
-            </a:pPr>
-            <a:r>
-              <a:rPr lang="en-US" sz="1600" b="1" dirty="0">
-                <a:solidFill>
-                  <a:srgbClr val="0D9488"/>
+              <a:t>io</a:t>
+            </a:r>
+            <a:endParaRPr lang="en-US" sz="900" dirty="0"/>
+          </a:p>
+        </p:txBody>
+      </p:sp>
+      <p:sp>
+        <p:nvSpPr>
+          <p:cNvPr id="54" name="Shape 52"/>
+          <p:cNvSpPr/>
+          <p:nvPr/>
+        </p:nvSpPr>
+        <p:spPr>
+          <a:xfrm>
+            <a:off x="6062472" y="4169664"/>
+            <a:ext cx="685800" cy="384048"/>
+          </a:xfrm>
+          <a:prstGeom prst="rect">
+            <a:avLst>
+              <a:gd name="adj" fmla="val 9524"/>
+            </a:avLst>
+          </a:prstGeom>
+          <a:solidFill>
+            <a:srgbClr val="FFFFFF"/>
+          </a:solidFill>
+          <a:ln w="12700">
+            <a:solidFill>
+              <a:srgbClr val="DB2777"/>
+            </a:solidFill>
+            <a:prstDash val="solid"/>
+          </a:ln>
+        </p:spPr>
+      </p:sp>
+      <p:sp>
+        <p:nvSpPr>
+          <p:cNvPr id="55" name="Text 53"/>
+          <p:cNvSpPr/>
+          <p:nvPr/>
+        </p:nvSpPr>
+        <p:spPr>
+          <a:xfrm>
+            <a:off x="6062472" y="4169664"/>
+            <a:ext cx="685800" cy="384048"/>
+          </a:xfrm>
+          <a:prstGeom prst="rect">
+            <a:avLst/>
+          </a:prstGeom>
+          <a:noFill/>
+          <a:ln/>
+        </p:spPr>
+        <p:txBody>
+          <a:bodyPr wrap="square" lIns="0" tIns="0" rIns="0" bIns="0" rtlCol="0" anchor="ctr"/>
+          <a:lstStyle/>
+          <a:p>
+            <a:pPr algn="ctr" indent="0" marL="0">
+              <a:buNone/>
+            </a:pPr>
+            <a:r>
+              <a:rPr lang="en-US" sz="900" b="1" dirty="0">
+                <a:solidFill>
+                  <a:srgbClr val="9D174D"/>
                 </a:solidFill>
                 <a:latin typeface="Trebuchet MS" pitchFamily="34" charset="0"/>
                 <a:ea typeface="Trebuchet MS" pitchFamily="34" charset="-122"/>
                 <a:cs typeface="Trebuchet MS" pitchFamily="34" charset="-120"/>
               </a:rPr>
-              <a:t>·</a:t>
-            </a:r>
-            <a:endParaRPr lang="en-US" sz="1600" dirty="0"/>
-          </a:p>
-        </p:txBody>
-      </p:sp>
-      <p:sp>
-        <p:nvSpPr>
-          <p:cNvPr id="34" name="Shape 32"/>
-          <p:cNvSpPr/>
-          <p:nvPr/>
-        </p:nvSpPr>
-        <p:spPr>
-          <a:xfrm>
-            <a:off x="4370832" y="3364992"/>
-            <a:ext cx="1645920" cy="475488"/>
+              <a:t>n</a:t>
+            </a:r>
+            <a:endParaRPr lang="en-US" sz="900" dirty="0"/>
+          </a:p>
+        </p:txBody>
+      </p:sp>
+      <p:sp>
+        <p:nvSpPr>
+          <p:cNvPr id="56" name="Shape 54"/>
+          <p:cNvSpPr/>
+          <p:nvPr/>
+        </p:nvSpPr>
+        <p:spPr>
+          <a:xfrm>
+            <a:off x="6870192" y="4169664"/>
+            <a:ext cx="685800" cy="384048"/>
           </a:xfrm>
           <a:prstGeom prst="rect">
             <a:avLst>
-              <a:gd name="adj" fmla="val 9615"/>
+              <a:gd name="adj" fmla="val 9524"/>
             </a:avLst>
           </a:prstGeom>
           <a:solidFill>
@@ -33863,745 +34139,112 @@
           </a:solidFill>
           <a:ln w="12700">
             <a:solidFill>
-              <a:srgbClr val="0D9488"/>
-            </a:solidFill>
-            <a:prstDash val="solid"/>
-          </a:ln>
-        </p:spPr>
-      </p:sp>
-      <p:sp>
-        <p:nvSpPr>
-          <p:cNvPr id="35" name="Text 33"/>
-          <p:cNvSpPr/>
-          <p:nvPr/>
-        </p:nvSpPr>
-        <p:spPr>
-          <a:xfrm>
-            <a:off x="4370832" y="3364992"/>
-            <a:ext cx="1645920" cy="475488"/>
-          </a:xfrm>
-          <a:prstGeom prst="rect">
-            <a:avLst/>
-          </a:prstGeom>
-          <a:noFill/>
-          <a:ln/>
-        </p:spPr>
-        <p:txBody>
-          <a:bodyPr wrap="square" lIns="0" tIns="0" rIns="0" bIns="0" rtlCol="0" anchor="ctr"/>
-          <a:lstStyle/>
-          <a:p>
-            <a:pPr algn="ctr" indent="0" marL="0">
-              <a:buNone/>
-            </a:pPr>
-            <a:r>
-              <a:rPr lang="en-US" sz="1400" b="1" dirty="0">
-                <a:solidFill>
-                  <a:srgbClr val="0D9488"/>
+              <a:srgbClr val="DB2777"/>
+            </a:solidFill>
+            <a:prstDash val="solid"/>
+          </a:ln>
+        </p:spPr>
+      </p:sp>
+      <p:sp>
+        <p:nvSpPr>
+          <p:cNvPr id="57" name="Text 55"/>
+          <p:cNvSpPr/>
+          <p:nvPr/>
+        </p:nvSpPr>
+        <p:spPr>
+          <a:xfrm>
+            <a:off x="6870192" y="4169664"/>
+            <a:ext cx="685800" cy="384048"/>
+          </a:xfrm>
+          <a:prstGeom prst="rect">
+            <a:avLst/>
+          </a:prstGeom>
+          <a:noFill/>
+          <a:ln/>
+        </p:spPr>
+        <p:txBody>
+          <a:bodyPr wrap="square" lIns="0" tIns="0" rIns="0" bIns="0" rtlCol="0" anchor="ctr"/>
+          <a:lstStyle/>
+          <a:p>
+            <a:pPr algn="ctr" indent="0" marL="0">
+              <a:buNone/>
+            </a:pPr>
+            <a:r>
+              <a:rPr lang="en-US" sz="900" b="1" dirty="0">
+                <a:solidFill>
+                  <a:srgbClr val="9D174D"/>
                 </a:solidFill>
                 <a:latin typeface="Trebuchet MS" pitchFamily="34" charset="0"/>
                 <a:ea typeface="Trebuchet MS" pitchFamily="34" charset="-122"/>
                 <a:cs typeface="Trebuchet MS" pitchFamily="34" charset="-120"/>
               </a:rPr>
-              <a:t>ta</a:t>
-            </a:r>
-            <a:endParaRPr lang="en-US" sz="1400" dirty="0"/>
-          </a:p>
-        </p:txBody>
-      </p:sp>
-      <p:sp>
-        <p:nvSpPr>
-          <p:cNvPr id="36" name="Text 34"/>
-          <p:cNvSpPr/>
-          <p:nvPr/>
-        </p:nvSpPr>
-        <p:spPr>
-          <a:xfrm>
-            <a:off x="6016752" y="3364992"/>
-            <a:ext cx="411480" cy="475488"/>
-          </a:xfrm>
-          <a:prstGeom prst="rect">
-            <a:avLst/>
-          </a:prstGeom>
-          <a:noFill/>
-          <a:ln/>
-        </p:spPr>
-        <p:txBody>
-          <a:bodyPr wrap="square" lIns="0" tIns="0" rIns="0" bIns="0" rtlCol="0" anchor="ctr"/>
-          <a:lstStyle/>
-          <a:p>
-            <a:pPr algn="ctr" indent="0" marL="0">
-              <a:buNone/>
-            </a:pPr>
-            <a:r>
-              <a:rPr lang="en-US" sz="1600" b="1" dirty="0">
-                <a:solidFill>
-                  <a:srgbClr val="0D9488"/>
+              <a:t>ar</a:t>
+            </a:r>
+            <a:endParaRPr lang="en-US" sz="900" dirty="0"/>
+          </a:p>
+        </p:txBody>
+      </p:sp>
+      <p:sp>
+        <p:nvSpPr>
+          <p:cNvPr id="58" name="Shape 56"/>
+          <p:cNvSpPr/>
+          <p:nvPr/>
+        </p:nvSpPr>
+        <p:spPr>
+          <a:xfrm>
+            <a:off x="7677912" y="4169664"/>
+            <a:ext cx="685800" cy="384048"/>
+          </a:xfrm>
+          <a:prstGeom prst="rect">
+            <a:avLst>
+              <a:gd name="adj" fmla="val 9524"/>
+            </a:avLst>
+          </a:prstGeom>
+          <a:solidFill>
+            <a:srgbClr val="FFFFFF"/>
+          </a:solidFill>
+          <a:ln w="12700">
+            <a:solidFill>
+              <a:srgbClr val="DB2777"/>
+            </a:solidFill>
+            <a:prstDash val="solid"/>
+          </a:ln>
+        </p:spPr>
+      </p:sp>
+      <p:sp>
+        <p:nvSpPr>
+          <p:cNvPr id="59" name="Text 57"/>
+          <p:cNvSpPr/>
+          <p:nvPr/>
+        </p:nvSpPr>
+        <p:spPr>
+          <a:xfrm>
+            <a:off x="7677912" y="4169664"/>
+            <a:ext cx="685800" cy="384048"/>
+          </a:xfrm>
+          <a:prstGeom prst="rect">
+            <a:avLst/>
+          </a:prstGeom>
+          <a:noFill/>
+          <a:ln/>
+        </p:spPr>
+        <p:txBody>
+          <a:bodyPr wrap="square" lIns="0" tIns="0" rIns="0" bIns="0" rtlCol="0" anchor="ctr"/>
+          <a:lstStyle/>
+          <a:p>
+            <a:pPr algn="ctr" indent="0" marL="0">
+              <a:buNone/>
+            </a:pPr>
+            <a:r>
+              <a:rPr lang="en-US" sz="900" b="1" dirty="0">
+                <a:solidFill>
+                  <a:srgbClr val="9D174D"/>
                 </a:solidFill>
                 <a:latin typeface="Trebuchet MS" pitchFamily="34" charset="0"/>
                 <a:ea typeface="Trebuchet MS" pitchFamily="34" charset="-122"/>
                 <a:cs typeface="Trebuchet MS" pitchFamily="34" charset="-120"/>
               </a:rPr>
-              <a:t>·</a:t>
-            </a:r>
-            <a:endParaRPr lang="en-US" sz="1600" dirty="0"/>
-          </a:p>
-        </p:txBody>
-      </p:sp>
-      <p:sp>
-        <p:nvSpPr>
-          <p:cNvPr id="37" name="Shape 35"/>
-          <p:cNvSpPr/>
-          <p:nvPr/>
-        </p:nvSpPr>
-        <p:spPr>
-          <a:xfrm>
-            <a:off x="6428232" y="3364992"/>
-            <a:ext cx="1645920" cy="475488"/>
-          </a:xfrm>
-          <a:prstGeom prst="rect">
-            <a:avLst>
-              <a:gd name="adj" fmla="val 9615"/>
-            </a:avLst>
-          </a:prstGeom>
-          <a:solidFill>
-            <a:srgbClr val="FFFFFF"/>
-          </a:solidFill>
-          <a:ln w="12700">
-            <a:solidFill>
-              <a:srgbClr val="0D9488"/>
-            </a:solidFill>
-            <a:prstDash val="solid"/>
-          </a:ln>
-        </p:spPr>
-      </p:sp>
-      <p:sp>
-        <p:nvSpPr>
-          <p:cNvPr id="38" name="Text 36"/>
-          <p:cNvSpPr/>
-          <p:nvPr/>
-        </p:nvSpPr>
-        <p:spPr>
-          <a:xfrm>
-            <a:off x="6428232" y="3364992"/>
-            <a:ext cx="1645920" cy="475488"/>
-          </a:xfrm>
-          <a:prstGeom prst="rect">
-            <a:avLst/>
-          </a:prstGeom>
-          <a:noFill/>
-          <a:ln/>
-        </p:spPr>
-        <p:txBody>
-          <a:bodyPr wrap="square" lIns="0" tIns="0" rIns="0" bIns="0" rtlCol="0" anchor="ctr"/>
-          <a:lstStyle/>
-          <a:p>
-            <a:pPr algn="ctr" indent="0" marL="0">
-              <a:buNone/>
-            </a:pPr>
-            <a:r>
-              <a:rPr lang="en-US" sz="1400" b="1" dirty="0">
-                <a:solidFill>
-                  <a:srgbClr val="0D9488"/>
-                </a:solidFill>
-                <a:latin typeface="Trebuchet MS" pitchFamily="34" charset="0"/>
-                <a:ea typeface="Trebuchet MS" pitchFamily="34" charset="-122"/>
-                <a:cs typeface="Trebuchet MS" pitchFamily="34" charset="-120"/>
-              </a:rPr>
-              <a:t>tor</a:t>
-            </a:r>
-            <a:endParaRPr lang="en-US" sz="1400" dirty="0"/>
-          </a:p>
-        </p:txBody>
-      </p:sp>
-      <p:sp>
-        <p:nvSpPr>
-          <p:cNvPr id="39" name="Shape 37"/>
-          <p:cNvSpPr/>
-          <p:nvPr/>
-        </p:nvSpPr>
-        <p:spPr>
-          <a:xfrm>
-            <a:off x="365760" y="4096512"/>
-            <a:ext cx="1371600" cy="804672"/>
-          </a:xfrm>
-          <a:prstGeom prst="rect">
-            <a:avLst>
-              <a:gd name="adj" fmla="val 6818"/>
-            </a:avLst>
-          </a:prstGeom>
-          <a:solidFill>
-            <a:srgbClr val="E2E8F0"/>
-          </a:solidFill>
-          <a:ln w="12700">
-            <a:solidFill>
-              <a:srgbClr val="E2E8F0"/>
-            </a:solidFill>
-            <a:prstDash val="solid"/>
-          </a:ln>
-        </p:spPr>
-      </p:sp>
-      <p:sp>
-        <p:nvSpPr>
-          <p:cNvPr id="40" name="Text 38"/>
-          <p:cNvSpPr/>
-          <p:nvPr/>
-        </p:nvSpPr>
-        <p:spPr>
-          <a:xfrm>
-            <a:off x="365760" y="4096512"/>
-            <a:ext cx="1371600" cy="804672"/>
-          </a:xfrm>
-          <a:prstGeom prst="rect">
-            <a:avLst/>
-          </a:prstGeom>
-          <a:noFill/>
-          <a:ln/>
-        </p:spPr>
-        <p:txBody>
-          <a:bodyPr wrap="square" lIns="0" tIns="0" rIns="0" bIns="0" rtlCol="0" anchor="ctr"/>
-          <a:lstStyle/>
-          <a:p>
-            <a:pPr algn="ctr" indent="0" marL="0">
-              <a:buNone/>
-            </a:pPr>
-            <a:r>
-              <a:rPr lang="en-US" sz="1100" b="1" dirty="0">
-                <a:solidFill>
-                  <a:srgbClr val="475569"/>
-                </a:solidFill>
-                <a:latin typeface="Trebuchet MS" pitchFamily="34" charset="0"/>
-                <a:ea typeface="Trebuchet MS" pitchFamily="34" charset="-122"/>
-                <a:cs typeface="Trebuchet MS" pitchFamily="34" charset="-120"/>
-              </a:rPr>
-              <a:t>Phonemes</a:t>
-            </a:r>
-            <a:endParaRPr lang="en-US" sz="1100" dirty="0"/>
-          </a:p>
-        </p:txBody>
-      </p:sp>
-      <p:sp>
-        <p:nvSpPr>
-          <p:cNvPr id="41" name="Shape 39"/>
-          <p:cNvSpPr/>
-          <p:nvPr/>
-        </p:nvSpPr>
-        <p:spPr>
-          <a:xfrm>
-            <a:off x="1874520" y="4096512"/>
-            <a:ext cx="6903720" cy="804672"/>
-          </a:xfrm>
-          <a:prstGeom prst="rect">
-            <a:avLst>
-              <a:gd name="adj" fmla="val 6818"/>
-            </a:avLst>
-          </a:prstGeom>
-          <a:solidFill>
-            <a:srgbClr val="FCE7F3"/>
-          </a:solidFill>
-          <a:ln w="12700">
-            <a:solidFill>
-              <a:srgbClr val="DB2777"/>
-            </a:solidFill>
-            <a:prstDash val="solid"/>
-          </a:ln>
-        </p:spPr>
-      </p:sp>
-      <p:sp>
-        <p:nvSpPr>
-          <p:cNvPr id="42" name="Shape 40"/>
-          <p:cNvSpPr/>
-          <p:nvPr/>
-        </p:nvSpPr>
-        <p:spPr>
-          <a:xfrm>
-            <a:off x="2124837" y="4169664"/>
-            <a:ext cx="685800" cy="384048"/>
-          </a:xfrm>
-          <a:prstGeom prst="rect">
-            <a:avLst>
-              <a:gd name="adj" fmla="val 9524"/>
-            </a:avLst>
-          </a:prstGeom>
-          <a:solidFill>
-            <a:srgbClr val="FFFFFF"/>
-          </a:solidFill>
-          <a:ln w="12700">
-            <a:solidFill>
-              <a:srgbClr val="DB2777"/>
-            </a:solidFill>
-            <a:prstDash val="solid"/>
-          </a:ln>
-        </p:spPr>
-      </p:sp>
-      <p:sp>
-        <p:nvSpPr>
-          <p:cNvPr id="43" name="Text 41"/>
-          <p:cNvSpPr/>
-          <p:nvPr/>
-        </p:nvSpPr>
-        <p:spPr>
-          <a:xfrm>
-            <a:off x="2124837" y="4169664"/>
-            <a:ext cx="685800" cy="384048"/>
-          </a:xfrm>
-          <a:prstGeom prst="rect">
-            <a:avLst/>
-          </a:prstGeom>
-          <a:noFill/>
-          <a:ln/>
-        </p:spPr>
-        <p:txBody>
-          <a:bodyPr wrap="square" lIns="0" tIns="0" rIns="0" bIns="0" rtlCol="0" anchor="ctr"/>
-          <a:lstStyle/>
-          <a:p>
-            <a:pPr algn="ctr" indent="0" marL="0">
-              <a:buNone/>
-            </a:pPr>
-            <a:r>
-              <a:rPr lang="en-US" sz="900" b="1" dirty="0">
-                <a:solidFill>
-                  <a:srgbClr val="9D174D"/>
-                </a:solidFill>
-                <a:latin typeface="Trebuchet MS" pitchFamily="34" charset="0"/>
-                <a:ea typeface="Trebuchet MS" pitchFamily="34" charset="-122"/>
-                <a:cs typeface="Trebuchet MS" pitchFamily="34" charset="-120"/>
-              </a:rPr>
-              <a:t>d</a:t>
-            </a:r>
-            <a:endParaRPr lang="en-US" sz="900" dirty="0"/>
-          </a:p>
-        </p:txBody>
-      </p:sp>
-      <p:sp>
-        <p:nvSpPr>
-          <p:cNvPr id="44" name="Shape 42"/>
-          <p:cNvSpPr/>
-          <p:nvPr/>
-        </p:nvSpPr>
-        <p:spPr>
-          <a:xfrm>
-            <a:off x="3033522" y="4169664"/>
-            <a:ext cx="685800" cy="384048"/>
-          </a:xfrm>
-          <a:prstGeom prst="rect">
-            <a:avLst>
-              <a:gd name="adj" fmla="val 9524"/>
-            </a:avLst>
-          </a:prstGeom>
-          <a:solidFill>
-            <a:srgbClr val="FFFFFF"/>
-          </a:solidFill>
-          <a:ln w="12700">
-            <a:solidFill>
-              <a:srgbClr val="DB2777"/>
-            </a:solidFill>
-            <a:prstDash val="solid"/>
-          </a:ln>
-        </p:spPr>
-      </p:sp>
-      <p:sp>
-        <p:nvSpPr>
-          <p:cNvPr id="45" name="Text 43"/>
-          <p:cNvSpPr/>
-          <p:nvPr/>
-        </p:nvSpPr>
-        <p:spPr>
-          <a:xfrm>
-            <a:off x="3033522" y="4169664"/>
-            <a:ext cx="685800" cy="384048"/>
-          </a:xfrm>
-          <a:prstGeom prst="rect">
-            <a:avLst/>
-          </a:prstGeom>
-          <a:noFill/>
-          <a:ln/>
-        </p:spPr>
-        <p:txBody>
-          <a:bodyPr wrap="square" lIns="0" tIns="0" rIns="0" bIns="0" rtlCol="0" anchor="ctr"/>
-          <a:lstStyle/>
-          <a:p>
-            <a:pPr algn="ctr" indent="0" marL="0">
-              <a:buNone/>
-            </a:pPr>
-            <a:r>
-              <a:rPr lang="en-US" sz="900" b="1" dirty="0">
-                <a:solidFill>
-                  <a:srgbClr val="9D174D"/>
-                </a:solidFill>
-                <a:latin typeface="Trebuchet MS" pitchFamily="34" charset="0"/>
-                <a:ea typeface="Trebuchet MS" pitchFamily="34" charset="-122"/>
-                <a:cs typeface="Trebuchet MS" pitchFamily="34" charset="-120"/>
-              </a:rPr>
-              <a:t>i</a:t>
-            </a:r>
-            <a:endParaRPr lang="en-US" sz="900" dirty="0"/>
-          </a:p>
-        </p:txBody>
-      </p:sp>
-      <p:sp>
-        <p:nvSpPr>
-          <p:cNvPr id="46" name="Shape 44"/>
-          <p:cNvSpPr/>
-          <p:nvPr/>
-        </p:nvSpPr>
-        <p:spPr>
-          <a:xfrm>
-            <a:off x="3942207" y="4169664"/>
-            <a:ext cx="685800" cy="384048"/>
-          </a:xfrm>
-          <a:prstGeom prst="rect">
-            <a:avLst>
-              <a:gd name="adj" fmla="val 9524"/>
-            </a:avLst>
-          </a:prstGeom>
-          <a:solidFill>
-            <a:srgbClr val="FFFFFF"/>
-          </a:solidFill>
-          <a:ln w="12700">
-            <a:solidFill>
-              <a:srgbClr val="DB2777"/>
-            </a:solidFill>
-            <a:prstDash val="solid"/>
-          </a:ln>
-        </p:spPr>
-      </p:sp>
-      <p:sp>
-        <p:nvSpPr>
-          <p:cNvPr id="47" name="Text 45"/>
-          <p:cNvSpPr/>
-          <p:nvPr/>
-        </p:nvSpPr>
-        <p:spPr>
-          <a:xfrm>
-            <a:off x="3942207" y="4169664"/>
-            <a:ext cx="685800" cy="384048"/>
-          </a:xfrm>
-          <a:prstGeom prst="rect">
-            <a:avLst/>
-          </a:prstGeom>
-          <a:noFill/>
-          <a:ln/>
-        </p:spPr>
-        <p:txBody>
-          <a:bodyPr wrap="square" lIns="0" tIns="0" rIns="0" bIns="0" rtlCol="0" anchor="ctr"/>
-          <a:lstStyle/>
-          <a:p>
-            <a:pPr algn="ctr" indent="0" marL="0">
-              <a:buNone/>
-            </a:pPr>
-            <a:r>
-              <a:rPr lang="en-US" sz="900" b="1" dirty="0">
-                <a:solidFill>
-                  <a:srgbClr val="9D174D"/>
-                </a:solidFill>
-                <a:latin typeface="Trebuchet MS" pitchFamily="34" charset="0"/>
-                <a:ea typeface="Trebuchet MS" pitchFamily="34" charset="-122"/>
-                <a:cs typeface="Trebuchet MS" pitchFamily="34" charset="-120"/>
-              </a:rPr>
-              <a:t>c</a:t>
-            </a:r>
-            <a:endParaRPr lang="en-US" sz="900" dirty="0"/>
-          </a:p>
-        </p:txBody>
-      </p:sp>
-      <p:sp>
-        <p:nvSpPr>
-          <p:cNvPr id="48" name="Text 46"/>
-          <p:cNvSpPr/>
-          <p:nvPr/>
-        </p:nvSpPr>
-        <p:spPr>
-          <a:xfrm>
-            <a:off x="3942207" y="4572000"/>
-            <a:ext cx="685800" cy="219456"/>
-          </a:xfrm>
-          <a:prstGeom prst="rect">
-            <a:avLst/>
-          </a:prstGeom>
-          <a:noFill/>
-          <a:ln/>
-        </p:spPr>
-        <p:txBody>
-          <a:bodyPr wrap="square" lIns="0" tIns="0" rIns="0" bIns="0" rtlCol="0" anchor="t"/>
-          <a:lstStyle/>
-          <a:p>
-            <a:pPr algn="ctr" indent="0" marL="0">
-              <a:buNone/>
-            </a:pPr>
-            <a:r>
-              <a:rPr lang="en-US" sz="750" i="1" dirty="0">
-                <a:solidFill>
-                  <a:srgbClr val="94A3B8"/>
-                </a:solidFill>
-                <a:latin typeface="Calibri" pitchFamily="34" charset="0"/>
-                <a:ea typeface="Calibri" pitchFamily="34" charset="-122"/>
-                <a:cs typeface="Calibri" pitchFamily="34" charset="-120"/>
-              </a:rPr>
-              <a:t>/k/</a:t>
-            </a:r>
-            <a:endParaRPr lang="en-US" sz="750" dirty="0"/>
-          </a:p>
-        </p:txBody>
-      </p:sp>
-      <p:sp>
-        <p:nvSpPr>
-          <p:cNvPr id="49" name="Shape 47"/>
-          <p:cNvSpPr/>
-          <p:nvPr/>
-        </p:nvSpPr>
-        <p:spPr>
-          <a:xfrm>
-            <a:off x="4850892" y="4169664"/>
-            <a:ext cx="685800" cy="384048"/>
-          </a:xfrm>
-          <a:prstGeom prst="rect">
-            <a:avLst>
-              <a:gd name="adj" fmla="val 9524"/>
-            </a:avLst>
-          </a:prstGeom>
-          <a:solidFill>
-            <a:srgbClr val="FFFFFF"/>
-          </a:solidFill>
-          <a:ln w="12700">
-            <a:solidFill>
-              <a:srgbClr val="DB2777"/>
-            </a:solidFill>
-            <a:prstDash val="solid"/>
-          </a:ln>
-        </p:spPr>
-      </p:sp>
-      <p:sp>
-        <p:nvSpPr>
-          <p:cNvPr id="50" name="Text 48"/>
-          <p:cNvSpPr/>
-          <p:nvPr/>
-        </p:nvSpPr>
-        <p:spPr>
-          <a:xfrm>
-            <a:off x="4850892" y="4169664"/>
-            <a:ext cx="685800" cy="384048"/>
-          </a:xfrm>
-          <a:prstGeom prst="rect">
-            <a:avLst/>
-          </a:prstGeom>
-          <a:noFill/>
-          <a:ln/>
-        </p:spPr>
-        <p:txBody>
-          <a:bodyPr wrap="square" lIns="0" tIns="0" rIns="0" bIns="0" rtlCol="0" anchor="ctr"/>
-          <a:lstStyle/>
-          <a:p>
-            <a:pPr algn="ctr" indent="0" marL="0">
-              <a:buNone/>
-            </a:pPr>
-            <a:r>
-              <a:rPr lang="en-US" sz="900" b="1" dirty="0">
-                <a:solidFill>
-                  <a:srgbClr val="9D174D"/>
-                </a:solidFill>
-                <a:latin typeface="Trebuchet MS" pitchFamily="34" charset="0"/>
-                <a:ea typeface="Trebuchet MS" pitchFamily="34" charset="-122"/>
-                <a:cs typeface="Trebuchet MS" pitchFamily="34" charset="-120"/>
-              </a:rPr>
-              <a:t>t</a:t>
-            </a:r>
-            <a:endParaRPr lang="en-US" sz="900" dirty="0"/>
-          </a:p>
-        </p:txBody>
-      </p:sp>
-      <p:sp>
-        <p:nvSpPr>
-          <p:cNvPr id="51" name="Shape 49"/>
-          <p:cNvSpPr/>
-          <p:nvPr/>
-        </p:nvSpPr>
-        <p:spPr>
-          <a:xfrm>
-            <a:off x="5759577" y="4169664"/>
-            <a:ext cx="685800" cy="384048"/>
-          </a:xfrm>
-          <a:prstGeom prst="rect">
-            <a:avLst>
-              <a:gd name="adj" fmla="val 9524"/>
-            </a:avLst>
-          </a:prstGeom>
-          <a:solidFill>
-            <a:srgbClr val="FFFFFF"/>
-          </a:solidFill>
-          <a:ln w="12700">
-            <a:solidFill>
-              <a:srgbClr val="DB2777"/>
-            </a:solidFill>
-            <a:prstDash val="solid"/>
-          </a:ln>
-        </p:spPr>
-      </p:sp>
-      <p:sp>
-        <p:nvSpPr>
-          <p:cNvPr id="52" name="Text 50"/>
-          <p:cNvSpPr/>
-          <p:nvPr/>
-        </p:nvSpPr>
-        <p:spPr>
-          <a:xfrm>
-            <a:off x="5759577" y="4169664"/>
-            <a:ext cx="685800" cy="384048"/>
-          </a:xfrm>
-          <a:prstGeom prst="rect">
-            <a:avLst/>
-          </a:prstGeom>
-          <a:noFill/>
-          <a:ln/>
-        </p:spPr>
-        <p:txBody>
-          <a:bodyPr wrap="square" lIns="0" tIns="0" rIns="0" bIns="0" rtlCol="0" anchor="ctr"/>
-          <a:lstStyle/>
-          <a:p>
-            <a:pPr algn="ctr" indent="0" marL="0">
-              <a:buNone/>
-            </a:pPr>
-            <a:r>
-              <a:rPr lang="en-US" sz="900" b="1" dirty="0">
-                <a:solidFill>
-                  <a:srgbClr val="9D174D"/>
-                </a:solidFill>
-                <a:latin typeface="Trebuchet MS" pitchFamily="34" charset="0"/>
-                <a:ea typeface="Trebuchet MS" pitchFamily="34" charset="-122"/>
-                <a:cs typeface="Trebuchet MS" pitchFamily="34" charset="-120"/>
-              </a:rPr>
-              <a:t>a</a:t>
-            </a:r>
-            <a:endParaRPr lang="en-US" sz="900" dirty="0"/>
-          </a:p>
-        </p:txBody>
-      </p:sp>
-      <p:sp>
-        <p:nvSpPr>
-          <p:cNvPr id="53" name="Shape 51"/>
-          <p:cNvSpPr/>
-          <p:nvPr/>
-        </p:nvSpPr>
-        <p:spPr>
-          <a:xfrm>
-            <a:off x="6668262" y="4169664"/>
-            <a:ext cx="685800" cy="384048"/>
-          </a:xfrm>
-          <a:prstGeom prst="rect">
-            <a:avLst>
-              <a:gd name="adj" fmla="val 9524"/>
-            </a:avLst>
-          </a:prstGeom>
-          <a:solidFill>
-            <a:srgbClr val="FFFFFF"/>
-          </a:solidFill>
-          <a:ln w="12700">
-            <a:solidFill>
-              <a:srgbClr val="DB2777"/>
-            </a:solidFill>
-            <a:prstDash val="solid"/>
-          </a:ln>
-        </p:spPr>
-      </p:sp>
-      <p:sp>
-        <p:nvSpPr>
-          <p:cNvPr id="54" name="Text 52"/>
-          <p:cNvSpPr/>
-          <p:nvPr/>
-        </p:nvSpPr>
-        <p:spPr>
-          <a:xfrm>
-            <a:off x="6668262" y="4169664"/>
-            <a:ext cx="685800" cy="384048"/>
-          </a:xfrm>
-          <a:prstGeom prst="rect">
-            <a:avLst/>
-          </a:prstGeom>
-          <a:noFill/>
-          <a:ln/>
-        </p:spPr>
-        <p:txBody>
-          <a:bodyPr wrap="square" lIns="0" tIns="0" rIns="0" bIns="0" rtlCol="0" anchor="ctr"/>
-          <a:lstStyle/>
-          <a:p>
-            <a:pPr algn="ctr" indent="0" marL="0">
-              <a:buNone/>
-            </a:pPr>
-            <a:r>
-              <a:rPr lang="en-US" sz="900" b="1" dirty="0">
-                <a:solidFill>
-                  <a:srgbClr val="9D174D"/>
-                </a:solidFill>
-                <a:latin typeface="Trebuchet MS" pitchFamily="34" charset="0"/>
-                <a:ea typeface="Trebuchet MS" pitchFamily="34" charset="-122"/>
-                <a:cs typeface="Trebuchet MS" pitchFamily="34" charset="-120"/>
-              </a:rPr>
-              <a:t>t</a:t>
-            </a:r>
-            <a:endParaRPr lang="en-US" sz="900" dirty="0"/>
-          </a:p>
-        </p:txBody>
-      </p:sp>
-      <p:sp>
-        <p:nvSpPr>
-          <p:cNvPr id="55" name="Shape 53"/>
-          <p:cNvSpPr/>
-          <p:nvPr/>
-        </p:nvSpPr>
-        <p:spPr>
-          <a:xfrm>
-            <a:off x="7576947" y="4169664"/>
-            <a:ext cx="685800" cy="384048"/>
-          </a:xfrm>
-          <a:prstGeom prst="rect">
-            <a:avLst>
-              <a:gd name="adj" fmla="val 9524"/>
-            </a:avLst>
-          </a:prstGeom>
-          <a:solidFill>
-            <a:srgbClr val="FFFFFF"/>
-          </a:solidFill>
-          <a:ln w="12700">
-            <a:solidFill>
-              <a:srgbClr val="DB2777"/>
-            </a:solidFill>
-            <a:prstDash val="solid"/>
-          </a:ln>
-        </p:spPr>
-      </p:sp>
-      <p:sp>
-        <p:nvSpPr>
-          <p:cNvPr id="56" name="Text 54"/>
-          <p:cNvSpPr/>
-          <p:nvPr/>
-        </p:nvSpPr>
-        <p:spPr>
-          <a:xfrm>
-            <a:off x="7576947" y="4169664"/>
-            <a:ext cx="685800" cy="384048"/>
-          </a:xfrm>
-          <a:prstGeom prst="rect">
-            <a:avLst/>
-          </a:prstGeom>
-          <a:noFill/>
-          <a:ln/>
-        </p:spPr>
-        <p:txBody>
-          <a:bodyPr wrap="square" lIns="0" tIns="0" rIns="0" bIns="0" rtlCol="0" anchor="ctr"/>
-          <a:lstStyle/>
-          <a:p>
-            <a:pPr algn="ctr" indent="0" marL="0">
-              <a:buNone/>
-            </a:pPr>
-            <a:r>
-              <a:rPr lang="en-US" sz="900" b="1" dirty="0">
-                <a:solidFill>
-                  <a:srgbClr val="9D174D"/>
-                </a:solidFill>
-                <a:latin typeface="Trebuchet MS" pitchFamily="34" charset="0"/>
-                <a:ea typeface="Trebuchet MS" pitchFamily="34" charset="-122"/>
-                <a:cs typeface="Trebuchet MS" pitchFamily="34" charset="-120"/>
-              </a:rPr>
-              <a:t>or</a:t>
+              <a:t>y</a:t>
             </a:r>
             <a:endParaRPr lang="en-US" sz="900" dirty="0"/>
           </a:p>
@@ -34893,7 +34536,7 @@
                 <a:ea typeface="Calibri" pitchFamily="34" charset="-122"/>
                 <a:cs typeface="Calibri" pitchFamily="34" charset="-120"/>
               </a:rPr>
-              <a:t>Word Labs  •  wordlabs.app  •  Root: 'dic' = say, speak, or declare</a:t>
+              <a:t>Word Labs  •  wordlabs.app  •  Root: 'dic' = say, speak, proclaim</a:t>
             </a:r>
             <a:endParaRPr lang="en-US" sz="800" dirty="0"/>
           </a:p>
@@ -36062,7 +35705,7 @@
                 <a:ea typeface="Calibri" pitchFamily="34" charset="-122"/>
                 <a:cs typeface="Calibri" pitchFamily="34" charset="-120"/>
               </a:rPr>
-              <a:t>Word Labs  •  wordlabs.app  •  Root: 'dic' = say, speak, or declare</a:t>
+              <a:t>Word Labs  •  wordlabs.app  •  Root: 'dic' = say, speak, proclaim</a:t>
             </a:r>
             <a:endParaRPr lang="en-US" sz="800" dirty="0"/>
           </a:p>
@@ -36491,7 +36134,7 @@
                 <a:ea typeface="Trebuchet MS" pitchFamily="34" charset="-122"/>
                 <a:cs typeface="Trebuchet MS" pitchFamily="34" charset="-120"/>
               </a:rPr>
-              <a:t>-ate</a:t>
+              <a:t>-tion</a:t>
             </a:r>
             <a:endParaRPr lang="en-US" sz="1300" dirty="0"/>
           </a:p>
@@ -36644,7 +36287,7 @@
                 <a:ea typeface="Trebuchet MS" pitchFamily="34" charset="-122"/>
                 <a:cs typeface="Trebuchet MS" pitchFamily="34" charset="-120"/>
               </a:rPr>
-              <a:t>-tion</a:t>
+              <a:t>-ate</a:t>
             </a:r>
             <a:endParaRPr lang="en-US" sz="1300" dirty="0"/>
           </a:p>
@@ -36708,7 +36351,7 @@
                 <a:ea typeface="Trebuchet MS" pitchFamily="34" charset="-122"/>
                 <a:cs typeface="Trebuchet MS" pitchFamily="34" charset="-120"/>
               </a:rPr>
-              <a:t>contra-</a:t>
+              <a:t>con-</a:t>
             </a:r>
             <a:endParaRPr lang="en-US" sz="1300" dirty="0"/>
           </a:p>
@@ -36797,7 +36440,7 @@
                 <a:ea typeface="Trebuchet MS" pitchFamily="34" charset="-122"/>
                 <a:cs typeface="Trebuchet MS" pitchFamily="34" charset="-120"/>
               </a:rPr>
-              <a:t>-tator</a:t>
+              <a:t>-ator</a:t>
             </a:r>
             <a:endParaRPr lang="en-US" sz="1300" dirty="0"/>
           </a:p>
@@ -36950,7 +36593,7 @@
                 <a:ea typeface="Trebuchet MS" pitchFamily="34" charset="-122"/>
                 <a:cs typeface="Trebuchet MS" pitchFamily="34" charset="-120"/>
               </a:rPr>
-              <a:t>-tionary</a:t>
+              <a:t>-tate</a:t>
             </a:r>
             <a:endParaRPr lang="en-US" sz="1300" dirty="0"/>
           </a:p>
@@ -37014,7 +36657,7 @@
                 <a:ea typeface="Trebuchet MS" pitchFamily="34" charset="-122"/>
                 <a:cs typeface="Trebuchet MS" pitchFamily="34" charset="-120"/>
               </a:rPr>
-              <a:t>e-</a:t>
+              <a:t>veri-</a:t>
             </a:r>
             <a:endParaRPr lang="en-US" sz="1300" dirty="0"/>
           </a:p>
@@ -37103,7 +36746,7 @@
                 <a:ea typeface="Trebuchet MS" pitchFamily="34" charset="-122"/>
                 <a:cs typeface="Trebuchet MS" pitchFamily="34" charset="-120"/>
               </a:rPr>
-              <a:t>-tate</a:t>
+              <a:t>-tionary</a:t>
             </a:r>
             <a:endParaRPr lang="en-US" sz="1300" dirty="0"/>
           </a:p>
@@ -37274,7 +36917,7 @@
                 <a:ea typeface="Trebuchet MS" pitchFamily="34" charset="-122"/>
                 <a:cs typeface="Trebuchet MS" pitchFamily="34" charset="-120"/>
               </a:rPr>
-              <a:t>predict</a:t>
+              <a:t>dictionary</a:t>
             </a:r>
             <a:endParaRPr lang="en-US" sz="1200" dirty="0"/>
           </a:p>
@@ -37340,7 +36983,7 @@
                 <a:ea typeface="Trebuchet MS" pitchFamily="34" charset="-122"/>
                 <a:cs typeface="Trebuchet MS" pitchFamily="34" charset="-120"/>
               </a:rPr>
-              <a:t>dictionary</a:t>
+              <a:t>predict</a:t>
             </a:r>
             <a:endParaRPr lang="en-US" sz="1200" dirty="0"/>
           </a:p>
@@ -37472,7 +37115,7 @@
                 <a:ea typeface="Trebuchet MS" pitchFamily="34" charset="-122"/>
                 <a:cs typeface="Trebuchet MS" pitchFamily="34" charset="-120"/>
               </a:rPr>
-              <a:t>contradict</a:t>
+              <a:t>verdict</a:t>
             </a:r>
             <a:endParaRPr lang="en-US" sz="1200" dirty="0"/>
           </a:p>
@@ -37538,7 +37181,7 @@
                 <a:ea typeface="Trebuchet MS" pitchFamily="34" charset="-122"/>
                 <a:cs typeface="Trebuchet MS" pitchFamily="34" charset="-120"/>
               </a:rPr>
-              <a:t>verdict</a:t>
+              <a:t>contradict</a:t>
             </a:r>
             <a:endParaRPr lang="en-US" sz="1200" dirty="0"/>
           </a:p>
@@ -37604,7 +37247,7 @@
                 <a:ea typeface="Trebuchet MS" pitchFamily="34" charset="-122"/>
                 <a:cs typeface="Trebuchet MS" pitchFamily="34" charset="-120"/>
               </a:rPr>
-              <a:t>abdicate</a:t>
+              <a:t>dedicate</a:t>
             </a:r>
             <a:endParaRPr lang="en-US" sz="1200" dirty="0"/>
           </a:p>
@@ -37670,7 +37313,7 @@
                 <a:ea typeface="Trebuchet MS" pitchFamily="34" charset="-122"/>
                 <a:cs typeface="Trebuchet MS" pitchFamily="34" charset="-120"/>
               </a:rPr>
-              <a:t>edict</a:t>
+              <a:t>abdicate</a:t>
             </a:r>
             <a:endParaRPr lang="en-US" sz="1200" dirty="0"/>
           </a:p>
@@ -37962,7 +37605,7 @@
                 <a:ea typeface="Calibri" pitchFamily="34" charset="-122"/>
                 <a:cs typeface="Calibri" pitchFamily="34" charset="-120"/>
               </a:rPr>
-              <a:t>Word Labs  •  wordlabs.app  •  Root: 'dic' = say, speak, or declare</a:t>
+              <a:t>Word Labs  •  wordlabs.app  •  Root: 'dic' = say, speak, proclaim</a:t>
             </a:r>
             <a:endParaRPr lang="en-US" sz="800" dirty="0"/>
           </a:p>
@@ -38126,7 +37769,7 @@
                 <a:ea typeface="Calibri" pitchFamily="34" charset="-122"/>
                 <a:cs typeface="Calibri" pitchFamily="34" charset="-120"/>
               </a:rPr>
-              <a:t>The core part of a word carrying its basic meaning. For example, 'dic' means 'say, speak, or declare'.</a:t>
+              <a:t>The core part of a word carrying its basic meaning. For example, 'dic' means 'say, speak, proclaim'.</a:t>
             </a:r>
             <a:endParaRPr lang="en-US" sz="1350" dirty="0"/>
           </a:p>
@@ -38746,7 +38389,7 @@
                 <a:ea typeface="Calibri" pitchFamily="34" charset="-122"/>
                 <a:cs typeface="Calibri" pitchFamily="34" charset="-120"/>
               </a:rPr>
-              <a:t>Word Labs  •  wordlabs.app  •  Root: 'dic' = say, speak, or declare</a:t>
+              <a:t>Word Labs  •  wordlabs.app  •  Root: 'dic' = say, speak, proclaim</a:t>
             </a:r>
             <a:endParaRPr lang="en-US" sz="800" dirty="0"/>
           </a:p>
@@ -38858,7 +38501,7 @@
                 <a:ea typeface="Calibri" pitchFamily="34" charset="-122"/>
                 <a:cs typeface="Calibri" pitchFamily="34" charset="-120"/>
               </a:rPr>
-              <a:t>1.  The root 'dic' comes from Latin and means to say or speak.</a:t>
+              <a:t>1.  A dictionary helps us understand the meaning of words, which connects to 'dic' meaning to say or explain.</a:t>
             </a:r>
             <a:endParaRPr lang="en-US" sz="1300" dirty="0"/>
           </a:p>
@@ -38997,7 +38640,7 @@
                 <a:ea typeface="Calibri" pitchFamily="34" charset="-122"/>
                 <a:cs typeface="Calibri" pitchFamily="34" charset="-120"/>
               </a:rPr>
-              <a:t>2.  The word 'predict' means to say something happened in the past.</a:t>
+              <a:t>2.  The root 'dic' comes from a Latin word meaning to say or speak.</a:t>
             </a:r>
             <a:endParaRPr lang="en-US" sz="1300" dirty="0"/>
           </a:p>
@@ -39020,11 +38663,11 @@
             </a:avLst>
           </a:prstGeom>
           <a:solidFill>
-            <a:srgbClr val="FEE2E2"/>
-          </a:solidFill>
-          <a:ln w="12700">
-            <a:solidFill>
-              <a:srgbClr val="DC2626"/>
+            <a:srgbClr val="DCFCE7"/>
+          </a:solidFill>
+          <a:ln w="12700">
+            <a:solidFill>
+              <a:srgbClr val="16A34A"/>
             </a:solidFill>
             <a:prstDash val="solid"/>
           </a:ln>
@@ -39057,13 +38700,13 @@
             <a:r>
               <a:rPr lang="en-US" sz="1100" b="1" dirty="0">
                 <a:solidFill>
-                  <a:srgbClr val="DC2626"/>
+                  <a:srgbClr val="16A34A"/>
                 </a:solidFill>
                 <a:latin typeface="Trebuchet MS" pitchFamily="34" charset="0"/>
                 <a:ea typeface="Trebuchet MS" pitchFamily="34" charset="-122"/>
                 <a:cs typeface="Trebuchet MS" pitchFamily="34" charset="-120"/>
               </a:rPr>
-              <a:t>FALSE</a:t>
+              <a:t>TRUE</a:t>
             </a:r>
             <a:endParaRPr lang="en-US" sz="1100" dirty="0"/>
           </a:p>
@@ -39136,7 +38779,7 @@
                 <a:ea typeface="Calibri" pitchFamily="34" charset="-122"/>
                 <a:cs typeface="Calibri" pitchFamily="34" charset="-120"/>
               </a:rPr>
-              <a:t>3.  A dictionary is connected to 'dic' because it is a book of words and their meanings.</a:t>
+              <a:t>3.  The root 'dic' comes from a Greek word meaning to write.</a:t>
             </a:r>
             <a:endParaRPr lang="en-US" sz="1300" dirty="0"/>
           </a:p>
@@ -39159,11 +38802,11 @@
             </a:avLst>
           </a:prstGeom>
           <a:solidFill>
-            <a:srgbClr val="DCFCE7"/>
-          </a:solidFill>
-          <a:ln w="12700">
-            <a:solidFill>
-              <a:srgbClr val="16A34A"/>
+            <a:srgbClr val="FEE2E2"/>
+          </a:solidFill>
+          <a:ln w="12700">
+            <a:solidFill>
+              <a:srgbClr val="DC2626"/>
             </a:solidFill>
             <a:prstDash val="solid"/>
           </a:ln>
@@ -39196,13 +38839,13 @@
             <a:r>
               <a:rPr lang="en-US" sz="1100" b="1" dirty="0">
                 <a:solidFill>
-                  <a:srgbClr val="16A34A"/>
+                  <a:srgbClr val="DC2626"/>
                 </a:solidFill>
                 <a:latin typeface="Trebuchet MS" pitchFamily="34" charset="0"/>
                 <a:ea typeface="Trebuchet MS" pitchFamily="34" charset="-122"/>
                 <a:cs typeface="Trebuchet MS" pitchFamily="34" charset="-120"/>
               </a:rPr>
-              <a:t>TRUE</a:t>
+              <a:t>FALSE</a:t>
             </a:r>
             <a:endParaRPr lang="en-US" sz="1100" dirty="0"/>
           </a:p>
@@ -39275,7 +38918,7 @@
                 <a:ea typeface="Calibri" pitchFamily="34" charset="-122"/>
                 <a:cs typeface="Calibri" pitchFamily="34" charset="-120"/>
               </a:rPr>
-              <a:t>4.  The word 'dictate' contains the root 'dic' meaning to say or declare.</a:t>
+              <a:t>4.  The word 'picture' contains the root 'dic' meaning to speak.</a:t>
             </a:r>
             <a:endParaRPr lang="en-US" sz="1300" dirty="0"/>
           </a:p>
@@ -39298,11 +38941,11 @@
             </a:avLst>
           </a:prstGeom>
           <a:solidFill>
-            <a:srgbClr val="DCFCE7"/>
-          </a:solidFill>
-          <a:ln w="12700">
-            <a:solidFill>
-              <a:srgbClr val="16A34A"/>
+            <a:srgbClr val="FEE2E2"/>
+          </a:solidFill>
+          <a:ln w="12700">
+            <a:solidFill>
+              <a:srgbClr val="DC2626"/>
             </a:solidFill>
             <a:prstDash val="solid"/>
           </a:ln>
@@ -39335,13 +38978,13 @@
             <a:r>
               <a:rPr lang="en-US" sz="1100" b="1" dirty="0">
                 <a:solidFill>
-                  <a:srgbClr val="16A34A"/>
+                  <a:srgbClr val="DC2626"/>
                 </a:solidFill>
                 <a:latin typeface="Trebuchet MS" pitchFamily="34" charset="0"/>
                 <a:ea typeface="Trebuchet MS" pitchFamily="34" charset="-122"/>
                 <a:cs typeface="Trebuchet MS" pitchFamily="34" charset="-120"/>
               </a:rPr>
-              <a:t>TRUE</a:t>
+              <a:t>FALSE</a:t>
             </a:r>
             <a:endParaRPr lang="en-US" sz="1100" dirty="0"/>
           </a:p>
@@ -39414,7 +39057,7 @@
                 <a:ea typeface="Calibri" pitchFamily="34" charset="-122"/>
                 <a:cs typeface="Calibri" pitchFamily="34" charset="-120"/>
               </a:rPr>
-              <a:t>5.  The root 'dic' comes from the Greek word for writing.</a:t>
+              <a:t>5.  The word 'predict' uses 'dic' because it means to say something before it happens.</a:t>
             </a:r>
             <a:endParaRPr lang="en-US" sz="1300" dirty="0"/>
           </a:p>
@@ -39437,11 +39080,11 @@
             </a:avLst>
           </a:prstGeom>
           <a:solidFill>
-            <a:srgbClr val="FEE2E2"/>
-          </a:solidFill>
-          <a:ln w="12700">
-            <a:solidFill>
-              <a:srgbClr val="DC2626"/>
+            <a:srgbClr val="DCFCE7"/>
+          </a:solidFill>
+          <a:ln w="12700">
+            <a:solidFill>
+              <a:srgbClr val="16A34A"/>
             </a:solidFill>
             <a:prstDash val="solid"/>
           </a:ln>
@@ -39474,13 +39117,13 @@
             <a:r>
               <a:rPr lang="en-US" sz="1100" b="1" dirty="0">
                 <a:solidFill>
-                  <a:srgbClr val="DC2626"/>
+                  <a:srgbClr val="16A34A"/>
                 </a:solidFill>
                 <a:latin typeface="Trebuchet MS" pitchFamily="34" charset="0"/>
                 <a:ea typeface="Trebuchet MS" pitchFamily="34" charset="-122"/>
                 <a:cs typeface="Trebuchet MS" pitchFamily="34" charset="-120"/>
               </a:rPr>
-              <a:t>FALSE</a:t>
+              <a:t>TRUE</a:t>
             </a:r>
             <a:endParaRPr lang="en-US" sz="1100" dirty="0"/>
           </a:p>
@@ -39772,7 +39415,7 @@
                 <a:ea typeface="Calibri" pitchFamily="34" charset="-122"/>
                 <a:cs typeface="Calibri" pitchFamily="34" charset="-120"/>
               </a:rPr>
-              <a:t>Word Labs  •  wordlabs.app  •  Root: 'dic' = say, speak, or declare</a:t>
+              <a:t>Word Labs  •  wordlabs.app  •  Root: 'dic' = say, speak, proclaim</a:t>
             </a:r>
             <a:endParaRPr lang="en-US" sz="800" dirty="0"/>
           </a:p>
@@ -39909,7 +39552,7 @@
                 <a:ea typeface="Trebuchet MS" pitchFamily="34" charset="-122"/>
                 <a:cs typeface="Trebuchet MS" pitchFamily="34" charset="-120"/>
               </a:rPr>
-              <a:t>say, speak, or declare</a:t>
+              <a:t>say, speak, proclaim</a:t>
             </a:r>
             <a:endParaRPr lang="en-US" sz="2000" dirty="0"/>
           </a:p>
@@ -40119,7 +39762,7 @@
                 <a:ea typeface="Trebuchet MS" pitchFamily="34" charset="-122"/>
                 <a:cs typeface="Trebuchet MS" pitchFamily="34" charset="-120"/>
               </a:rPr>
-              <a:t>predict</a:t>
+              <a:t>dictionary</a:t>
             </a:r>
             <a:endParaRPr lang="en-US" sz="1300" dirty="0"/>
           </a:p>
@@ -40185,7 +39828,7 @@
                 <a:ea typeface="Trebuchet MS" pitchFamily="34" charset="-122"/>
                 <a:cs typeface="Trebuchet MS" pitchFamily="34" charset="-120"/>
               </a:rPr>
-              <a:t>dictionary</a:t>
+              <a:t>predict</a:t>
             </a:r>
             <a:endParaRPr lang="en-US" sz="1300" dirty="0"/>
           </a:p>
@@ -40317,7 +39960,7 @@
                 <a:ea typeface="Trebuchet MS" pitchFamily="34" charset="-122"/>
                 <a:cs typeface="Trebuchet MS" pitchFamily="34" charset="-120"/>
               </a:rPr>
-              <a:t>contradict</a:t>
+              <a:t>verdict</a:t>
             </a:r>
             <a:endParaRPr lang="en-US" sz="1300" dirty="0"/>
           </a:p>
@@ -40383,7 +40026,7 @@
                 <a:ea typeface="Trebuchet MS" pitchFamily="34" charset="-122"/>
                 <a:cs typeface="Trebuchet MS" pitchFamily="34" charset="-120"/>
               </a:rPr>
-              <a:t>verdict</a:t>
+              <a:t>contradict</a:t>
             </a:r>
             <a:endParaRPr lang="en-US" sz="1300" dirty="0"/>
           </a:p>
@@ -40449,7 +40092,7 @@
                 <a:ea typeface="Trebuchet MS" pitchFamily="34" charset="-122"/>
                 <a:cs typeface="Trebuchet MS" pitchFamily="34" charset="-120"/>
               </a:rPr>
-              <a:t>abdicate</a:t>
+              <a:t>dedicate</a:t>
             </a:r>
             <a:endParaRPr lang="en-US" sz="1300" dirty="0"/>
           </a:p>
@@ -40741,7 +40384,7 @@
                 <a:ea typeface="Calibri" pitchFamily="34" charset="-122"/>
                 <a:cs typeface="Calibri" pitchFamily="34" charset="-120"/>
               </a:rPr>
-              <a:t>Word Labs  •  wordlabs.app  •  Root: 'dic' = say, speak, or declare</a:t>
+              <a:t>Word Labs  •  wordlabs.app  •  Root: 'dic' = say, speak, proclaim</a:t>
             </a:r>
             <a:endParaRPr lang="en-US" sz="800" dirty="0"/>
           </a:p>
@@ -41170,7 +40813,7 @@
                 <a:ea typeface="Trebuchet MS" pitchFamily="34" charset="-122"/>
                 <a:cs typeface="Trebuchet MS" pitchFamily="34" charset="-120"/>
               </a:rPr>
-              <a:t>-ate</a:t>
+              <a:t>-tion</a:t>
             </a:r>
             <a:endParaRPr lang="en-US" sz="1300" dirty="0"/>
           </a:p>
@@ -41323,7 +40966,7 @@
                 <a:ea typeface="Trebuchet MS" pitchFamily="34" charset="-122"/>
                 <a:cs typeface="Trebuchet MS" pitchFamily="34" charset="-120"/>
               </a:rPr>
-              <a:t>-tion</a:t>
+              <a:t>-ate</a:t>
             </a:r>
             <a:endParaRPr lang="en-US" sz="1300" dirty="0"/>
           </a:p>
@@ -41387,7 +41030,7 @@
                 <a:ea typeface="Trebuchet MS" pitchFamily="34" charset="-122"/>
                 <a:cs typeface="Trebuchet MS" pitchFamily="34" charset="-120"/>
               </a:rPr>
-              <a:t>contra-</a:t>
+              <a:t>con-</a:t>
             </a:r>
             <a:endParaRPr lang="en-US" sz="1300" dirty="0"/>
           </a:p>
@@ -41476,7 +41119,7 @@
                 <a:ea typeface="Trebuchet MS" pitchFamily="34" charset="-122"/>
                 <a:cs typeface="Trebuchet MS" pitchFamily="34" charset="-120"/>
               </a:rPr>
-              <a:t>-tator</a:t>
+              <a:t>-ator</a:t>
             </a:r>
             <a:endParaRPr lang="en-US" sz="1300" dirty="0"/>
           </a:p>
@@ -41629,7 +41272,7 @@
                 <a:ea typeface="Trebuchet MS" pitchFamily="34" charset="-122"/>
                 <a:cs typeface="Trebuchet MS" pitchFamily="34" charset="-120"/>
               </a:rPr>
-              <a:t>-tionary</a:t>
+              <a:t>-tate</a:t>
             </a:r>
             <a:endParaRPr lang="en-US" sz="1300" dirty="0"/>
           </a:p>
@@ -41693,7 +41336,7 @@
                 <a:ea typeface="Trebuchet MS" pitchFamily="34" charset="-122"/>
                 <a:cs typeface="Trebuchet MS" pitchFamily="34" charset="-120"/>
               </a:rPr>
-              <a:t>e-</a:t>
+              <a:t>veri-</a:t>
             </a:r>
             <a:endParaRPr lang="en-US" sz="1300" dirty="0"/>
           </a:p>
@@ -41782,7 +41425,7 @@
                 <a:ea typeface="Trebuchet MS" pitchFamily="34" charset="-122"/>
                 <a:cs typeface="Trebuchet MS" pitchFamily="34" charset="-120"/>
               </a:rPr>
-              <a:t>-tate</a:t>
+              <a:t>-tionary</a:t>
             </a:r>
             <a:endParaRPr lang="en-US" sz="1300" dirty="0"/>
           </a:p>
@@ -42060,7 +41703,7 @@
         <p:spPr>
           <a:xfrm>
             <a:off x="4306824" y="4178808"/>
-            <a:ext cx="950976" cy="420624"/>
+            <a:ext cx="1097280" cy="420624"/>
           </a:xfrm>
           <a:prstGeom prst="rect">
             <a:avLst>
@@ -42094,7 +41737,7 @@
         <p:spPr>
           <a:xfrm>
             <a:off x="4306824" y="4178808"/>
-            <a:ext cx="950976" cy="420624"/>
+            <a:ext cx="1097280" cy="420624"/>
           </a:xfrm>
           <a:prstGeom prst="rect">
             <a:avLst/>
@@ -42118,7 +41761,7 @@
                 <a:ea typeface="Trebuchet MS" pitchFamily="34" charset="-122"/>
                 <a:cs typeface="Trebuchet MS" pitchFamily="34" charset="-120"/>
               </a:rPr>
-              <a:t>-ate</a:t>
+              <a:t>-tion</a:t>
             </a:r>
             <a:endParaRPr lang="en-US" sz="1300" dirty="0"/>
           </a:p>
@@ -42132,7 +41775,7 @@
         </p:nvSpPr>
         <p:spPr>
           <a:xfrm>
-            <a:off x="5330952" y="4178808"/>
+            <a:off x="5477256" y="4178808"/>
             <a:ext cx="365760" cy="420624"/>
           </a:xfrm>
           <a:prstGeom prst="rect">
@@ -42171,7 +41814,7 @@
         </p:nvSpPr>
         <p:spPr>
           <a:xfrm>
-            <a:off x="5742432" y="4178808"/>
+            <a:off x="5888736" y="4178808"/>
             <a:ext cx="2194560" cy="420624"/>
           </a:xfrm>
           <a:prstGeom prst="rect">
@@ -42198,7 +41841,7 @@
         </p:nvSpPr>
         <p:spPr>
           <a:xfrm>
-            <a:off x="5742432" y="4178808"/>
+            <a:off x="5888736" y="4178808"/>
             <a:ext cx="2194560" cy="420624"/>
           </a:xfrm>
           <a:prstGeom prst="rect">
@@ -42515,7 +42158,7 @@
                 <a:ea typeface="Calibri" pitchFamily="34" charset="-122"/>
                 <a:cs typeface="Calibri" pitchFamily="34" charset="-120"/>
               </a:rPr>
-              <a:t>Word Labs  •  wordlabs.app  •  Root: 'dic' = say, speak, or declare</a:t>
+              <a:t>Word Labs  •  wordlabs.app  •  Root: 'dic' = say, speak, proclaim</a:t>
             </a:r>
             <a:endParaRPr lang="en-US" sz="800" dirty="0"/>
           </a:p>
@@ -42693,7 +42336,7 @@
                 <a:ea typeface="Calibri" pitchFamily="34" charset="-122"/>
                 <a:cs typeface="Calibri" pitchFamily="34" charset="-120"/>
               </a:rPr>
-              <a:t>To say the opposite of what someone else has said, going against their words.</a:t>
+              <a:t>An official decision or judgement made about something, like in a court of law.</a:t>
             </a:r>
             <a:endParaRPr lang="en-US" sz="1200" dirty="0"/>
           </a:p>
@@ -42766,7 +42409,7 @@
                 <a:ea typeface="Trebuchet MS" pitchFamily="34" charset="-122"/>
                 <a:cs typeface="Trebuchet MS" pitchFamily="34" charset="-120"/>
               </a:rPr>
-              <a:t>predict</a:t>
+              <a:t>dictionary</a:t>
             </a:r>
             <a:endParaRPr lang="en-US" sz="1200" dirty="0"/>
           </a:p>
@@ -42832,7 +42475,7 @@
                 <a:ea typeface="Calibri" pitchFamily="34" charset="-122"/>
                 <a:cs typeface="Calibri" pitchFamily="34" charset="-120"/>
               </a:rPr>
-              <a:t>To give up an important position of power, like when a king or queen leaves the throne.</a:t>
+              <a:t>To give your time and effort fully to a person or a special purpose.</a:t>
             </a:r>
             <a:endParaRPr lang="en-US" sz="1200" dirty="0"/>
           </a:p>
@@ -42905,7 +42548,7 @@
                 <a:ea typeface="Trebuchet MS" pitchFamily="34" charset="-122"/>
                 <a:cs typeface="Trebuchet MS" pitchFamily="34" charset="-120"/>
               </a:rPr>
-              <a:t>dictionary</a:t>
+              <a:t>predict</a:t>
             </a:r>
             <a:endParaRPr lang="en-US" sz="1200" dirty="0"/>
           </a:p>
@@ -42971,7 +42614,7 @@
                 <a:ea typeface="Calibri" pitchFamily="34" charset="-122"/>
                 <a:cs typeface="Calibri" pitchFamily="34" charset="-120"/>
               </a:rPr>
-              <a:t>To say something out loud for someone else to write down, or to give orders that others must follow.</a:t>
+              <a:t>To say something out loud for someone else to write down, or to give orders that must be followed.</a:t>
             </a:r>
             <a:endParaRPr lang="en-US" sz="1200" dirty="0"/>
           </a:p>
@@ -43110,7 +42753,7 @@
                 <a:ea typeface="Calibri" pitchFamily="34" charset="-122"/>
                 <a:cs typeface="Calibri" pitchFamily="34" charset="-120"/>
               </a:rPr>
-              <a:t>The official decision made by a judge or jury about whether someone is guilty or not.</a:t>
+              <a:t>To say the opposite of what someone else has said, disagreeing with their words.</a:t>
             </a:r>
             <a:endParaRPr lang="en-US" sz="1200" dirty="0"/>
           </a:p>
@@ -43183,7 +42826,7 @@
                 <a:ea typeface="Trebuchet MS" pitchFamily="34" charset="-122"/>
                 <a:cs typeface="Trebuchet MS" pitchFamily="34" charset="-120"/>
               </a:rPr>
-              <a:t>contradict</a:t>
+              <a:t>verdict</a:t>
             </a:r>
             <a:endParaRPr lang="en-US" sz="1200" dirty="0"/>
           </a:p>
@@ -43249,7 +42892,7 @@
                 <a:ea typeface="Calibri" pitchFamily="34" charset="-122"/>
                 <a:cs typeface="Calibri" pitchFamily="34" charset="-120"/>
               </a:rPr>
-              <a:t>A book that lists words in alphabetical order and explains what they mean.</a:t>
+              <a:t>To say what you think will happen in the future before it actually occurs.</a:t>
             </a:r>
             <a:endParaRPr lang="en-US" sz="1200" dirty="0"/>
           </a:p>
@@ -43322,7 +42965,7 @@
                 <a:ea typeface="Trebuchet MS" pitchFamily="34" charset="-122"/>
                 <a:cs typeface="Trebuchet MS" pitchFamily="34" charset="-120"/>
               </a:rPr>
-              <a:t>verdict</a:t>
+              <a:t>contradict</a:t>
             </a:r>
             <a:endParaRPr lang="en-US" sz="1200" dirty="0"/>
           </a:p>
@@ -43388,7 +43031,7 @@
                 <a:ea typeface="Calibri" pitchFamily="34" charset="-122"/>
                 <a:cs typeface="Calibri" pitchFamily="34" charset="-120"/>
               </a:rPr>
-              <a:t>To point to or show something clearly so others can see or understand it.</a:t>
+              <a:t>To point to or show something clearly so others can understand.</a:t>
             </a:r>
             <a:endParaRPr lang="en-US" sz="1200" dirty="0"/>
           </a:p>
@@ -43461,7 +43104,7 @@
                 <a:ea typeface="Trebuchet MS" pitchFamily="34" charset="-122"/>
                 <a:cs typeface="Trebuchet MS" pitchFamily="34" charset="-120"/>
               </a:rPr>
-              <a:t>abdicate</a:t>
+              <a:t>dedicate</a:t>
             </a:r>
             <a:endParaRPr lang="en-US" sz="1200" dirty="0"/>
           </a:p>
@@ -43527,7 +43170,7 @@
                 <a:ea typeface="Calibri" pitchFamily="34" charset="-122"/>
                 <a:cs typeface="Calibri" pitchFamily="34" charset="-120"/>
               </a:rPr>
-              <a:t>To say what you think will happen in the future before it actually occurs.</a:t>
+              <a:t>A book that lists words in alphabetical order and explains what they mean.</a:t>
             </a:r>
             <a:endParaRPr lang="en-US" sz="1200" dirty="0"/>
           </a:p>
@@ -43819,7 +43462,7 @@
                 <a:ea typeface="Calibri" pitchFamily="34" charset="-122"/>
                 <a:cs typeface="Calibri" pitchFamily="34" charset="-120"/>
               </a:rPr>
-              <a:t>Word Labs  •  wordlabs.app  •  Root: 'dic' = say, speak, or declare</a:t>
+              <a:t>Word Labs  •  wordlabs.app  •  Root: 'dic' = say, speak, proclaim</a:t>
             </a:r>
             <a:endParaRPr lang="en-US" sz="800" dirty="0"/>
           </a:p>
@@ -44022,7 +43665,7 @@
                 <a:ea typeface="Calibri" pitchFamily="34" charset="-122"/>
                 <a:cs typeface="Calibri" pitchFamily="34" charset="-120"/>
               </a:rPr>
-              <a:t>The teacher asked the students to predict what would happen next in the story based on the clues they had found.</a:t>
+              <a:t>The weather forecast will predict whether we need to bring an umbrella to school tomorrow.</a:t>
             </a:r>
             <a:endParaRPr lang="en-US" sz="1500" dirty="0"/>
           </a:p>
@@ -44186,7 +43829,7 @@
                 <a:ea typeface="Calibri" pitchFamily="34" charset="-122"/>
                 <a:cs typeface="Calibri" pitchFamily="34" charset="-120"/>
               </a:rPr>
-              <a:t>When you contradict someone, you are saying the opposite of what they have told you.</a:t>
+              <a:t>Our teacher asked us to use a dictionary to find the meaning of any unfamiliar words in the passage.</a:t>
             </a:r>
             <a:endParaRPr lang="en-US" sz="1500" dirty="0"/>
           </a:p>
@@ -44350,7 +43993,7 @@
                 <a:ea typeface="Calibri" pitchFamily="34" charset="-122"/>
                 <a:cs typeface="Calibri" pitchFamily="34" charset="-120"/>
               </a:rPr>
-              <a:t>The judge announced the verdict after listening carefully to both sides of the argument.</a:t>
+              <a:t>The captain had to dictate instructions to the crew during the storm so everyone knew what to do.</a:t>
             </a:r>
             <a:endParaRPr lang="en-US" sz="1500" dirty="0"/>
           </a:p>

--- a/output/wordlabs-dic-3day.pptx
+++ b/output/wordlabs-dic-3day.pptx
@@ -4240,7 +4240,7 @@
                 <a:ea typeface="Calibri" pitchFamily="34" charset="-122"/>
                 <a:cs typeface="Calibri" pitchFamily="34" charset="-120"/>
               </a:rPr>
-              <a:t>"say, speak, proclaim"</a:t>
+              <a:t>"say; speak"</a:t>
             </a:r>
             <a:endParaRPr lang="en-US" sz="2200" dirty="0"/>
           </a:p>
@@ -4279,7 +4279,7 @@
                 <a:ea typeface="Calibri" pitchFamily="34" charset="-122"/>
                 <a:cs typeface="Calibri" pitchFamily="34" charset="-120"/>
               </a:rPr>
-              <a:t>Origin: Latin: dicere</a:t>
+              <a:t>Origin: Latin root</a:t>
             </a:r>
             <a:endParaRPr lang="en-US" sz="1300" dirty="0"/>
           </a:p>
@@ -5288,7 +5288,7 @@
                 <a:ea typeface="Calibri" pitchFamily="34" charset="-122"/>
                 <a:cs typeface="Calibri" pitchFamily="34" charset="-120"/>
               </a:rPr>
-              <a:t>Word Labs  •  wordlabs.app  •  Root: 'dic' = say, speak, proclaim</a:t>
+              <a:t>Word Labs  •  wordlabs.app  •  Root: 'dic' = say; speak</a:t>
             </a:r>
             <a:endParaRPr lang="en-US" sz="800" dirty="0"/>
           </a:p>
@@ -5622,7 +5622,7 @@
                 <a:ea typeface="Trebuchet MS" pitchFamily="34" charset="-122"/>
                 <a:cs typeface="Trebuchet MS" pitchFamily="34" charset="-120"/>
               </a:rPr>
-              <a:t>2</a:t>
+              <a:t>0</a:t>
             </a:r>
             <a:pPr algn="ctr" indent="0" marL="0">
               <a:buNone/>
@@ -5636,7 +5636,7 @@
                 <a:ea typeface="Trebuchet MS" pitchFamily="34" charset="-122"/>
                 <a:cs typeface="Trebuchet MS" pitchFamily="34" charset="-120"/>
               </a:rPr>
-              <a:t>  punctuation marks</a:t>
+              <a:t>  punctuation mark</a:t>
             </a:r>
             <a:endParaRPr lang="en-US" sz="2800" dirty="0"/>
           </a:p>
@@ -5928,7 +5928,7 @@
                 <a:ea typeface="Calibri" pitchFamily="34" charset="-122"/>
                 <a:cs typeface="Calibri" pitchFamily="34" charset="-120"/>
               </a:rPr>
-              <a:t>Word Labs  •  wordlabs.app  •  Root: 'dic' = say, speak, proclaim</a:t>
+              <a:t>Word Labs  •  wordlabs.app  •  Root: 'dic' = say; speak</a:t>
             </a:r>
             <a:endParaRPr lang="en-US" sz="800" dirty="0"/>
           </a:p>
@@ -6040,7 +6040,7 @@
                 <a:ea typeface="Calibri" pitchFamily="34" charset="-122"/>
                 <a:cs typeface="Calibri" pitchFamily="34" charset="-120"/>
               </a:rPr>
-              <a:t>Can you </a:t>
+              <a:t>There was a </a:t>
             </a:r>
             <a:pPr algn="l" indent="0" marL="0">
               <a:buNone/>
@@ -6057,7 +6057,7 @@
                 <a:ea typeface="Calibri" pitchFamily="34" charset="-122"/>
                 <a:cs typeface="Calibri" pitchFamily="34" charset="-120"/>
               </a:rPr>
-              <a:t>predict</a:t>
+              <a:t>contradiction</a:t>
             </a:r>
             <a:pPr algn="l" indent="0" marL="0">
               <a:buNone/>
@@ -6071,7 +6071,7 @@
                 <a:ea typeface="Calibri" pitchFamily="34" charset="-122"/>
                 <a:cs typeface="Calibri" pitchFamily="34" charset="-120"/>
               </a:rPr>
-              <a:t> what will happen next, or does the evidence </a:t>
+              <a:t> between the two witnesses' stories. The priest gave a </a:t>
             </a:r>
             <a:pPr algn="l" indent="0" marL="0">
               <a:buNone/>
@@ -6088,7 +6088,7 @@
                 <a:ea typeface="Calibri" pitchFamily="34" charset="-122"/>
                 <a:cs typeface="Calibri" pitchFamily="34" charset="-120"/>
               </a:rPr>
-              <a:t>indicate</a:t>
+              <a:t>benediction</a:t>
             </a:r>
             <a:pPr algn="l" indent="0" marL="0">
               <a:buNone/>
@@ -6102,7 +6102,7 @@
                 <a:ea typeface="Calibri" pitchFamily="34" charset="-122"/>
                 <a:cs typeface="Calibri" pitchFamily="34" charset="-120"/>
               </a:rPr>
-              <a:t> something unexpected?</a:t>
+              <a:t> to close the wedding ceremony.</a:t>
             </a:r>
             <a:endParaRPr lang="en-US" sz="1800" dirty="0"/>
           </a:p>
@@ -6257,7 +6257,7 @@
                 <a:ea typeface="Trebuchet MS" pitchFamily="34" charset="-122"/>
                 <a:cs typeface="Trebuchet MS" pitchFamily="34" charset="-120"/>
               </a:rPr>
-              <a:t>predict</a:t>
+              <a:t>contradiction</a:t>
             </a:r>
             <a:endParaRPr lang="en-US" sz="1400" dirty="0"/>
           </a:p>
@@ -6385,7 +6385,7 @@
                 <a:ea typeface="Trebuchet MS" pitchFamily="34" charset="-122"/>
                 <a:cs typeface="Trebuchet MS" pitchFamily="34" charset="-120"/>
               </a:rPr>
-              <a:t>indicate</a:t>
+              <a:t>benediction</a:t>
             </a:r>
             <a:endParaRPr lang="en-US" sz="1400" dirty="0"/>
           </a:p>
@@ -6716,7 +6716,7 @@
                 <a:ea typeface="Calibri" pitchFamily="34" charset="-122"/>
                 <a:cs typeface="Calibri" pitchFamily="34" charset="-120"/>
               </a:rPr>
-              <a:t>Word Labs  •  wordlabs.app  •  Root: 'dic' = say, speak, proclaim</a:t>
+              <a:t>Word Labs  •  wordlabs.app  •  Root: 'dic' = say; speak</a:t>
             </a:r>
             <a:endParaRPr lang="en-US" sz="800" dirty="0"/>
           </a:p>
@@ -6855,7 +6855,7 @@
                 <a:ea typeface="Trebuchet MS" pitchFamily="34" charset="-122"/>
                 <a:cs typeface="Trebuchet MS" pitchFamily="34" charset="-120"/>
               </a:rPr>
-              <a:t>predict</a:t>
+              <a:t>contradiction</a:t>
             </a:r>
             <a:endParaRPr lang="en-US" sz="2800" dirty="0"/>
           </a:p>
@@ -7543,7 +7543,7 @@
                 <a:ea typeface="Calibri" pitchFamily="34" charset="-122"/>
                 <a:cs typeface="Calibri" pitchFamily="34" charset="-120"/>
               </a:rPr>
-              <a:t>Word Labs  •  wordlabs.app  •  Root: 'dic' = say, speak, proclaim</a:t>
+              <a:t>Word Labs  •  wordlabs.app  •  Root: 'dic' = say; speak</a:t>
             </a:r>
             <a:endParaRPr lang="en-US" sz="800" dirty="0"/>
           </a:p>
@@ -7682,7 +7682,7 @@
                 <a:ea typeface="Trebuchet MS" pitchFamily="34" charset="-122"/>
                 <a:cs typeface="Trebuchet MS" pitchFamily="34" charset="-120"/>
               </a:rPr>
-              <a:t>predict</a:t>
+              <a:t>contradiction</a:t>
             </a:r>
             <a:endParaRPr lang="en-US" sz="2800" dirty="0"/>
           </a:p>
@@ -7821,7 +7821,7 @@
                 <a:ea typeface="Trebuchet MS" pitchFamily="34" charset="-122"/>
                 <a:cs typeface="Trebuchet MS" pitchFamily="34" charset="-120"/>
               </a:rPr>
-              <a:t>pre</a:t>
+              <a:t>contra</a:t>
             </a:r>
             <a:endParaRPr lang="en-US" sz="1300" dirty="0"/>
           </a:p>
@@ -7860,7 +7860,7 @@
                 <a:ea typeface="Calibri" pitchFamily="34" charset="-122"/>
                 <a:cs typeface="Calibri" pitchFamily="34" charset="-120"/>
               </a:rPr>
-              <a:t>before</a:t>
+              <a:t>against; opposite</a:t>
             </a:r>
             <a:endParaRPr lang="en-US" sz="850" dirty="0"/>
           </a:p>
@@ -7972,7 +7972,7 @@
                 <a:ea typeface="Calibri" pitchFamily="34" charset="-122"/>
                 <a:cs typeface="Calibri" pitchFamily="34" charset="-120"/>
               </a:rPr>
-              <a:t>say, speak</a:t>
+              <a:t>say; speak</a:t>
             </a:r>
             <a:endParaRPr lang="en-US" sz="850" dirty="0"/>
           </a:p>
@@ -8045,7 +8045,7 @@
                 <a:ea typeface="Trebuchet MS" pitchFamily="34" charset="-122"/>
                 <a:cs typeface="Trebuchet MS" pitchFamily="34" charset="-120"/>
               </a:rPr>
-              <a:t>t</a:t>
+              <a:t>tion</a:t>
             </a:r>
             <a:endParaRPr lang="en-US" sz="1300" dirty="0"/>
           </a:p>
@@ -8084,7 +8084,7 @@
                 <a:ea typeface="Calibri" pitchFamily="34" charset="-122"/>
                 <a:cs typeface="Calibri" pitchFamily="34" charset="-120"/>
               </a:rPr>
-              <a:t>word-forming consonant</a:t>
+              <a:t>act or process of</a:t>
             </a:r>
             <a:endParaRPr lang="en-US" sz="850" dirty="0"/>
           </a:p>
@@ -8640,7 +8640,7 @@
                 <a:ea typeface="Calibri" pitchFamily="34" charset="-122"/>
                 <a:cs typeface="Calibri" pitchFamily="34" charset="-120"/>
               </a:rPr>
-              <a:t>Word Labs  •  wordlabs.app  •  Root: 'dic' = say, speak, proclaim</a:t>
+              <a:t>Word Labs  •  wordlabs.app  •  Root: 'dic' = say; speak</a:t>
             </a:r>
             <a:endParaRPr lang="en-US" sz="800" dirty="0"/>
           </a:p>
@@ -8779,7 +8779,7 @@
                 <a:ea typeface="Trebuchet MS" pitchFamily="34" charset="-122"/>
                 <a:cs typeface="Trebuchet MS" pitchFamily="34" charset="-120"/>
               </a:rPr>
-              <a:t>predict</a:t>
+              <a:t>contradiction</a:t>
             </a:r>
             <a:endParaRPr lang="en-US" sz="2800" dirty="0"/>
           </a:p>
@@ -8918,7 +8918,7 @@
                 <a:ea typeface="Trebuchet MS" pitchFamily="34" charset="-122"/>
                 <a:cs typeface="Trebuchet MS" pitchFamily="34" charset="-120"/>
               </a:rPr>
-              <a:t>pre</a:t>
+              <a:t>contra</a:t>
             </a:r>
             <a:endParaRPr lang="en-US" sz="1300" dirty="0"/>
           </a:p>
@@ -8957,7 +8957,7 @@
                 <a:ea typeface="Calibri" pitchFamily="34" charset="-122"/>
                 <a:cs typeface="Calibri" pitchFamily="34" charset="-120"/>
               </a:rPr>
-              <a:t>before</a:t>
+              <a:t>against; opposite</a:t>
             </a:r>
             <a:endParaRPr lang="en-US" sz="850" dirty="0"/>
           </a:p>
@@ -9069,7 +9069,7 @@
                 <a:ea typeface="Calibri" pitchFamily="34" charset="-122"/>
                 <a:cs typeface="Calibri" pitchFamily="34" charset="-120"/>
               </a:rPr>
-              <a:t>say, speak</a:t>
+              <a:t>say; speak</a:t>
             </a:r>
             <a:endParaRPr lang="en-US" sz="850" dirty="0"/>
           </a:p>
@@ -9142,7 +9142,7 @@
                 <a:ea typeface="Trebuchet MS" pitchFamily="34" charset="-122"/>
                 <a:cs typeface="Trebuchet MS" pitchFamily="34" charset="-120"/>
               </a:rPr>
-              <a:t>t</a:t>
+              <a:t>tion</a:t>
             </a:r>
             <a:endParaRPr lang="en-US" sz="1300" dirty="0"/>
           </a:p>
@@ -9181,7 +9181,7 @@
                 <a:ea typeface="Calibri" pitchFamily="34" charset="-122"/>
                 <a:cs typeface="Calibri" pitchFamily="34" charset="-120"/>
               </a:rPr>
-              <a:t>word-forming consonant</a:t>
+              <a:t>act or process of</a:t>
             </a:r>
             <a:endParaRPr lang="en-US" sz="850" dirty="0"/>
           </a:p>
@@ -9288,8 +9288,8 @@
         </p:nvSpPr>
         <p:spPr>
           <a:xfrm>
-            <a:off x="2999232" y="3364992"/>
-            <a:ext cx="1645920" cy="475488"/>
+            <a:off x="1975104" y="3364992"/>
+            <a:ext cx="1554480" cy="475488"/>
           </a:xfrm>
           <a:prstGeom prst="rect">
             <a:avLst>
@@ -9315,8 +9315,8 @@
         </p:nvSpPr>
         <p:spPr>
           <a:xfrm>
-            <a:off x="2999232" y="3364992"/>
-            <a:ext cx="1645920" cy="475488"/>
+            <a:off x="1975104" y="3364992"/>
+            <a:ext cx="1554480" cy="475488"/>
           </a:xfrm>
           <a:prstGeom prst="rect">
             <a:avLst/>
@@ -9340,7 +9340,7 @@
                 <a:ea typeface="Trebuchet MS" pitchFamily="34" charset="-122"/>
                 <a:cs typeface="Trebuchet MS" pitchFamily="34" charset="-120"/>
               </a:rPr>
-              <a:t>pre</a:t>
+              <a:t>con</a:t>
             </a:r>
             <a:endParaRPr lang="en-US" sz="1400" dirty="0"/>
           </a:p>
@@ -9354,8 +9354,8 @@
         </p:nvSpPr>
         <p:spPr>
           <a:xfrm>
-            <a:off x="4645152" y="3364992"/>
-            <a:ext cx="1097280" cy="475488"/>
+            <a:off x="3529584" y="3364992"/>
+            <a:ext cx="73152" cy="475488"/>
           </a:xfrm>
           <a:prstGeom prst="rect">
             <a:avLst/>
@@ -9393,8 +9393,8 @@
         </p:nvSpPr>
         <p:spPr>
           <a:xfrm>
-            <a:off x="5742432" y="3364992"/>
-            <a:ext cx="1645920" cy="475488"/>
+            <a:off x="3602736" y="3364992"/>
+            <a:ext cx="1554480" cy="475488"/>
           </a:xfrm>
           <a:prstGeom prst="rect">
             <a:avLst>
@@ -9420,8 +9420,8 @@
         </p:nvSpPr>
         <p:spPr>
           <a:xfrm>
-            <a:off x="5742432" y="3364992"/>
-            <a:ext cx="1645920" cy="475488"/>
+            <a:off x="3602736" y="3364992"/>
+            <a:ext cx="1554480" cy="475488"/>
           </a:xfrm>
           <a:prstGeom prst="rect">
             <a:avLst/>
@@ -9445,7 +9445,7 @@
                 <a:ea typeface="Trebuchet MS" pitchFamily="34" charset="-122"/>
                 <a:cs typeface="Trebuchet MS" pitchFamily="34" charset="-120"/>
               </a:rPr>
-              <a:t>dict</a:t>
+              <a:t>tra</a:t>
             </a:r>
             <a:endParaRPr lang="en-US" sz="1400" dirty="0"/>
           </a:p>
@@ -9453,7 +9453,217 @@
       </p:sp>
       <p:sp>
         <p:nvSpPr>
-          <p:cNvPr id="33" name="Shape 31"/>
+          <p:cNvPr id="33" name="Text 31"/>
+          <p:cNvSpPr/>
+          <p:nvPr/>
+        </p:nvSpPr>
+        <p:spPr>
+          <a:xfrm>
+            <a:off x="5157216" y="3364992"/>
+            <a:ext cx="73152" cy="475488"/>
+          </a:xfrm>
+          <a:prstGeom prst="rect">
+            <a:avLst/>
+          </a:prstGeom>
+          <a:noFill/>
+          <a:ln/>
+        </p:spPr>
+        <p:txBody>
+          <a:bodyPr wrap="square" lIns="0" tIns="0" rIns="0" bIns="0" rtlCol="0" anchor="ctr"/>
+          <a:lstStyle/>
+          <a:p>
+            <a:pPr algn="ctr" indent="0" marL="0">
+              <a:buNone/>
+            </a:pPr>
+            <a:r>
+              <a:rPr lang="en-US" sz="1600" b="1" dirty="0">
+                <a:solidFill>
+                  <a:srgbClr val="0D9488"/>
+                </a:solidFill>
+                <a:latin typeface="Trebuchet MS" pitchFamily="34" charset="0"/>
+                <a:ea typeface="Trebuchet MS" pitchFamily="34" charset="-122"/>
+                <a:cs typeface="Trebuchet MS" pitchFamily="34" charset="-120"/>
+              </a:rPr>
+              <a:t>·</a:t>
+            </a:r>
+            <a:endParaRPr lang="en-US" sz="1600" dirty="0"/>
+          </a:p>
+        </p:txBody>
+      </p:sp>
+      <p:sp>
+        <p:nvSpPr>
+          <p:cNvPr id="34" name="Shape 32"/>
+          <p:cNvSpPr/>
+          <p:nvPr/>
+        </p:nvSpPr>
+        <p:spPr>
+          <a:xfrm>
+            <a:off x="5230368" y="3364992"/>
+            <a:ext cx="1554480" cy="475488"/>
+          </a:xfrm>
+          <a:prstGeom prst="rect">
+            <a:avLst>
+              <a:gd name="adj" fmla="val 9615"/>
+            </a:avLst>
+          </a:prstGeom>
+          <a:solidFill>
+            <a:srgbClr val="FFFFFF"/>
+          </a:solidFill>
+          <a:ln w="12700">
+            <a:solidFill>
+              <a:srgbClr val="0D9488"/>
+            </a:solidFill>
+            <a:prstDash val="solid"/>
+          </a:ln>
+        </p:spPr>
+      </p:sp>
+      <p:sp>
+        <p:nvSpPr>
+          <p:cNvPr id="35" name="Text 33"/>
+          <p:cNvSpPr/>
+          <p:nvPr/>
+        </p:nvSpPr>
+        <p:spPr>
+          <a:xfrm>
+            <a:off x="5230368" y="3364992"/>
+            <a:ext cx="1554480" cy="475488"/>
+          </a:xfrm>
+          <a:prstGeom prst="rect">
+            <a:avLst/>
+          </a:prstGeom>
+          <a:noFill/>
+          <a:ln/>
+        </p:spPr>
+        <p:txBody>
+          <a:bodyPr wrap="square" lIns="0" tIns="0" rIns="0" bIns="0" rtlCol="0" anchor="ctr"/>
+          <a:lstStyle/>
+          <a:p>
+            <a:pPr algn="ctr" indent="0" marL="0">
+              <a:buNone/>
+            </a:pPr>
+            <a:r>
+              <a:rPr lang="en-US" sz="1400" b="1" dirty="0">
+                <a:solidFill>
+                  <a:srgbClr val="0D9488"/>
+                </a:solidFill>
+                <a:latin typeface="Trebuchet MS" pitchFamily="34" charset="0"/>
+                <a:ea typeface="Trebuchet MS" pitchFamily="34" charset="-122"/>
+                <a:cs typeface="Trebuchet MS" pitchFamily="34" charset="-120"/>
+              </a:rPr>
+              <a:t>dic</a:t>
+            </a:r>
+            <a:endParaRPr lang="en-US" sz="1400" dirty="0"/>
+          </a:p>
+        </p:txBody>
+      </p:sp>
+      <p:sp>
+        <p:nvSpPr>
+          <p:cNvPr id="36" name="Text 34"/>
+          <p:cNvSpPr/>
+          <p:nvPr/>
+        </p:nvSpPr>
+        <p:spPr>
+          <a:xfrm>
+            <a:off x="6784848" y="3364992"/>
+            <a:ext cx="73152" cy="475488"/>
+          </a:xfrm>
+          <a:prstGeom prst="rect">
+            <a:avLst/>
+          </a:prstGeom>
+          <a:noFill/>
+          <a:ln/>
+        </p:spPr>
+        <p:txBody>
+          <a:bodyPr wrap="square" lIns="0" tIns="0" rIns="0" bIns="0" rtlCol="0" anchor="ctr"/>
+          <a:lstStyle/>
+          <a:p>
+            <a:pPr algn="ctr" indent="0" marL="0">
+              <a:buNone/>
+            </a:pPr>
+            <a:r>
+              <a:rPr lang="en-US" sz="1600" b="1" dirty="0">
+                <a:solidFill>
+                  <a:srgbClr val="0D9488"/>
+                </a:solidFill>
+                <a:latin typeface="Trebuchet MS" pitchFamily="34" charset="0"/>
+                <a:ea typeface="Trebuchet MS" pitchFamily="34" charset="-122"/>
+                <a:cs typeface="Trebuchet MS" pitchFamily="34" charset="-120"/>
+              </a:rPr>
+              <a:t>·</a:t>
+            </a:r>
+            <a:endParaRPr lang="en-US" sz="1600" dirty="0"/>
+          </a:p>
+        </p:txBody>
+      </p:sp>
+      <p:sp>
+        <p:nvSpPr>
+          <p:cNvPr id="37" name="Shape 35"/>
+          <p:cNvSpPr/>
+          <p:nvPr/>
+        </p:nvSpPr>
+        <p:spPr>
+          <a:xfrm>
+            <a:off x="6858000" y="3364992"/>
+            <a:ext cx="1554480" cy="475488"/>
+          </a:xfrm>
+          <a:prstGeom prst="rect">
+            <a:avLst>
+              <a:gd name="adj" fmla="val 9615"/>
+            </a:avLst>
+          </a:prstGeom>
+          <a:solidFill>
+            <a:srgbClr val="FFFFFF"/>
+          </a:solidFill>
+          <a:ln w="12700">
+            <a:solidFill>
+              <a:srgbClr val="0D9488"/>
+            </a:solidFill>
+            <a:prstDash val="solid"/>
+          </a:ln>
+        </p:spPr>
+      </p:sp>
+      <p:sp>
+        <p:nvSpPr>
+          <p:cNvPr id="38" name="Text 36"/>
+          <p:cNvSpPr/>
+          <p:nvPr/>
+        </p:nvSpPr>
+        <p:spPr>
+          <a:xfrm>
+            <a:off x="6858000" y="3364992"/>
+            <a:ext cx="1554480" cy="475488"/>
+          </a:xfrm>
+          <a:prstGeom prst="rect">
+            <a:avLst/>
+          </a:prstGeom>
+          <a:noFill/>
+          <a:ln/>
+        </p:spPr>
+        <p:txBody>
+          <a:bodyPr wrap="square" lIns="0" tIns="0" rIns="0" bIns="0" rtlCol="0" anchor="ctr"/>
+          <a:lstStyle/>
+          <a:p>
+            <a:pPr algn="ctr" indent="0" marL="0">
+              <a:buNone/>
+            </a:pPr>
+            <a:r>
+              <a:rPr lang="en-US" sz="1400" b="1" dirty="0">
+                <a:solidFill>
+                  <a:srgbClr val="0D9488"/>
+                </a:solidFill>
+                <a:latin typeface="Trebuchet MS" pitchFamily="34" charset="0"/>
+                <a:ea typeface="Trebuchet MS" pitchFamily="34" charset="-122"/>
+                <a:cs typeface="Trebuchet MS" pitchFamily="34" charset="-120"/>
+              </a:rPr>
+              <a:t>tion</a:t>
+            </a:r>
+            <a:endParaRPr lang="en-US" sz="1400" dirty="0"/>
+          </a:p>
+        </p:txBody>
+      </p:sp>
+      <p:sp>
+        <p:nvSpPr>
+          <p:cNvPr id="39" name="Shape 37"/>
           <p:cNvSpPr/>
           <p:nvPr/>
         </p:nvSpPr>
@@ -9480,7 +9690,7 @@
       </p:sp>
       <p:sp>
         <p:nvSpPr>
-          <p:cNvPr id="34" name="Text 32"/>
+          <p:cNvPr id="40" name="Text 38"/>
           <p:cNvSpPr/>
           <p:nvPr/>
         </p:nvSpPr>
@@ -9519,7 +9729,7 @@
       </p:sp>
       <p:sp>
         <p:nvSpPr>
-          <p:cNvPr id="35" name="Shape 33"/>
+          <p:cNvPr id="41" name="Shape 39"/>
           <p:cNvSpPr/>
           <p:nvPr/>
         </p:nvSpPr>
@@ -9546,7 +9756,7 @@
       </p:sp>
       <p:sp>
         <p:nvSpPr>
-          <p:cNvPr id="36" name="Text 34"/>
+          <p:cNvPr id="42" name="Text 40"/>
           <p:cNvSpPr/>
           <p:nvPr/>
         </p:nvSpPr>
@@ -9869,7 +10079,7 @@
                 <a:ea typeface="Calibri" pitchFamily="34" charset="-122"/>
                 <a:cs typeface="Calibri" pitchFamily="34" charset="-120"/>
               </a:rPr>
-              <a:t>Word Labs  •  wordlabs.app  •  Root: 'dic' = say, speak, proclaim</a:t>
+              <a:t>Word Labs  •  wordlabs.app  •  Root: 'dic' = say; speak</a:t>
             </a:r>
             <a:endParaRPr lang="en-US" sz="800" dirty="0"/>
           </a:p>
@@ -10008,7 +10218,7 @@
                 <a:ea typeface="Trebuchet MS" pitchFamily="34" charset="-122"/>
                 <a:cs typeface="Trebuchet MS" pitchFamily="34" charset="-120"/>
               </a:rPr>
-              <a:t>predict</a:t>
+              <a:t>contradiction</a:t>
             </a:r>
             <a:endParaRPr lang="en-US" sz="2800" dirty="0"/>
           </a:p>
@@ -10147,7 +10357,7 @@
                 <a:ea typeface="Trebuchet MS" pitchFamily="34" charset="-122"/>
                 <a:cs typeface="Trebuchet MS" pitchFamily="34" charset="-120"/>
               </a:rPr>
-              <a:t>pre</a:t>
+              <a:t>contra</a:t>
             </a:r>
             <a:endParaRPr lang="en-US" sz="1300" dirty="0"/>
           </a:p>
@@ -10186,7 +10396,7 @@
                 <a:ea typeface="Calibri" pitchFamily="34" charset="-122"/>
                 <a:cs typeface="Calibri" pitchFamily="34" charset="-120"/>
               </a:rPr>
-              <a:t>before</a:t>
+              <a:t>against; opposite</a:t>
             </a:r>
             <a:endParaRPr lang="en-US" sz="850" dirty="0"/>
           </a:p>
@@ -10298,7 +10508,7 @@
                 <a:ea typeface="Calibri" pitchFamily="34" charset="-122"/>
                 <a:cs typeface="Calibri" pitchFamily="34" charset="-120"/>
               </a:rPr>
-              <a:t>say, speak</a:t>
+              <a:t>say; speak</a:t>
             </a:r>
             <a:endParaRPr lang="en-US" sz="850" dirty="0"/>
           </a:p>
@@ -10371,7 +10581,7 @@
                 <a:ea typeface="Trebuchet MS" pitchFamily="34" charset="-122"/>
                 <a:cs typeface="Trebuchet MS" pitchFamily="34" charset="-120"/>
               </a:rPr>
-              <a:t>t</a:t>
+              <a:t>tion</a:t>
             </a:r>
             <a:endParaRPr lang="en-US" sz="1300" dirty="0"/>
           </a:p>
@@ -10410,7 +10620,7 @@
                 <a:ea typeface="Calibri" pitchFamily="34" charset="-122"/>
                 <a:cs typeface="Calibri" pitchFamily="34" charset="-120"/>
               </a:rPr>
-              <a:t>word-forming consonant</a:t>
+              <a:t>act or process of</a:t>
             </a:r>
             <a:endParaRPr lang="en-US" sz="850" dirty="0"/>
           </a:p>
@@ -10517,8 +10727,8 @@
         </p:nvSpPr>
         <p:spPr>
           <a:xfrm>
-            <a:off x="2999232" y="3364992"/>
-            <a:ext cx="1645920" cy="475488"/>
+            <a:off x="1975104" y="3364992"/>
+            <a:ext cx="1554480" cy="475488"/>
           </a:xfrm>
           <a:prstGeom prst="rect">
             <a:avLst>
@@ -10544,8 +10754,8 @@
         </p:nvSpPr>
         <p:spPr>
           <a:xfrm>
-            <a:off x="2999232" y="3364992"/>
-            <a:ext cx="1645920" cy="475488"/>
+            <a:off x="1975104" y="3364992"/>
+            <a:ext cx="1554480" cy="475488"/>
           </a:xfrm>
           <a:prstGeom prst="rect">
             <a:avLst/>
@@ -10569,7 +10779,7 @@
                 <a:ea typeface="Trebuchet MS" pitchFamily="34" charset="-122"/>
                 <a:cs typeface="Trebuchet MS" pitchFamily="34" charset="-120"/>
               </a:rPr>
-              <a:t>pre</a:t>
+              <a:t>con</a:t>
             </a:r>
             <a:endParaRPr lang="en-US" sz="1400" dirty="0"/>
           </a:p>
@@ -10583,8 +10793,8 @@
         </p:nvSpPr>
         <p:spPr>
           <a:xfrm>
-            <a:off x="4645152" y="3364992"/>
-            <a:ext cx="1097280" cy="475488"/>
+            <a:off x="3529584" y="3364992"/>
+            <a:ext cx="73152" cy="475488"/>
           </a:xfrm>
           <a:prstGeom prst="rect">
             <a:avLst/>
@@ -10622,8 +10832,8 @@
         </p:nvSpPr>
         <p:spPr>
           <a:xfrm>
-            <a:off x="5742432" y="3364992"/>
-            <a:ext cx="1645920" cy="475488"/>
+            <a:off x="3602736" y="3364992"/>
+            <a:ext cx="1554480" cy="475488"/>
           </a:xfrm>
           <a:prstGeom prst="rect">
             <a:avLst>
@@ -10649,8 +10859,8 @@
         </p:nvSpPr>
         <p:spPr>
           <a:xfrm>
-            <a:off x="5742432" y="3364992"/>
-            <a:ext cx="1645920" cy="475488"/>
+            <a:off x="3602736" y="3364992"/>
+            <a:ext cx="1554480" cy="475488"/>
           </a:xfrm>
           <a:prstGeom prst="rect">
             <a:avLst/>
@@ -10674,7 +10884,7 @@
                 <a:ea typeface="Trebuchet MS" pitchFamily="34" charset="-122"/>
                 <a:cs typeface="Trebuchet MS" pitchFamily="34" charset="-120"/>
               </a:rPr>
-              <a:t>dict</a:t>
+              <a:t>tra</a:t>
             </a:r>
             <a:endParaRPr lang="en-US" sz="1400" dirty="0"/>
           </a:p>
@@ -10682,7 +10892,217 @@
       </p:sp>
       <p:sp>
         <p:nvSpPr>
-          <p:cNvPr id="33" name="Shape 31"/>
+          <p:cNvPr id="33" name="Text 31"/>
+          <p:cNvSpPr/>
+          <p:nvPr/>
+        </p:nvSpPr>
+        <p:spPr>
+          <a:xfrm>
+            <a:off x="5157216" y="3364992"/>
+            <a:ext cx="73152" cy="475488"/>
+          </a:xfrm>
+          <a:prstGeom prst="rect">
+            <a:avLst/>
+          </a:prstGeom>
+          <a:noFill/>
+          <a:ln/>
+        </p:spPr>
+        <p:txBody>
+          <a:bodyPr wrap="square" lIns="0" tIns="0" rIns="0" bIns="0" rtlCol="0" anchor="ctr"/>
+          <a:lstStyle/>
+          <a:p>
+            <a:pPr algn="ctr" indent="0" marL="0">
+              <a:buNone/>
+            </a:pPr>
+            <a:r>
+              <a:rPr lang="en-US" sz="1600" b="1" dirty="0">
+                <a:solidFill>
+                  <a:srgbClr val="0D9488"/>
+                </a:solidFill>
+                <a:latin typeface="Trebuchet MS" pitchFamily="34" charset="0"/>
+                <a:ea typeface="Trebuchet MS" pitchFamily="34" charset="-122"/>
+                <a:cs typeface="Trebuchet MS" pitchFamily="34" charset="-120"/>
+              </a:rPr>
+              <a:t>·</a:t>
+            </a:r>
+            <a:endParaRPr lang="en-US" sz="1600" dirty="0"/>
+          </a:p>
+        </p:txBody>
+      </p:sp>
+      <p:sp>
+        <p:nvSpPr>
+          <p:cNvPr id="34" name="Shape 32"/>
+          <p:cNvSpPr/>
+          <p:nvPr/>
+        </p:nvSpPr>
+        <p:spPr>
+          <a:xfrm>
+            <a:off x="5230368" y="3364992"/>
+            <a:ext cx="1554480" cy="475488"/>
+          </a:xfrm>
+          <a:prstGeom prst="rect">
+            <a:avLst>
+              <a:gd name="adj" fmla="val 9615"/>
+            </a:avLst>
+          </a:prstGeom>
+          <a:solidFill>
+            <a:srgbClr val="FFFFFF"/>
+          </a:solidFill>
+          <a:ln w="12700">
+            <a:solidFill>
+              <a:srgbClr val="0D9488"/>
+            </a:solidFill>
+            <a:prstDash val="solid"/>
+          </a:ln>
+        </p:spPr>
+      </p:sp>
+      <p:sp>
+        <p:nvSpPr>
+          <p:cNvPr id="35" name="Text 33"/>
+          <p:cNvSpPr/>
+          <p:nvPr/>
+        </p:nvSpPr>
+        <p:spPr>
+          <a:xfrm>
+            <a:off x="5230368" y="3364992"/>
+            <a:ext cx="1554480" cy="475488"/>
+          </a:xfrm>
+          <a:prstGeom prst="rect">
+            <a:avLst/>
+          </a:prstGeom>
+          <a:noFill/>
+          <a:ln/>
+        </p:spPr>
+        <p:txBody>
+          <a:bodyPr wrap="square" lIns="0" tIns="0" rIns="0" bIns="0" rtlCol="0" anchor="ctr"/>
+          <a:lstStyle/>
+          <a:p>
+            <a:pPr algn="ctr" indent="0" marL="0">
+              <a:buNone/>
+            </a:pPr>
+            <a:r>
+              <a:rPr lang="en-US" sz="1400" b="1" dirty="0">
+                <a:solidFill>
+                  <a:srgbClr val="0D9488"/>
+                </a:solidFill>
+                <a:latin typeface="Trebuchet MS" pitchFamily="34" charset="0"/>
+                <a:ea typeface="Trebuchet MS" pitchFamily="34" charset="-122"/>
+                <a:cs typeface="Trebuchet MS" pitchFamily="34" charset="-120"/>
+              </a:rPr>
+              <a:t>dic</a:t>
+            </a:r>
+            <a:endParaRPr lang="en-US" sz="1400" dirty="0"/>
+          </a:p>
+        </p:txBody>
+      </p:sp>
+      <p:sp>
+        <p:nvSpPr>
+          <p:cNvPr id="36" name="Text 34"/>
+          <p:cNvSpPr/>
+          <p:nvPr/>
+        </p:nvSpPr>
+        <p:spPr>
+          <a:xfrm>
+            <a:off x="6784848" y="3364992"/>
+            <a:ext cx="73152" cy="475488"/>
+          </a:xfrm>
+          <a:prstGeom prst="rect">
+            <a:avLst/>
+          </a:prstGeom>
+          <a:noFill/>
+          <a:ln/>
+        </p:spPr>
+        <p:txBody>
+          <a:bodyPr wrap="square" lIns="0" tIns="0" rIns="0" bIns="0" rtlCol="0" anchor="ctr"/>
+          <a:lstStyle/>
+          <a:p>
+            <a:pPr algn="ctr" indent="0" marL="0">
+              <a:buNone/>
+            </a:pPr>
+            <a:r>
+              <a:rPr lang="en-US" sz="1600" b="1" dirty="0">
+                <a:solidFill>
+                  <a:srgbClr val="0D9488"/>
+                </a:solidFill>
+                <a:latin typeface="Trebuchet MS" pitchFamily="34" charset="0"/>
+                <a:ea typeface="Trebuchet MS" pitchFamily="34" charset="-122"/>
+                <a:cs typeface="Trebuchet MS" pitchFamily="34" charset="-120"/>
+              </a:rPr>
+              <a:t>·</a:t>
+            </a:r>
+            <a:endParaRPr lang="en-US" sz="1600" dirty="0"/>
+          </a:p>
+        </p:txBody>
+      </p:sp>
+      <p:sp>
+        <p:nvSpPr>
+          <p:cNvPr id="37" name="Shape 35"/>
+          <p:cNvSpPr/>
+          <p:nvPr/>
+        </p:nvSpPr>
+        <p:spPr>
+          <a:xfrm>
+            <a:off x="6858000" y="3364992"/>
+            <a:ext cx="1554480" cy="475488"/>
+          </a:xfrm>
+          <a:prstGeom prst="rect">
+            <a:avLst>
+              <a:gd name="adj" fmla="val 9615"/>
+            </a:avLst>
+          </a:prstGeom>
+          <a:solidFill>
+            <a:srgbClr val="FFFFFF"/>
+          </a:solidFill>
+          <a:ln w="12700">
+            <a:solidFill>
+              <a:srgbClr val="0D9488"/>
+            </a:solidFill>
+            <a:prstDash val="solid"/>
+          </a:ln>
+        </p:spPr>
+      </p:sp>
+      <p:sp>
+        <p:nvSpPr>
+          <p:cNvPr id="38" name="Text 36"/>
+          <p:cNvSpPr/>
+          <p:nvPr/>
+        </p:nvSpPr>
+        <p:spPr>
+          <a:xfrm>
+            <a:off x="6858000" y="3364992"/>
+            <a:ext cx="1554480" cy="475488"/>
+          </a:xfrm>
+          <a:prstGeom prst="rect">
+            <a:avLst/>
+          </a:prstGeom>
+          <a:noFill/>
+          <a:ln/>
+        </p:spPr>
+        <p:txBody>
+          <a:bodyPr wrap="square" lIns="0" tIns="0" rIns="0" bIns="0" rtlCol="0" anchor="ctr"/>
+          <a:lstStyle/>
+          <a:p>
+            <a:pPr algn="ctr" indent="0" marL="0">
+              <a:buNone/>
+            </a:pPr>
+            <a:r>
+              <a:rPr lang="en-US" sz="1400" b="1" dirty="0">
+                <a:solidFill>
+                  <a:srgbClr val="0D9488"/>
+                </a:solidFill>
+                <a:latin typeface="Trebuchet MS" pitchFamily="34" charset="0"/>
+                <a:ea typeface="Trebuchet MS" pitchFamily="34" charset="-122"/>
+                <a:cs typeface="Trebuchet MS" pitchFamily="34" charset="-120"/>
+              </a:rPr>
+              <a:t>tion</a:t>
+            </a:r>
+            <a:endParaRPr lang="en-US" sz="1400" dirty="0"/>
+          </a:p>
+        </p:txBody>
+      </p:sp>
+      <p:sp>
+        <p:nvSpPr>
+          <p:cNvPr id="39" name="Shape 37"/>
           <p:cNvSpPr/>
           <p:nvPr/>
         </p:nvSpPr>
@@ -10709,7 +11129,7 @@
       </p:sp>
       <p:sp>
         <p:nvSpPr>
-          <p:cNvPr id="34" name="Text 32"/>
+          <p:cNvPr id="40" name="Text 38"/>
           <p:cNvSpPr/>
           <p:nvPr/>
         </p:nvSpPr>
@@ -10748,18 +11168,18 @@
       </p:sp>
       <p:sp>
         <p:nvSpPr>
-          <p:cNvPr id="35" name="Shape 33"/>
+          <p:cNvPr id="41" name="Shape 39"/>
           <p:cNvSpPr/>
           <p:nvPr/>
         </p:nvSpPr>
         <p:spPr>
           <a:xfrm>
             <a:off x="1874520" y="4096512"/>
-            <a:ext cx="6903720" cy="804672"/>
+            <a:ext cx="6903720" cy="658368"/>
           </a:xfrm>
           <a:prstGeom prst="rect">
             <a:avLst>
-              <a:gd name="adj" fmla="val 6818"/>
+              <a:gd name="adj" fmla="val 8333"/>
             </a:avLst>
           </a:prstGeom>
           <a:solidFill>
@@ -10775,18 +11195,18 @@
       </p:sp>
       <p:sp>
         <p:nvSpPr>
-          <p:cNvPr id="36" name="Shape 34"/>
-          <p:cNvSpPr/>
-          <p:nvPr/>
-        </p:nvSpPr>
-        <p:spPr>
-          <a:xfrm>
-            <a:off x="2124837" y="4169664"/>
-            <a:ext cx="685800" cy="384048"/>
+          <p:cNvPr id="42" name="Shape 40"/>
+          <p:cNvSpPr/>
+          <p:nvPr/>
+        </p:nvSpPr>
+        <p:spPr>
+          <a:xfrm>
+            <a:off x="1952596" y="4169664"/>
+            <a:ext cx="493776" cy="475488"/>
           </a:xfrm>
           <a:prstGeom prst="rect">
             <a:avLst>
-              <a:gd name="adj" fmla="val 9524"/>
+              <a:gd name="adj" fmla="val 7692"/>
             </a:avLst>
           </a:prstGeom>
           <a:solidFill>
@@ -10802,14 +11222,14 @@
       </p:sp>
       <p:sp>
         <p:nvSpPr>
-          <p:cNvPr id="37" name="Text 35"/>
-          <p:cNvSpPr/>
-          <p:nvPr/>
-        </p:nvSpPr>
-        <p:spPr>
-          <a:xfrm>
-            <a:off x="2124837" y="4169664"/>
-            <a:ext cx="685800" cy="384048"/>
+          <p:cNvPr id="43" name="Text 41"/>
+          <p:cNvSpPr/>
+          <p:nvPr/>
+        </p:nvSpPr>
+        <p:spPr>
+          <a:xfrm>
+            <a:off x="1952596" y="4169664"/>
+            <a:ext cx="493776" cy="475488"/>
           </a:xfrm>
           <a:prstGeom prst="rect">
             <a:avLst/>
@@ -10833,7 +11253,7 @@
                 <a:ea typeface="Trebuchet MS" pitchFamily="34" charset="-122"/>
                 <a:cs typeface="Trebuchet MS" pitchFamily="34" charset="-120"/>
               </a:rPr>
-              <a:t>p</a:t>
+              <a:t>c</a:t>
             </a:r>
             <a:endParaRPr lang="en-US" sz="900" dirty="0"/>
           </a:p>
@@ -10841,18 +11261,18 @@
       </p:sp>
       <p:sp>
         <p:nvSpPr>
-          <p:cNvPr id="38" name="Shape 36"/>
-          <p:cNvSpPr/>
-          <p:nvPr/>
-        </p:nvSpPr>
-        <p:spPr>
-          <a:xfrm>
-            <a:off x="3033522" y="4169664"/>
-            <a:ext cx="685800" cy="384048"/>
+          <p:cNvPr id="44" name="Shape 42"/>
+          <p:cNvSpPr/>
+          <p:nvPr/>
+        </p:nvSpPr>
+        <p:spPr>
+          <a:xfrm>
+            <a:off x="2497015" y="4169664"/>
+            <a:ext cx="493776" cy="475488"/>
           </a:xfrm>
           <a:prstGeom prst="rect">
             <a:avLst>
-              <a:gd name="adj" fmla="val 9524"/>
+              <a:gd name="adj" fmla="val 7692"/>
             </a:avLst>
           </a:prstGeom>
           <a:solidFill>
@@ -10868,14 +11288,14 @@
       </p:sp>
       <p:sp>
         <p:nvSpPr>
-          <p:cNvPr id="39" name="Text 37"/>
-          <p:cNvSpPr/>
-          <p:nvPr/>
-        </p:nvSpPr>
-        <p:spPr>
-          <a:xfrm>
-            <a:off x="3033522" y="4169664"/>
-            <a:ext cx="685800" cy="384048"/>
+          <p:cNvPr id="45" name="Text 43"/>
+          <p:cNvSpPr/>
+          <p:nvPr/>
+        </p:nvSpPr>
+        <p:spPr>
+          <a:xfrm>
+            <a:off x="2497015" y="4169664"/>
+            <a:ext cx="493776" cy="475488"/>
           </a:xfrm>
           <a:prstGeom prst="rect">
             <a:avLst/>
@@ -10899,7 +11319,7 @@
                 <a:ea typeface="Trebuchet MS" pitchFamily="34" charset="-122"/>
                 <a:cs typeface="Trebuchet MS" pitchFamily="34" charset="-120"/>
               </a:rPr>
-              <a:t>r</a:t>
+              <a:t>o</a:t>
             </a:r>
             <a:endParaRPr lang="en-US" sz="900" dirty="0"/>
           </a:p>
@@ -10907,18 +11327,18 @@
       </p:sp>
       <p:sp>
         <p:nvSpPr>
-          <p:cNvPr id="40" name="Shape 38"/>
-          <p:cNvSpPr/>
-          <p:nvPr/>
-        </p:nvSpPr>
-        <p:spPr>
-          <a:xfrm>
-            <a:off x="3942207" y="4169664"/>
-            <a:ext cx="685800" cy="384048"/>
+          <p:cNvPr id="46" name="Shape 44"/>
+          <p:cNvSpPr/>
+          <p:nvPr/>
+        </p:nvSpPr>
+        <p:spPr>
+          <a:xfrm>
+            <a:off x="3041435" y="4169664"/>
+            <a:ext cx="493776" cy="475488"/>
           </a:xfrm>
           <a:prstGeom prst="rect">
             <a:avLst>
-              <a:gd name="adj" fmla="val 9524"/>
+              <a:gd name="adj" fmla="val 7692"/>
             </a:avLst>
           </a:prstGeom>
           <a:solidFill>
@@ -10934,14 +11354,14 @@
       </p:sp>
       <p:sp>
         <p:nvSpPr>
-          <p:cNvPr id="41" name="Text 39"/>
-          <p:cNvSpPr/>
-          <p:nvPr/>
-        </p:nvSpPr>
-        <p:spPr>
-          <a:xfrm>
-            <a:off x="3942207" y="4169664"/>
-            <a:ext cx="685800" cy="384048"/>
+          <p:cNvPr id="47" name="Text 45"/>
+          <p:cNvSpPr/>
+          <p:nvPr/>
+        </p:nvSpPr>
+        <p:spPr>
+          <a:xfrm>
+            <a:off x="3041435" y="4169664"/>
+            <a:ext cx="493776" cy="475488"/>
           </a:xfrm>
           <a:prstGeom prst="rect">
             <a:avLst/>
@@ -10965,7 +11385,7 @@
                 <a:ea typeface="Trebuchet MS" pitchFamily="34" charset="-122"/>
                 <a:cs typeface="Trebuchet MS" pitchFamily="34" charset="-120"/>
               </a:rPr>
-              <a:t>e</a:t>
+              <a:t>n</a:t>
             </a:r>
             <a:endParaRPr lang="en-US" sz="900" dirty="0"/>
           </a:p>
@@ -10973,18 +11393,18 @@
       </p:sp>
       <p:sp>
         <p:nvSpPr>
-          <p:cNvPr id="42" name="Shape 40"/>
-          <p:cNvSpPr/>
-          <p:nvPr/>
-        </p:nvSpPr>
-        <p:spPr>
-          <a:xfrm>
-            <a:off x="4850892" y="4169664"/>
-            <a:ext cx="685800" cy="384048"/>
+          <p:cNvPr id="48" name="Shape 46"/>
+          <p:cNvSpPr/>
+          <p:nvPr/>
+        </p:nvSpPr>
+        <p:spPr>
+          <a:xfrm>
+            <a:off x="3585855" y="4169664"/>
+            <a:ext cx="493776" cy="475488"/>
           </a:xfrm>
           <a:prstGeom prst="rect">
             <a:avLst>
-              <a:gd name="adj" fmla="val 9524"/>
+              <a:gd name="adj" fmla="val 7692"/>
             </a:avLst>
           </a:prstGeom>
           <a:solidFill>
@@ -11000,14 +11420,14 @@
       </p:sp>
       <p:sp>
         <p:nvSpPr>
-          <p:cNvPr id="43" name="Text 41"/>
-          <p:cNvSpPr/>
-          <p:nvPr/>
-        </p:nvSpPr>
-        <p:spPr>
-          <a:xfrm>
-            <a:off x="4850892" y="4169664"/>
-            <a:ext cx="685800" cy="384048"/>
+          <p:cNvPr id="49" name="Text 47"/>
+          <p:cNvSpPr/>
+          <p:nvPr/>
+        </p:nvSpPr>
+        <p:spPr>
+          <a:xfrm>
+            <a:off x="3585855" y="4169664"/>
+            <a:ext cx="493776" cy="475488"/>
           </a:xfrm>
           <a:prstGeom prst="rect">
             <a:avLst/>
@@ -11031,7 +11451,7 @@
                 <a:ea typeface="Trebuchet MS" pitchFamily="34" charset="-122"/>
                 <a:cs typeface="Trebuchet MS" pitchFamily="34" charset="-120"/>
               </a:rPr>
-              <a:t>d</a:t>
+              <a:t>t</a:t>
             </a:r>
             <a:endParaRPr lang="en-US" sz="900" dirty="0"/>
           </a:p>
@@ -11039,18 +11459,18 @@
       </p:sp>
       <p:sp>
         <p:nvSpPr>
-          <p:cNvPr id="44" name="Shape 42"/>
-          <p:cNvSpPr/>
-          <p:nvPr/>
-        </p:nvSpPr>
-        <p:spPr>
-          <a:xfrm>
-            <a:off x="5759577" y="4169664"/>
-            <a:ext cx="685800" cy="384048"/>
+          <p:cNvPr id="50" name="Shape 48"/>
+          <p:cNvSpPr/>
+          <p:nvPr/>
+        </p:nvSpPr>
+        <p:spPr>
+          <a:xfrm>
+            <a:off x="4130274" y="4169664"/>
+            <a:ext cx="493776" cy="475488"/>
           </a:xfrm>
           <a:prstGeom prst="rect">
             <a:avLst>
-              <a:gd name="adj" fmla="val 9524"/>
+              <a:gd name="adj" fmla="val 7692"/>
             </a:avLst>
           </a:prstGeom>
           <a:solidFill>
@@ -11066,14 +11486,14 @@
       </p:sp>
       <p:sp>
         <p:nvSpPr>
-          <p:cNvPr id="45" name="Text 43"/>
-          <p:cNvSpPr/>
-          <p:nvPr/>
-        </p:nvSpPr>
-        <p:spPr>
-          <a:xfrm>
-            <a:off x="5759577" y="4169664"/>
-            <a:ext cx="685800" cy="384048"/>
+          <p:cNvPr id="51" name="Text 49"/>
+          <p:cNvSpPr/>
+          <p:nvPr/>
+        </p:nvSpPr>
+        <p:spPr>
+          <a:xfrm>
+            <a:off x="4130274" y="4169664"/>
+            <a:ext cx="493776" cy="475488"/>
           </a:xfrm>
           <a:prstGeom prst="rect">
             <a:avLst/>
@@ -11097,7 +11517,7 @@
                 <a:ea typeface="Trebuchet MS" pitchFamily="34" charset="-122"/>
                 <a:cs typeface="Trebuchet MS" pitchFamily="34" charset="-120"/>
               </a:rPr>
-              <a:t>i</a:t>
+              <a:t>r</a:t>
             </a:r>
             <a:endParaRPr lang="en-US" sz="900" dirty="0"/>
           </a:p>
@@ -11105,18 +11525,18 @@
       </p:sp>
       <p:sp>
         <p:nvSpPr>
-          <p:cNvPr id="46" name="Shape 44"/>
-          <p:cNvSpPr/>
-          <p:nvPr/>
-        </p:nvSpPr>
-        <p:spPr>
-          <a:xfrm>
-            <a:off x="6668262" y="4169664"/>
-            <a:ext cx="685800" cy="384048"/>
+          <p:cNvPr id="52" name="Shape 50"/>
+          <p:cNvSpPr/>
+          <p:nvPr/>
+        </p:nvSpPr>
+        <p:spPr>
+          <a:xfrm>
+            <a:off x="4674694" y="4169664"/>
+            <a:ext cx="493776" cy="475488"/>
           </a:xfrm>
           <a:prstGeom prst="rect">
             <a:avLst>
-              <a:gd name="adj" fmla="val 9524"/>
+              <a:gd name="adj" fmla="val 7692"/>
             </a:avLst>
           </a:prstGeom>
           <a:solidFill>
@@ -11132,14 +11552,14 @@
       </p:sp>
       <p:sp>
         <p:nvSpPr>
-          <p:cNvPr id="47" name="Text 45"/>
-          <p:cNvSpPr/>
-          <p:nvPr/>
-        </p:nvSpPr>
-        <p:spPr>
-          <a:xfrm>
-            <a:off x="6668262" y="4169664"/>
-            <a:ext cx="685800" cy="384048"/>
+          <p:cNvPr id="53" name="Text 51"/>
+          <p:cNvSpPr/>
+          <p:nvPr/>
+        </p:nvSpPr>
+        <p:spPr>
+          <a:xfrm>
+            <a:off x="4674694" y="4169664"/>
+            <a:ext cx="493776" cy="475488"/>
           </a:xfrm>
           <a:prstGeom prst="rect">
             <a:avLst/>
@@ -11163,7 +11583,7 @@
                 <a:ea typeface="Trebuchet MS" pitchFamily="34" charset="-122"/>
                 <a:cs typeface="Trebuchet MS" pitchFamily="34" charset="-120"/>
               </a:rPr>
-              <a:t>c</a:t>
+              <a:t>a</a:t>
             </a:r>
             <a:endParaRPr lang="en-US" sz="900" dirty="0"/>
           </a:p>
@@ -11171,57 +11591,18 @@
       </p:sp>
       <p:sp>
         <p:nvSpPr>
-          <p:cNvPr id="48" name="Text 46"/>
-          <p:cNvSpPr/>
-          <p:nvPr/>
-        </p:nvSpPr>
-        <p:spPr>
-          <a:xfrm>
-            <a:off x="6668262" y="4572000"/>
-            <a:ext cx="685800" cy="219456"/>
-          </a:xfrm>
-          <a:prstGeom prst="rect">
-            <a:avLst/>
-          </a:prstGeom>
-          <a:noFill/>
-          <a:ln/>
-        </p:spPr>
-        <p:txBody>
-          <a:bodyPr wrap="square" lIns="0" tIns="0" rIns="0" bIns="0" rtlCol="0" anchor="t"/>
-          <a:lstStyle/>
-          <a:p>
-            <a:pPr algn="ctr" indent="0" marL="0">
-              <a:buNone/>
-            </a:pPr>
-            <a:r>
-              <a:rPr lang="en-US" sz="750" i="1" dirty="0">
-                <a:solidFill>
-                  <a:srgbClr val="94A3B8"/>
-                </a:solidFill>
-                <a:latin typeface="Calibri" pitchFamily="34" charset="0"/>
-                <a:ea typeface="Calibri" pitchFamily="34" charset="-122"/>
-                <a:cs typeface="Calibri" pitchFamily="34" charset="-120"/>
-              </a:rPr>
-              <a:t>/k/</a:t>
-            </a:r>
-            <a:endParaRPr lang="en-US" sz="750" dirty="0"/>
-          </a:p>
-        </p:txBody>
-      </p:sp>
-      <p:sp>
-        <p:nvSpPr>
-          <p:cNvPr id="49" name="Shape 47"/>
-          <p:cNvSpPr/>
-          <p:nvPr/>
-        </p:nvSpPr>
-        <p:spPr>
-          <a:xfrm>
-            <a:off x="7576947" y="4169664"/>
-            <a:ext cx="685800" cy="384048"/>
+          <p:cNvPr id="54" name="Shape 52"/>
+          <p:cNvSpPr/>
+          <p:nvPr/>
+        </p:nvSpPr>
+        <p:spPr>
+          <a:xfrm>
+            <a:off x="5219114" y="4169664"/>
+            <a:ext cx="493776" cy="475488"/>
           </a:xfrm>
           <a:prstGeom prst="rect">
             <a:avLst>
-              <a:gd name="adj" fmla="val 9524"/>
+              <a:gd name="adj" fmla="val 7692"/>
             </a:avLst>
           </a:prstGeom>
           <a:solidFill>
@@ -11237,14 +11618,14 @@
       </p:sp>
       <p:sp>
         <p:nvSpPr>
-          <p:cNvPr id="50" name="Text 48"/>
-          <p:cNvSpPr/>
-          <p:nvPr/>
-        </p:nvSpPr>
-        <p:spPr>
-          <a:xfrm>
-            <a:off x="7576947" y="4169664"/>
-            <a:ext cx="685800" cy="384048"/>
+          <p:cNvPr id="55" name="Text 53"/>
+          <p:cNvSpPr/>
+          <p:nvPr/>
+        </p:nvSpPr>
+        <p:spPr>
+          <a:xfrm>
+            <a:off x="5219114" y="4169664"/>
+            <a:ext cx="493776" cy="475488"/>
           </a:xfrm>
           <a:prstGeom prst="rect">
             <a:avLst/>
@@ -11268,7 +11649,337 @@
                 <a:ea typeface="Trebuchet MS" pitchFamily="34" charset="-122"/>
                 <a:cs typeface="Trebuchet MS" pitchFamily="34" charset="-120"/>
               </a:rPr>
-              <a:t>t</a:t>
+              <a:t>d</a:t>
+            </a:r>
+            <a:endParaRPr lang="en-US" sz="900" dirty="0"/>
+          </a:p>
+        </p:txBody>
+      </p:sp>
+      <p:sp>
+        <p:nvSpPr>
+          <p:cNvPr id="56" name="Shape 54"/>
+          <p:cNvSpPr/>
+          <p:nvPr/>
+        </p:nvSpPr>
+        <p:spPr>
+          <a:xfrm>
+            <a:off x="5763534" y="4169664"/>
+            <a:ext cx="493776" cy="475488"/>
+          </a:xfrm>
+          <a:prstGeom prst="rect">
+            <a:avLst>
+              <a:gd name="adj" fmla="val 7692"/>
+            </a:avLst>
+          </a:prstGeom>
+          <a:solidFill>
+            <a:srgbClr val="FFFFFF"/>
+          </a:solidFill>
+          <a:ln w="12700">
+            <a:solidFill>
+              <a:srgbClr val="DB2777"/>
+            </a:solidFill>
+            <a:prstDash val="solid"/>
+          </a:ln>
+        </p:spPr>
+      </p:sp>
+      <p:sp>
+        <p:nvSpPr>
+          <p:cNvPr id="57" name="Text 55"/>
+          <p:cNvSpPr/>
+          <p:nvPr/>
+        </p:nvSpPr>
+        <p:spPr>
+          <a:xfrm>
+            <a:off x="5763534" y="4169664"/>
+            <a:ext cx="493776" cy="475488"/>
+          </a:xfrm>
+          <a:prstGeom prst="rect">
+            <a:avLst/>
+          </a:prstGeom>
+          <a:noFill/>
+          <a:ln/>
+        </p:spPr>
+        <p:txBody>
+          <a:bodyPr wrap="square" lIns="0" tIns="0" rIns="0" bIns="0" rtlCol="0" anchor="ctr"/>
+          <a:lstStyle/>
+          <a:p>
+            <a:pPr algn="ctr" indent="0" marL="0">
+              <a:buNone/>
+            </a:pPr>
+            <a:r>
+              <a:rPr lang="en-US" sz="900" b="1" dirty="0">
+                <a:solidFill>
+                  <a:srgbClr val="9D174D"/>
+                </a:solidFill>
+                <a:latin typeface="Trebuchet MS" pitchFamily="34" charset="0"/>
+                <a:ea typeface="Trebuchet MS" pitchFamily="34" charset="-122"/>
+                <a:cs typeface="Trebuchet MS" pitchFamily="34" charset="-120"/>
+              </a:rPr>
+              <a:t>i</a:t>
+            </a:r>
+            <a:endParaRPr lang="en-US" sz="900" dirty="0"/>
+          </a:p>
+        </p:txBody>
+      </p:sp>
+      <p:sp>
+        <p:nvSpPr>
+          <p:cNvPr id="58" name="Shape 56"/>
+          <p:cNvSpPr/>
+          <p:nvPr/>
+        </p:nvSpPr>
+        <p:spPr>
+          <a:xfrm>
+            <a:off x="6307953" y="4169664"/>
+            <a:ext cx="493776" cy="475488"/>
+          </a:xfrm>
+          <a:prstGeom prst="rect">
+            <a:avLst>
+              <a:gd name="adj" fmla="val 7692"/>
+            </a:avLst>
+          </a:prstGeom>
+          <a:solidFill>
+            <a:srgbClr val="FFFFFF"/>
+          </a:solidFill>
+          <a:ln w="12700">
+            <a:solidFill>
+              <a:srgbClr val="DB2777"/>
+            </a:solidFill>
+            <a:prstDash val="solid"/>
+          </a:ln>
+        </p:spPr>
+      </p:sp>
+      <p:sp>
+        <p:nvSpPr>
+          <p:cNvPr id="59" name="Text 57"/>
+          <p:cNvSpPr/>
+          <p:nvPr/>
+        </p:nvSpPr>
+        <p:spPr>
+          <a:xfrm>
+            <a:off x="6307953" y="4169664"/>
+            <a:ext cx="493776" cy="475488"/>
+          </a:xfrm>
+          <a:prstGeom prst="rect">
+            <a:avLst/>
+          </a:prstGeom>
+          <a:noFill/>
+          <a:ln/>
+        </p:spPr>
+        <p:txBody>
+          <a:bodyPr wrap="square" lIns="0" tIns="0" rIns="0" bIns="0" rtlCol="0" anchor="ctr"/>
+          <a:lstStyle/>
+          <a:p>
+            <a:pPr algn="ctr" indent="0" marL="0">
+              <a:buNone/>
+            </a:pPr>
+            <a:r>
+              <a:rPr lang="en-US" sz="900" b="1" dirty="0">
+                <a:solidFill>
+                  <a:srgbClr val="9D174D"/>
+                </a:solidFill>
+                <a:latin typeface="Trebuchet MS" pitchFamily="34" charset="0"/>
+                <a:ea typeface="Trebuchet MS" pitchFamily="34" charset="-122"/>
+                <a:cs typeface="Trebuchet MS" pitchFamily="34" charset="-120"/>
+              </a:rPr>
+              <a:t>c</a:t>
+            </a:r>
+            <a:endParaRPr lang="en-US" sz="900" dirty="0"/>
+          </a:p>
+        </p:txBody>
+      </p:sp>
+      <p:sp>
+        <p:nvSpPr>
+          <p:cNvPr id="60" name="Shape 58"/>
+          <p:cNvSpPr/>
+          <p:nvPr/>
+        </p:nvSpPr>
+        <p:spPr>
+          <a:xfrm>
+            <a:off x="6852373" y="4169664"/>
+            <a:ext cx="493776" cy="475488"/>
+          </a:xfrm>
+          <a:prstGeom prst="rect">
+            <a:avLst>
+              <a:gd name="adj" fmla="val 7692"/>
+            </a:avLst>
+          </a:prstGeom>
+          <a:solidFill>
+            <a:srgbClr val="FFFFFF"/>
+          </a:solidFill>
+          <a:ln w="12700">
+            <a:solidFill>
+              <a:srgbClr val="DB2777"/>
+            </a:solidFill>
+            <a:prstDash val="solid"/>
+          </a:ln>
+        </p:spPr>
+      </p:sp>
+      <p:sp>
+        <p:nvSpPr>
+          <p:cNvPr id="61" name="Text 59"/>
+          <p:cNvSpPr/>
+          <p:nvPr/>
+        </p:nvSpPr>
+        <p:spPr>
+          <a:xfrm>
+            <a:off x="6852373" y="4169664"/>
+            <a:ext cx="493776" cy="475488"/>
+          </a:xfrm>
+          <a:prstGeom prst="rect">
+            <a:avLst/>
+          </a:prstGeom>
+          <a:noFill/>
+          <a:ln/>
+        </p:spPr>
+        <p:txBody>
+          <a:bodyPr wrap="square" lIns="0" tIns="0" rIns="0" bIns="0" rtlCol="0" anchor="ctr"/>
+          <a:lstStyle/>
+          <a:p>
+            <a:pPr algn="ctr" indent="0" marL="0">
+              <a:buNone/>
+            </a:pPr>
+            <a:r>
+              <a:rPr lang="en-US" sz="900" b="1" dirty="0">
+                <a:solidFill>
+                  <a:srgbClr val="9D174D"/>
+                </a:solidFill>
+                <a:latin typeface="Trebuchet MS" pitchFamily="34" charset="0"/>
+                <a:ea typeface="Trebuchet MS" pitchFamily="34" charset="-122"/>
+                <a:cs typeface="Trebuchet MS" pitchFamily="34" charset="-120"/>
+              </a:rPr>
+              <a:t>ti</a:t>
+            </a:r>
+            <a:endParaRPr lang="en-US" sz="900" dirty="0"/>
+          </a:p>
+        </p:txBody>
+      </p:sp>
+      <p:sp>
+        <p:nvSpPr>
+          <p:cNvPr id="62" name="Shape 60"/>
+          <p:cNvSpPr/>
+          <p:nvPr/>
+        </p:nvSpPr>
+        <p:spPr>
+          <a:xfrm>
+            <a:off x="7396793" y="4169664"/>
+            <a:ext cx="493776" cy="475488"/>
+          </a:xfrm>
+          <a:prstGeom prst="rect">
+            <a:avLst>
+              <a:gd name="adj" fmla="val 7692"/>
+            </a:avLst>
+          </a:prstGeom>
+          <a:solidFill>
+            <a:srgbClr val="FFFFFF"/>
+          </a:solidFill>
+          <a:ln w="12700">
+            <a:solidFill>
+              <a:srgbClr val="DB2777"/>
+            </a:solidFill>
+            <a:prstDash val="solid"/>
+          </a:ln>
+        </p:spPr>
+      </p:sp>
+      <p:sp>
+        <p:nvSpPr>
+          <p:cNvPr id="63" name="Text 61"/>
+          <p:cNvSpPr/>
+          <p:nvPr/>
+        </p:nvSpPr>
+        <p:spPr>
+          <a:xfrm>
+            <a:off x="7396793" y="4169664"/>
+            <a:ext cx="493776" cy="475488"/>
+          </a:xfrm>
+          <a:prstGeom prst="rect">
+            <a:avLst/>
+          </a:prstGeom>
+          <a:noFill/>
+          <a:ln/>
+        </p:spPr>
+        <p:txBody>
+          <a:bodyPr wrap="square" lIns="0" tIns="0" rIns="0" bIns="0" rtlCol="0" anchor="ctr"/>
+          <a:lstStyle/>
+          <a:p>
+            <a:pPr algn="ctr" indent="0" marL="0">
+              <a:buNone/>
+            </a:pPr>
+            <a:r>
+              <a:rPr lang="en-US" sz="900" b="1" dirty="0">
+                <a:solidFill>
+                  <a:srgbClr val="9D174D"/>
+                </a:solidFill>
+                <a:latin typeface="Trebuchet MS" pitchFamily="34" charset="0"/>
+                <a:ea typeface="Trebuchet MS" pitchFamily="34" charset="-122"/>
+                <a:cs typeface="Trebuchet MS" pitchFamily="34" charset="-120"/>
+              </a:rPr>
+              <a:t>o</a:t>
+            </a:r>
+            <a:endParaRPr lang="en-US" sz="900" dirty="0"/>
+          </a:p>
+        </p:txBody>
+      </p:sp>
+      <p:sp>
+        <p:nvSpPr>
+          <p:cNvPr id="64" name="Shape 62"/>
+          <p:cNvSpPr/>
+          <p:nvPr/>
+        </p:nvSpPr>
+        <p:spPr>
+          <a:xfrm>
+            <a:off x="7941212" y="4169664"/>
+            <a:ext cx="493776" cy="475488"/>
+          </a:xfrm>
+          <a:prstGeom prst="rect">
+            <a:avLst>
+              <a:gd name="adj" fmla="val 7692"/>
+            </a:avLst>
+          </a:prstGeom>
+          <a:solidFill>
+            <a:srgbClr val="FFFFFF"/>
+          </a:solidFill>
+          <a:ln w="12700">
+            <a:solidFill>
+              <a:srgbClr val="DB2777"/>
+            </a:solidFill>
+            <a:prstDash val="solid"/>
+          </a:ln>
+        </p:spPr>
+      </p:sp>
+      <p:sp>
+        <p:nvSpPr>
+          <p:cNvPr id="65" name="Text 63"/>
+          <p:cNvSpPr/>
+          <p:nvPr/>
+        </p:nvSpPr>
+        <p:spPr>
+          <a:xfrm>
+            <a:off x="7941212" y="4169664"/>
+            <a:ext cx="493776" cy="475488"/>
+          </a:xfrm>
+          <a:prstGeom prst="rect">
+            <a:avLst/>
+          </a:prstGeom>
+          <a:noFill/>
+          <a:ln/>
+        </p:spPr>
+        <p:txBody>
+          <a:bodyPr wrap="square" lIns="0" tIns="0" rIns="0" bIns="0" rtlCol="0" anchor="ctr"/>
+          <a:lstStyle/>
+          <a:p>
+            <a:pPr algn="ctr" indent="0" marL="0">
+              <a:buNone/>
+            </a:pPr>
+            <a:r>
+              <a:rPr lang="en-US" sz="900" b="1" dirty="0">
+                <a:solidFill>
+                  <a:srgbClr val="9D174D"/>
+                </a:solidFill>
+                <a:latin typeface="Trebuchet MS" pitchFamily="34" charset="0"/>
+                <a:ea typeface="Trebuchet MS" pitchFamily="34" charset="-122"/>
+                <a:cs typeface="Trebuchet MS" pitchFamily="34" charset="-120"/>
+              </a:rPr>
+              <a:t>n</a:t>
             </a:r>
             <a:endParaRPr lang="en-US" sz="900" dirty="0"/>
           </a:p>
@@ -11560,7 +12271,7 @@
                 <a:ea typeface="Calibri" pitchFamily="34" charset="-122"/>
                 <a:cs typeface="Calibri" pitchFamily="34" charset="-120"/>
               </a:rPr>
-              <a:t>Word Labs  •  wordlabs.app  •  Root: 'dic' = say, speak, proclaim</a:t>
+              <a:t>Word Labs  •  wordlabs.app  •  Root: 'dic' = say; speak</a:t>
             </a:r>
             <a:endParaRPr lang="en-US" sz="800" dirty="0"/>
           </a:p>
@@ -11699,7 +12410,7 @@
                 <a:ea typeface="Trebuchet MS" pitchFamily="34" charset="-122"/>
                 <a:cs typeface="Trebuchet MS" pitchFamily="34" charset="-120"/>
               </a:rPr>
-              <a:t>indicate</a:t>
+              <a:t>benediction</a:t>
             </a:r>
             <a:endParaRPr lang="en-US" sz="2800" dirty="0"/>
           </a:p>
@@ -12387,7 +13098,7 @@
                 <a:ea typeface="Calibri" pitchFamily="34" charset="-122"/>
                 <a:cs typeface="Calibri" pitchFamily="34" charset="-120"/>
               </a:rPr>
-              <a:t>Word Labs  •  wordlabs.app  •  Root: 'dic' = say, speak, proclaim</a:t>
+              <a:t>Word Labs  •  wordlabs.app  •  Root: 'dic' = say; speak</a:t>
             </a:r>
             <a:endParaRPr lang="en-US" sz="800" dirty="0"/>
           </a:p>
@@ -12526,7 +13237,7 @@
                 <a:ea typeface="Trebuchet MS" pitchFamily="34" charset="-122"/>
                 <a:cs typeface="Trebuchet MS" pitchFamily="34" charset="-120"/>
               </a:rPr>
-              <a:t>indicate</a:t>
+              <a:t>benediction</a:t>
             </a:r>
             <a:endParaRPr lang="en-US" sz="2800" dirty="0"/>
           </a:p>
@@ -12665,7 +13376,7 @@
                 <a:ea typeface="Trebuchet MS" pitchFamily="34" charset="-122"/>
                 <a:cs typeface="Trebuchet MS" pitchFamily="34" charset="-120"/>
               </a:rPr>
-              <a:t>in</a:t>
+              <a:t>bene</a:t>
             </a:r>
             <a:endParaRPr lang="en-US" sz="1300" dirty="0"/>
           </a:p>
@@ -12704,7 +13415,7 @@
                 <a:ea typeface="Calibri" pitchFamily="34" charset="-122"/>
                 <a:cs typeface="Calibri" pitchFamily="34" charset="-120"/>
               </a:rPr>
-              <a:t>into, towards</a:t>
+              <a:t>good; well</a:t>
             </a:r>
             <a:endParaRPr lang="en-US" sz="850" dirty="0"/>
           </a:p>
@@ -12816,7 +13527,7 @@
                 <a:ea typeface="Calibri" pitchFamily="34" charset="-122"/>
                 <a:cs typeface="Calibri" pitchFamily="34" charset="-120"/>
               </a:rPr>
-              <a:t>say, speak</a:t>
+              <a:t>say; speak</a:t>
             </a:r>
             <a:endParaRPr lang="en-US" sz="850" dirty="0"/>
           </a:p>
@@ -12889,7 +13600,7 @@
                 <a:ea typeface="Trebuchet MS" pitchFamily="34" charset="-122"/>
                 <a:cs typeface="Trebuchet MS" pitchFamily="34" charset="-120"/>
               </a:rPr>
-              <a:t>ate</a:t>
+              <a:t>tion</a:t>
             </a:r>
             <a:endParaRPr lang="en-US" sz="1300" dirty="0"/>
           </a:p>
@@ -12928,7 +13639,7 @@
                 <a:ea typeface="Calibri" pitchFamily="34" charset="-122"/>
                 <a:cs typeface="Calibri" pitchFamily="34" charset="-120"/>
               </a:rPr>
-              <a:t>to make or do</a:t>
+              <a:t>act or process of</a:t>
             </a:r>
             <a:endParaRPr lang="en-US" sz="850" dirty="0"/>
           </a:p>
@@ -13484,7 +14195,7 @@
                 <a:ea typeface="Calibri" pitchFamily="34" charset="-122"/>
                 <a:cs typeface="Calibri" pitchFamily="34" charset="-120"/>
               </a:rPr>
-              <a:t>Word Labs  •  wordlabs.app  •  Root: 'dic' = say, speak, proclaim</a:t>
+              <a:t>Word Labs  •  wordlabs.app  •  Root: 'dic' = say; speak</a:t>
             </a:r>
             <a:endParaRPr lang="en-US" sz="800" dirty="0"/>
           </a:p>
@@ -13623,7 +14334,7 @@
                 <a:ea typeface="Trebuchet MS" pitchFamily="34" charset="-122"/>
                 <a:cs typeface="Trebuchet MS" pitchFamily="34" charset="-120"/>
               </a:rPr>
-              <a:t>indicate</a:t>
+              <a:t>benediction</a:t>
             </a:r>
             <a:endParaRPr lang="en-US" sz="2800" dirty="0"/>
           </a:p>
@@ -13762,7 +14473,7 @@
                 <a:ea typeface="Trebuchet MS" pitchFamily="34" charset="-122"/>
                 <a:cs typeface="Trebuchet MS" pitchFamily="34" charset="-120"/>
               </a:rPr>
-              <a:t>in</a:t>
+              <a:t>bene</a:t>
             </a:r>
             <a:endParaRPr lang="en-US" sz="1300" dirty="0"/>
           </a:p>
@@ -13801,7 +14512,7 @@
                 <a:ea typeface="Calibri" pitchFamily="34" charset="-122"/>
                 <a:cs typeface="Calibri" pitchFamily="34" charset="-120"/>
               </a:rPr>
-              <a:t>into, towards</a:t>
+              <a:t>good; well</a:t>
             </a:r>
             <a:endParaRPr lang="en-US" sz="850" dirty="0"/>
           </a:p>
@@ -13913,7 +14624,7 @@
                 <a:ea typeface="Calibri" pitchFamily="34" charset="-122"/>
                 <a:cs typeface="Calibri" pitchFamily="34" charset="-120"/>
               </a:rPr>
-              <a:t>say, speak</a:t>
+              <a:t>say; speak</a:t>
             </a:r>
             <a:endParaRPr lang="en-US" sz="850" dirty="0"/>
           </a:p>
@@ -13986,7 +14697,7 @@
                 <a:ea typeface="Trebuchet MS" pitchFamily="34" charset="-122"/>
                 <a:cs typeface="Trebuchet MS" pitchFamily="34" charset="-120"/>
               </a:rPr>
-              <a:t>ate</a:t>
+              <a:t>tion</a:t>
             </a:r>
             <a:endParaRPr lang="en-US" sz="1300" dirty="0"/>
           </a:p>
@@ -14025,7 +14736,7 @@
                 <a:ea typeface="Calibri" pitchFamily="34" charset="-122"/>
                 <a:cs typeface="Calibri" pitchFamily="34" charset="-120"/>
               </a:rPr>
-              <a:t>to make or do</a:t>
+              <a:t>act or process of</a:t>
             </a:r>
             <a:endParaRPr lang="en-US" sz="850" dirty="0"/>
           </a:p>
@@ -14132,8 +14843,8 @@
         </p:nvSpPr>
         <p:spPr>
           <a:xfrm>
-            <a:off x="2313432" y="3364992"/>
-            <a:ext cx="1645920" cy="475488"/>
+            <a:off x="1975104" y="3364992"/>
+            <a:ext cx="1554480" cy="475488"/>
           </a:xfrm>
           <a:prstGeom prst="rect">
             <a:avLst>
@@ -14159,8 +14870,8 @@
         </p:nvSpPr>
         <p:spPr>
           <a:xfrm>
-            <a:off x="2313432" y="3364992"/>
-            <a:ext cx="1645920" cy="475488"/>
+            <a:off x="1975104" y="3364992"/>
+            <a:ext cx="1554480" cy="475488"/>
           </a:xfrm>
           <a:prstGeom prst="rect">
             <a:avLst/>
@@ -14184,7 +14895,7 @@
                 <a:ea typeface="Trebuchet MS" pitchFamily="34" charset="-122"/>
                 <a:cs typeface="Trebuchet MS" pitchFamily="34" charset="-120"/>
               </a:rPr>
-              <a:t>in</a:t>
+              <a:t>ben</a:t>
             </a:r>
             <a:endParaRPr lang="en-US" sz="1400" dirty="0"/>
           </a:p>
@@ -14198,8 +14909,8 @@
         </p:nvSpPr>
         <p:spPr>
           <a:xfrm>
-            <a:off x="3959352" y="3364992"/>
-            <a:ext cx="411480" cy="475488"/>
+            <a:off x="3529584" y="3364992"/>
+            <a:ext cx="73152" cy="475488"/>
           </a:xfrm>
           <a:prstGeom prst="rect">
             <a:avLst/>
@@ -14237,8 +14948,8 @@
         </p:nvSpPr>
         <p:spPr>
           <a:xfrm>
-            <a:off x="4370832" y="3364992"/>
-            <a:ext cx="1645920" cy="475488"/>
+            <a:off x="3602736" y="3364992"/>
+            <a:ext cx="1554480" cy="475488"/>
           </a:xfrm>
           <a:prstGeom prst="rect">
             <a:avLst>
@@ -14264,8 +14975,8 @@
         </p:nvSpPr>
         <p:spPr>
           <a:xfrm>
-            <a:off x="4370832" y="3364992"/>
-            <a:ext cx="1645920" cy="475488"/>
+            <a:off x="3602736" y="3364992"/>
+            <a:ext cx="1554480" cy="475488"/>
           </a:xfrm>
           <a:prstGeom prst="rect">
             <a:avLst/>
@@ -14289,7 +15000,7 @@
                 <a:ea typeface="Trebuchet MS" pitchFamily="34" charset="-122"/>
                 <a:cs typeface="Trebuchet MS" pitchFamily="34" charset="-120"/>
               </a:rPr>
-              <a:t>di</a:t>
+              <a:t>e</a:t>
             </a:r>
             <a:endParaRPr lang="en-US" sz="1400" dirty="0"/>
           </a:p>
@@ -14303,8 +15014,8 @@
         </p:nvSpPr>
         <p:spPr>
           <a:xfrm>
-            <a:off x="6016752" y="3364992"/>
-            <a:ext cx="411480" cy="475488"/>
+            <a:off x="5157216" y="3364992"/>
+            <a:ext cx="73152" cy="475488"/>
           </a:xfrm>
           <a:prstGeom prst="rect">
             <a:avLst/>
@@ -14342,8 +15053,8 @@
         </p:nvSpPr>
         <p:spPr>
           <a:xfrm>
-            <a:off x="6428232" y="3364992"/>
-            <a:ext cx="1645920" cy="475488"/>
+            <a:off x="5230368" y="3364992"/>
+            <a:ext cx="1554480" cy="475488"/>
           </a:xfrm>
           <a:prstGeom prst="rect">
             <a:avLst>
@@ -14369,8 +15080,8 @@
         </p:nvSpPr>
         <p:spPr>
           <a:xfrm>
-            <a:off x="6428232" y="3364992"/>
-            <a:ext cx="1645920" cy="475488"/>
+            <a:off x="5230368" y="3364992"/>
+            <a:ext cx="1554480" cy="475488"/>
           </a:xfrm>
           <a:prstGeom prst="rect">
             <a:avLst/>
@@ -14394,7 +15105,7 @@
                 <a:ea typeface="Trebuchet MS" pitchFamily="34" charset="-122"/>
                 <a:cs typeface="Trebuchet MS" pitchFamily="34" charset="-120"/>
               </a:rPr>
-              <a:t>cate</a:t>
+              <a:t>dic</a:t>
             </a:r>
             <a:endParaRPr lang="en-US" sz="1400" dirty="0"/>
           </a:p>
@@ -14402,7 +15113,112 @@
       </p:sp>
       <p:sp>
         <p:nvSpPr>
-          <p:cNvPr id="36" name="Shape 34"/>
+          <p:cNvPr id="36" name="Text 34"/>
+          <p:cNvSpPr/>
+          <p:nvPr/>
+        </p:nvSpPr>
+        <p:spPr>
+          <a:xfrm>
+            <a:off x="6784848" y="3364992"/>
+            <a:ext cx="73152" cy="475488"/>
+          </a:xfrm>
+          <a:prstGeom prst="rect">
+            <a:avLst/>
+          </a:prstGeom>
+          <a:noFill/>
+          <a:ln/>
+        </p:spPr>
+        <p:txBody>
+          <a:bodyPr wrap="square" lIns="0" tIns="0" rIns="0" bIns="0" rtlCol="0" anchor="ctr"/>
+          <a:lstStyle/>
+          <a:p>
+            <a:pPr algn="ctr" indent="0" marL="0">
+              <a:buNone/>
+            </a:pPr>
+            <a:r>
+              <a:rPr lang="en-US" sz="1600" b="1" dirty="0">
+                <a:solidFill>
+                  <a:srgbClr val="0D9488"/>
+                </a:solidFill>
+                <a:latin typeface="Trebuchet MS" pitchFamily="34" charset="0"/>
+                <a:ea typeface="Trebuchet MS" pitchFamily="34" charset="-122"/>
+                <a:cs typeface="Trebuchet MS" pitchFamily="34" charset="-120"/>
+              </a:rPr>
+              <a:t>·</a:t>
+            </a:r>
+            <a:endParaRPr lang="en-US" sz="1600" dirty="0"/>
+          </a:p>
+        </p:txBody>
+      </p:sp>
+      <p:sp>
+        <p:nvSpPr>
+          <p:cNvPr id="37" name="Shape 35"/>
+          <p:cNvSpPr/>
+          <p:nvPr/>
+        </p:nvSpPr>
+        <p:spPr>
+          <a:xfrm>
+            <a:off x="6858000" y="3364992"/>
+            <a:ext cx="1554480" cy="475488"/>
+          </a:xfrm>
+          <a:prstGeom prst="rect">
+            <a:avLst>
+              <a:gd name="adj" fmla="val 9615"/>
+            </a:avLst>
+          </a:prstGeom>
+          <a:solidFill>
+            <a:srgbClr val="FFFFFF"/>
+          </a:solidFill>
+          <a:ln w="12700">
+            <a:solidFill>
+              <a:srgbClr val="0D9488"/>
+            </a:solidFill>
+            <a:prstDash val="solid"/>
+          </a:ln>
+        </p:spPr>
+      </p:sp>
+      <p:sp>
+        <p:nvSpPr>
+          <p:cNvPr id="38" name="Text 36"/>
+          <p:cNvSpPr/>
+          <p:nvPr/>
+        </p:nvSpPr>
+        <p:spPr>
+          <a:xfrm>
+            <a:off x="6858000" y="3364992"/>
+            <a:ext cx="1554480" cy="475488"/>
+          </a:xfrm>
+          <a:prstGeom prst="rect">
+            <a:avLst/>
+          </a:prstGeom>
+          <a:noFill/>
+          <a:ln/>
+        </p:spPr>
+        <p:txBody>
+          <a:bodyPr wrap="square" lIns="0" tIns="0" rIns="0" bIns="0" rtlCol="0" anchor="ctr"/>
+          <a:lstStyle/>
+          <a:p>
+            <a:pPr algn="ctr" indent="0" marL="0">
+              <a:buNone/>
+            </a:pPr>
+            <a:r>
+              <a:rPr lang="en-US" sz="1400" b="1" dirty="0">
+                <a:solidFill>
+                  <a:srgbClr val="0D9488"/>
+                </a:solidFill>
+                <a:latin typeface="Trebuchet MS" pitchFamily="34" charset="0"/>
+                <a:ea typeface="Trebuchet MS" pitchFamily="34" charset="-122"/>
+                <a:cs typeface="Trebuchet MS" pitchFamily="34" charset="-120"/>
+              </a:rPr>
+              <a:t>tion</a:t>
+            </a:r>
+            <a:endParaRPr lang="en-US" sz="1400" dirty="0"/>
+          </a:p>
+        </p:txBody>
+      </p:sp>
+      <p:sp>
+        <p:nvSpPr>
+          <p:cNvPr id="39" name="Shape 37"/>
           <p:cNvSpPr/>
           <p:nvPr/>
         </p:nvSpPr>
@@ -14429,7 +15245,7 @@
       </p:sp>
       <p:sp>
         <p:nvSpPr>
-          <p:cNvPr id="37" name="Text 35"/>
+          <p:cNvPr id="40" name="Text 38"/>
           <p:cNvSpPr/>
           <p:nvPr/>
         </p:nvSpPr>
@@ -14468,7 +15284,7 @@
       </p:sp>
       <p:sp>
         <p:nvSpPr>
-          <p:cNvPr id="38" name="Shape 36"/>
+          <p:cNvPr id="41" name="Shape 39"/>
           <p:cNvSpPr/>
           <p:nvPr/>
         </p:nvSpPr>
@@ -14495,7 +15311,7 @@
       </p:sp>
       <p:sp>
         <p:nvSpPr>
-          <p:cNvPr id="39" name="Text 37"/>
+          <p:cNvPr id="42" name="Text 40"/>
           <p:cNvSpPr/>
           <p:nvPr/>
         </p:nvSpPr>
@@ -14727,7 +15543,7 @@
                 <a:ea typeface="Calibri" pitchFamily="34" charset="-122"/>
                 <a:cs typeface="Calibri" pitchFamily="34" charset="-120"/>
               </a:rPr>
-              <a:t>Root 'dic' — say, speak, proclaim</a:t>
+              <a:t>Root 'dic' — say; speak</a:t>
             </a:r>
             <a:endParaRPr lang="en-US" sz="1600" dirty="0"/>
           </a:p>
@@ -15083,7 +15899,7 @@
                 <a:ea typeface="Calibri" pitchFamily="34" charset="-122"/>
                 <a:cs typeface="Calibri" pitchFamily="34" charset="-120"/>
               </a:rPr>
-              <a:t>Word Labs  •  wordlabs.app  •  Root: 'dic' = say, speak, proclaim</a:t>
+              <a:t>Word Labs  •  wordlabs.app  •  Root: 'dic' = say; speak</a:t>
             </a:r>
             <a:endParaRPr lang="en-US" sz="800" dirty="0"/>
           </a:p>
@@ -15222,7 +16038,7 @@
                 <a:ea typeface="Trebuchet MS" pitchFamily="34" charset="-122"/>
                 <a:cs typeface="Trebuchet MS" pitchFamily="34" charset="-120"/>
               </a:rPr>
-              <a:t>indicate</a:t>
+              <a:t>benediction</a:t>
             </a:r>
             <a:endParaRPr lang="en-US" sz="2800" dirty="0"/>
           </a:p>
@@ -15361,7 +16177,7 @@
                 <a:ea typeface="Trebuchet MS" pitchFamily="34" charset="-122"/>
                 <a:cs typeface="Trebuchet MS" pitchFamily="34" charset="-120"/>
               </a:rPr>
-              <a:t>in</a:t>
+              <a:t>bene</a:t>
             </a:r>
             <a:endParaRPr lang="en-US" sz="1300" dirty="0"/>
           </a:p>
@@ -15400,7 +16216,7 @@
                 <a:ea typeface="Calibri" pitchFamily="34" charset="-122"/>
                 <a:cs typeface="Calibri" pitchFamily="34" charset="-120"/>
               </a:rPr>
-              <a:t>into, towards</a:t>
+              <a:t>good; well</a:t>
             </a:r>
             <a:endParaRPr lang="en-US" sz="850" dirty="0"/>
           </a:p>
@@ -15512,7 +16328,7 @@
                 <a:ea typeface="Calibri" pitchFamily="34" charset="-122"/>
                 <a:cs typeface="Calibri" pitchFamily="34" charset="-120"/>
               </a:rPr>
-              <a:t>say, speak</a:t>
+              <a:t>say; speak</a:t>
             </a:r>
             <a:endParaRPr lang="en-US" sz="850" dirty="0"/>
           </a:p>
@@ -15585,7 +16401,7 @@
                 <a:ea typeface="Trebuchet MS" pitchFamily="34" charset="-122"/>
                 <a:cs typeface="Trebuchet MS" pitchFamily="34" charset="-120"/>
               </a:rPr>
-              <a:t>ate</a:t>
+              <a:t>tion</a:t>
             </a:r>
             <a:endParaRPr lang="en-US" sz="1300" dirty="0"/>
           </a:p>
@@ -15624,7 +16440,7 @@
                 <a:ea typeface="Calibri" pitchFamily="34" charset="-122"/>
                 <a:cs typeface="Calibri" pitchFamily="34" charset="-120"/>
               </a:rPr>
-              <a:t>to make or do</a:t>
+              <a:t>act or process of</a:t>
             </a:r>
             <a:endParaRPr lang="en-US" sz="850" dirty="0"/>
           </a:p>
@@ -15731,8 +16547,8 @@
         </p:nvSpPr>
         <p:spPr>
           <a:xfrm>
-            <a:off x="2313432" y="3364992"/>
-            <a:ext cx="1645920" cy="475488"/>
+            <a:off x="1975104" y="3364992"/>
+            <a:ext cx="1554480" cy="475488"/>
           </a:xfrm>
           <a:prstGeom prst="rect">
             <a:avLst>
@@ -15758,8 +16574,8 @@
         </p:nvSpPr>
         <p:spPr>
           <a:xfrm>
-            <a:off x="2313432" y="3364992"/>
-            <a:ext cx="1645920" cy="475488"/>
+            <a:off x="1975104" y="3364992"/>
+            <a:ext cx="1554480" cy="475488"/>
           </a:xfrm>
           <a:prstGeom prst="rect">
             <a:avLst/>
@@ -15783,7 +16599,7 @@
                 <a:ea typeface="Trebuchet MS" pitchFamily="34" charset="-122"/>
                 <a:cs typeface="Trebuchet MS" pitchFamily="34" charset="-120"/>
               </a:rPr>
-              <a:t>in</a:t>
+              <a:t>ben</a:t>
             </a:r>
             <a:endParaRPr lang="en-US" sz="1400" dirty="0"/>
           </a:p>
@@ -15797,8 +16613,8 @@
         </p:nvSpPr>
         <p:spPr>
           <a:xfrm>
-            <a:off x="3959352" y="3364992"/>
-            <a:ext cx="411480" cy="475488"/>
+            <a:off x="3529584" y="3364992"/>
+            <a:ext cx="73152" cy="475488"/>
           </a:xfrm>
           <a:prstGeom prst="rect">
             <a:avLst/>
@@ -15836,8 +16652,8 @@
         </p:nvSpPr>
         <p:spPr>
           <a:xfrm>
-            <a:off x="4370832" y="3364992"/>
-            <a:ext cx="1645920" cy="475488"/>
+            <a:off x="3602736" y="3364992"/>
+            <a:ext cx="1554480" cy="475488"/>
           </a:xfrm>
           <a:prstGeom prst="rect">
             <a:avLst>
@@ -15863,8 +16679,8 @@
         </p:nvSpPr>
         <p:spPr>
           <a:xfrm>
-            <a:off x="4370832" y="3364992"/>
-            <a:ext cx="1645920" cy="475488"/>
+            <a:off x="3602736" y="3364992"/>
+            <a:ext cx="1554480" cy="475488"/>
           </a:xfrm>
           <a:prstGeom prst="rect">
             <a:avLst/>
@@ -15888,7 +16704,7 @@
                 <a:ea typeface="Trebuchet MS" pitchFamily="34" charset="-122"/>
                 <a:cs typeface="Trebuchet MS" pitchFamily="34" charset="-120"/>
               </a:rPr>
-              <a:t>di</a:t>
+              <a:t>e</a:t>
             </a:r>
             <a:endParaRPr lang="en-US" sz="1400" dirty="0"/>
           </a:p>
@@ -15902,8 +16718,8 @@
         </p:nvSpPr>
         <p:spPr>
           <a:xfrm>
-            <a:off x="6016752" y="3364992"/>
-            <a:ext cx="411480" cy="475488"/>
+            <a:off x="5157216" y="3364992"/>
+            <a:ext cx="73152" cy="475488"/>
           </a:xfrm>
           <a:prstGeom prst="rect">
             <a:avLst/>
@@ -15941,8 +16757,8 @@
         </p:nvSpPr>
         <p:spPr>
           <a:xfrm>
-            <a:off x="6428232" y="3364992"/>
-            <a:ext cx="1645920" cy="475488"/>
+            <a:off x="5230368" y="3364992"/>
+            <a:ext cx="1554480" cy="475488"/>
           </a:xfrm>
           <a:prstGeom prst="rect">
             <a:avLst>
@@ -15968,8 +16784,8 @@
         </p:nvSpPr>
         <p:spPr>
           <a:xfrm>
-            <a:off x="6428232" y="3364992"/>
-            <a:ext cx="1645920" cy="475488"/>
+            <a:off x="5230368" y="3364992"/>
+            <a:ext cx="1554480" cy="475488"/>
           </a:xfrm>
           <a:prstGeom prst="rect">
             <a:avLst/>
@@ -15993,7 +16809,7 @@
                 <a:ea typeface="Trebuchet MS" pitchFamily="34" charset="-122"/>
                 <a:cs typeface="Trebuchet MS" pitchFamily="34" charset="-120"/>
               </a:rPr>
-              <a:t>cate</a:t>
+              <a:t>dic</a:t>
             </a:r>
             <a:endParaRPr lang="en-US" sz="1400" dirty="0"/>
           </a:p>
@@ -16001,7 +16817,112 @@
       </p:sp>
       <p:sp>
         <p:nvSpPr>
-          <p:cNvPr id="36" name="Shape 34"/>
+          <p:cNvPr id="36" name="Text 34"/>
+          <p:cNvSpPr/>
+          <p:nvPr/>
+        </p:nvSpPr>
+        <p:spPr>
+          <a:xfrm>
+            <a:off x="6784848" y="3364992"/>
+            <a:ext cx="73152" cy="475488"/>
+          </a:xfrm>
+          <a:prstGeom prst="rect">
+            <a:avLst/>
+          </a:prstGeom>
+          <a:noFill/>
+          <a:ln/>
+        </p:spPr>
+        <p:txBody>
+          <a:bodyPr wrap="square" lIns="0" tIns="0" rIns="0" bIns="0" rtlCol="0" anchor="ctr"/>
+          <a:lstStyle/>
+          <a:p>
+            <a:pPr algn="ctr" indent="0" marL="0">
+              <a:buNone/>
+            </a:pPr>
+            <a:r>
+              <a:rPr lang="en-US" sz="1600" b="1" dirty="0">
+                <a:solidFill>
+                  <a:srgbClr val="0D9488"/>
+                </a:solidFill>
+                <a:latin typeface="Trebuchet MS" pitchFamily="34" charset="0"/>
+                <a:ea typeface="Trebuchet MS" pitchFamily="34" charset="-122"/>
+                <a:cs typeface="Trebuchet MS" pitchFamily="34" charset="-120"/>
+              </a:rPr>
+              <a:t>·</a:t>
+            </a:r>
+            <a:endParaRPr lang="en-US" sz="1600" dirty="0"/>
+          </a:p>
+        </p:txBody>
+      </p:sp>
+      <p:sp>
+        <p:nvSpPr>
+          <p:cNvPr id="37" name="Shape 35"/>
+          <p:cNvSpPr/>
+          <p:nvPr/>
+        </p:nvSpPr>
+        <p:spPr>
+          <a:xfrm>
+            <a:off x="6858000" y="3364992"/>
+            <a:ext cx="1554480" cy="475488"/>
+          </a:xfrm>
+          <a:prstGeom prst="rect">
+            <a:avLst>
+              <a:gd name="adj" fmla="val 9615"/>
+            </a:avLst>
+          </a:prstGeom>
+          <a:solidFill>
+            <a:srgbClr val="FFFFFF"/>
+          </a:solidFill>
+          <a:ln w="12700">
+            <a:solidFill>
+              <a:srgbClr val="0D9488"/>
+            </a:solidFill>
+            <a:prstDash val="solid"/>
+          </a:ln>
+        </p:spPr>
+      </p:sp>
+      <p:sp>
+        <p:nvSpPr>
+          <p:cNvPr id="38" name="Text 36"/>
+          <p:cNvSpPr/>
+          <p:nvPr/>
+        </p:nvSpPr>
+        <p:spPr>
+          <a:xfrm>
+            <a:off x="6858000" y="3364992"/>
+            <a:ext cx="1554480" cy="475488"/>
+          </a:xfrm>
+          <a:prstGeom prst="rect">
+            <a:avLst/>
+          </a:prstGeom>
+          <a:noFill/>
+          <a:ln/>
+        </p:spPr>
+        <p:txBody>
+          <a:bodyPr wrap="square" lIns="0" tIns="0" rIns="0" bIns="0" rtlCol="0" anchor="ctr"/>
+          <a:lstStyle/>
+          <a:p>
+            <a:pPr algn="ctr" indent="0" marL="0">
+              <a:buNone/>
+            </a:pPr>
+            <a:r>
+              <a:rPr lang="en-US" sz="1400" b="1" dirty="0">
+                <a:solidFill>
+                  <a:srgbClr val="0D9488"/>
+                </a:solidFill>
+                <a:latin typeface="Trebuchet MS" pitchFamily="34" charset="0"/>
+                <a:ea typeface="Trebuchet MS" pitchFamily="34" charset="-122"/>
+                <a:cs typeface="Trebuchet MS" pitchFamily="34" charset="-120"/>
+              </a:rPr>
+              <a:t>tion</a:t>
+            </a:r>
+            <a:endParaRPr lang="en-US" sz="1400" dirty="0"/>
+          </a:p>
+        </p:txBody>
+      </p:sp>
+      <p:sp>
+        <p:nvSpPr>
+          <p:cNvPr id="39" name="Shape 37"/>
           <p:cNvSpPr/>
           <p:nvPr/>
         </p:nvSpPr>
@@ -16028,7 +16949,7 @@
       </p:sp>
       <p:sp>
         <p:nvSpPr>
-          <p:cNvPr id="37" name="Text 35"/>
+          <p:cNvPr id="40" name="Text 38"/>
           <p:cNvSpPr/>
           <p:nvPr/>
         </p:nvSpPr>
@@ -16067,18 +16988,18 @@
       </p:sp>
       <p:sp>
         <p:nvSpPr>
-          <p:cNvPr id="38" name="Shape 36"/>
+          <p:cNvPr id="41" name="Shape 39"/>
           <p:cNvSpPr/>
           <p:nvPr/>
         </p:nvSpPr>
         <p:spPr>
           <a:xfrm>
             <a:off x="1874520" y="4096512"/>
-            <a:ext cx="6903720" cy="804672"/>
+            <a:ext cx="6903720" cy="658368"/>
           </a:xfrm>
           <a:prstGeom prst="rect">
             <a:avLst>
-              <a:gd name="adj" fmla="val 6818"/>
+              <a:gd name="adj" fmla="val 8333"/>
             </a:avLst>
           </a:prstGeom>
           <a:solidFill>
@@ -16094,18 +17015,18 @@
       </p:sp>
       <p:sp>
         <p:nvSpPr>
-          <p:cNvPr id="39" name="Shape 37"/>
-          <p:cNvSpPr/>
-          <p:nvPr/>
-        </p:nvSpPr>
-        <p:spPr>
-          <a:xfrm>
-            <a:off x="2254649" y="4169664"/>
-            <a:ext cx="685800" cy="384048"/>
+          <p:cNvPr id="42" name="Shape 40"/>
+          <p:cNvSpPr/>
+          <p:nvPr/>
+        </p:nvSpPr>
+        <p:spPr>
+          <a:xfrm>
+            <a:off x="1951828" y="4169664"/>
+            <a:ext cx="603504" cy="475488"/>
           </a:xfrm>
           <a:prstGeom prst="rect">
             <a:avLst>
-              <a:gd name="adj" fmla="val 9524"/>
+              <a:gd name="adj" fmla="val 7692"/>
             </a:avLst>
           </a:prstGeom>
           <a:solidFill>
@@ -16121,14 +17042,14 @@
       </p:sp>
       <p:sp>
         <p:nvSpPr>
-          <p:cNvPr id="40" name="Text 38"/>
-          <p:cNvSpPr/>
-          <p:nvPr/>
-        </p:nvSpPr>
-        <p:spPr>
-          <a:xfrm>
-            <a:off x="2254649" y="4169664"/>
-            <a:ext cx="685800" cy="384048"/>
+          <p:cNvPr id="43" name="Text 41"/>
+          <p:cNvSpPr/>
+          <p:nvPr/>
+        </p:nvSpPr>
+        <p:spPr>
+          <a:xfrm>
+            <a:off x="1951828" y="4169664"/>
+            <a:ext cx="603504" cy="475488"/>
           </a:xfrm>
           <a:prstGeom prst="rect">
             <a:avLst/>
@@ -16152,7 +17073,7 @@
                 <a:ea typeface="Trebuchet MS" pitchFamily="34" charset="-122"/>
                 <a:cs typeface="Trebuchet MS" pitchFamily="34" charset="-120"/>
               </a:rPr>
-              <a:t>i</a:t>
+              <a:t>b</a:t>
             </a:r>
             <a:endParaRPr lang="en-US" sz="900" dirty="0"/>
           </a:p>
@@ -16160,18 +17081,18 @@
       </p:sp>
       <p:sp>
         <p:nvSpPr>
-          <p:cNvPr id="41" name="Shape 39"/>
-          <p:cNvSpPr/>
-          <p:nvPr/>
-        </p:nvSpPr>
-        <p:spPr>
-          <a:xfrm>
-            <a:off x="3293146" y="4169664"/>
-            <a:ext cx="685800" cy="384048"/>
+          <p:cNvPr id="44" name="Shape 42"/>
+          <p:cNvSpPr/>
+          <p:nvPr/>
+        </p:nvSpPr>
+        <p:spPr>
+          <a:xfrm>
+            <a:off x="2605209" y="4169664"/>
+            <a:ext cx="603504" cy="475488"/>
           </a:xfrm>
           <a:prstGeom prst="rect">
             <a:avLst>
-              <a:gd name="adj" fmla="val 9524"/>
+              <a:gd name="adj" fmla="val 7692"/>
             </a:avLst>
           </a:prstGeom>
           <a:solidFill>
@@ -16187,14 +17108,14 @@
       </p:sp>
       <p:sp>
         <p:nvSpPr>
-          <p:cNvPr id="42" name="Text 40"/>
-          <p:cNvSpPr/>
-          <p:nvPr/>
-        </p:nvSpPr>
-        <p:spPr>
-          <a:xfrm>
-            <a:off x="3293146" y="4169664"/>
-            <a:ext cx="685800" cy="384048"/>
+          <p:cNvPr id="45" name="Text 43"/>
+          <p:cNvSpPr/>
+          <p:nvPr/>
+        </p:nvSpPr>
+        <p:spPr>
+          <a:xfrm>
+            <a:off x="2605209" y="4169664"/>
+            <a:ext cx="603504" cy="475488"/>
           </a:xfrm>
           <a:prstGeom prst="rect">
             <a:avLst/>
@@ -16218,7 +17139,7 @@
                 <a:ea typeface="Trebuchet MS" pitchFamily="34" charset="-122"/>
                 <a:cs typeface="Trebuchet MS" pitchFamily="34" charset="-120"/>
               </a:rPr>
-              <a:t>n</a:t>
+              <a:t>e</a:t>
             </a:r>
             <a:endParaRPr lang="en-US" sz="900" dirty="0"/>
           </a:p>
@@ -16226,18 +17147,18 @@
       </p:sp>
       <p:sp>
         <p:nvSpPr>
-          <p:cNvPr id="43" name="Shape 41"/>
-          <p:cNvSpPr/>
-          <p:nvPr/>
-        </p:nvSpPr>
-        <p:spPr>
-          <a:xfrm>
-            <a:off x="4331643" y="4169664"/>
-            <a:ext cx="685800" cy="384048"/>
+          <p:cNvPr id="46" name="Shape 44"/>
+          <p:cNvSpPr/>
+          <p:nvPr/>
+        </p:nvSpPr>
+        <p:spPr>
+          <a:xfrm>
+            <a:off x="3258589" y="4169664"/>
+            <a:ext cx="603504" cy="475488"/>
           </a:xfrm>
           <a:prstGeom prst="rect">
             <a:avLst>
-              <a:gd name="adj" fmla="val 9524"/>
+              <a:gd name="adj" fmla="val 7692"/>
             </a:avLst>
           </a:prstGeom>
           <a:solidFill>
@@ -16253,14 +17174,14 @@
       </p:sp>
       <p:sp>
         <p:nvSpPr>
-          <p:cNvPr id="44" name="Text 42"/>
-          <p:cNvSpPr/>
-          <p:nvPr/>
-        </p:nvSpPr>
-        <p:spPr>
-          <a:xfrm>
-            <a:off x="4331643" y="4169664"/>
-            <a:ext cx="685800" cy="384048"/>
+          <p:cNvPr id="47" name="Text 45"/>
+          <p:cNvSpPr/>
+          <p:nvPr/>
+        </p:nvSpPr>
+        <p:spPr>
+          <a:xfrm>
+            <a:off x="3258589" y="4169664"/>
+            <a:ext cx="603504" cy="475488"/>
           </a:xfrm>
           <a:prstGeom prst="rect">
             <a:avLst/>
@@ -16284,7 +17205,7 @@
                 <a:ea typeface="Trebuchet MS" pitchFamily="34" charset="-122"/>
                 <a:cs typeface="Trebuchet MS" pitchFamily="34" charset="-120"/>
               </a:rPr>
-              <a:t>d</a:t>
+              <a:t>n</a:t>
             </a:r>
             <a:endParaRPr lang="en-US" sz="900" dirty="0"/>
           </a:p>
@@ -16292,18 +17213,18 @@
       </p:sp>
       <p:sp>
         <p:nvSpPr>
-          <p:cNvPr id="45" name="Shape 43"/>
-          <p:cNvSpPr/>
-          <p:nvPr/>
-        </p:nvSpPr>
-        <p:spPr>
-          <a:xfrm>
-            <a:off x="5370141" y="4169664"/>
-            <a:ext cx="685800" cy="384048"/>
+          <p:cNvPr id="48" name="Shape 46"/>
+          <p:cNvSpPr/>
+          <p:nvPr/>
+        </p:nvSpPr>
+        <p:spPr>
+          <a:xfrm>
+            <a:off x="3911969" y="4169664"/>
+            <a:ext cx="603504" cy="475488"/>
           </a:xfrm>
           <a:prstGeom prst="rect">
             <a:avLst>
-              <a:gd name="adj" fmla="val 9524"/>
+              <a:gd name="adj" fmla="val 7692"/>
             </a:avLst>
           </a:prstGeom>
           <a:solidFill>
@@ -16319,14 +17240,14 @@
       </p:sp>
       <p:sp>
         <p:nvSpPr>
-          <p:cNvPr id="46" name="Text 44"/>
-          <p:cNvSpPr/>
-          <p:nvPr/>
-        </p:nvSpPr>
-        <p:spPr>
-          <a:xfrm>
-            <a:off x="5370141" y="4169664"/>
-            <a:ext cx="685800" cy="384048"/>
+          <p:cNvPr id="49" name="Text 47"/>
+          <p:cNvSpPr/>
+          <p:nvPr/>
+        </p:nvSpPr>
+        <p:spPr>
+          <a:xfrm>
+            <a:off x="3911969" y="4169664"/>
+            <a:ext cx="603504" cy="475488"/>
           </a:xfrm>
           <a:prstGeom prst="rect">
             <a:avLst/>
@@ -16350,7 +17271,7 @@
                 <a:ea typeface="Trebuchet MS" pitchFamily="34" charset="-122"/>
                 <a:cs typeface="Trebuchet MS" pitchFamily="34" charset="-120"/>
               </a:rPr>
-              <a:t>i</a:t>
+              <a:t>e</a:t>
             </a:r>
             <a:endParaRPr lang="en-US" sz="900" dirty="0"/>
           </a:p>
@@ -16358,18 +17279,18 @@
       </p:sp>
       <p:sp>
         <p:nvSpPr>
-          <p:cNvPr id="47" name="Shape 45"/>
-          <p:cNvSpPr/>
-          <p:nvPr/>
-        </p:nvSpPr>
-        <p:spPr>
-          <a:xfrm>
-            <a:off x="6408638" y="4169664"/>
-            <a:ext cx="685800" cy="384048"/>
+          <p:cNvPr id="50" name="Shape 48"/>
+          <p:cNvSpPr/>
+          <p:nvPr/>
+        </p:nvSpPr>
+        <p:spPr>
+          <a:xfrm>
+            <a:off x="4565350" y="4169664"/>
+            <a:ext cx="603504" cy="475488"/>
           </a:xfrm>
           <a:prstGeom prst="rect">
             <a:avLst>
-              <a:gd name="adj" fmla="val 9524"/>
+              <a:gd name="adj" fmla="val 7692"/>
             </a:avLst>
           </a:prstGeom>
           <a:solidFill>
@@ -16385,14 +17306,14 @@
       </p:sp>
       <p:sp>
         <p:nvSpPr>
-          <p:cNvPr id="48" name="Text 46"/>
-          <p:cNvSpPr/>
-          <p:nvPr/>
-        </p:nvSpPr>
-        <p:spPr>
-          <a:xfrm>
-            <a:off x="6408638" y="4169664"/>
-            <a:ext cx="685800" cy="384048"/>
+          <p:cNvPr id="51" name="Text 49"/>
+          <p:cNvSpPr/>
+          <p:nvPr/>
+        </p:nvSpPr>
+        <p:spPr>
+          <a:xfrm>
+            <a:off x="4565350" y="4169664"/>
+            <a:ext cx="603504" cy="475488"/>
           </a:xfrm>
           <a:prstGeom prst="rect">
             <a:avLst/>
@@ -16416,7 +17337,7 @@
                 <a:ea typeface="Trebuchet MS" pitchFamily="34" charset="-122"/>
                 <a:cs typeface="Trebuchet MS" pitchFamily="34" charset="-120"/>
               </a:rPr>
-              <a:t>c</a:t>
+              <a:t>d</a:t>
             </a:r>
             <a:endParaRPr lang="en-US" sz="900" dirty="0"/>
           </a:p>
@@ -16424,57 +17345,18 @@
       </p:sp>
       <p:sp>
         <p:nvSpPr>
-          <p:cNvPr id="49" name="Text 47"/>
-          <p:cNvSpPr/>
-          <p:nvPr/>
-        </p:nvSpPr>
-        <p:spPr>
-          <a:xfrm>
-            <a:off x="6408638" y="4572000"/>
-            <a:ext cx="685800" cy="219456"/>
-          </a:xfrm>
-          <a:prstGeom prst="rect">
-            <a:avLst/>
-          </a:prstGeom>
-          <a:noFill/>
-          <a:ln/>
-        </p:spPr>
-        <p:txBody>
-          <a:bodyPr wrap="square" lIns="0" tIns="0" rIns="0" bIns="0" rtlCol="0" anchor="t"/>
-          <a:lstStyle/>
-          <a:p>
-            <a:pPr algn="ctr" indent="0" marL="0">
-              <a:buNone/>
-            </a:pPr>
-            <a:r>
-              <a:rPr lang="en-US" sz="750" i="1" dirty="0">
-                <a:solidFill>
-                  <a:srgbClr val="94A3B8"/>
-                </a:solidFill>
-                <a:latin typeface="Calibri" pitchFamily="34" charset="0"/>
-                <a:ea typeface="Calibri" pitchFamily="34" charset="-122"/>
-                <a:cs typeface="Calibri" pitchFamily="34" charset="-120"/>
-              </a:rPr>
-              <a:t>/k/</a:t>
-            </a:r>
-            <a:endParaRPr lang="en-US" sz="750" dirty="0"/>
-          </a:p>
-        </p:txBody>
-      </p:sp>
-      <p:sp>
-        <p:nvSpPr>
-          <p:cNvPr id="50" name="Shape 48"/>
-          <p:cNvSpPr/>
-          <p:nvPr/>
-        </p:nvSpPr>
-        <p:spPr>
-          <a:xfrm>
-            <a:off x="7447135" y="4169664"/>
-            <a:ext cx="685800" cy="384048"/>
+          <p:cNvPr id="52" name="Shape 50"/>
+          <p:cNvSpPr/>
+          <p:nvPr/>
+        </p:nvSpPr>
+        <p:spPr>
+          <a:xfrm>
+            <a:off x="5218730" y="4169664"/>
+            <a:ext cx="603504" cy="475488"/>
           </a:xfrm>
           <a:prstGeom prst="rect">
             <a:avLst>
-              <a:gd name="adj" fmla="val 9524"/>
+              <a:gd name="adj" fmla="val 7692"/>
             </a:avLst>
           </a:prstGeom>
           <a:solidFill>
@@ -16490,14 +17372,14 @@
       </p:sp>
       <p:sp>
         <p:nvSpPr>
-          <p:cNvPr id="51" name="Text 49"/>
-          <p:cNvSpPr/>
-          <p:nvPr/>
-        </p:nvSpPr>
-        <p:spPr>
-          <a:xfrm>
-            <a:off x="7447135" y="4169664"/>
-            <a:ext cx="685800" cy="384048"/>
+          <p:cNvPr id="53" name="Text 51"/>
+          <p:cNvSpPr/>
+          <p:nvPr/>
+        </p:nvSpPr>
+        <p:spPr>
+          <a:xfrm>
+            <a:off x="5218730" y="4169664"/>
+            <a:ext cx="603504" cy="475488"/>
           </a:xfrm>
           <a:prstGeom prst="rect">
             <a:avLst/>
@@ -16521,7 +17403,271 @@
                 <a:ea typeface="Trebuchet MS" pitchFamily="34" charset="-122"/>
                 <a:cs typeface="Trebuchet MS" pitchFamily="34" charset="-120"/>
               </a:rPr>
-              <a:t>ate</a:t>
+              <a:t>i</a:t>
+            </a:r>
+            <a:endParaRPr lang="en-US" sz="900" dirty="0"/>
+          </a:p>
+        </p:txBody>
+      </p:sp>
+      <p:sp>
+        <p:nvSpPr>
+          <p:cNvPr id="54" name="Shape 52"/>
+          <p:cNvSpPr/>
+          <p:nvPr/>
+        </p:nvSpPr>
+        <p:spPr>
+          <a:xfrm>
+            <a:off x="5872111" y="4169664"/>
+            <a:ext cx="603504" cy="475488"/>
+          </a:xfrm>
+          <a:prstGeom prst="rect">
+            <a:avLst>
+              <a:gd name="adj" fmla="val 7692"/>
+            </a:avLst>
+          </a:prstGeom>
+          <a:solidFill>
+            <a:srgbClr val="FFFFFF"/>
+          </a:solidFill>
+          <a:ln w="12700">
+            <a:solidFill>
+              <a:srgbClr val="DB2777"/>
+            </a:solidFill>
+            <a:prstDash val="solid"/>
+          </a:ln>
+        </p:spPr>
+      </p:sp>
+      <p:sp>
+        <p:nvSpPr>
+          <p:cNvPr id="55" name="Text 53"/>
+          <p:cNvSpPr/>
+          <p:nvPr/>
+        </p:nvSpPr>
+        <p:spPr>
+          <a:xfrm>
+            <a:off x="5872111" y="4169664"/>
+            <a:ext cx="603504" cy="475488"/>
+          </a:xfrm>
+          <a:prstGeom prst="rect">
+            <a:avLst/>
+          </a:prstGeom>
+          <a:noFill/>
+          <a:ln/>
+        </p:spPr>
+        <p:txBody>
+          <a:bodyPr wrap="square" lIns="0" tIns="0" rIns="0" bIns="0" rtlCol="0" anchor="ctr"/>
+          <a:lstStyle/>
+          <a:p>
+            <a:pPr algn="ctr" indent="0" marL="0">
+              <a:buNone/>
+            </a:pPr>
+            <a:r>
+              <a:rPr lang="en-US" sz="900" b="1" dirty="0">
+                <a:solidFill>
+                  <a:srgbClr val="9D174D"/>
+                </a:solidFill>
+                <a:latin typeface="Trebuchet MS" pitchFamily="34" charset="0"/>
+                <a:ea typeface="Trebuchet MS" pitchFamily="34" charset="-122"/>
+                <a:cs typeface="Trebuchet MS" pitchFamily="34" charset="-120"/>
+              </a:rPr>
+              <a:t>c</a:t>
+            </a:r>
+            <a:endParaRPr lang="en-US" sz="900" dirty="0"/>
+          </a:p>
+        </p:txBody>
+      </p:sp>
+      <p:sp>
+        <p:nvSpPr>
+          <p:cNvPr id="56" name="Shape 54"/>
+          <p:cNvSpPr/>
+          <p:nvPr/>
+        </p:nvSpPr>
+        <p:spPr>
+          <a:xfrm>
+            <a:off x="6525491" y="4169664"/>
+            <a:ext cx="603504" cy="475488"/>
+          </a:xfrm>
+          <a:prstGeom prst="rect">
+            <a:avLst>
+              <a:gd name="adj" fmla="val 7692"/>
+            </a:avLst>
+          </a:prstGeom>
+          <a:solidFill>
+            <a:srgbClr val="FFFFFF"/>
+          </a:solidFill>
+          <a:ln w="12700">
+            <a:solidFill>
+              <a:srgbClr val="DB2777"/>
+            </a:solidFill>
+            <a:prstDash val="solid"/>
+          </a:ln>
+        </p:spPr>
+      </p:sp>
+      <p:sp>
+        <p:nvSpPr>
+          <p:cNvPr id="57" name="Text 55"/>
+          <p:cNvSpPr/>
+          <p:nvPr/>
+        </p:nvSpPr>
+        <p:spPr>
+          <a:xfrm>
+            <a:off x="6525491" y="4169664"/>
+            <a:ext cx="603504" cy="475488"/>
+          </a:xfrm>
+          <a:prstGeom prst="rect">
+            <a:avLst/>
+          </a:prstGeom>
+          <a:noFill/>
+          <a:ln/>
+        </p:spPr>
+        <p:txBody>
+          <a:bodyPr wrap="square" lIns="0" tIns="0" rIns="0" bIns="0" rtlCol="0" anchor="ctr"/>
+          <a:lstStyle/>
+          <a:p>
+            <a:pPr algn="ctr" indent="0" marL="0">
+              <a:buNone/>
+            </a:pPr>
+            <a:r>
+              <a:rPr lang="en-US" sz="900" b="1" dirty="0">
+                <a:solidFill>
+                  <a:srgbClr val="9D174D"/>
+                </a:solidFill>
+                <a:latin typeface="Trebuchet MS" pitchFamily="34" charset="0"/>
+                <a:ea typeface="Trebuchet MS" pitchFamily="34" charset="-122"/>
+                <a:cs typeface="Trebuchet MS" pitchFamily="34" charset="-120"/>
+              </a:rPr>
+              <a:t>ti</a:t>
+            </a:r>
+            <a:endParaRPr lang="en-US" sz="900" dirty="0"/>
+          </a:p>
+        </p:txBody>
+      </p:sp>
+      <p:sp>
+        <p:nvSpPr>
+          <p:cNvPr id="58" name="Shape 56"/>
+          <p:cNvSpPr/>
+          <p:nvPr/>
+        </p:nvSpPr>
+        <p:spPr>
+          <a:xfrm>
+            <a:off x="7178871" y="4169664"/>
+            <a:ext cx="603504" cy="475488"/>
+          </a:xfrm>
+          <a:prstGeom prst="rect">
+            <a:avLst>
+              <a:gd name="adj" fmla="val 7692"/>
+            </a:avLst>
+          </a:prstGeom>
+          <a:solidFill>
+            <a:srgbClr val="FFFFFF"/>
+          </a:solidFill>
+          <a:ln w="12700">
+            <a:solidFill>
+              <a:srgbClr val="DB2777"/>
+            </a:solidFill>
+            <a:prstDash val="solid"/>
+          </a:ln>
+        </p:spPr>
+      </p:sp>
+      <p:sp>
+        <p:nvSpPr>
+          <p:cNvPr id="59" name="Text 57"/>
+          <p:cNvSpPr/>
+          <p:nvPr/>
+        </p:nvSpPr>
+        <p:spPr>
+          <a:xfrm>
+            <a:off x="7178871" y="4169664"/>
+            <a:ext cx="603504" cy="475488"/>
+          </a:xfrm>
+          <a:prstGeom prst="rect">
+            <a:avLst/>
+          </a:prstGeom>
+          <a:noFill/>
+          <a:ln/>
+        </p:spPr>
+        <p:txBody>
+          <a:bodyPr wrap="square" lIns="0" tIns="0" rIns="0" bIns="0" rtlCol="0" anchor="ctr"/>
+          <a:lstStyle/>
+          <a:p>
+            <a:pPr algn="ctr" indent="0" marL="0">
+              <a:buNone/>
+            </a:pPr>
+            <a:r>
+              <a:rPr lang="en-US" sz="900" b="1" dirty="0">
+                <a:solidFill>
+                  <a:srgbClr val="9D174D"/>
+                </a:solidFill>
+                <a:latin typeface="Trebuchet MS" pitchFamily="34" charset="0"/>
+                <a:ea typeface="Trebuchet MS" pitchFamily="34" charset="-122"/>
+                <a:cs typeface="Trebuchet MS" pitchFamily="34" charset="-120"/>
+              </a:rPr>
+              <a:t>o</a:t>
+            </a:r>
+            <a:endParaRPr lang="en-US" sz="900" dirty="0"/>
+          </a:p>
+        </p:txBody>
+      </p:sp>
+      <p:sp>
+        <p:nvSpPr>
+          <p:cNvPr id="60" name="Shape 58"/>
+          <p:cNvSpPr/>
+          <p:nvPr/>
+        </p:nvSpPr>
+        <p:spPr>
+          <a:xfrm>
+            <a:off x="7832252" y="4169664"/>
+            <a:ext cx="603504" cy="475488"/>
+          </a:xfrm>
+          <a:prstGeom prst="rect">
+            <a:avLst>
+              <a:gd name="adj" fmla="val 7692"/>
+            </a:avLst>
+          </a:prstGeom>
+          <a:solidFill>
+            <a:srgbClr val="FFFFFF"/>
+          </a:solidFill>
+          <a:ln w="12700">
+            <a:solidFill>
+              <a:srgbClr val="DB2777"/>
+            </a:solidFill>
+            <a:prstDash val="solid"/>
+          </a:ln>
+        </p:spPr>
+      </p:sp>
+      <p:sp>
+        <p:nvSpPr>
+          <p:cNvPr id="61" name="Text 59"/>
+          <p:cNvSpPr/>
+          <p:nvPr/>
+        </p:nvSpPr>
+        <p:spPr>
+          <a:xfrm>
+            <a:off x="7832252" y="4169664"/>
+            <a:ext cx="603504" cy="475488"/>
+          </a:xfrm>
+          <a:prstGeom prst="rect">
+            <a:avLst/>
+          </a:prstGeom>
+          <a:noFill/>
+          <a:ln/>
+        </p:spPr>
+        <p:txBody>
+          <a:bodyPr wrap="square" lIns="0" tIns="0" rIns="0" bIns="0" rtlCol="0" anchor="ctr"/>
+          <a:lstStyle/>
+          <a:p>
+            <a:pPr algn="ctr" indent="0" marL="0">
+              <a:buNone/>
+            </a:pPr>
+            <a:r>
+              <a:rPr lang="en-US" sz="900" b="1" dirty="0">
+                <a:solidFill>
+                  <a:srgbClr val="9D174D"/>
+                </a:solidFill>
+                <a:latin typeface="Trebuchet MS" pitchFamily="34" charset="0"/>
+                <a:ea typeface="Trebuchet MS" pitchFamily="34" charset="-122"/>
+                <a:cs typeface="Trebuchet MS" pitchFamily="34" charset="-120"/>
+              </a:rPr>
+              <a:t>n</a:t>
             </a:r>
             <a:endParaRPr lang="en-US" sz="900" dirty="0"/>
           </a:p>
@@ -17095,7 +18241,7 @@
                 <a:ea typeface="Calibri" pitchFamily="34" charset="-122"/>
                 <a:cs typeface="Calibri" pitchFamily="34" charset="-120"/>
               </a:rPr>
-              <a:t>Word Labs  •  wordlabs.app  •  Root: 'dic' = say, speak, proclaim</a:t>
+              <a:t>Word Labs  •  wordlabs.app  •  Root: 'dic' = say; speak</a:t>
             </a:r>
             <a:endParaRPr lang="en-US" sz="800" dirty="0"/>
           </a:p>
@@ -17429,7 +18575,7 @@
                 <a:ea typeface="Trebuchet MS" pitchFamily="34" charset="-122"/>
                 <a:cs typeface="Trebuchet MS" pitchFamily="34" charset="-120"/>
               </a:rPr>
-              <a:t>2</a:t>
+              <a:t>0</a:t>
             </a:r>
             <a:pPr algn="ctr" indent="0" marL="0">
               <a:buNone/>
@@ -17443,7 +18589,7 @@
                 <a:ea typeface="Trebuchet MS" pitchFamily="34" charset="-122"/>
                 <a:cs typeface="Trebuchet MS" pitchFamily="34" charset="-120"/>
               </a:rPr>
-              <a:t>  punctuation marks</a:t>
+              <a:t>  punctuation mark</a:t>
             </a:r>
             <a:endParaRPr lang="en-US" sz="2800" dirty="0"/>
           </a:p>
@@ -17735,7 +18881,7 @@
                 <a:ea typeface="Calibri" pitchFamily="34" charset="-122"/>
                 <a:cs typeface="Calibri" pitchFamily="34" charset="-120"/>
               </a:rPr>
-              <a:t>Word Labs  •  wordlabs.app  •  Root: 'dic' = say, speak, proclaim</a:t>
+              <a:t>Word Labs  •  wordlabs.app  •  Root: 'dic' = say; speak</a:t>
             </a:r>
             <a:endParaRPr lang="en-US" sz="800" dirty="0"/>
           </a:p>
@@ -17847,7 +18993,7 @@
                 <a:ea typeface="Calibri" pitchFamily="34" charset="-122"/>
                 <a:cs typeface="Calibri" pitchFamily="34" charset="-120"/>
               </a:rPr>
-              <a:t>The queen chose to </a:t>
+              <a:t>A </a:t>
             </a:r>
             <a:pPr algn="l" indent="0" marL="0">
               <a:buNone/>
@@ -17864,7 +19010,7 @@
                 <a:ea typeface="Calibri" pitchFamily="34" charset="-122"/>
                 <a:cs typeface="Calibri" pitchFamily="34" charset="-120"/>
               </a:rPr>
-              <a:t>abdicate</a:t>
+              <a:t>syndicate</a:t>
             </a:r>
             <a:pPr algn="l" indent="0" marL="0">
               <a:buNone/>
@@ -17878,7 +19024,7 @@
                 <a:ea typeface="Calibri" pitchFamily="34" charset="-122"/>
                 <a:cs typeface="Calibri" pitchFamily="34" charset="-120"/>
               </a:rPr>
-              <a:t> her throne, but her </a:t>
+              <a:t> of investors bought the old factory. Her comic strip is </a:t>
             </a:r>
             <a:pPr algn="l" indent="0" marL="0">
               <a:buNone/>
@@ -17895,7 +19041,7 @@
                 <a:ea typeface="Calibri" pitchFamily="34" charset="-122"/>
                 <a:cs typeface="Calibri" pitchFamily="34" charset="-120"/>
               </a:rPr>
-              <a:t>verdict</a:t>
+              <a:t>syndicated</a:t>
             </a:r>
             <a:pPr algn="l" indent="0" marL="0">
               <a:buNone/>
@@ -17909,7 +19055,7 @@
                 <a:ea typeface="Calibri" pitchFamily="34" charset="-122"/>
                 <a:cs typeface="Calibri" pitchFamily="34" charset="-120"/>
               </a:rPr>
-              <a:t> was that a </a:t>
+              <a:t> in newspapers around the world. The show earned millions through </a:t>
             </a:r>
             <a:pPr algn="l" indent="0" marL="0">
               <a:buNone/>
@@ -17926,7 +19072,7 @@
                 <a:ea typeface="Calibri" pitchFamily="34" charset="-122"/>
                 <a:cs typeface="Calibri" pitchFamily="34" charset="-120"/>
               </a:rPr>
-              <a:t>dictionary</a:t>
+              <a:t>syndication</a:t>
             </a:r>
             <a:pPr algn="l" indent="0" marL="0">
               <a:buNone/>
@@ -17940,7 +19086,7 @@
                 <a:ea typeface="Calibri" pitchFamily="34" charset="-122"/>
                 <a:cs typeface="Calibri" pitchFamily="34" charset="-120"/>
               </a:rPr>
-              <a:t> of new laws should guide the kingdom.</a:t>
+              <a:t>.</a:t>
             </a:r>
             <a:endParaRPr lang="en-US" sz="1800" dirty="0"/>
           </a:p>
@@ -18095,7 +19241,7 @@
                 <a:ea typeface="Trebuchet MS" pitchFamily="34" charset="-122"/>
                 <a:cs typeface="Trebuchet MS" pitchFamily="34" charset="-120"/>
               </a:rPr>
-              <a:t>abdicate</a:t>
+              <a:t>syndicate</a:t>
             </a:r>
             <a:endParaRPr lang="en-US" sz="1400" dirty="0"/>
           </a:p>
@@ -18223,7 +19369,7 @@
                 <a:ea typeface="Trebuchet MS" pitchFamily="34" charset="-122"/>
                 <a:cs typeface="Trebuchet MS" pitchFamily="34" charset="-120"/>
               </a:rPr>
-              <a:t>verdict</a:t>
+              <a:t>syndicated</a:t>
             </a:r>
             <a:endParaRPr lang="en-US" sz="1400" dirty="0"/>
           </a:p>
@@ -18351,7 +19497,7 @@
                 <a:ea typeface="Trebuchet MS" pitchFamily="34" charset="-122"/>
                 <a:cs typeface="Trebuchet MS" pitchFamily="34" charset="-120"/>
               </a:rPr>
-              <a:t>dictionary</a:t>
+              <a:t>syndication</a:t>
             </a:r>
             <a:endParaRPr lang="en-US" sz="1400" dirty="0"/>
           </a:p>
@@ -18682,7 +19828,7 @@
                 <a:ea typeface="Calibri" pitchFamily="34" charset="-122"/>
                 <a:cs typeface="Calibri" pitchFamily="34" charset="-120"/>
               </a:rPr>
-              <a:t>Word Labs  •  wordlabs.app  •  Root: 'dic' = say, speak, proclaim</a:t>
+              <a:t>Word Labs  •  wordlabs.app  •  Root: 'dic' = say; speak</a:t>
             </a:r>
             <a:endParaRPr lang="en-US" sz="800" dirty="0"/>
           </a:p>
@@ -18821,7 +19967,7 @@
                 <a:ea typeface="Trebuchet MS" pitchFamily="34" charset="-122"/>
                 <a:cs typeface="Trebuchet MS" pitchFamily="34" charset="-120"/>
               </a:rPr>
-              <a:t>abdicate</a:t>
+              <a:t>syndicate</a:t>
             </a:r>
             <a:endParaRPr lang="en-US" sz="2800" dirty="0"/>
           </a:p>
@@ -19509,7 +20655,7 @@
                 <a:ea typeface="Calibri" pitchFamily="34" charset="-122"/>
                 <a:cs typeface="Calibri" pitchFamily="34" charset="-120"/>
               </a:rPr>
-              <a:t>Word Labs  •  wordlabs.app  •  Root: 'dic' = say, speak, proclaim</a:t>
+              <a:t>Word Labs  •  wordlabs.app  •  Root: 'dic' = say; speak</a:t>
             </a:r>
             <a:endParaRPr lang="en-US" sz="800" dirty="0"/>
           </a:p>
@@ -19648,7 +20794,7 @@
                 <a:ea typeface="Trebuchet MS" pitchFamily="34" charset="-122"/>
                 <a:cs typeface="Trebuchet MS" pitchFamily="34" charset="-120"/>
               </a:rPr>
-              <a:t>abdicate</a:t>
+              <a:t>syndicate</a:t>
             </a:r>
             <a:endParaRPr lang="en-US" sz="2800" dirty="0"/>
           </a:p>
@@ -19787,7 +20933,7 @@
                 <a:ea typeface="Trebuchet MS" pitchFamily="34" charset="-122"/>
                 <a:cs typeface="Trebuchet MS" pitchFamily="34" charset="-120"/>
               </a:rPr>
-              <a:t>ab</a:t>
+              <a:t>syn</a:t>
             </a:r>
             <a:endParaRPr lang="en-US" sz="1300" dirty="0"/>
           </a:p>
@@ -19826,7 +20972,7 @@
                 <a:ea typeface="Calibri" pitchFamily="34" charset="-122"/>
                 <a:cs typeface="Calibri" pitchFamily="34" charset="-120"/>
               </a:rPr>
-              <a:t>away from</a:t>
+              <a:t>together; with; same</a:t>
             </a:r>
             <a:endParaRPr lang="en-US" sz="850" dirty="0"/>
           </a:p>
@@ -19938,7 +21084,7 @@
                 <a:ea typeface="Calibri" pitchFamily="34" charset="-122"/>
                 <a:cs typeface="Calibri" pitchFamily="34" charset="-120"/>
               </a:rPr>
-              <a:t>say, speak, proclaim</a:t>
+              <a:t>say; speak</a:t>
             </a:r>
             <a:endParaRPr lang="en-US" sz="850" dirty="0"/>
           </a:p>
@@ -20050,7 +21196,7 @@
                 <a:ea typeface="Calibri" pitchFamily="34" charset="-122"/>
                 <a:cs typeface="Calibri" pitchFamily="34" charset="-120"/>
               </a:rPr>
-              <a:t>to make or do</a:t>
+              <a:t>to make; to become</a:t>
             </a:r>
             <a:endParaRPr lang="en-US" sz="850" dirty="0"/>
           </a:p>
@@ -20606,7 +21752,7 @@
                 <a:ea typeface="Calibri" pitchFamily="34" charset="-122"/>
                 <a:cs typeface="Calibri" pitchFamily="34" charset="-120"/>
               </a:rPr>
-              <a:t>Word Labs  •  wordlabs.app  •  Root: 'dic' = say, speak, proclaim</a:t>
+              <a:t>Word Labs  •  wordlabs.app  •  Root: 'dic' = say; speak</a:t>
             </a:r>
             <a:endParaRPr lang="en-US" sz="800" dirty="0"/>
           </a:p>
@@ -20745,7 +21891,7 @@
                 <a:ea typeface="Trebuchet MS" pitchFamily="34" charset="-122"/>
                 <a:cs typeface="Trebuchet MS" pitchFamily="34" charset="-120"/>
               </a:rPr>
-              <a:t>abdicate</a:t>
+              <a:t>syndicate</a:t>
             </a:r>
             <a:endParaRPr lang="en-US" sz="2800" dirty="0"/>
           </a:p>
@@ -20884,7 +22030,7 @@
                 <a:ea typeface="Trebuchet MS" pitchFamily="34" charset="-122"/>
                 <a:cs typeface="Trebuchet MS" pitchFamily="34" charset="-120"/>
               </a:rPr>
-              <a:t>ab</a:t>
+              <a:t>syn</a:t>
             </a:r>
             <a:endParaRPr lang="en-US" sz="1300" dirty="0"/>
           </a:p>
@@ -20923,7 +22069,7 @@
                 <a:ea typeface="Calibri" pitchFamily="34" charset="-122"/>
                 <a:cs typeface="Calibri" pitchFamily="34" charset="-120"/>
               </a:rPr>
-              <a:t>away from</a:t>
+              <a:t>together; with; same</a:t>
             </a:r>
             <a:endParaRPr lang="en-US" sz="850" dirty="0"/>
           </a:p>
@@ -21035,7 +22181,7 @@
                 <a:ea typeface="Calibri" pitchFamily="34" charset="-122"/>
                 <a:cs typeface="Calibri" pitchFamily="34" charset="-120"/>
               </a:rPr>
-              <a:t>say, speak, proclaim</a:t>
+              <a:t>say; speak</a:t>
             </a:r>
             <a:endParaRPr lang="en-US" sz="850" dirty="0"/>
           </a:p>
@@ -21147,7 +22293,7 @@
                 <a:ea typeface="Calibri" pitchFamily="34" charset="-122"/>
                 <a:cs typeface="Calibri" pitchFamily="34" charset="-120"/>
               </a:rPr>
-              <a:t>to make or do</a:t>
+              <a:t>to make; to become</a:t>
             </a:r>
             <a:endParaRPr lang="en-US" sz="850" dirty="0"/>
           </a:p>
@@ -21306,7 +22452,7 @@
                 <a:ea typeface="Trebuchet MS" pitchFamily="34" charset="-122"/>
                 <a:cs typeface="Trebuchet MS" pitchFamily="34" charset="-120"/>
               </a:rPr>
-              <a:t>ab</a:t>
+              <a:t>syn</a:t>
             </a:r>
             <a:endParaRPr lang="en-US" sz="1400" dirty="0"/>
           </a:p>
@@ -21940,7 +23086,7 @@
                 <a:ea typeface="Calibri" pitchFamily="34" charset="-122"/>
                 <a:cs typeface="Calibri" pitchFamily="34" charset="-120"/>
               </a:rPr>
-              <a:t>Word Labs  •  wordlabs.app  •  Root: 'dic' = say, speak, proclaim</a:t>
+              <a:t>Word Labs  •  wordlabs.app  •  Root: 'dic' = say; speak</a:t>
             </a:r>
             <a:endParaRPr lang="en-US" sz="800" dirty="0"/>
           </a:p>
@@ -22079,7 +23225,7 @@
                 <a:ea typeface="Trebuchet MS" pitchFamily="34" charset="-122"/>
                 <a:cs typeface="Trebuchet MS" pitchFamily="34" charset="-120"/>
               </a:rPr>
-              <a:t>abdicate</a:t>
+              <a:t>syndicate</a:t>
             </a:r>
             <a:endParaRPr lang="en-US" sz="2800" dirty="0"/>
           </a:p>
@@ -22218,7 +23364,7 @@
                 <a:ea typeface="Trebuchet MS" pitchFamily="34" charset="-122"/>
                 <a:cs typeface="Trebuchet MS" pitchFamily="34" charset="-120"/>
               </a:rPr>
-              <a:t>ab</a:t>
+              <a:t>syn</a:t>
             </a:r>
             <a:endParaRPr lang="en-US" sz="1300" dirty="0"/>
           </a:p>
@@ -22257,7 +23403,7 @@
                 <a:ea typeface="Calibri" pitchFamily="34" charset="-122"/>
                 <a:cs typeface="Calibri" pitchFamily="34" charset="-120"/>
               </a:rPr>
-              <a:t>away from</a:t>
+              <a:t>together; with; same</a:t>
             </a:r>
             <a:endParaRPr lang="en-US" sz="850" dirty="0"/>
           </a:p>
@@ -22369,7 +23515,7 @@
                 <a:ea typeface="Calibri" pitchFamily="34" charset="-122"/>
                 <a:cs typeface="Calibri" pitchFamily="34" charset="-120"/>
               </a:rPr>
-              <a:t>say, speak, proclaim</a:t>
+              <a:t>say; speak</a:t>
             </a:r>
             <a:endParaRPr lang="en-US" sz="850" dirty="0"/>
           </a:p>
@@ -22481,7 +23627,7 @@
                 <a:ea typeface="Calibri" pitchFamily="34" charset="-122"/>
                 <a:cs typeface="Calibri" pitchFamily="34" charset="-120"/>
               </a:rPr>
-              <a:t>to make or do</a:t>
+              <a:t>to make; to become</a:t>
             </a:r>
             <a:endParaRPr lang="en-US" sz="850" dirty="0"/>
           </a:p>
@@ -22640,7 +23786,7 @@
                 <a:ea typeface="Trebuchet MS" pitchFamily="34" charset="-122"/>
                 <a:cs typeface="Trebuchet MS" pitchFamily="34" charset="-120"/>
               </a:rPr>
-              <a:t>ab</a:t>
+              <a:t>syn</a:t>
             </a:r>
             <a:endParaRPr lang="en-US" sz="1400" dirty="0"/>
           </a:p>
@@ -22931,11 +24077,11 @@
         <p:spPr>
           <a:xfrm>
             <a:off x="1874520" y="4096512"/>
-            <a:ext cx="6903720" cy="804672"/>
+            <a:ext cx="6903720" cy="658368"/>
           </a:xfrm>
           <a:prstGeom prst="rect">
             <a:avLst>
-              <a:gd name="adj" fmla="val 6818"/>
+              <a:gd name="adj" fmla="val 8333"/>
             </a:avLst>
           </a:prstGeom>
           <a:solidFill>
@@ -22957,12 +24103,12 @@
         </p:nvSpPr>
         <p:spPr>
           <a:xfrm>
-            <a:off x="2254649" y="4169664"/>
-            <a:ext cx="685800" cy="384048"/>
+            <a:off x="2023872" y="4169664"/>
+            <a:ext cx="685800" cy="475488"/>
           </a:xfrm>
           <a:prstGeom prst="rect">
             <a:avLst>
-              <a:gd name="adj" fmla="val 9524"/>
+              <a:gd name="adj" fmla="val 7692"/>
             </a:avLst>
           </a:prstGeom>
           <a:solidFill>
@@ -22984,8 +24130,8 @@
         </p:nvSpPr>
         <p:spPr>
           <a:xfrm>
-            <a:off x="2254649" y="4169664"/>
-            <a:ext cx="685800" cy="384048"/>
+            <a:off x="2023872" y="4169664"/>
+            <a:ext cx="685800" cy="475488"/>
           </a:xfrm>
           <a:prstGeom prst="rect">
             <a:avLst/>
@@ -23009,7 +24155,7 @@
                 <a:ea typeface="Trebuchet MS" pitchFamily="34" charset="-122"/>
                 <a:cs typeface="Trebuchet MS" pitchFamily="34" charset="-120"/>
               </a:rPr>
-              <a:t>a</a:t>
+              <a:t>s</a:t>
             </a:r>
             <a:endParaRPr lang="en-US" sz="900" dirty="0"/>
           </a:p>
@@ -23023,12 +24169,12 @@
         </p:nvSpPr>
         <p:spPr>
           <a:xfrm>
-            <a:off x="3293146" y="4169664"/>
-            <a:ext cx="685800" cy="384048"/>
+            <a:off x="2831592" y="4169664"/>
+            <a:ext cx="685800" cy="475488"/>
           </a:xfrm>
           <a:prstGeom prst="rect">
             <a:avLst>
-              <a:gd name="adj" fmla="val 9524"/>
+              <a:gd name="adj" fmla="val 7692"/>
             </a:avLst>
           </a:prstGeom>
           <a:solidFill>
@@ -23050,8 +24196,8 @@
         </p:nvSpPr>
         <p:spPr>
           <a:xfrm>
-            <a:off x="3293146" y="4169664"/>
-            <a:ext cx="685800" cy="384048"/>
+            <a:off x="2831592" y="4169664"/>
+            <a:ext cx="685800" cy="475488"/>
           </a:xfrm>
           <a:prstGeom prst="rect">
             <a:avLst/>
@@ -23075,7 +24221,7 @@
                 <a:ea typeface="Trebuchet MS" pitchFamily="34" charset="-122"/>
                 <a:cs typeface="Trebuchet MS" pitchFamily="34" charset="-120"/>
               </a:rPr>
-              <a:t>b</a:t>
+              <a:t>y</a:t>
             </a:r>
             <a:endParaRPr lang="en-US" sz="900" dirty="0"/>
           </a:p>
@@ -23089,12 +24235,12 @@
         </p:nvSpPr>
         <p:spPr>
           <a:xfrm>
-            <a:off x="4331643" y="4169664"/>
-            <a:ext cx="685800" cy="384048"/>
+            <a:off x="3639312" y="4169664"/>
+            <a:ext cx="685800" cy="475488"/>
           </a:xfrm>
           <a:prstGeom prst="rect">
             <a:avLst>
-              <a:gd name="adj" fmla="val 9524"/>
+              <a:gd name="adj" fmla="val 7692"/>
             </a:avLst>
           </a:prstGeom>
           <a:solidFill>
@@ -23116,8 +24262,8 @@
         </p:nvSpPr>
         <p:spPr>
           <a:xfrm>
-            <a:off x="4331643" y="4169664"/>
-            <a:ext cx="685800" cy="384048"/>
+            <a:off x="3639312" y="4169664"/>
+            <a:ext cx="685800" cy="475488"/>
           </a:xfrm>
           <a:prstGeom prst="rect">
             <a:avLst/>
@@ -23141,7 +24287,7 @@
                 <a:ea typeface="Trebuchet MS" pitchFamily="34" charset="-122"/>
                 <a:cs typeface="Trebuchet MS" pitchFamily="34" charset="-120"/>
               </a:rPr>
-              <a:t>d</a:t>
+              <a:t>n</a:t>
             </a:r>
             <a:endParaRPr lang="en-US" sz="900" dirty="0"/>
           </a:p>
@@ -23155,12 +24301,12 @@
         </p:nvSpPr>
         <p:spPr>
           <a:xfrm>
-            <a:off x="5370141" y="4169664"/>
-            <a:ext cx="685800" cy="384048"/>
+            <a:off x="4447032" y="4169664"/>
+            <a:ext cx="685800" cy="475488"/>
           </a:xfrm>
           <a:prstGeom prst="rect">
             <a:avLst>
-              <a:gd name="adj" fmla="val 9524"/>
+              <a:gd name="adj" fmla="val 7692"/>
             </a:avLst>
           </a:prstGeom>
           <a:solidFill>
@@ -23182,8 +24328,8 @@
         </p:nvSpPr>
         <p:spPr>
           <a:xfrm>
-            <a:off x="5370141" y="4169664"/>
-            <a:ext cx="685800" cy="384048"/>
+            <a:off x="4447032" y="4169664"/>
+            <a:ext cx="685800" cy="475488"/>
           </a:xfrm>
           <a:prstGeom prst="rect">
             <a:avLst/>
@@ -23207,7 +24353,7 @@
                 <a:ea typeface="Trebuchet MS" pitchFamily="34" charset="-122"/>
                 <a:cs typeface="Trebuchet MS" pitchFamily="34" charset="-120"/>
               </a:rPr>
-              <a:t>i</a:t>
+              <a:t>d</a:t>
             </a:r>
             <a:endParaRPr lang="en-US" sz="900" dirty="0"/>
           </a:p>
@@ -23221,12 +24367,12 @@
         </p:nvSpPr>
         <p:spPr>
           <a:xfrm>
-            <a:off x="6408638" y="4169664"/>
-            <a:ext cx="685800" cy="384048"/>
+            <a:off x="5254752" y="4169664"/>
+            <a:ext cx="685800" cy="475488"/>
           </a:xfrm>
           <a:prstGeom prst="rect">
             <a:avLst>
-              <a:gd name="adj" fmla="val 9524"/>
+              <a:gd name="adj" fmla="val 7692"/>
             </a:avLst>
           </a:prstGeom>
           <a:solidFill>
@@ -23248,8 +24394,8 @@
         </p:nvSpPr>
         <p:spPr>
           <a:xfrm>
-            <a:off x="6408638" y="4169664"/>
-            <a:ext cx="685800" cy="384048"/>
+            <a:off x="5254752" y="4169664"/>
+            <a:ext cx="685800" cy="475488"/>
           </a:xfrm>
           <a:prstGeom prst="rect">
             <a:avLst/>
@@ -23273,7 +24419,7 @@
                 <a:ea typeface="Trebuchet MS" pitchFamily="34" charset="-122"/>
                 <a:cs typeface="Trebuchet MS" pitchFamily="34" charset="-120"/>
               </a:rPr>
-              <a:t>c</a:t>
+              <a:t>i</a:t>
             </a:r>
             <a:endParaRPr lang="en-US" sz="900" dirty="0"/>
           </a:p>
@@ -23281,57 +24427,18 @@
       </p:sp>
       <p:sp>
         <p:nvSpPr>
-          <p:cNvPr id="49" name="Text 47"/>
-          <p:cNvSpPr/>
-          <p:nvPr/>
-        </p:nvSpPr>
-        <p:spPr>
-          <a:xfrm>
-            <a:off x="6408638" y="4572000"/>
-            <a:ext cx="685800" cy="219456"/>
-          </a:xfrm>
-          <a:prstGeom prst="rect">
-            <a:avLst/>
-          </a:prstGeom>
-          <a:noFill/>
-          <a:ln/>
-        </p:spPr>
-        <p:txBody>
-          <a:bodyPr wrap="square" lIns="0" tIns="0" rIns="0" bIns="0" rtlCol="0" anchor="t"/>
-          <a:lstStyle/>
-          <a:p>
-            <a:pPr algn="ctr" indent="0" marL="0">
-              <a:buNone/>
-            </a:pPr>
-            <a:r>
-              <a:rPr lang="en-US" sz="750" i="1" dirty="0">
-                <a:solidFill>
-                  <a:srgbClr val="94A3B8"/>
-                </a:solidFill>
-                <a:latin typeface="Calibri" pitchFamily="34" charset="0"/>
-                <a:ea typeface="Calibri" pitchFamily="34" charset="-122"/>
-                <a:cs typeface="Calibri" pitchFamily="34" charset="-120"/>
-              </a:rPr>
-              <a:t>/k/</a:t>
-            </a:r>
-            <a:endParaRPr lang="en-US" sz="750" dirty="0"/>
-          </a:p>
-        </p:txBody>
-      </p:sp>
-      <p:sp>
-        <p:nvSpPr>
-          <p:cNvPr id="50" name="Shape 48"/>
-          <p:cNvSpPr/>
-          <p:nvPr/>
-        </p:nvSpPr>
-        <p:spPr>
-          <a:xfrm>
-            <a:off x="7447135" y="4169664"/>
-            <a:ext cx="685800" cy="384048"/>
+          <p:cNvPr id="49" name="Shape 47"/>
+          <p:cNvSpPr/>
+          <p:nvPr/>
+        </p:nvSpPr>
+        <p:spPr>
+          <a:xfrm>
+            <a:off x="6062472" y="4169664"/>
+            <a:ext cx="685800" cy="475488"/>
           </a:xfrm>
           <a:prstGeom prst="rect">
             <a:avLst>
-              <a:gd name="adj" fmla="val 9524"/>
+              <a:gd name="adj" fmla="val 7692"/>
             </a:avLst>
           </a:prstGeom>
           <a:solidFill>
@@ -23347,14 +24454,14 @@
       </p:sp>
       <p:sp>
         <p:nvSpPr>
-          <p:cNvPr id="51" name="Text 49"/>
-          <p:cNvSpPr/>
-          <p:nvPr/>
-        </p:nvSpPr>
-        <p:spPr>
-          <a:xfrm>
-            <a:off x="7447135" y="4169664"/>
-            <a:ext cx="685800" cy="384048"/>
+          <p:cNvPr id="50" name="Text 48"/>
+          <p:cNvSpPr/>
+          <p:nvPr/>
+        </p:nvSpPr>
+        <p:spPr>
+          <a:xfrm>
+            <a:off x="6062472" y="4169664"/>
+            <a:ext cx="685800" cy="475488"/>
           </a:xfrm>
           <a:prstGeom prst="rect">
             <a:avLst/>
@@ -23378,7 +24485,139 @@
                 <a:ea typeface="Trebuchet MS" pitchFamily="34" charset="-122"/>
                 <a:cs typeface="Trebuchet MS" pitchFamily="34" charset="-120"/>
               </a:rPr>
-              <a:t>ate</a:t>
+              <a:t>c</a:t>
+            </a:r>
+            <a:endParaRPr lang="en-US" sz="900" dirty="0"/>
+          </a:p>
+        </p:txBody>
+      </p:sp>
+      <p:sp>
+        <p:nvSpPr>
+          <p:cNvPr id="51" name="Shape 49"/>
+          <p:cNvSpPr/>
+          <p:nvPr/>
+        </p:nvSpPr>
+        <p:spPr>
+          <a:xfrm>
+            <a:off x="6870192" y="4169664"/>
+            <a:ext cx="685800" cy="475488"/>
+          </a:xfrm>
+          <a:prstGeom prst="rect">
+            <a:avLst>
+              <a:gd name="adj" fmla="val 7692"/>
+            </a:avLst>
+          </a:prstGeom>
+          <a:solidFill>
+            <a:srgbClr val="FFFFFF"/>
+          </a:solidFill>
+          <a:ln w="12700">
+            <a:solidFill>
+              <a:srgbClr val="DB2777"/>
+            </a:solidFill>
+            <a:prstDash val="solid"/>
+          </a:ln>
+        </p:spPr>
+      </p:sp>
+      <p:sp>
+        <p:nvSpPr>
+          <p:cNvPr id="52" name="Text 50"/>
+          <p:cNvSpPr/>
+          <p:nvPr/>
+        </p:nvSpPr>
+        <p:spPr>
+          <a:xfrm>
+            <a:off x="6870192" y="4169664"/>
+            <a:ext cx="685800" cy="475488"/>
+          </a:xfrm>
+          <a:prstGeom prst="rect">
+            <a:avLst/>
+          </a:prstGeom>
+          <a:noFill/>
+          <a:ln/>
+        </p:spPr>
+        <p:txBody>
+          <a:bodyPr wrap="square" lIns="0" tIns="0" rIns="0" bIns="0" rtlCol="0" anchor="ctr"/>
+          <a:lstStyle/>
+          <a:p>
+            <a:pPr algn="ctr" indent="0" marL="0">
+              <a:buNone/>
+            </a:pPr>
+            <a:r>
+              <a:rPr lang="en-US" sz="900" b="1" dirty="0">
+                <a:solidFill>
+                  <a:srgbClr val="9D174D"/>
+                </a:solidFill>
+                <a:latin typeface="Trebuchet MS" pitchFamily="34" charset="0"/>
+                <a:ea typeface="Trebuchet MS" pitchFamily="34" charset="-122"/>
+                <a:cs typeface="Trebuchet MS" pitchFamily="34" charset="-120"/>
+              </a:rPr>
+              <a:t>a_e</a:t>
+            </a:r>
+            <a:endParaRPr lang="en-US" sz="900" dirty="0"/>
+          </a:p>
+        </p:txBody>
+      </p:sp>
+      <p:sp>
+        <p:nvSpPr>
+          <p:cNvPr id="53" name="Shape 51"/>
+          <p:cNvSpPr/>
+          <p:nvPr/>
+        </p:nvSpPr>
+        <p:spPr>
+          <a:xfrm>
+            <a:off x="7677912" y="4169664"/>
+            <a:ext cx="685800" cy="475488"/>
+          </a:xfrm>
+          <a:prstGeom prst="rect">
+            <a:avLst>
+              <a:gd name="adj" fmla="val 7692"/>
+            </a:avLst>
+          </a:prstGeom>
+          <a:solidFill>
+            <a:srgbClr val="FFFFFF"/>
+          </a:solidFill>
+          <a:ln w="12700">
+            <a:solidFill>
+              <a:srgbClr val="DB2777"/>
+            </a:solidFill>
+            <a:prstDash val="solid"/>
+          </a:ln>
+        </p:spPr>
+      </p:sp>
+      <p:sp>
+        <p:nvSpPr>
+          <p:cNvPr id="54" name="Text 52"/>
+          <p:cNvSpPr/>
+          <p:nvPr/>
+        </p:nvSpPr>
+        <p:spPr>
+          <a:xfrm>
+            <a:off x="7677912" y="4169664"/>
+            <a:ext cx="685800" cy="475488"/>
+          </a:xfrm>
+          <a:prstGeom prst="rect">
+            <a:avLst/>
+          </a:prstGeom>
+          <a:noFill/>
+          <a:ln/>
+        </p:spPr>
+        <p:txBody>
+          <a:bodyPr wrap="square" lIns="0" tIns="0" rIns="0" bIns="0" rtlCol="0" anchor="ctr"/>
+          <a:lstStyle/>
+          <a:p>
+            <a:pPr algn="ctr" indent="0" marL="0">
+              <a:buNone/>
+            </a:pPr>
+            <a:r>
+              <a:rPr lang="en-US" sz="900" b="1" dirty="0">
+                <a:solidFill>
+                  <a:srgbClr val="9D174D"/>
+                </a:solidFill>
+                <a:latin typeface="Trebuchet MS" pitchFamily="34" charset="0"/>
+                <a:ea typeface="Trebuchet MS" pitchFamily="34" charset="-122"/>
+                <a:cs typeface="Trebuchet MS" pitchFamily="34" charset="-120"/>
+              </a:rPr>
+              <a:t>t</a:t>
             </a:r>
             <a:endParaRPr lang="en-US" sz="900" dirty="0"/>
           </a:p>
@@ -23670,7 +24909,7 @@
                 <a:ea typeface="Calibri" pitchFamily="34" charset="-122"/>
                 <a:cs typeface="Calibri" pitchFamily="34" charset="-120"/>
               </a:rPr>
-              <a:t>Word Labs  •  wordlabs.app  •  Root: 'dic' = say, speak, proclaim</a:t>
+              <a:t>Word Labs  •  wordlabs.app  •  Root: 'dic' = say; speak</a:t>
             </a:r>
             <a:endParaRPr lang="en-US" sz="800" dirty="0"/>
           </a:p>
@@ -23809,7 +25048,7 @@
                 <a:ea typeface="Trebuchet MS" pitchFamily="34" charset="-122"/>
                 <a:cs typeface="Trebuchet MS" pitchFamily="34" charset="-120"/>
               </a:rPr>
-              <a:t>verdict</a:t>
+              <a:t>syndicated</a:t>
             </a:r>
             <a:endParaRPr lang="en-US" sz="2800" dirty="0"/>
           </a:p>
@@ -24497,7 +25736,7 @@
                 <a:ea typeface="Calibri" pitchFamily="34" charset="-122"/>
                 <a:cs typeface="Calibri" pitchFamily="34" charset="-120"/>
               </a:rPr>
-              <a:t>Word Labs  •  wordlabs.app  •  Root: 'dic' = say, speak, proclaim</a:t>
+              <a:t>Word Labs  •  wordlabs.app  •  Root: 'dic' = say; speak</a:t>
             </a:r>
             <a:endParaRPr lang="en-US" sz="800" dirty="0"/>
           </a:p>
@@ -24636,7 +25875,7 @@
                 <a:ea typeface="Trebuchet MS" pitchFamily="34" charset="-122"/>
                 <a:cs typeface="Trebuchet MS" pitchFamily="34" charset="-120"/>
               </a:rPr>
-              <a:t>verdict</a:t>
+              <a:t>syndicated</a:t>
             </a:r>
             <a:endParaRPr lang="en-US" sz="2800" dirty="0"/>
           </a:p>
@@ -24716,8 +25955,8 @@
         </p:nvSpPr>
         <p:spPr>
           <a:xfrm>
-            <a:off x="2221992" y="2258568"/>
-            <a:ext cx="1828800" cy="292608"/>
+            <a:off x="1989734" y="2258568"/>
+            <a:ext cx="1581912" cy="292608"/>
           </a:xfrm>
           <a:prstGeom prst="rect">
             <a:avLst>
@@ -24750,8 +25989,8 @@
         </p:nvSpPr>
         <p:spPr>
           <a:xfrm>
-            <a:off x="2221992" y="2258568"/>
-            <a:ext cx="1828800" cy="292608"/>
+            <a:off x="1989734" y="2258568"/>
+            <a:ext cx="1581912" cy="292608"/>
           </a:xfrm>
           <a:prstGeom prst="rect">
             <a:avLst/>
@@ -24775,7 +26014,7 @@
                 <a:ea typeface="Trebuchet MS" pitchFamily="34" charset="-122"/>
                 <a:cs typeface="Trebuchet MS" pitchFamily="34" charset="-120"/>
               </a:rPr>
-              <a:t>ver</a:t>
+              <a:t>syn</a:t>
             </a:r>
             <a:endParaRPr lang="en-US" sz="1300" dirty="0"/>
           </a:p>
@@ -24789,8 +26028,8 @@
         </p:nvSpPr>
         <p:spPr>
           <a:xfrm>
-            <a:off x="2221992" y="2569464"/>
-            <a:ext cx="1828800" cy="201168"/>
+            <a:off x="1989734" y="2569464"/>
+            <a:ext cx="1581912" cy="201168"/>
           </a:xfrm>
           <a:prstGeom prst="rect">
             <a:avLst/>
@@ -24814,7 +26053,7 @@
                 <a:ea typeface="Calibri" pitchFamily="34" charset="-122"/>
                 <a:cs typeface="Calibri" pitchFamily="34" charset="-120"/>
               </a:rPr>
-              <a:t>true</a:t>
+              <a:t>together; with; same</a:t>
             </a:r>
             <a:endParaRPr lang="en-US" sz="850" dirty="0"/>
           </a:p>
@@ -24828,8 +26067,8 @@
         </p:nvSpPr>
         <p:spPr>
           <a:xfrm>
-            <a:off x="4370832" y="2258568"/>
-            <a:ext cx="1828800" cy="292608"/>
+            <a:off x="3659429" y="2258568"/>
+            <a:ext cx="1581912" cy="292608"/>
           </a:xfrm>
           <a:prstGeom prst="rect">
             <a:avLst>
@@ -24862,8 +26101,8 @@
         </p:nvSpPr>
         <p:spPr>
           <a:xfrm>
-            <a:off x="4370832" y="2258568"/>
-            <a:ext cx="1828800" cy="292608"/>
+            <a:off x="3659429" y="2258568"/>
+            <a:ext cx="1581912" cy="292608"/>
           </a:xfrm>
           <a:prstGeom prst="rect">
             <a:avLst/>
@@ -24901,8 +26140,8 @@
         </p:nvSpPr>
         <p:spPr>
           <a:xfrm>
-            <a:off x="4370832" y="2569464"/>
-            <a:ext cx="1828800" cy="201168"/>
+            <a:off x="3659429" y="2569464"/>
+            <a:ext cx="1581912" cy="201168"/>
           </a:xfrm>
           <a:prstGeom prst="rect">
             <a:avLst/>
@@ -24926,7 +26165,7 @@
                 <a:ea typeface="Calibri" pitchFamily="34" charset="-122"/>
                 <a:cs typeface="Calibri" pitchFamily="34" charset="-120"/>
               </a:rPr>
-              <a:t>say, speak</a:t>
+              <a:t>say; speak</a:t>
             </a:r>
             <a:endParaRPr lang="en-US" sz="850" dirty="0"/>
           </a:p>
@@ -24940,8 +26179,8 @@
         </p:nvSpPr>
         <p:spPr>
           <a:xfrm>
-            <a:off x="6519672" y="2258568"/>
-            <a:ext cx="1828800" cy="292608"/>
+            <a:off x="5329123" y="2258568"/>
+            <a:ext cx="1581912" cy="292608"/>
           </a:xfrm>
           <a:prstGeom prst="rect">
             <a:avLst>
@@ -24974,8 +26213,8 @@
         </p:nvSpPr>
         <p:spPr>
           <a:xfrm>
-            <a:off x="6519672" y="2258568"/>
-            <a:ext cx="1828800" cy="292608"/>
+            <a:off x="5329123" y="2258568"/>
+            <a:ext cx="1581912" cy="292608"/>
           </a:xfrm>
           <a:prstGeom prst="rect">
             <a:avLst/>
@@ -24999,7 +26238,7 @@
                 <a:ea typeface="Trebuchet MS" pitchFamily="34" charset="-122"/>
                 <a:cs typeface="Trebuchet MS" pitchFamily="34" charset="-120"/>
               </a:rPr>
-              <a:t>t</a:t>
+              <a:t>ate</a:t>
             </a:r>
             <a:endParaRPr lang="en-US" sz="1300" dirty="0"/>
           </a:p>
@@ -25013,8 +26252,8 @@
         </p:nvSpPr>
         <p:spPr>
           <a:xfrm>
-            <a:off x="6519672" y="2569464"/>
-            <a:ext cx="1828800" cy="201168"/>
+            <a:off x="5329123" y="2569464"/>
+            <a:ext cx="1581912" cy="201168"/>
           </a:xfrm>
           <a:prstGeom prst="rect">
             <a:avLst/>
@@ -25038,7 +26277,7 @@
                 <a:ea typeface="Calibri" pitchFamily="34" charset="-122"/>
                 <a:cs typeface="Calibri" pitchFamily="34" charset="-120"/>
               </a:rPr>
-              <a:t>word-forming consonant</a:t>
+              <a:t>to make; to become</a:t>
             </a:r>
             <a:endParaRPr lang="en-US" sz="850" dirty="0"/>
           </a:p>
@@ -25047,6 +26286,118 @@
       <p:sp>
         <p:nvSpPr>
           <p:cNvPr id="25" name="Shape 23"/>
+          <p:cNvSpPr/>
+          <p:nvPr/>
+        </p:nvSpPr>
+        <p:spPr>
+          <a:xfrm>
+            <a:off x="6998818" y="2258568"/>
+            <a:ext cx="1581912" cy="292608"/>
+          </a:xfrm>
+          <a:prstGeom prst="rect">
+            <a:avLst>
+              <a:gd name="adj" fmla="val 25000"/>
+            </a:avLst>
+          </a:prstGeom>
+          <a:solidFill>
+            <a:srgbClr val="FCE7F3"/>
+          </a:solidFill>
+          <a:ln w="19050">
+            <a:solidFill>
+              <a:srgbClr val="DB2777"/>
+            </a:solidFill>
+            <a:prstDash val="solid"/>
+          </a:ln>
+          <a:effectLst>
+            <a:outerShdw sx="100000" sy="100000" kx="0" ky="0" algn="bl" rotWithShape="0" blurRad="101600" dist="38100" dir="8100000">
+              <a:srgbClr val="000000">
+                <a:alpha val="12000"/>
+              </a:srgbClr>
+            </a:outerShdw>
+          </a:effectLst>
+        </p:spPr>
+      </p:sp>
+      <p:sp>
+        <p:nvSpPr>
+          <p:cNvPr id="26" name="Text 24"/>
+          <p:cNvSpPr/>
+          <p:nvPr/>
+        </p:nvSpPr>
+        <p:spPr>
+          <a:xfrm>
+            <a:off x="6998818" y="2258568"/>
+            <a:ext cx="1581912" cy="292608"/>
+          </a:xfrm>
+          <a:prstGeom prst="rect">
+            <a:avLst/>
+          </a:prstGeom>
+          <a:noFill/>
+          <a:ln/>
+        </p:spPr>
+        <p:txBody>
+          <a:bodyPr wrap="square" lIns="0" tIns="0" rIns="0" bIns="0" rtlCol="0" anchor="ctr"/>
+          <a:lstStyle/>
+          <a:p>
+            <a:pPr algn="ctr" indent="0" marL="0">
+              <a:buNone/>
+            </a:pPr>
+            <a:r>
+              <a:rPr lang="en-US" sz="1300" b="1" dirty="0">
+                <a:solidFill>
+                  <a:srgbClr val="9D174D"/>
+                </a:solidFill>
+                <a:latin typeface="Trebuchet MS" pitchFamily="34" charset="0"/>
+                <a:ea typeface="Trebuchet MS" pitchFamily="34" charset="-122"/>
+                <a:cs typeface="Trebuchet MS" pitchFamily="34" charset="-120"/>
+              </a:rPr>
+              <a:t>ed</a:t>
+            </a:r>
+            <a:endParaRPr lang="en-US" sz="1300" dirty="0"/>
+          </a:p>
+        </p:txBody>
+      </p:sp>
+      <p:sp>
+        <p:nvSpPr>
+          <p:cNvPr id="27" name="Text 25"/>
+          <p:cNvSpPr/>
+          <p:nvPr/>
+        </p:nvSpPr>
+        <p:spPr>
+          <a:xfrm>
+            <a:off x="6998818" y="2569464"/>
+            <a:ext cx="1581912" cy="201168"/>
+          </a:xfrm>
+          <a:prstGeom prst="rect">
+            <a:avLst/>
+          </a:prstGeom>
+          <a:noFill/>
+          <a:ln/>
+        </p:spPr>
+        <p:txBody>
+          <a:bodyPr wrap="square" lIns="0" tIns="0" rIns="0" bIns="0" rtlCol="0" anchor="t"/>
+          <a:lstStyle/>
+          <a:p>
+            <a:pPr algn="ctr" indent="0" marL="0">
+              <a:buNone/>
+            </a:pPr>
+            <a:r>
+              <a:rPr lang="en-US" sz="850" dirty="0">
+                <a:solidFill>
+                  <a:srgbClr val="475569"/>
+                </a:solidFill>
+                <a:latin typeface="Calibri" pitchFamily="34" charset="0"/>
+                <a:ea typeface="Calibri" pitchFamily="34" charset="-122"/>
+                <a:cs typeface="Calibri" pitchFamily="34" charset="-120"/>
+              </a:rPr>
+              <a:t>past tense</a:t>
+            </a:r>
+            <a:endParaRPr lang="en-US" sz="850" dirty="0"/>
+          </a:p>
+        </p:txBody>
+      </p:sp>
+      <p:sp>
+        <p:nvSpPr>
+          <p:cNvPr id="28" name="Shape 26"/>
           <p:cNvSpPr/>
           <p:nvPr/>
         </p:nvSpPr>
@@ -25073,7 +26424,7 @@
       </p:sp>
       <p:sp>
         <p:nvSpPr>
-          <p:cNvPr id="26" name="Text 24"/>
+          <p:cNvPr id="29" name="Text 27"/>
           <p:cNvSpPr/>
           <p:nvPr/>
         </p:nvSpPr>
@@ -25112,7 +26463,7 @@
       </p:sp>
       <p:sp>
         <p:nvSpPr>
-          <p:cNvPr id="27" name="Shape 25"/>
+          <p:cNvPr id="30" name="Shape 28"/>
           <p:cNvSpPr/>
           <p:nvPr/>
         </p:nvSpPr>
@@ -25139,7 +26490,7 @@
       </p:sp>
       <p:sp>
         <p:nvSpPr>
-          <p:cNvPr id="28" name="Text 26"/>
+          <p:cNvPr id="31" name="Text 29"/>
           <p:cNvSpPr/>
           <p:nvPr/>
         </p:nvSpPr>
@@ -25178,7 +26529,7 @@
       </p:sp>
       <p:sp>
         <p:nvSpPr>
-          <p:cNvPr id="29" name="Shape 27"/>
+          <p:cNvPr id="32" name="Shape 30"/>
           <p:cNvSpPr/>
           <p:nvPr/>
         </p:nvSpPr>
@@ -25205,7 +26556,7 @@
       </p:sp>
       <p:sp>
         <p:nvSpPr>
-          <p:cNvPr id="30" name="Text 28"/>
+          <p:cNvPr id="33" name="Text 31"/>
           <p:cNvSpPr/>
           <p:nvPr/>
         </p:nvSpPr>
@@ -25244,7 +26595,7 @@
       </p:sp>
       <p:sp>
         <p:nvSpPr>
-          <p:cNvPr id="31" name="Shape 29"/>
+          <p:cNvPr id="34" name="Shape 32"/>
           <p:cNvSpPr/>
           <p:nvPr/>
         </p:nvSpPr>
@@ -25271,7 +26622,7 @@
       </p:sp>
       <p:sp>
         <p:nvSpPr>
-          <p:cNvPr id="32" name="Text 30"/>
+          <p:cNvPr id="35" name="Text 33"/>
           <p:cNvSpPr/>
           <p:nvPr/>
         </p:nvSpPr>
@@ -25594,7 +26945,7 @@
                 <a:ea typeface="Calibri" pitchFamily="34" charset="-122"/>
                 <a:cs typeface="Calibri" pitchFamily="34" charset="-120"/>
               </a:rPr>
-              <a:t>Word Labs  •  wordlabs.app  •  Root: 'dic' = say, speak, proclaim</a:t>
+              <a:t>Word Labs  •  wordlabs.app  •  Root: 'dic' = say; speak</a:t>
             </a:r>
             <a:endParaRPr lang="en-US" sz="800" dirty="0"/>
           </a:p>
@@ -25667,7 +27018,7 @@
                 <a:ea typeface="Trebuchet MS" pitchFamily="34" charset="-122"/>
                 <a:cs typeface="Trebuchet MS" pitchFamily="34" charset="-120"/>
               </a:rPr>
-              <a:t>We are learning that the root 'dic' means 'say, speak, proclaim'.</a:t>
+              <a:t>We are learning that the root 'dic' means 'say; speak'.</a:t>
             </a:r>
             <a:endParaRPr lang="en-US" sz="2000" dirty="0"/>
           </a:p>
@@ -26313,7 +27664,7 @@
                 <a:ea typeface="Calibri" pitchFamily="34" charset="-122"/>
                 <a:cs typeface="Calibri" pitchFamily="34" charset="-120"/>
               </a:rPr>
-              <a:t>Word Labs  •  wordlabs.app  •  Root: 'dic' = say, speak, proclaim</a:t>
+              <a:t>Word Labs  •  wordlabs.app  •  Root: 'dic' = say; speak</a:t>
             </a:r>
             <a:endParaRPr lang="en-US" sz="800" dirty="0"/>
           </a:p>
@@ -26452,7 +27803,7 @@
                 <a:ea typeface="Trebuchet MS" pitchFamily="34" charset="-122"/>
                 <a:cs typeface="Trebuchet MS" pitchFamily="34" charset="-120"/>
               </a:rPr>
-              <a:t>verdict</a:t>
+              <a:t>syndicated</a:t>
             </a:r>
             <a:endParaRPr lang="en-US" sz="2800" dirty="0"/>
           </a:p>
@@ -26532,8 +27883,8 @@
         </p:nvSpPr>
         <p:spPr>
           <a:xfrm>
-            <a:off x="2221992" y="2258568"/>
-            <a:ext cx="1828800" cy="292608"/>
+            <a:off x="1989734" y="2258568"/>
+            <a:ext cx="1581912" cy="292608"/>
           </a:xfrm>
           <a:prstGeom prst="rect">
             <a:avLst>
@@ -26566,8 +27917,8 @@
         </p:nvSpPr>
         <p:spPr>
           <a:xfrm>
-            <a:off x="2221992" y="2258568"/>
-            <a:ext cx="1828800" cy="292608"/>
+            <a:off x="1989734" y="2258568"/>
+            <a:ext cx="1581912" cy="292608"/>
           </a:xfrm>
           <a:prstGeom prst="rect">
             <a:avLst/>
@@ -26591,7 +27942,7 @@
                 <a:ea typeface="Trebuchet MS" pitchFamily="34" charset="-122"/>
                 <a:cs typeface="Trebuchet MS" pitchFamily="34" charset="-120"/>
               </a:rPr>
-              <a:t>ver</a:t>
+              <a:t>syn</a:t>
             </a:r>
             <a:endParaRPr lang="en-US" sz="1300" dirty="0"/>
           </a:p>
@@ -26605,8 +27956,8 @@
         </p:nvSpPr>
         <p:spPr>
           <a:xfrm>
-            <a:off x="2221992" y="2569464"/>
-            <a:ext cx="1828800" cy="201168"/>
+            <a:off x="1989734" y="2569464"/>
+            <a:ext cx="1581912" cy="201168"/>
           </a:xfrm>
           <a:prstGeom prst="rect">
             <a:avLst/>
@@ -26630,7 +27981,7 @@
                 <a:ea typeface="Calibri" pitchFamily="34" charset="-122"/>
                 <a:cs typeface="Calibri" pitchFamily="34" charset="-120"/>
               </a:rPr>
-              <a:t>true</a:t>
+              <a:t>together; with; same</a:t>
             </a:r>
             <a:endParaRPr lang="en-US" sz="850" dirty="0"/>
           </a:p>
@@ -26644,8 +27995,8 @@
         </p:nvSpPr>
         <p:spPr>
           <a:xfrm>
-            <a:off x="4370832" y="2258568"/>
-            <a:ext cx="1828800" cy="292608"/>
+            <a:off x="3659429" y="2258568"/>
+            <a:ext cx="1581912" cy="292608"/>
           </a:xfrm>
           <a:prstGeom prst="rect">
             <a:avLst>
@@ -26678,8 +28029,8 @@
         </p:nvSpPr>
         <p:spPr>
           <a:xfrm>
-            <a:off x="4370832" y="2258568"/>
-            <a:ext cx="1828800" cy="292608"/>
+            <a:off x="3659429" y="2258568"/>
+            <a:ext cx="1581912" cy="292608"/>
           </a:xfrm>
           <a:prstGeom prst="rect">
             <a:avLst/>
@@ -26717,8 +28068,8 @@
         </p:nvSpPr>
         <p:spPr>
           <a:xfrm>
-            <a:off x="4370832" y="2569464"/>
-            <a:ext cx="1828800" cy="201168"/>
+            <a:off x="3659429" y="2569464"/>
+            <a:ext cx="1581912" cy="201168"/>
           </a:xfrm>
           <a:prstGeom prst="rect">
             <a:avLst/>
@@ -26742,7 +28093,7 @@
                 <a:ea typeface="Calibri" pitchFamily="34" charset="-122"/>
                 <a:cs typeface="Calibri" pitchFamily="34" charset="-120"/>
               </a:rPr>
-              <a:t>say, speak</a:t>
+              <a:t>say; speak</a:t>
             </a:r>
             <a:endParaRPr lang="en-US" sz="850" dirty="0"/>
           </a:p>
@@ -26756,8 +28107,8 @@
         </p:nvSpPr>
         <p:spPr>
           <a:xfrm>
-            <a:off x="6519672" y="2258568"/>
-            <a:ext cx="1828800" cy="292608"/>
+            <a:off x="5329123" y="2258568"/>
+            <a:ext cx="1581912" cy="292608"/>
           </a:xfrm>
           <a:prstGeom prst="rect">
             <a:avLst>
@@ -26790,8 +28141,8 @@
         </p:nvSpPr>
         <p:spPr>
           <a:xfrm>
-            <a:off x="6519672" y="2258568"/>
-            <a:ext cx="1828800" cy="292608"/>
+            <a:off x="5329123" y="2258568"/>
+            <a:ext cx="1581912" cy="292608"/>
           </a:xfrm>
           <a:prstGeom prst="rect">
             <a:avLst/>
@@ -26815,7 +28166,7 @@
                 <a:ea typeface="Trebuchet MS" pitchFamily="34" charset="-122"/>
                 <a:cs typeface="Trebuchet MS" pitchFamily="34" charset="-120"/>
               </a:rPr>
-              <a:t>t</a:t>
+              <a:t>ate</a:t>
             </a:r>
             <a:endParaRPr lang="en-US" sz="1300" dirty="0"/>
           </a:p>
@@ -26829,8 +28180,8 @@
         </p:nvSpPr>
         <p:spPr>
           <a:xfrm>
-            <a:off x="6519672" y="2569464"/>
-            <a:ext cx="1828800" cy="201168"/>
+            <a:off x="5329123" y="2569464"/>
+            <a:ext cx="1581912" cy="201168"/>
           </a:xfrm>
           <a:prstGeom prst="rect">
             <a:avLst/>
@@ -26854,7 +28205,7 @@
                 <a:ea typeface="Calibri" pitchFamily="34" charset="-122"/>
                 <a:cs typeface="Calibri" pitchFamily="34" charset="-120"/>
               </a:rPr>
-              <a:t>word-forming consonant</a:t>
+              <a:t>to make; to become</a:t>
             </a:r>
             <a:endParaRPr lang="en-US" sz="850" dirty="0"/>
           </a:p>
@@ -26863,6 +28214,118 @@
       <p:sp>
         <p:nvSpPr>
           <p:cNvPr id="25" name="Shape 23"/>
+          <p:cNvSpPr/>
+          <p:nvPr/>
+        </p:nvSpPr>
+        <p:spPr>
+          <a:xfrm>
+            <a:off x="6998818" y="2258568"/>
+            <a:ext cx="1581912" cy="292608"/>
+          </a:xfrm>
+          <a:prstGeom prst="rect">
+            <a:avLst>
+              <a:gd name="adj" fmla="val 25000"/>
+            </a:avLst>
+          </a:prstGeom>
+          <a:solidFill>
+            <a:srgbClr val="FCE7F3"/>
+          </a:solidFill>
+          <a:ln w="19050">
+            <a:solidFill>
+              <a:srgbClr val="DB2777"/>
+            </a:solidFill>
+            <a:prstDash val="solid"/>
+          </a:ln>
+          <a:effectLst>
+            <a:outerShdw sx="100000" sy="100000" kx="0" ky="0" algn="bl" rotWithShape="0" blurRad="101600" dist="38100" dir="8100000">
+              <a:srgbClr val="000000">
+                <a:alpha val="12000"/>
+              </a:srgbClr>
+            </a:outerShdw>
+          </a:effectLst>
+        </p:spPr>
+      </p:sp>
+      <p:sp>
+        <p:nvSpPr>
+          <p:cNvPr id="26" name="Text 24"/>
+          <p:cNvSpPr/>
+          <p:nvPr/>
+        </p:nvSpPr>
+        <p:spPr>
+          <a:xfrm>
+            <a:off x="6998818" y="2258568"/>
+            <a:ext cx="1581912" cy="292608"/>
+          </a:xfrm>
+          <a:prstGeom prst="rect">
+            <a:avLst/>
+          </a:prstGeom>
+          <a:noFill/>
+          <a:ln/>
+        </p:spPr>
+        <p:txBody>
+          <a:bodyPr wrap="square" lIns="0" tIns="0" rIns="0" bIns="0" rtlCol="0" anchor="ctr"/>
+          <a:lstStyle/>
+          <a:p>
+            <a:pPr algn="ctr" indent="0" marL="0">
+              <a:buNone/>
+            </a:pPr>
+            <a:r>
+              <a:rPr lang="en-US" sz="1300" b="1" dirty="0">
+                <a:solidFill>
+                  <a:srgbClr val="9D174D"/>
+                </a:solidFill>
+                <a:latin typeface="Trebuchet MS" pitchFamily="34" charset="0"/>
+                <a:ea typeface="Trebuchet MS" pitchFamily="34" charset="-122"/>
+                <a:cs typeface="Trebuchet MS" pitchFamily="34" charset="-120"/>
+              </a:rPr>
+              <a:t>ed</a:t>
+            </a:r>
+            <a:endParaRPr lang="en-US" sz="1300" dirty="0"/>
+          </a:p>
+        </p:txBody>
+      </p:sp>
+      <p:sp>
+        <p:nvSpPr>
+          <p:cNvPr id="27" name="Text 25"/>
+          <p:cNvSpPr/>
+          <p:nvPr/>
+        </p:nvSpPr>
+        <p:spPr>
+          <a:xfrm>
+            <a:off x="6998818" y="2569464"/>
+            <a:ext cx="1581912" cy="201168"/>
+          </a:xfrm>
+          <a:prstGeom prst="rect">
+            <a:avLst/>
+          </a:prstGeom>
+          <a:noFill/>
+          <a:ln/>
+        </p:spPr>
+        <p:txBody>
+          <a:bodyPr wrap="square" lIns="0" tIns="0" rIns="0" bIns="0" rtlCol="0" anchor="t"/>
+          <a:lstStyle/>
+          <a:p>
+            <a:pPr algn="ctr" indent="0" marL="0">
+              <a:buNone/>
+            </a:pPr>
+            <a:r>
+              <a:rPr lang="en-US" sz="850" dirty="0">
+                <a:solidFill>
+                  <a:srgbClr val="475569"/>
+                </a:solidFill>
+                <a:latin typeface="Calibri" pitchFamily="34" charset="0"/>
+                <a:ea typeface="Calibri" pitchFamily="34" charset="-122"/>
+                <a:cs typeface="Calibri" pitchFamily="34" charset="-120"/>
+              </a:rPr>
+              <a:t>past tense</a:t>
+            </a:r>
+            <a:endParaRPr lang="en-US" sz="850" dirty="0"/>
+          </a:p>
+        </p:txBody>
+      </p:sp>
+      <p:sp>
+        <p:nvSpPr>
+          <p:cNvPr id="28" name="Shape 26"/>
           <p:cNvSpPr/>
           <p:nvPr/>
         </p:nvSpPr>
@@ -26889,7 +28352,7 @@
       </p:sp>
       <p:sp>
         <p:nvSpPr>
-          <p:cNvPr id="26" name="Text 24"/>
+          <p:cNvPr id="29" name="Text 27"/>
           <p:cNvSpPr/>
           <p:nvPr/>
         </p:nvSpPr>
@@ -26928,7 +28391,7 @@
       </p:sp>
       <p:sp>
         <p:nvSpPr>
-          <p:cNvPr id="27" name="Shape 25"/>
+          <p:cNvPr id="30" name="Shape 28"/>
           <p:cNvSpPr/>
           <p:nvPr/>
         </p:nvSpPr>
@@ -26955,14 +28418,14 @@
       </p:sp>
       <p:sp>
         <p:nvSpPr>
-          <p:cNvPr id="28" name="Shape 26"/>
-          <p:cNvSpPr/>
-          <p:nvPr/>
-        </p:nvSpPr>
-        <p:spPr>
-          <a:xfrm>
-            <a:off x="2999232" y="3364992"/>
-            <a:ext cx="1645920" cy="475488"/>
+          <p:cNvPr id="31" name="Shape 29"/>
+          <p:cNvSpPr/>
+          <p:nvPr/>
+        </p:nvSpPr>
+        <p:spPr>
+          <a:xfrm>
+            <a:off x="1975104" y="3364992"/>
+            <a:ext cx="1554480" cy="475488"/>
           </a:xfrm>
           <a:prstGeom prst="rect">
             <a:avLst>
@@ -26982,14 +28445,14 @@
       </p:sp>
       <p:sp>
         <p:nvSpPr>
-          <p:cNvPr id="29" name="Text 27"/>
-          <p:cNvSpPr/>
-          <p:nvPr/>
-        </p:nvSpPr>
-        <p:spPr>
-          <a:xfrm>
-            <a:off x="2999232" y="3364992"/>
-            <a:ext cx="1645920" cy="475488"/>
+          <p:cNvPr id="32" name="Text 30"/>
+          <p:cNvSpPr/>
+          <p:nvPr/>
+        </p:nvSpPr>
+        <p:spPr>
+          <a:xfrm>
+            <a:off x="1975104" y="3364992"/>
+            <a:ext cx="1554480" cy="475488"/>
           </a:xfrm>
           <a:prstGeom prst="rect">
             <a:avLst/>
@@ -27013,7 +28476,7 @@
                 <a:ea typeface="Trebuchet MS" pitchFamily="34" charset="-122"/>
                 <a:cs typeface="Trebuchet MS" pitchFamily="34" charset="-120"/>
               </a:rPr>
-              <a:t>ver</a:t>
+              <a:t>syn</a:t>
             </a:r>
             <a:endParaRPr lang="en-US" sz="1400" dirty="0"/>
           </a:p>
@@ -27021,14 +28484,14 @@
       </p:sp>
       <p:sp>
         <p:nvSpPr>
-          <p:cNvPr id="30" name="Text 28"/>
-          <p:cNvSpPr/>
-          <p:nvPr/>
-        </p:nvSpPr>
-        <p:spPr>
-          <a:xfrm>
-            <a:off x="4645152" y="3364992"/>
-            <a:ext cx="1097280" cy="475488"/>
+          <p:cNvPr id="33" name="Text 31"/>
+          <p:cNvSpPr/>
+          <p:nvPr/>
+        </p:nvSpPr>
+        <p:spPr>
+          <a:xfrm>
+            <a:off x="3529584" y="3364992"/>
+            <a:ext cx="73152" cy="475488"/>
           </a:xfrm>
           <a:prstGeom prst="rect">
             <a:avLst/>
@@ -27060,14 +28523,14 @@
       </p:sp>
       <p:sp>
         <p:nvSpPr>
-          <p:cNvPr id="31" name="Shape 29"/>
-          <p:cNvSpPr/>
-          <p:nvPr/>
-        </p:nvSpPr>
-        <p:spPr>
-          <a:xfrm>
-            <a:off x="5742432" y="3364992"/>
-            <a:ext cx="1645920" cy="475488"/>
+          <p:cNvPr id="34" name="Shape 32"/>
+          <p:cNvSpPr/>
+          <p:nvPr/>
+        </p:nvSpPr>
+        <p:spPr>
+          <a:xfrm>
+            <a:off x="3602736" y="3364992"/>
+            <a:ext cx="1554480" cy="475488"/>
           </a:xfrm>
           <a:prstGeom prst="rect">
             <a:avLst>
@@ -27087,14 +28550,14 @@
       </p:sp>
       <p:sp>
         <p:nvSpPr>
-          <p:cNvPr id="32" name="Text 30"/>
-          <p:cNvSpPr/>
-          <p:nvPr/>
-        </p:nvSpPr>
-        <p:spPr>
-          <a:xfrm>
-            <a:off x="5742432" y="3364992"/>
-            <a:ext cx="1645920" cy="475488"/>
+          <p:cNvPr id="35" name="Text 33"/>
+          <p:cNvSpPr/>
+          <p:nvPr/>
+        </p:nvSpPr>
+        <p:spPr>
+          <a:xfrm>
+            <a:off x="3602736" y="3364992"/>
+            <a:ext cx="1554480" cy="475488"/>
           </a:xfrm>
           <a:prstGeom prst="rect">
             <a:avLst/>
@@ -27118,7 +28581,7 @@
                 <a:ea typeface="Trebuchet MS" pitchFamily="34" charset="-122"/>
                 <a:cs typeface="Trebuchet MS" pitchFamily="34" charset="-120"/>
               </a:rPr>
-              <a:t>dict</a:t>
+              <a:t>di</a:t>
             </a:r>
             <a:endParaRPr lang="en-US" sz="1400" dirty="0"/>
           </a:p>
@@ -27126,7 +28589,217 @@
       </p:sp>
       <p:sp>
         <p:nvSpPr>
-          <p:cNvPr id="33" name="Shape 31"/>
+          <p:cNvPr id="36" name="Text 34"/>
+          <p:cNvSpPr/>
+          <p:nvPr/>
+        </p:nvSpPr>
+        <p:spPr>
+          <a:xfrm>
+            <a:off x="5157216" y="3364992"/>
+            <a:ext cx="73152" cy="475488"/>
+          </a:xfrm>
+          <a:prstGeom prst="rect">
+            <a:avLst/>
+          </a:prstGeom>
+          <a:noFill/>
+          <a:ln/>
+        </p:spPr>
+        <p:txBody>
+          <a:bodyPr wrap="square" lIns="0" tIns="0" rIns="0" bIns="0" rtlCol="0" anchor="ctr"/>
+          <a:lstStyle/>
+          <a:p>
+            <a:pPr algn="ctr" indent="0" marL="0">
+              <a:buNone/>
+            </a:pPr>
+            <a:r>
+              <a:rPr lang="en-US" sz="1600" b="1" dirty="0">
+                <a:solidFill>
+                  <a:srgbClr val="0D9488"/>
+                </a:solidFill>
+                <a:latin typeface="Trebuchet MS" pitchFamily="34" charset="0"/>
+                <a:ea typeface="Trebuchet MS" pitchFamily="34" charset="-122"/>
+                <a:cs typeface="Trebuchet MS" pitchFamily="34" charset="-120"/>
+              </a:rPr>
+              <a:t>·</a:t>
+            </a:r>
+            <a:endParaRPr lang="en-US" sz="1600" dirty="0"/>
+          </a:p>
+        </p:txBody>
+      </p:sp>
+      <p:sp>
+        <p:nvSpPr>
+          <p:cNvPr id="37" name="Shape 35"/>
+          <p:cNvSpPr/>
+          <p:nvPr/>
+        </p:nvSpPr>
+        <p:spPr>
+          <a:xfrm>
+            <a:off x="5230368" y="3364992"/>
+            <a:ext cx="1554480" cy="475488"/>
+          </a:xfrm>
+          <a:prstGeom prst="rect">
+            <a:avLst>
+              <a:gd name="adj" fmla="val 9615"/>
+            </a:avLst>
+          </a:prstGeom>
+          <a:solidFill>
+            <a:srgbClr val="FFFFFF"/>
+          </a:solidFill>
+          <a:ln w="12700">
+            <a:solidFill>
+              <a:srgbClr val="0D9488"/>
+            </a:solidFill>
+            <a:prstDash val="solid"/>
+          </a:ln>
+        </p:spPr>
+      </p:sp>
+      <p:sp>
+        <p:nvSpPr>
+          <p:cNvPr id="38" name="Text 36"/>
+          <p:cNvSpPr/>
+          <p:nvPr/>
+        </p:nvSpPr>
+        <p:spPr>
+          <a:xfrm>
+            <a:off x="5230368" y="3364992"/>
+            <a:ext cx="1554480" cy="475488"/>
+          </a:xfrm>
+          <a:prstGeom prst="rect">
+            <a:avLst/>
+          </a:prstGeom>
+          <a:noFill/>
+          <a:ln/>
+        </p:spPr>
+        <p:txBody>
+          <a:bodyPr wrap="square" lIns="0" tIns="0" rIns="0" bIns="0" rtlCol="0" anchor="ctr"/>
+          <a:lstStyle/>
+          <a:p>
+            <a:pPr algn="ctr" indent="0" marL="0">
+              <a:buNone/>
+            </a:pPr>
+            <a:r>
+              <a:rPr lang="en-US" sz="1400" b="1" dirty="0">
+                <a:solidFill>
+                  <a:srgbClr val="0D9488"/>
+                </a:solidFill>
+                <a:latin typeface="Trebuchet MS" pitchFamily="34" charset="0"/>
+                <a:ea typeface="Trebuchet MS" pitchFamily="34" charset="-122"/>
+                <a:cs typeface="Trebuchet MS" pitchFamily="34" charset="-120"/>
+              </a:rPr>
+              <a:t>cat</a:t>
+            </a:r>
+            <a:endParaRPr lang="en-US" sz="1400" dirty="0"/>
+          </a:p>
+        </p:txBody>
+      </p:sp>
+      <p:sp>
+        <p:nvSpPr>
+          <p:cNvPr id="39" name="Text 37"/>
+          <p:cNvSpPr/>
+          <p:nvPr/>
+        </p:nvSpPr>
+        <p:spPr>
+          <a:xfrm>
+            <a:off x="6784848" y="3364992"/>
+            <a:ext cx="73152" cy="475488"/>
+          </a:xfrm>
+          <a:prstGeom prst="rect">
+            <a:avLst/>
+          </a:prstGeom>
+          <a:noFill/>
+          <a:ln/>
+        </p:spPr>
+        <p:txBody>
+          <a:bodyPr wrap="square" lIns="0" tIns="0" rIns="0" bIns="0" rtlCol="0" anchor="ctr"/>
+          <a:lstStyle/>
+          <a:p>
+            <a:pPr algn="ctr" indent="0" marL="0">
+              <a:buNone/>
+            </a:pPr>
+            <a:r>
+              <a:rPr lang="en-US" sz="1600" b="1" dirty="0">
+                <a:solidFill>
+                  <a:srgbClr val="0D9488"/>
+                </a:solidFill>
+                <a:latin typeface="Trebuchet MS" pitchFamily="34" charset="0"/>
+                <a:ea typeface="Trebuchet MS" pitchFamily="34" charset="-122"/>
+                <a:cs typeface="Trebuchet MS" pitchFamily="34" charset="-120"/>
+              </a:rPr>
+              <a:t>·</a:t>
+            </a:r>
+            <a:endParaRPr lang="en-US" sz="1600" dirty="0"/>
+          </a:p>
+        </p:txBody>
+      </p:sp>
+      <p:sp>
+        <p:nvSpPr>
+          <p:cNvPr id="40" name="Shape 38"/>
+          <p:cNvSpPr/>
+          <p:nvPr/>
+        </p:nvSpPr>
+        <p:spPr>
+          <a:xfrm>
+            <a:off x="6858000" y="3364992"/>
+            <a:ext cx="1554480" cy="475488"/>
+          </a:xfrm>
+          <a:prstGeom prst="rect">
+            <a:avLst>
+              <a:gd name="adj" fmla="val 9615"/>
+            </a:avLst>
+          </a:prstGeom>
+          <a:solidFill>
+            <a:srgbClr val="FFFFFF"/>
+          </a:solidFill>
+          <a:ln w="12700">
+            <a:solidFill>
+              <a:srgbClr val="0D9488"/>
+            </a:solidFill>
+            <a:prstDash val="solid"/>
+          </a:ln>
+        </p:spPr>
+      </p:sp>
+      <p:sp>
+        <p:nvSpPr>
+          <p:cNvPr id="41" name="Text 39"/>
+          <p:cNvSpPr/>
+          <p:nvPr/>
+        </p:nvSpPr>
+        <p:spPr>
+          <a:xfrm>
+            <a:off x="6858000" y="3364992"/>
+            <a:ext cx="1554480" cy="475488"/>
+          </a:xfrm>
+          <a:prstGeom prst="rect">
+            <a:avLst/>
+          </a:prstGeom>
+          <a:noFill/>
+          <a:ln/>
+        </p:spPr>
+        <p:txBody>
+          <a:bodyPr wrap="square" lIns="0" tIns="0" rIns="0" bIns="0" rtlCol="0" anchor="ctr"/>
+          <a:lstStyle/>
+          <a:p>
+            <a:pPr algn="ctr" indent="0" marL="0">
+              <a:buNone/>
+            </a:pPr>
+            <a:r>
+              <a:rPr lang="en-US" sz="1400" b="1" dirty="0">
+                <a:solidFill>
+                  <a:srgbClr val="0D9488"/>
+                </a:solidFill>
+                <a:latin typeface="Trebuchet MS" pitchFamily="34" charset="0"/>
+                <a:ea typeface="Trebuchet MS" pitchFamily="34" charset="-122"/>
+                <a:cs typeface="Trebuchet MS" pitchFamily="34" charset="-120"/>
+              </a:rPr>
+              <a:t>ed</a:t>
+            </a:r>
+            <a:endParaRPr lang="en-US" sz="1400" dirty="0"/>
+          </a:p>
+        </p:txBody>
+      </p:sp>
+      <p:sp>
+        <p:nvSpPr>
+          <p:cNvPr id="42" name="Shape 40"/>
           <p:cNvSpPr/>
           <p:nvPr/>
         </p:nvSpPr>
@@ -27153,7 +28826,7 @@
       </p:sp>
       <p:sp>
         <p:nvSpPr>
-          <p:cNvPr id="34" name="Text 32"/>
+          <p:cNvPr id="43" name="Text 41"/>
           <p:cNvSpPr/>
           <p:nvPr/>
         </p:nvSpPr>
@@ -27192,7 +28865,7 @@
       </p:sp>
       <p:sp>
         <p:nvSpPr>
-          <p:cNvPr id="35" name="Shape 33"/>
+          <p:cNvPr id="44" name="Shape 42"/>
           <p:cNvSpPr/>
           <p:nvPr/>
         </p:nvSpPr>
@@ -27219,7 +28892,7 @@
       </p:sp>
       <p:sp>
         <p:nvSpPr>
-          <p:cNvPr id="36" name="Text 34"/>
+          <p:cNvPr id="45" name="Text 43"/>
           <p:cNvSpPr/>
           <p:nvPr/>
         </p:nvSpPr>
@@ -27542,7 +29215,7 @@
                 <a:ea typeface="Calibri" pitchFamily="34" charset="-122"/>
                 <a:cs typeface="Calibri" pitchFamily="34" charset="-120"/>
               </a:rPr>
-              <a:t>Word Labs  •  wordlabs.app  •  Root: 'dic' = say, speak, proclaim</a:t>
+              <a:t>Word Labs  •  wordlabs.app  •  Root: 'dic' = say; speak</a:t>
             </a:r>
             <a:endParaRPr lang="en-US" sz="800" dirty="0"/>
           </a:p>
@@ -27681,7 +29354,7 @@
                 <a:ea typeface="Trebuchet MS" pitchFamily="34" charset="-122"/>
                 <a:cs typeface="Trebuchet MS" pitchFamily="34" charset="-120"/>
               </a:rPr>
-              <a:t>verdict</a:t>
+              <a:t>syndicated</a:t>
             </a:r>
             <a:endParaRPr lang="en-US" sz="2800" dirty="0"/>
           </a:p>
@@ -27761,8 +29434,8 @@
         </p:nvSpPr>
         <p:spPr>
           <a:xfrm>
-            <a:off x="2221992" y="2258568"/>
-            <a:ext cx="1828800" cy="292608"/>
+            <a:off x="1989734" y="2258568"/>
+            <a:ext cx="1581912" cy="292608"/>
           </a:xfrm>
           <a:prstGeom prst="rect">
             <a:avLst>
@@ -27795,8 +29468,8 @@
         </p:nvSpPr>
         <p:spPr>
           <a:xfrm>
-            <a:off x="2221992" y="2258568"/>
-            <a:ext cx="1828800" cy="292608"/>
+            <a:off x="1989734" y="2258568"/>
+            <a:ext cx="1581912" cy="292608"/>
           </a:xfrm>
           <a:prstGeom prst="rect">
             <a:avLst/>
@@ -27820,7 +29493,7 @@
                 <a:ea typeface="Trebuchet MS" pitchFamily="34" charset="-122"/>
                 <a:cs typeface="Trebuchet MS" pitchFamily="34" charset="-120"/>
               </a:rPr>
-              <a:t>ver</a:t>
+              <a:t>syn</a:t>
             </a:r>
             <a:endParaRPr lang="en-US" sz="1300" dirty="0"/>
           </a:p>
@@ -27834,8 +29507,8 @@
         </p:nvSpPr>
         <p:spPr>
           <a:xfrm>
-            <a:off x="2221992" y="2569464"/>
-            <a:ext cx="1828800" cy="201168"/>
+            <a:off x="1989734" y="2569464"/>
+            <a:ext cx="1581912" cy="201168"/>
           </a:xfrm>
           <a:prstGeom prst="rect">
             <a:avLst/>
@@ -27859,7 +29532,7 @@
                 <a:ea typeface="Calibri" pitchFamily="34" charset="-122"/>
                 <a:cs typeface="Calibri" pitchFamily="34" charset="-120"/>
               </a:rPr>
-              <a:t>true</a:t>
+              <a:t>together; with; same</a:t>
             </a:r>
             <a:endParaRPr lang="en-US" sz="850" dirty="0"/>
           </a:p>
@@ -27873,8 +29546,8 @@
         </p:nvSpPr>
         <p:spPr>
           <a:xfrm>
-            <a:off x="4370832" y="2258568"/>
-            <a:ext cx="1828800" cy="292608"/>
+            <a:off x="3659429" y="2258568"/>
+            <a:ext cx="1581912" cy="292608"/>
           </a:xfrm>
           <a:prstGeom prst="rect">
             <a:avLst>
@@ -27907,8 +29580,8 @@
         </p:nvSpPr>
         <p:spPr>
           <a:xfrm>
-            <a:off x="4370832" y="2258568"/>
-            <a:ext cx="1828800" cy="292608"/>
+            <a:off x="3659429" y="2258568"/>
+            <a:ext cx="1581912" cy="292608"/>
           </a:xfrm>
           <a:prstGeom prst="rect">
             <a:avLst/>
@@ -27946,8 +29619,8 @@
         </p:nvSpPr>
         <p:spPr>
           <a:xfrm>
-            <a:off x="4370832" y="2569464"/>
-            <a:ext cx="1828800" cy="201168"/>
+            <a:off x="3659429" y="2569464"/>
+            <a:ext cx="1581912" cy="201168"/>
           </a:xfrm>
           <a:prstGeom prst="rect">
             <a:avLst/>
@@ -27971,7 +29644,7 @@
                 <a:ea typeface="Calibri" pitchFamily="34" charset="-122"/>
                 <a:cs typeface="Calibri" pitchFamily="34" charset="-120"/>
               </a:rPr>
-              <a:t>say, speak</a:t>
+              <a:t>say; speak</a:t>
             </a:r>
             <a:endParaRPr lang="en-US" sz="850" dirty="0"/>
           </a:p>
@@ -27985,8 +29658,8 @@
         </p:nvSpPr>
         <p:spPr>
           <a:xfrm>
-            <a:off x="6519672" y="2258568"/>
-            <a:ext cx="1828800" cy="292608"/>
+            <a:off x="5329123" y="2258568"/>
+            <a:ext cx="1581912" cy="292608"/>
           </a:xfrm>
           <a:prstGeom prst="rect">
             <a:avLst>
@@ -28019,8 +29692,8 @@
         </p:nvSpPr>
         <p:spPr>
           <a:xfrm>
-            <a:off x="6519672" y="2258568"/>
-            <a:ext cx="1828800" cy="292608"/>
+            <a:off x="5329123" y="2258568"/>
+            <a:ext cx="1581912" cy="292608"/>
           </a:xfrm>
           <a:prstGeom prst="rect">
             <a:avLst/>
@@ -28044,7 +29717,7 @@
                 <a:ea typeface="Trebuchet MS" pitchFamily="34" charset="-122"/>
                 <a:cs typeface="Trebuchet MS" pitchFamily="34" charset="-120"/>
               </a:rPr>
-              <a:t>t</a:t>
+              <a:t>ate</a:t>
             </a:r>
             <a:endParaRPr lang="en-US" sz="1300" dirty="0"/>
           </a:p>
@@ -28058,8 +29731,8 @@
         </p:nvSpPr>
         <p:spPr>
           <a:xfrm>
-            <a:off x="6519672" y="2569464"/>
-            <a:ext cx="1828800" cy="201168"/>
+            <a:off x="5329123" y="2569464"/>
+            <a:ext cx="1581912" cy="201168"/>
           </a:xfrm>
           <a:prstGeom prst="rect">
             <a:avLst/>
@@ -28083,7 +29756,7 @@
                 <a:ea typeface="Calibri" pitchFamily="34" charset="-122"/>
                 <a:cs typeface="Calibri" pitchFamily="34" charset="-120"/>
               </a:rPr>
-              <a:t>word-forming consonant</a:t>
+              <a:t>to make; to become</a:t>
             </a:r>
             <a:endParaRPr lang="en-US" sz="850" dirty="0"/>
           </a:p>
@@ -28092,6 +29765,118 @@
       <p:sp>
         <p:nvSpPr>
           <p:cNvPr id="25" name="Shape 23"/>
+          <p:cNvSpPr/>
+          <p:nvPr/>
+        </p:nvSpPr>
+        <p:spPr>
+          <a:xfrm>
+            <a:off x="6998818" y="2258568"/>
+            <a:ext cx="1581912" cy="292608"/>
+          </a:xfrm>
+          <a:prstGeom prst="rect">
+            <a:avLst>
+              <a:gd name="adj" fmla="val 25000"/>
+            </a:avLst>
+          </a:prstGeom>
+          <a:solidFill>
+            <a:srgbClr val="FCE7F3"/>
+          </a:solidFill>
+          <a:ln w="19050">
+            <a:solidFill>
+              <a:srgbClr val="DB2777"/>
+            </a:solidFill>
+            <a:prstDash val="solid"/>
+          </a:ln>
+          <a:effectLst>
+            <a:outerShdw sx="100000" sy="100000" kx="0" ky="0" algn="bl" rotWithShape="0" blurRad="101600" dist="38100" dir="8100000">
+              <a:srgbClr val="000000">
+                <a:alpha val="12000"/>
+              </a:srgbClr>
+            </a:outerShdw>
+          </a:effectLst>
+        </p:spPr>
+      </p:sp>
+      <p:sp>
+        <p:nvSpPr>
+          <p:cNvPr id="26" name="Text 24"/>
+          <p:cNvSpPr/>
+          <p:nvPr/>
+        </p:nvSpPr>
+        <p:spPr>
+          <a:xfrm>
+            <a:off x="6998818" y="2258568"/>
+            <a:ext cx="1581912" cy="292608"/>
+          </a:xfrm>
+          <a:prstGeom prst="rect">
+            <a:avLst/>
+          </a:prstGeom>
+          <a:noFill/>
+          <a:ln/>
+        </p:spPr>
+        <p:txBody>
+          <a:bodyPr wrap="square" lIns="0" tIns="0" rIns="0" bIns="0" rtlCol="0" anchor="ctr"/>
+          <a:lstStyle/>
+          <a:p>
+            <a:pPr algn="ctr" indent="0" marL="0">
+              <a:buNone/>
+            </a:pPr>
+            <a:r>
+              <a:rPr lang="en-US" sz="1300" b="1" dirty="0">
+                <a:solidFill>
+                  <a:srgbClr val="9D174D"/>
+                </a:solidFill>
+                <a:latin typeface="Trebuchet MS" pitchFamily="34" charset="0"/>
+                <a:ea typeface="Trebuchet MS" pitchFamily="34" charset="-122"/>
+                <a:cs typeface="Trebuchet MS" pitchFamily="34" charset="-120"/>
+              </a:rPr>
+              <a:t>ed</a:t>
+            </a:r>
+            <a:endParaRPr lang="en-US" sz="1300" dirty="0"/>
+          </a:p>
+        </p:txBody>
+      </p:sp>
+      <p:sp>
+        <p:nvSpPr>
+          <p:cNvPr id="27" name="Text 25"/>
+          <p:cNvSpPr/>
+          <p:nvPr/>
+        </p:nvSpPr>
+        <p:spPr>
+          <a:xfrm>
+            <a:off x="6998818" y="2569464"/>
+            <a:ext cx="1581912" cy="201168"/>
+          </a:xfrm>
+          <a:prstGeom prst="rect">
+            <a:avLst/>
+          </a:prstGeom>
+          <a:noFill/>
+          <a:ln/>
+        </p:spPr>
+        <p:txBody>
+          <a:bodyPr wrap="square" lIns="0" tIns="0" rIns="0" bIns="0" rtlCol="0" anchor="t"/>
+          <a:lstStyle/>
+          <a:p>
+            <a:pPr algn="ctr" indent="0" marL="0">
+              <a:buNone/>
+            </a:pPr>
+            <a:r>
+              <a:rPr lang="en-US" sz="850" dirty="0">
+                <a:solidFill>
+                  <a:srgbClr val="475569"/>
+                </a:solidFill>
+                <a:latin typeface="Calibri" pitchFamily="34" charset="0"/>
+                <a:ea typeface="Calibri" pitchFamily="34" charset="-122"/>
+                <a:cs typeface="Calibri" pitchFamily="34" charset="-120"/>
+              </a:rPr>
+              <a:t>past tense</a:t>
+            </a:r>
+            <a:endParaRPr lang="en-US" sz="850" dirty="0"/>
+          </a:p>
+        </p:txBody>
+      </p:sp>
+      <p:sp>
+        <p:nvSpPr>
+          <p:cNvPr id="28" name="Shape 26"/>
           <p:cNvSpPr/>
           <p:nvPr/>
         </p:nvSpPr>
@@ -28118,7 +29903,7 @@
       </p:sp>
       <p:sp>
         <p:nvSpPr>
-          <p:cNvPr id="26" name="Text 24"/>
+          <p:cNvPr id="29" name="Text 27"/>
           <p:cNvSpPr/>
           <p:nvPr/>
         </p:nvSpPr>
@@ -28157,7 +29942,7 @@
       </p:sp>
       <p:sp>
         <p:nvSpPr>
-          <p:cNvPr id="27" name="Shape 25"/>
+          <p:cNvPr id="30" name="Shape 28"/>
           <p:cNvSpPr/>
           <p:nvPr/>
         </p:nvSpPr>
@@ -28184,14 +29969,14 @@
       </p:sp>
       <p:sp>
         <p:nvSpPr>
-          <p:cNvPr id="28" name="Shape 26"/>
-          <p:cNvSpPr/>
-          <p:nvPr/>
-        </p:nvSpPr>
-        <p:spPr>
-          <a:xfrm>
-            <a:off x="2999232" y="3364992"/>
-            <a:ext cx="1645920" cy="475488"/>
+          <p:cNvPr id="31" name="Shape 29"/>
+          <p:cNvSpPr/>
+          <p:nvPr/>
+        </p:nvSpPr>
+        <p:spPr>
+          <a:xfrm>
+            <a:off x="1975104" y="3364992"/>
+            <a:ext cx="1554480" cy="475488"/>
           </a:xfrm>
           <a:prstGeom prst="rect">
             <a:avLst>
@@ -28211,14 +29996,14 @@
       </p:sp>
       <p:sp>
         <p:nvSpPr>
-          <p:cNvPr id="29" name="Text 27"/>
-          <p:cNvSpPr/>
-          <p:nvPr/>
-        </p:nvSpPr>
-        <p:spPr>
-          <a:xfrm>
-            <a:off x="2999232" y="3364992"/>
-            <a:ext cx="1645920" cy="475488"/>
+          <p:cNvPr id="32" name="Text 30"/>
+          <p:cNvSpPr/>
+          <p:nvPr/>
+        </p:nvSpPr>
+        <p:spPr>
+          <a:xfrm>
+            <a:off x="1975104" y="3364992"/>
+            <a:ext cx="1554480" cy="475488"/>
           </a:xfrm>
           <a:prstGeom prst="rect">
             <a:avLst/>
@@ -28242,7 +30027,7 @@
                 <a:ea typeface="Trebuchet MS" pitchFamily="34" charset="-122"/>
                 <a:cs typeface="Trebuchet MS" pitchFamily="34" charset="-120"/>
               </a:rPr>
-              <a:t>ver</a:t>
+              <a:t>syn</a:t>
             </a:r>
             <a:endParaRPr lang="en-US" sz="1400" dirty="0"/>
           </a:p>
@@ -28250,14 +30035,14 @@
       </p:sp>
       <p:sp>
         <p:nvSpPr>
-          <p:cNvPr id="30" name="Text 28"/>
-          <p:cNvSpPr/>
-          <p:nvPr/>
-        </p:nvSpPr>
-        <p:spPr>
-          <a:xfrm>
-            <a:off x="4645152" y="3364992"/>
-            <a:ext cx="1097280" cy="475488"/>
+          <p:cNvPr id="33" name="Text 31"/>
+          <p:cNvSpPr/>
+          <p:nvPr/>
+        </p:nvSpPr>
+        <p:spPr>
+          <a:xfrm>
+            <a:off x="3529584" y="3364992"/>
+            <a:ext cx="73152" cy="475488"/>
           </a:xfrm>
           <a:prstGeom prst="rect">
             <a:avLst/>
@@ -28289,14 +30074,14 @@
       </p:sp>
       <p:sp>
         <p:nvSpPr>
-          <p:cNvPr id="31" name="Shape 29"/>
-          <p:cNvSpPr/>
-          <p:nvPr/>
-        </p:nvSpPr>
-        <p:spPr>
-          <a:xfrm>
-            <a:off x="5742432" y="3364992"/>
-            <a:ext cx="1645920" cy="475488"/>
+          <p:cNvPr id="34" name="Shape 32"/>
+          <p:cNvSpPr/>
+          <p:nvPr/>
+        </p:nvSpPr>
+        <p:spPr>
+          <a:xfrm>
+            <a:off x="3602736" y="3364992"/>
+            <a:ext cx="1554480" cy="475488"/>
           </a:xfrm>
           <a:prstGeom prst="rect">
             <a:avLst>
@@ -28316,14 +30101,14 @@
       </p:sp>
       <p:sp>
         <p:nvSpPr>
-          <p:cNvPr id="32" name="Text 30"/>
-          <p:cNvSpPr/>
-          <p:nvPr/>
-        </p:nvSpPr>
-        <p:spPr>
-          <a:xfrm>
-            <a:off x="5742432" y="3364992"/>
-            <a:ext cx="1645920" cy="475488"/>
+          <p:cNvPr id="35" name="Text 33"/>
+          <p:cNvSpPr/>
+          <p:nvPr/>
+        </p:nvSpPr>
+        <p:spPr>
+          <a:xfrm>
+            <a:off x="3602736" y="3364992"/>
+            <a:ext cx="1554480" cy="475488"/>
           </a:xfrm>
           <a:prstGeom prst="rect">
             <a:avLst/>
@@ -28347,7 +30132,7 @@
                 <a:ea typeface="Trebuchet MS" pitchFamily="34" charset="-122"/>
                 <a:cs typeface="Trebuchet MS" pitchFamily="34" charset="-120"/>
               </a:rPr>
-              <a:t>dict</a:t>
+              <a:t>di</a:t>
             </a:r>
             <a:endParaRPr lang="en-US" sz="1400" dirty="0"/>
           </a:p>
@@ -28355,7 +30140,217 @@
       </p:sp>
       <p:sp>
         <p:nvSpPr>
-          <p:cNvPr id="33" name="Shape 31"/>
+          <p:cNvPr id="36" name="Text 34"/>
+          <p:cNvSpPr/>
+          <p:nvPr/>
+        </p:nvSpPr>
+        <p:spPr>
+          <a:xfrm>
+            <a:off x="5157216" y="3364992"/>
+            <a:ext cx="73152" cy="475488"/>
+          </a:xfrm>
+          <a:prstGeom prst="rect">
+            <a:avLst/>
+          </a:prstGeom>
+          <a:noFill/>
+          <a:ln/>
+        </p:spPr>
+        <p:txBody>
+          <a:bodyPr wrap="square" lIns="0" tIns="0" rIns="0" bIns="0" rtlCol="0" anchor="ctr"/>
+          <a:lstStyle/>
+          <a:p>
+            <a:pPr algn="ctr" indent="0" marL="0">
+              <a:buNone/>
+            </a:pPr>
+            <a:r>
+              <a:rPr lang="en-US" sz="1600" b="1" dirty="0">
+                <a:solidFill>
+                  <a:srgbClr val="0D9488"/>
+                </a:solidFill>
+                <a:latin typeface="Trebuchet MS" pitchFamily="34" charset="0"/>
+                <a:ea typeface="Trebuchet MS" pitchFamily="34" charset="-122"/>
+                <a:cs typeface="Trebuchet MS" pitchFamily="34" charset="-120"/>
+              </a:rPr>
+              <a:t>·</a:t>
+            </a:r>
+            <a:endParaRPr lang="en-US" sz="1600" dirty="0"/>
+          </a:p>
+        </p:txBody>
+      </p:sp>
+      <p:sp>
+        <p:nvSpPr>
+          <p:cNvPr id="37" name="Shape 35"/>
+          <p:cNvSpPr/>
+          <p:nvPr/>
+        </p:nvSpPr>
+        <p:spPr>
+          <a:xfrm>
+            <a:off x="5230368" y="3364992"/>
+            <a:ext cx="1554480" cy="475488"/>
+          </a:xfrm>
+          <a:prstGeom prst="rect">
+            <a:avLst>
+              <a:gd name="adj" fmla="val 9615"/>
+            </a:avLst>
+          </a:prstGeom>
+          <a:solidFill>
+            <a:srgbClr val="FFFFFF"/>
+          </a:solidFill>
+          <a:ln w="12700">
+            <a:solidFill>
+              <a:srgbClr val="0D9488"/>
+            </a:solidFill>
+            <a:prstDash val="solid"/>
+          </a:ln>
+        </p:spPr>
+      </p:sp>
+      <p:sp>
+        <p:nvSpPr>
+          <p:cNvPr id="38" name="Text 36"/>
+          <p:cNvSpPr/>
+          <p:nvPr/>
+        </p:nvSpPr>
+        <p:spPr>
+          <a:xfrm>
+            <a:off x="5230368" y="3364992"/>
+            <a:ext cx="1554480" cy="475488"/>
+          </a:xfrm>
+          <a:prstGeom prst="rect">
+            <a:avLst/>
+          </a:prstGeom>
+          <a:noFill/>
+          <a:ln/>
+        </p:spPr>
+        <p:txBody>
+          <a:bodyPr wrap="square" lIns="0" tIns="0" rIns="0" bIns="0" rtlCol="0" anchor="ctr"/>
+          <a:lstStyle/>
+          <a:p>
+            <a:pPr algn="ctr" indent="0" marL="0">
+              <a:buNone/>
+            </a:pPr>
+            <a:r>
+              <a:rPr lang="en-US" sz="1400" b="1" dirty="0">
+                <a:solidFill>
+                  <a:srgbClr val="0D9488"/>
+                </a:solidFill>
+                <a:latin typeface="Trebuchet MS" pitchFamily="34" charset="0"/>
+                <a:ea typeface="Trebuchet MS" pitchFamily="34" charset="-122"/>
+                <a:cs typeface="Trebuchet MS" pitchFamily="34" charset="-120"/>
+              </a:rPr>
+              <a:t>cat</a:t>
+            </a:r>
+            <a:endParaRPr lang="en-US" sz="1400" dirty="0"/>
+          </a:p>
+        </p:txBody>
+      </p:sp>
+      <p:sp>
+        <p:nvSpPr>
+          <p:cNvPr id="39" name="Text 37"/>
+          <p:cNvSpPr/>
+          <p:nvPr/>
+        </p:nvSpPr>
+        <p:spPr>
+          <a:xfrm>
+            <a:off x="6784848" y="3364992"/>
+            <a:ext cx="73152" cy="475488"/>
+          </a:xfrm>
+          <a:prstGeom prst="rect">
+            <a:avLst/>
+          </a:prstGeom>
+          <a:noFill/>
+          <a:ln/>
+        </p:spPr>
+        <p:txBody>
+          <a:bodyPr wrap="square" lIns="0" tIns="0" rIns="0" bIns="0" rtlCol="0" anchor="ctr"/>
+          <a:lstStyle/>
+          <a:p>
+            <a:pPr algn="ctr" indent="0" marL="0">
+              <a:buNone/>
+            </a:pPr>
+            <a:r>
+              <a:rPr lang="en-US" sz="1600" b="1" dirty="0">
+                <a:solidFill>
+                  <a:srgbClr val="0D9488"/>
+                </a:solidFill>
+                <a:latin typeface="Trebuchet MS" pitchFamily="34" charset="0"/>
+                <a:ea typeface="Trebuchet MS" pitchFamily="34" charset="-122"/>
+                <a:cs typeface="Trebuchet MS" pitchFamily="34" charset="-120"/>
+              </a:rPr>
+              <a:t>·</a:t>
+            </a:r>
+            <a:endParaRPr lang="en-US" sz="1600" dirty="0"/>
+          </a:p>
+        </p:txBody>
+      </p:sp>
+      <p:sp>
+        <p:nvSpPr>
+          <p:cNvPr id="40" name="Shape 38"/>
+          <p:cNvSpPr/>
+          <p:nvPr/>
+        </p:nvSpPr>
+        <p:spPr>
+          <a:xfrm>
+            <a:off x="6858000" y="3364992"/>
+            <a:ext cx="1554480" cy="475488"/>
+          </a:xfrm>
+          <a:prstGeom prst="rect">
+            <a:avLst>
+              <a:gd name="adj" fmla="val 9615"/>
+            </a:avLst>
+          </a:prstGeom>
+          <a:solidFill>
+            <a:srgbClr val="FFFFFF"/>
+          </a:solidFill>
+          <a:ln w="12700">
+            <a:solidFill>
+              <a:srgbClr val="0D9488"/>
+            </a:solidFill>
+            <a:prstDash val="solid"/>
+          </a:ln>
+        </p:spPr>
+      </p:sp>
+      <p:sp>
+        <p:nvSpPr>
+          <p:cNvPr id="41" name="Text 39"/>
+          <p:cNvSpPr/>
+          <p:nvPr/>
+        </p:nvSpPr>
+        <p:spPr>
+          <a:xfrm>
+            <a:off x="6858000" y="3364992"/>
+            <a:ext cx="1554480" cy="475488"/>
+          </a:xfrm>
+          <a:prstGeom prst="rect">
+            <a:avLst/>
+          </a:prstGeom>
+          <a:noFill/>
+          <a:ln/>
+        </p:spPr>
+        <p:txBody>
+          <a:bodyPr wrap="square" lIns="0" tIns="0" rIns="0" bIns="0" rtlCol="0" anchor="ctr"/>
+          <a:lstStyle/>
+          <a:p>
+            <a:pPr algn="ctr" indent="0" marL="0">
+              <a:buNone/>
+            </a:pPr>
+            <a:r>
+              <a:rPr lang="en-US" sz="1400" b="1" dirty="0">
+                <a:solidFill>
+                  <a:srgbClr val="0D9488"/>
+                </a:solidFill>
+                <a:latin typeface="Trebuchet MS" pitchFamily="34" charset="0"/>
+                <a:ea typeface="Trebuchet MS" pitchFamily="34" charset="-122"/>
+                <a:cs typeface="Trebuchet MS" pitchFamily="34" charset="-120"/>
+              </a:rPr>
+              <a:t>ed</a:t>
+            </a:r>
+            <a:endParaRPr lang="en-US" sz="1400" dirty="0"/>
+          </a:p>
+        </p:txBody>
+      </p:sp>
+      <p:sp>
+        <p:nvSpPr>
+          <p:cNvPr id="42" name="Shape 40"/>
           <p:cNvSpPr/>
           <p:nvPr/>
         </p:nvSpPr>
@@ -28382,7 +30377,7 @@
       </p:sp>
       <p:sp>
         <p:nvSpPr>
-          <p:cNvPr id="34" name="Text 32"/>
+          <p:cNvPr id="43" name="Text 41"/>
           <p:cNvSpPr/>
           <p:nvPr/>
         </p:nvSpPr>
@@ -28421,18 +30416,18 @@
       </p:sp>
       <p:sp>
         <p:nvSpPr>
-          <p:cNvPr id="35" name="Shape 33"/>
+          <p:cNvPr id="44" name="Shape 42"/>
           <p:cNvSpPr/>
           <p:nvPr/>
         </p:nvSpPr>
         <p:spPr>
           <a:xfrm>
             <a:off x="1874520" y="4096512"/>
-            <a:ext cx="6903720" cy="804672"/>
+            <a:ext cx="6903720" cy="658368"/>
           </a:xfrm>
           <a:prstGeom prst="rect">
             <a:avLst>
-              <a:gd name="adj" fmla="val 6818"/>
+              <a:gd name="adj" fmla="val 8333"/>
             </a:avLst>
           </a:prstGeom>
           <a:solidFill>
@@ -28448,18 +30443,18 @@
       </p:sp>
       <p:sp>
         <p:nvSpPr>
-          <p:cNvPr id="36" name="Shape 34"/>
-          <p:cNvSpPr/>
-          <p:nvPr/>
-        </p:nvSpPr>
-        <p:spPr>
-          <a:xfrm>
-            <a:off x="2254649" y="4169664"/>
-            <a:ext cx="685800" cy="384048"/>
+          <p:cNvPr id="45" name="Shape 43"/>
+          <p:cNvSpPr/>
+          <p:nvPr/>
+        </p:nvSpPr>
+        <p:spPr>
+          <a:xfrm>
+            <a:off x="1951330" y="4169664"/>
+            <a:ext cx="676656" cy="475488"/>
           </a:xfrm>
           <a:prstGeom prst="rect">
             <a:avLst>
-              <a:gd name="adj" fmla="val 9524"/>
+              <a:gd name="adj" fmla="val 7692"/>
             </a:avLst>
           </a:prstGeom>
           <a:solidFill>
@@ -28475,14 +30470,14 @@
       </p:sp>
       <p:sp>
         <p:nvSpPr>
-          <p:cNvPr id="37" name="Text 35"/>
-          <p:cNvSpPr/>
-          <p:nvPr/>
-        </p:nvSpPr>
-        <p:spPr>
-          <a:xfrm>
-            <a:off x="2254649" y="4169664"/>
-            <a:ext cx="685800" cy="384048"/>
+          <p:cNvPr id="46" name="Text 44"/>
+          <p:cNvSpPr/>
+          <p:nvPr/>
+        </p:nvSpPr>
+        <p:spPr>
+          <a:xfrm>
+            <a:off x="1951330" y="4169664"/>
+            <a:ext cx="676656" cy="475488"/>
           </a:xfrm>
           <a:prstGeom prst="rect">
             <a:avLst/>
@@ -28506,7 +30501,7 @@
                 <a:ea typeface="Trebuchet MS" pitchFamily="34" charset="-122"/>
                 <a:cs typeface="Trebuchet MS" pitchFamily="34" charset="-120"/>
               </a:rPr>
-              <a:t>v</a:t>
+              <a:t>s</a:t>
             </a:r>
             <a:endParaRPr lang="en-US" sz="900" dirty="0"/>
           </a:p>
@@ -28514,18 +30509,18 @@
       </p:sp>
       <p:sp>
         <p:nvSpPr>
-          <p:cNvPr id="38" name="Shape 36"/>
-          <p:cNvSpPr/>
-          <p:nvPr/>
-        </p:nvSpPr>
-        <p:spPr>
-          <a:xfrm>
-            <a:off x="3293146" y="4169664"/>
-            <a:ext cx="685800" cy="384048"/>
+          <p:cNvPr id="47" name="Shape 45"/>
+          <p:cNvSpPr/>
+          <p:nvPr/>
+        </p:nvSpPr>
+        <p:spPr>
+          <a:xfrm>
+            <a:off x="2677363" y="4169664"/>
+            <a:ext cx="676656" cy="475488"/>
           </a:xfrm>
           <a:prstGeom prst="rect">
             <a:avLst>
-              <a:gd name="adj" fmla="val 9524"/>
+              <a:gd name="adj" fmla="val 7692"/>
             </a:avLst>
           </a:prstGeom>
           <a:solidFill>
@@ -28541,14 +30536,14 @@
       </p:sp>
       <p:sp>
         <p:nvSpPr>
-          <p:cNvPr id="39" name="Text 37"/>
-          <p:cNvSpPr/>
-          <p:nvPr/>
-        </p:nvSpPr>
-        <p:spPr>
-          <a:xfrm>
-            <a:off x="3293146" y="4169664"/>
-            <a:ext cx="685800" cy="384048"/>
+          <p:cNvPr id="48" name="Text 46"/>
+          <p:cNvSpPr/>
+          <p:nvPr/>
+        </p:nvSpPr>
+        <p:spPr>
+          <a:xfrm>
+            <a:off x="2677363" y="4169664"/>
+            <a:ext cx="676656" cy="475488"/>
           </a:xfrm>
           <a:prstGeom prst="rect">
             <a:avLst/>
@@ -28572,7 +30567,7 @@
                 <a:ea typeface="Trebuchet MS" pitchFamily="34" charset="-122"/>
                 <a:cs typeface="Trebuchet MS" pitchFamily="34" charset="-120"/>
               </a:rPr>
-              <a:t>er</a:t>
+              <a:t>y</a:t>
             </a:r>
             <a:endParaRPr lang="en-US" sz="900" dirty="0"/>
           </a:p>
@@ -28580,18 +30575,18 @@
       </p:sp>
       <p:sp>
         <p:nvSpPr>
-          <p:cNvPr id="40" name="Shape 38"/>
-          <p:cNvSpPr/>
-          <p:nvPr/>
-        </p:nvSpPr>
-        <p:spPr>
-          <a:xfrm>
-            <a:off x="4331643" y="4169664"/>
-            <a:ext cx="685800" cy="384048"/>
+          <p:cNvPr id="49" name="Shape 47"/>
+          <p:cNvSpPr/>
+          <p:nvPr/>
+        </p:nvSpPr>
+        <p:spPr>
+          <a:xfrm>
+            <a:off x="3403397" y="4169664"/>
+            <a:ext cx="676656" cy="475488"/>
           </a:xfrm>
           <a:prstGeom prst="rect">
             <a:avLst>
-              <a:gd name="adj" fmla="val 9524"/>
+              <a:gd name="adj" fmla="val 7692"/>
             </a:avLst>
           </a:prstGeom>
           <a:solidFill>
@@ -28607,14 +30602,14 @@
       </p:sp>
       <p:sp>
         <p:nvSpPr>
-          <p:cNvPr id="41" name="Text 39"/>
-          <p:cNvSpPr/>
-          <p:nvPr/>
-        </p:nvSpPr>
-        <p:spPr>
-          <a:xfrm>
-            <a:off x="4331643" y="4169664"/>
-            <a:ext cx="685800" cy="384048"/>
+          <p:cNvPr id="50" name="Text 48"/>
+          <p:cNvSpPr/>
+          <p:nvPr/>
+        </p:nvSpPr>
+        <p:spPr>
+          <a:xfrm>
+            <a:off x="3403397" y="4169664"/>
+            <a:ext cx="676656" cy="475488"/>
           </a:xfrm>
           <a:prstGeom prst="rect">
             <a:avLst/>
@@ -28638,7 +30633,7 @@
                 <a:ea typeface="Trebuchet MS" pitchFamily="34" charset="-122"/>
                 <a:cs typeface="Trebuchet MS" pitchFamily="34" charset="-120"/>
               </a:rPr>
-              <a:t>d</a:t>
+              <a:t>n</a:t>
             </a:r>
             <a:endParaRPr lang="en-US" sz="900" dirty="0"/>
           </a:p>
@@ -28646,18 +30641,18 @@
       </p:sp>
       <p:sp>
         <p:nvSpPr>
-          <p:cNvPr id="42" name="Shape 40"/>
-          <p:cNvSpPr/>
-          <p:nvPr/>
-        </p:nvSpPr>
-        <p:spPr>
-          <a:xfrm>
-            <a:off x="5370141" y="4169664"/>
-            <a:ext cx="685800" cy="384048"/>
+          <p:cNvPr id="51" name="Shape 49"/>
+          <p:cNvSpPr/>
+          <p:nvPr/>
+        </p:nvSpPr>
+        <p:spPr>
+          <a:xfrm>
+            <a:off x="4129430" y="4169664"/>
+            <a:ext cx="676656" cy="475488"/>
           </a:xfrm>
           <a:prstGeom prst="rect">
             <a:avLst>
-              <a:gd name="adj" fmla="val 9524"/>
+              <a:gd name="adj" fmla="val 7692"/>
             </a:avLst>
           </a:prstGeom>
           <a:solidFill>
@@ -28673,14 +30668,14 @@
       </p:sp>
       <p:sp>
         <p:nvSpPr>
-          <p:cNvPr id="43" name="Text 41"/>
-          <p:cNvSpPr/>
-          <p:nvPr/>
-        </p:nvSpPr>
-        <p:spPr>
-          <a:xfrm>
-            <a:off x="5370141" y="4169664"/>
-            <a:ext cx="685800" cy="384048"/>
+          <p:cNvPr id="52" name="Text 50"/>
+          <p:cNvSpPr/>
+          <p:nvPr/>
+        </p:nvSpPr>
+        <p:spPr>
+          <a:xfrm>
+            <a:off x="4129430" y="4169664"/>
+            <a:ext cx="676656" cy="475488"/>
           </a:xfrm>
           <a:prstGeom prst="rect">
             <a:avLst/>
@@ -28704,7 +30699,7 @@
                 <a:ea typeface="Trebuchet MS" pitchFamily="34" charset="-122"/>
                 <a:cs typeface="Trebuchet MS" pitchFamily="34" charset="-120"/>
               </a:rPr>
-              <a:t>i</a:t>
+              <a:t>d</a:t>
             </a:r>
             <a:endParaRPr lang="en-US" sz="900" dirty="0"/>
           </a:p>
@@ -28712,18 +30707,18 @@
       </p:sp>
       <p:sp>
         <p:nvSpPr>
-          <p:cNvPr id="44" name="Shape 42"/>
-          <p:cNvSpPr/>
-          <p:nvPr/>
-        </p:nvSpPr>
-        <p:spPr>
-          <a:xfrm>
-            <a:off x="6408638" y="4169664"/>
-            <a:ext cx="685800" cy="384048"/>
+          <p:cNvPr id="53" name="Shape 51"/>
+          <p:cNvSpPr/>
+          <p:nvPr/>
+        </p:nvSpPr>
+        <p:spPr>
+          <a:xfrm>
+            <a:off x="4855464" y="4169664"/>
+            <a:ext cx="676656" cy="475488"/>
           </a:xfrm>
           <a:prstGeom prst="rect">
             <a:avLst>
-              <a:gd name="adj" fmla="val 9524"/>
+              <a:gd name="adj" fmla="val 7692"/>
             </a:avLst>
           </a:prstGeom>
           <a:solidFill>
@@ -28739,14 +30734,14 @@
       </p:sp>
       <p:sp>
         <p:nvSpPr>
-          <p:cNvPr id="45" name="Text 43"/>
-          <p:cNvSpPr/>
-          <p:nvPr/>
-        </p:nvSpPr>
-        <p:spPr>
-          <a:xfrm>
-            <a:off x="6408638" y="4169664"/>
-            <a:ext cx="685800" cy="384048"/>
+          <p:cNvPr id="54" name="Text 52"/>
+          <p:cNvSpPr/>
+          <p:nvPr/>
+        </p:nvSpPr>
+        <p:spPr>
+          <a:xfrm>
+            <a:off x="4855464" y="4169664"/>
+            <a:ext cx="676656" cy="475488"/>
           </a:xfrm>
           <a:prstGeom prst="rect">
             <a:avLst/>
@@ -28770,7 +30765,7 @@
                 <a:ea typeface="Trebuchet MS" pitchFamily="34" charset="-122"/>
                 <a:cs typeface="Trebuchet MS" pitchFamily="34" charset="-120"/>
               </a:rPr>
-              <a:t>c</a:t>
+              <a:t>i</a:t>
             </a:r>
             <a:endParaRPr lang="en-US" sz="900" dirty="0"/>
           </a:p>
@@ -28778,57 +30773,18 @@
       </p:sp>
       <p:sp>
         <p:nvSpPr>
-          <p:cNvPr id="46" name="Text 44"/>
-          <p:cNvSpPr/>
-          <p:nvPr/>
-        </p:nvSpPr>
-        <p:spPr>
-          <a:xfrm>
-            <a:off x="6408638" y="4572000"/>
-            <a:ext cx="685800" cy="219456"/>
-          </a:xfrm>
-          <a:prstGeom prst="rect">
-            <a:avLst/>
-          </a:prstGeom>
-          <a:noFill/>
-          <a:ln/>
-        </p:spPr>
-        <p:txBody>
-          <a:bodyPr wrap="square" lIns="0" tIns="0" rIns="0" bIns="0" rtlCol="0" anchor="t"/>
-          <a:lstStyle/>
-          <a:p>
-            <a:pPr algn="ctr" indent="0" marL="0">
-              <a:buNone/>
-            </a:pPr>
-            <a:r>
-              <a:rPr lang="en-US" sz="750" i="1" dirty="0">
-                <a:solidFill>
-                  <a:srgbClr val="94A3B8"/>
-                </a:solidFill>
-                <a:latin typeface="Calibri" pitchFamily="34" charset="0"/>
-                <a:ea typeface="Calibri" pitchFamily="34" charset="-122"/>
-                <a:cs typeface="Calibri" pitchFamily="34" charset="-120"/>
-              </a:rPr>
-              <a:t>/k/</a:t>
-            </a:r>
-            <a:endParaRPr lang="en-US" sz="750" dirty="0"/>
-          </a:p>
-        </p:txBody>
-      </p:sp>
-      <p:sp>
-        <p:nvSpPr>
-          <p:cNvPr id="47" name="Shape 45"/>
-          <p:cNvSpPr/>
-          <p:nvPr/>
-        </p:nvSpPr>
-        <p:spPr>
-          <a:xfrm>
-            <a:off x="7447135" y="4169664"/>
-            <a:ext cx="685800" cy="384048"/>
+          <p:cNvPr id="55" name="Shape 53"/>
+          <p:cNvSpPr/>
+          <p:nvPr/>
+        </p:nvSpPr>
+        <p:spPr>
+          <a:xfrm>
+            <a:off x="5581498" y="4169664"/>
+            <a:ext cx="676656" cy="475488"/>
           </a:xfrm>
           <a:prstGeom prst="rect">
             <a:avLst>
-              <a:gd name="adj" fmla="val 9524"/>
+              <a:gd name="adj" fmla="val 7692"/>
             </a:avLst>
           </a:prstGeom>
           <a:solidFill>
@@ -28844,14 +30800,14 @@
       </p:sp>
       <p:sp>
         <p:nvSpPr>
-          <p:cNvPr id="48" name="Text 46"/>
-          <p:cNvSpPr/>
-          <p:nvPr/>
-        </p:nvSpPr>
-        <p:spPr>
-          <a:xfrm>
-            <a:off x="7447135" y="4169664"/>
-            <a:ext cx="685800" cy="384048"/>
+          <p:cNvPr id="56" name="Text 54"/>
+          <p:cNvSpPr/>
+          <p:nvPr/>
+        </p:nvSpPr>
+        <p:spPr>
+          <a:xfrm>
+            <a:off x="5581498" y="4169664"/>
+            <a:ext cx="676656" cy="475488"/>
           </a:xfrm>
           <a:prstGeom prst="rect">
             <a:avLst/>
@@ -28875,7 +30831,205 @@
                 <a:ea typeface="Trebuchet MS" pitchFamily="34" charset="-122"/>
                 <a:cs typeface="Trebuchet MS" pitchFamily="34" charset="-120"/>
               </a:rPr>
+              <a:t>c</a:t>
+            </a:r>
+            <a:endParaRPr lang="en-US" sz="900" dirty="0"/>
+          </a:p>
+        </p:txBody>
+      </p:sp>
+      <p:sp>
+        <p:nvSpPr>
+          <p:cNvPr id="57" name="Shape 55"/>
+          <p:cNvSpPr/>
+          <p:nvPr/>
+        </p:nvSpPr>
+        <p:spPr>
+          <a:xfrm>
+            <a:off x="6307531" y="4169664"/>
+            <a:ext cx="676656" cy="475488"/>
+          </a:xfrm>
+          <a:prstGeom prst="rect">
+            <a:avLst>
+              <a:gd name="adj" fmla="val 7692"/>
+            </a:avLst>
+          </a:prstGeom>
+          <a:solidFill>
+            <a:srgbClr val="FFFFFF"/>
+          </a:solidFill>
+          <a:ln w="12700">
+            <a:solidFill>
+              <a:srgbClr val="DB2777"/>
+            </a:solidFill>
+            <a:prstDash val="solid"/>
+          </a:ln>
+        </p:spPr>
+      </p:sp>
+      <p:sp>
+        <p:nvSpPr>
+          <p:cNvPr id="58" name="Text 56"/>
+          <p:cNvSpPr/>
+          <p:nvPr/>
+        </p:nvSpPr>
+        <p:spPr>
+          <a:xfrm>
+            <a:off x="6307531" y="4169664"/>
+            <a:ext cx="676656" cy="475488"/>
+          </a:xfrm>
+          <a:prstGeom prst="rect">
+            <a:avLst/>
+          </a:prstGeom>
+          <a:noFill/>
+          <a:ln/>
+        </p:spPr>
+        <p:txBody>
+          <a:bodyPr wrap="square" lIns="0" tIns="0" rIns="0" bIns="0" rtlCol="0" anchor="ctr"/>
+          <a:lstStyle/>
+          <a:p>
+            <a:pPr algn="ctr" indent="0" marL="0">
+              <a:buNone/>
+            </a:pPr>
+            <a:r>
+              <a:rPr lang="en-US" sz="900" b="1" dirty="0">
+                <a:solidFill>
+                  <a:srgbClr val="9D174D"/>
+                </a:solidFill>
+                <a:latin typeface="Trebuchet MS" pitchFamily="34" charset="0"/>
+                <a:ea typeface="Trebuchet MS" pitchFamily="34" charset="-122"/>
+                <a:cs typeface="Trebuchet MS" pitchFamily="34" charset="-120"/>
+              </a:rPr>
+              <a:t>a_e</a:t>
+            </a:r>
+            <a:endParaRPr lang="en-US" sz="900" dirty="0"/>
+          </a:p>
+        </p:txBody>
+      </p:sp>
+      <p:sp>
+        <p:nvSpPr>
+          <p:cNvPr id="59" name="Shape 57"/>
+          <p:cNvSpPr/>
+          <p:nvPr/>
+        </p:nvSpPr>
+        <p:spPr>
+          <a:xfrm>
+            <a:off x="7033565" y="4169664"/>
+            <a:ext cx="676656" cy="475488"/>
+          </a:xfrm>
+          <a:prstGeom prst="rect">
+            <a:avLst>
+              <a:gd name="adj" fmla="val 7692"/>
+            </a:avLst>
+          </a:prstGeom>
+          <a:solidFill>
+            <a:srgbClr val="FFFFFF"/>
+          </a:solidFill>
+          <a:ln w="12700">
+            <a:solidFill>
+              <a:srgbClr val="DB2777"/>
+            </a:solidFill>
+            <a:prstDash val="solid"/>
+          </a:ln>
+        </p:spPr>
+      </p:sp>
+      <p:sp>
+        <p:nvSpPr>
+          <p:cNvPr id="60" name="Text 58"/>
+          <p:cNvSpPr/>
+          <p:nvPr/>
+        </p:nvSpPr>
+        <p:spPr>
+          <a:xfrm>
+            <a:off x="7033565" y="4169664"/>
+            <a:ext cx="676656" cy="475488"/>
+          </a:xfrm>
+          <a:prstGeom prst="rect">
+            <a:avLst/>
+          </a:prstGeom>
+          <a:noFill/>
+          <a:ln/>
+        </p:spPr>
+        <p:txBody>
+          <a:bodyPr wrap="square" lIns="0" tIns="0" rIns="0" bIns="0" rtlCol="0" anchor="ctr"/>
+          <a:lstStyle/>
+          <a:p>
+            <a:pPr algn="ctr" indent="0" marL="0">
+              <a:buNone/>
+            </a:pPr>
+            <a:r>
+              <a:rPr lang="en-US" sz="900" b="1" dirty="0">
+                <a:solidFill>
+                  <a:srgbClr val="9D174D"/>
+                </a:solidFill>
+                <a:latin typeface="Trebuchet MS" pitchFamily="34" charset="0"/>
+                <a:ea typeface="Trebuchet MS" pitchFamily="34" charset="-122"/>
+                <a:cs typeface="Trebuchet MS" pitchFamily="34" charset="-120"/>
+              </a:rPr>
               <a:t>t</a:t>
+            </a:r>
+            <a:endParaRPr lang="en-US" sz="900" dirty="0"/>
+          </a:p>
+        </p:txBody>
+      </p:sp>
+      <p:sp>
+        <p:nvSpPr>
+          <p:cNvPr id="61" name="Shape 59"/>
+          <p:cNvSpPr/>
+          <p:nvPr/>
+        </p:nvSpPr>
+        <p:spPr>
+          <a:xfrm>
+            <a:off x="7759598" y="4169664"/>
+            <a:ext cx="676656" cy="475488"/>
+          </a:xfrm>
+          <a:prstGeom prst="rect">
+            <a:avLst>
+              <a:gd name="adj" fmla="val 7692"/>
+            </a:avLst>
+          </a:prstGeom>
+          <a:solidFill>
+            <a:srgbClr val="FFFFFF"/>
+          </a:solidFill>
+          <a:ln w="12700">
+            <a:solidFill>
+              <a:srgbClr val="DB2777"/>
+            </a:solidFill>
+            <a:prstDash val="solid"/>
+          </a:ln>
+        </p:spPr>
+      </p:sp>
+      <p:sp>
+        <p:nvSpPr>
+          <p:cNvPr id="62" name="Text 60"/>
+          <p:cNvSpPr/>
+          <p:nvPr/>
+        </p:nvSpPr>
+        <p:spPr>
+          <a:xfrm>
+            <a:off x="7759598" y="4169664"/>
+            <a:ext cx="676656" cy="475488"/>
+          </a:xfrm>
+          <a:prstGeom prst="rect">
+            <a:avLst/>
+          </a:prstGeom>
+          <a:noFill/>
+          <a:ln/>
+        </p:spPr>
+        <p:txBody>
+          <a:bodyPr wrap="square" lIns="0" tIns="0" rIns="0" bIns="0" rtlCol="0" anchor="ctr"/>
+          <a:lstStyle/>
+          <a:p>
+            <a:pPr algn="ctr" indent="0" marL="0">
+              <a:buNone/>
+            </a:pPr>
+            <a:r>
+              <a:rPr lang="en-US" sz="900" b="1" dirty="0">
+                <a:solidFill>
+                  <a:srgbClr val="9D174D"/>
+                </a:solidFill>
+                <a:latin typeface="Trebuchet MS" pitchFamily="34" charset="0"/>
+                <a:ea typeface="Trebuchet MS" pitchFamily="34" charset="-122"/>
+                <a:cs typeface="Trebuchet MS" pitchFamily="34" charset="-120"/>
+              </a:rPr>
+              <a:t>d</a:t>
             </a:r>
             <a:endParaRPr lang="en-US" sz="900" dirty="0"/>
           </a:p>
@@ -29167,7 +31321,7 @@
                 <a:ea typeface="Calibri" pitchFamily="34" charset="-122"/>
                 <a:cs typeface="Calibri" pitchFamily="34" charset="-120"/>
               </a:rPr>
-              <a:t>Word Labs  •  wordlabs.app  •  Root: 'dic' = say, speak, proclaim</a:t>
+              <a:t>Word Labs  •  wordlabs.app  •  Root: 'dic' = say; speak</a:t>
             </a:r>
             <a:endParaRPr lang="en-US" sz="800" dirty="0"/>
           </a:p>
@@ -29306,7 +31460,7 @@
                 <a:ea typeface="Trebuchet MS" pitchFamily="34" charset="-122"/>
                 <a:cs typeface="Trebuchet MS" pitchFamily="34" charset="-120"/>
               </a:rPr>
-              <a:t>dictionary</a:t>
+              <a:t>syndication</a:t>
             </a:r>
             <a:endParaRPr lang="en-US" sz="2800" dirty="0"/>
           </a:p>
@@ -29994,7 +32148,7 @@
                 <a:ea typeface="Calibri" pitchFamily="34" charset="-122"/>
                 <a:cs typeface="Calibri" pitchFamily="34" charset="-120"/>
               </a:rPr>
-              <a:t>Word Labs  •  wordlabs.app  •  Root: 'dic' = say, speak, proclaim</a:t>
+              <a:t>Word Labs  •  wordlabs.app  •  Root: 'dic' = say; speak</a:t>
             </a:r>
             <a:endParaRPr lang="en-US" sz="800" dirty="0"/>
           </a:p>
@@ -30133,7 +32287,7 @@
                 <a:ea typeface="Trebuchet MS" pitchFamily="34" charset="-122"/>
                 <a:cs typeface="Trebuchet MS" pitchFamily="34" charset="-120"/>
               </a:rPr>
-              <a:t>dictionary</a:t>
+              <a:t>syndication</a:t>
             </a:r>
             <a:endParaRPr lang="en-US" sz="2800" dirty="0"/>
           </a:p>
@@ -30213,8 +32367,8 @@
         </p:nvSpPr>
         <p:spPr>
           <a:xfrm>
-            <a:off x="2221992" y="2258568"/>
-            <a:ext cx="1828800" cy="292608"/>
+            <a:off x="1989734" y="2258568"/>
+            <a:ext cx="1581912" cy="292608"/>
           </a:xfrm>
           <a:prstGeom prst="rect">
             <a:avLst>
@@ -30222,11 +32376,11 @@
             </a:avLst>
           </a:prstGeom>
           <a:solidFill>
-            <a:srgbClr val="CCFBF1"/>
+            <a:srgbClr val="DDD6FE"/>
           </a:solidFill>
           <a:ln w="19050">
             <a:solidFill>
-              <a:srgbClr val="0D9488"/>
+              <a:srgbClr val="7C3AED"/>
             </a:solidFill>
             <a:prstDash val="solid"/>
           </a:ln>
@@ -30247,8 +32401,8 @@
         </p:nvSpPr>
         <p:spPr>
           <a:xfrm>
-            <a:off x="2221992" y="2258568"/>
-            <a:ext cx="1828800" cy="292608"/>
+            <a:off x="1989734" y="2258568"/>
+            <a:ext cx="1581912" cy="292608"/>
           </a:xfrm>
           <a:prstGeom prst="rect">
             <a:avLst/>
@@ -30266,13 +32420,13 @@
             <a:r>
               <a:rPr lang="en-US" sz="1300" b="1" dirty="0">
                 <a:solidFill>
-                  <a:srgbClr val="0F766E"/>
+                  <a:srgbClr val="4C1D95"/>
                 </a:solidFill>
                 <a:latin typeface="Trebuchet MS" pitchFamily="34" charset="0"/>
                 <a:ea typeface="Trebuchet MS" pitchFamily="34" charset="-122"/>
                 <a:cs typeface="Trebuchet MS" pitchFamily="34" charset="-120"/>
               </a:rPr>
-              <a:t>dic</a:t>
+              <a:t>syn</a:t>
             </a:r>
             <a:endParaRPr lang="en-US" sz="1300" dirty="0"/>
           </a:p>
@@ -30286,8 +32440,8 @@
         </p:nvSpPr>
         <p:spPr>
           <a:xfrm>
-            <a:off x="2221992" y="2569464"/>
-            <a:ext cx="1828800" cy="201168"/>
+            <a:off x="1989734" y="2569464"/>
+            <a:ext cx="1581912" cy="201168"/>
           </a:xfrm>
           <a:prstGeom prst="rect">
             <a:avLst/>
@@ -30311,7 +32465,7 @@
                 <a:ea typeface="Calibri" pitchFamily="34" charset="-122"/>
                 <a:cs typeface="Calibri" pitchFamily="34" charset="-120"/>
               </a:rPr>
-              <a:t>say, speak</a:t>
+              <a:t>together; with; same</a:t>
             </a:r>
             <a:endParaRPr lang="en-US" sz="850" dirty="0"/>
           </a:p>
@@ -30325,8 +32479,8 @@
         </p:nvSpPr>
         <p:spPr>
           <a:xfrm>
-            <a:off x="4370832" y="2258568"/>
-            <a:ext cx="1828800" cy="292608"/>
+            <a:off x="3659429" y="2258568"/>
+            <a:ext cx="1581912" cy="292608"/>
           </a:xfrm>
           <a:prstGeom prst="rect">
             <a:avLst>
@@ -30334,11 +32488,11 @@
             </a:avLst>
           </a:prstGeom>
           <a:solidFill>
-            <a:srgbClr val="FCE7F3"/>
+            <a:srgbClr val="CCFBF1"/>
           </a:solidFill>
           <a:ln w="19050">
             <a:solidFill>
-              <a:srgbClr val="DB2777"/>
+              <a:srgbClr val="0D9488"/>
             </a:solidFill>
             <a:prstDash val="solid"/>
           </a:ln>
@@ -30359,8 +32513,8 @@
         </p:nvSpPr>
         <p:spPr>
           <a:xfrm>
-            <a:off x="4370832" y="2258568"/>
-            <a:ext cx="1828800" cy="292608"/>
+            <a:off x="3659429" y="2258568"/>
+            <a:ext cx="1581912" cy="292608"/>
           </a:xfrm>
           <a:prstGeom prst="rect">
             <a:avLst/>
@@ -30378,13 +32532,13 @@
             <a:r>
               <a:rPr lang="en-US" sz="1300" b="1" dirty="0">
                 <a:solidFill>
-                  <a:srgbClr val="9D174D"/>
+                  <a:srgbClr val="0F766E"/>
                 </a:solidFill>
                 <a:latin typeface="Trebuchet MS" pitchFamily="34" charset="0"/>
                 <a:ea typeface="Trebuchet MS" pitchFamily="34" charset="-122"/>
                 <a:cs typeface="Trebuchet MS" pitchFamily="34" charset="-120"/>
               </a:rPr>
-              <a:t>tion</a:t>
+              <a:t>dic</a:t>
             </a:r>
             <a:endParaRPr lang="en-US" sz="1300" dirty="0"/>
           </a:p>
@@ -30398,8 +32552,8 @@
         </p:nvSpPr>
         <p:spPr>
           <a:xfrm>
-            <a:off x="4370832" y="2569464"/>
-            <a:ext cx="1828800" cy="201168"/>
+            <a:off x="3659429" y="2569464"/>
+            <a:ext cx="1581912" cy="201168"/>
           </a:xfrm>
           <a:prstGeom prst="rect">
             <a:avLst/>
@@ -30423,7 +32577,7 @@
                 <a:ea typeface="Calibri" pitchFamily="34" charset="-122"/>
                 <a:cs typeface="Calibri" pitchFamily="34" charset="-120"/>
               </a:rPr>
-              <a:t>act or state of</a:t>
+              <a:t>say; speak</a:t>
             </a:r>
             <a:endParaRPr lang="en-US" sz="850" dirty="0"/>
           </a:p>
@@ -30437,8 +32591,8 @@
         </p:nvSpPr>
         <p:spPr>
           <a:xfrm>
-            <a:off x="6519672" y="2258568"/>
-            <a:ext cx="1828800" cy="292608"/>
+            <a:off x="5329123" y="2258568"/>
+            <a:ext cx="1581912" cy="292608"/>
           </a:xfrm>
           <a:prstGeom prst="rect">
             <a:avLst>
@@ -30471,8 +32625,8 @@
         </p:nvSpPr>
         <p:spPr>
           <a:xfrm>
-            <a:off x="6519672" y="2258568"/>
-            <a:ext cx="1828800" cy="292608"/>
+            <a:off x="5329123" y="2258568"/>
+            <a:ext cx="1581912" cy="292608"/>
           </a:xfrm>
           <a:prstGeom prst="rect">
             <a:avLst/>
@@ -30496,7 +32650,7 @@
                 <a:ea typeface="Trebuchet MS" pitchFamily="34" charset="-122"/>
                 <a:cs typeface="Trebuchet MS" pitchFamily="34" charset="-120"/>
               </a:rPr>
-              <a:t>ary</a:t>
+              <a:t>ate</a:t>
             </a:r>
             <a:endParaRPr lang="en-US" sz="1300" dirty="0"/>
           </a:p>
@@ -30510,8 +32664,8 @@
         </p:nvSpPr>
         <p:spPr>
           <a:xfrm>
-            <a:off x="6519672" y="2569464"/>
-            <a:ext cx="1828800" cy="201168"/>
+            <a:off x="5329123" y="2569464"/>
+            <a:ext cx="1581912" cy="201168"/>
           </a:xfrm>
           <a:prstGeom prst="rect">
             <a:avLst/>
@@ -30535,7 +32689,7 @@
                 <a:ea typeface="Calibri" pitchFamily="34" charset="-122"/>
                 <a:cs typeface="Calibri" pitchFamily="34" charset="-120"/>
               </a:rPr>
-              <a:t>relating to, a place for</a:t>
+              <a:t>to make; to become</a:t>
             </a:r>
             <a:endParaRPr lang="en-US" sz="850" dirty="0"/>
           </a:p>
@@ -30544,6 +32698,118 @@
       <p:sp>
         <p:nvSpPr>
           <p:cNvPr id="25" name="Shape 23"/>
+          <p:cNvSpPr/>
+          <p:nvPr/>
+        </p:nvSpPr>
+        <p:spPr>
+          <a:xfrm>
+            <a:off x="6998818" y="2258568"/>
+            <a:ext cx="1581912" cy="292608"/>
+          </a:xfrm>
+          <a:prstGeom prst="rect">
+            <a:avLst>
+              <a:gd name="adj" fmla="val 25000"/>
+            </a:avLst>
+          </a:prstGeom>
+          <a:solidFill>
+            <a:srgbClr val="FCE7F3"/>
+          </a:solidFill>
+          <a:ln w="19050">
+            <a:solidFill>
+              <a:srgbClr val="DB2777"/>
+            </a:solidFill>
+            <a:prstDash val="solid"/>
+          </a:ln>
+          <a:effectLst>
+            <a:outerShdw sx="100000" sy="100000" kx="0" ky="0" algn="bl" rotWithShape="0" blurRad="101600" dist="38100" dir="8100000">
+              <a:srgbClr val="000000">
+                <a:alpha val="12000"/>
+              </a:srgbClr>
+            </a:outerShdw>
+          </a:effectLst>
+        </p:spPr>
+      </p:sp>
+      <p:sp>
+        <p:nvSpPr>
+          <p:cNvPr id="26" name="Text 24"/>
+          <p:cNvSpPr/>
+          <p:nvPr/>
+        </p:nvSpPr>
+        <p:spPr>
+          <a:xfrm>
+            <a:off x="6998818" y="2258568"/>
+            <a:ext cx="1581912" cy="292608"/>
+          </a:xfrm>
+          <a:prstGeom prst="rect">
+            <a:avLst/>
+          </a:prstGeom>
+          <a:noFill/>
+          <a:ln/>
+        </p:spPr>
+        <p:txBody>
+          <a:bodyPr wrap="square" lIns="0" tIns="0" rIns="0" bIns="0" rtlCol="0" anchor="ctr"/>
+          <a:lstStyle/>
+          <a:p>
+            <a:pPr algn="ctr" indent="0" marL="0">
+              <a:buNone/>
+            </a:pPr>
+            <a:r>
+              <a:rPr lang="en-US" sz="1300" b="1" dirty="0">
+                <a:solidFill>
+                  <a:srgbClr val="9D174D"/>
+                </a:solidFill>
+                <a:latin typeface="Trebuchet MS" pitchFamily="34" charset="0"/>
+                <a:ea typeface="Trebuchet MS" pitchFamily="34" charset="-122"/>
+                <a:cs typeface="Trebuchet MS" pitchFamily="34" charset="-120"/>
+              </a:rPr>
+              <a:t>ion</a:t>
+            </a:r>
+            <a:endParaRPr lang="en-US" sz="1300" dirty="0"/>
+          </a:p>
+        </p:txBody>
+      </p:sp>
+      <p:sp>
+        <p:nvSpPr>
+          <p:cNvPr id="27" name="Text 25"/>
+          <p:cNvSpPr/>
+          <p:nvPr/>
+        </p:nvSpPr>
+        <p:spPr>
+          <a:xfrm>
+            <a:off x="6998818" y="2569464"/>
+            <a:ext cx="1581912" cy="201168"/>
+          </a:xfrm>
+          <a:prstGeom prst="rect">
+            <a:avLst/>
+          </a:prstGeom>
+          <a:noFill/>
+          <a:ln/>
+        </p:spPr>
+        <p:txBody>
+          <a:bodyPr wrap="square" lIns="0" tIns="0" rIns="0" bIns="0" rtlCol="0" anchor="t"/>
+          <a:lstStyle/>
+          <a:p>
+            <a:pPr algn="ctr" indent="0" marL="0">
+              <a:buNone/>
+            </a:pPr>
+            <a:r>
+              <a:rPr lang="en-US" sz="850" dirty="0">
+                <a:solidFill>
+                  <a:srgbClr val="475569"/>
+                </a:solidFill>
+                <a:latin typeface="Calibri" pitchFamily="34" charset="0"/>
+                <a:ea typeface="Calibri" pitchFamily="34" charset="-122"/>
+                <a:cs typeface="Calibri" pitchFamily="34" charset="-120"/>
+              </a:rPr>
+              <a:t>act or result of</a:t>
+            </a:r>
+            <a:endParaRPr lang="en-US" sz="850" dirty="0"/>
+          </a:p>
+        </p:txBody>
+      </p:sp>
+      <p:sp>
+        <p:nvSpPr>
+          <p:cNvPr id="28" name="Shape 26"/>
           <p:cNvSpPr/>
           <p:nvPr/>
         </p:nvSpPr>
@@ -30570,7 +32836,7 @@
       </p:sp>
       <p:sp>
         <p:nvSpPr>
-          <p:cNvPr id="26" name="Text 24"/>
+          <p:cNvPr id="29" name="Text 27"/>
           <p:cNvSpPr/>
           <p:nvPr/>
         </p:nvSpPr>
@@ -30609,7 +32875,7 @@
       </p:sp>
       <p:sp>
         <p:nvSpPr>
-          <p:cNvPr id="27" name="Shape 25"/>
+          <p:cNvPr id="30" name="Shape 28"/>
           <p:cNvSpPr/>
           <p:nvPr/>
         </p:nvSpPr>
@@ -30636,7 +32902,7 @@
       </p:sp>
       <p:sp>
         <p:nvSpPr>
-          <p:cNvPr id="28" name="Text 26"/>
+          <p:cNvPr id="31" name="Text 29"/>
           <p:cNvSpPr/>
           <p:nvPr/>
         </p:nvSpPr>
@@ -30675,7 +32941,7 @@
       </p:sp>
       <p:sp>
         <p:nvSpPr>
-          <p:cNvPr id="29" name="Shape 27"/>
+          <p:cNvPr id="32" name="Shape 30"/>
           <p:cNvSpPr/>
           <p:nvPr/>
         </p:nvSpPr>
@@ -30702,7 +32968,7 @@
       </p:sp>
       <p:sp>
         <p:nvSpPr>
-          <p:cNvPr id="30" name="Text 28"/>
+          <p:cNvPr id="33" name="Text 31"/>
           <p:cNvSpPr/>
           <p:nvPr/>
         </p:nvSpPr>
@@ -30741,7 +33007,7 @@
       </p:sp>
       <p:sp>
         <p:nvSpPr>
-          <p:cNvPr id="31" name="Shape 29"/>
+          <p:cNvPr id="34" name="Shape 32"/>
           <p:cNvSpPr/>
           <p:nvPr/>
         </p:nvSpPr>
@@ -30768,7 +33034,7 @@
       </p:sp>
       <p:sp>
         <p:nvSpPr>
-          <p:cNvPr id="32" name="Text 30"/>
+          <p:cNvPr id="35" name="Text 33"/>
           <p:cNvSpPr/>
           <p:nvPr/>
         </p:nvSpPr>
@@ -31091,7 +33357,7 @@
                 <a:ea typeface="Calibri" pitchFamily="34" charset="-122"/>
                 <a:cs typeface="Calibri" pitchFamily="34" charset="-120"/>
               </a:rPr>
-              <a:t>Word Labs  •  wordlabs.app  •  Root: 'dic' = say, speak, proclaim</a:t>
+              <a:t>Word Labs  •  wordlabs.app  •  Root: 'dic' = say; speak</a:t>
             </a:r>
             <a:endParaRPr lang="en-US" sz="800" dirty="0"/>
           </a:p>
@@ -31230,7 +33496,7 @@
                 <a:ea typeface="Trebuchet MS" pitchFamily="34" charset="-122"/>
                 <a:cs typeface="Trebuchet MS" pitchFamily="34" charset="-120"/>
               </a:rPr>
-              <a:t>dictionary</a:t>
+              <a:t>syndication</a:t>
             </a:r>
             <a:endParaRPr lang="en-US" sz="2800" dirty="0"/>
           </a:p>
@@ -31310,8 +33576,8 @@
         </p:nvSpPr>
         <p:spPr>
           <a:xfrm>
-            <a:off x="2221992" y="2258568"/>
-            <a:ext cx="1828800" cy="292608"/>
+            <a:off x="1989734" y="2258568"/>
+            <a:ext cx="1581912" cy="292608"/>
           </a:xfrm>
           <a:prstGeom prst="rect">
             <a:avLst>
@@ -31319,11 +33585,11 @@
             </a:avLst>
           </a:prstGeom>
           <a:solidFill>
-            <a:srgbClr val="CCFBF1"/>
+            <a:srgbClr val="DDD6FE"/>
           </a:solidFill>
           <a:ln w="19050">
             <a:solidFill>
-              <a:srgbClr val="0D9488"/>
+              <a:srgbClr val="7C3AED"/>
             </a:solidFill>
             <a:prstDash val="solid"/>
           </a:ln>
@@ -31344,8 +33610,8 @@
         </p:nvSpPr>
         <p:spPr>
           <a:xfrm>
-            <a:off x="2221992" y="2258568"/>
-            <a:ext cx="1828800" cy="292608"/>
+            <a:off x="1989734" y="2258568"/>
+            <a:ext cx="1581912" cy="292608"/>
           </a:xfrm>
           <a:prstGeom prst="rect">
             <a:avLst/>
@@ -31363,13 +33629,13 @@
             <a:r>
               <a:rPr lang="en-US" sz="1300" b="1" dirty="0">
                 <a:solidFill>
-                  <a:srgbClr val="0F766E"/>
+                  <a:srgbClr val="4C1D95"/>
                 </a:solidFill>
                 <a:latin typeface="Trebuchet MS" pitchFamily="34" charset="0"/>
                 <a:ea typeface="Trebuchet MS" pitchFamily="34" charset="-122"/>
                 <a:cs typeface="Trebuchet MS" pitchFamily="34" charset="-120"/>
               </a:rPr>
-              <a:t>dic</a:t>
+              <a:t>syn</a:t>
             </a:r>
             <a:endParaRPr lang="en-US" sz="1300" dirty="0"/>
           </a:p>
@@ -31383,8 +33649,8 @@
         </p:nvSpPr>
         <p:spPr>
           <a:xfrm>
-            <a:off x="2221992" y="2569464"/>
-            <a:ext cx="1828800" cy="201168"/>
+            <a:off x="1989734" y="2569464"/>
+            <a:ext cx="1581912" cy="201168"/>
           </a:xfrm>
           <a:prstGeom prst="rect">
             <a:avLst/>
@@ -31408,7 +33674,7 @@
                 <a:ea typeface="Calibri" pitchFamily="34" charset="-122"/>
                 <a:cs typeface="Calibri" pitchFamily="34" charset="-120"/>
               </a:rPr>
-              <a:t>say, speak</a:t>
+              <a:t>together; with; same</a:t>
             </a:r>
             <a:endParaRPr lang="en-US" sz="850" dirty="0"/>
           </a:p>
@@ -31422,8 +33688,8 @@
         </p:nvSpPr>
         <p:spPr>
           <a:xfrm>
-            <a:off x="4370832" y="2258568"/>
-            <a:ext cx="1828800" cy="292608"/>
+            <a:off x="3659429" y="2258568"/>
+            <a:ext cx="1581912" cy="292608"/>
           </a:xfrm>
           <a:prstGeom prst="rect">
             <a:avLst>
@@ -31431,11 +33697,11 @@
             </a:avLst>
           </a:prstGeom>
           <a:solidFill>
-            <a:srgbClr val="FCE7F3"/>
+            <a:srgbClr val="CCFBF1"/>
           </a:solidFill>
           <a:ln w="19050">
             <a:solidFill>
-              <a:srgbClr val="DB2777"/>
+              <a:srgbClr val="0D9488"/>
             </a:solidFill>
             <a:prstDash val="solid"/>
           </a:ln>
@@ -31456,8 +33722,8 @@
         </p:nvSpPr>
         <p:spPr>
           <a:xfrm>
-            <a:off x="4370832" y="2258568"/>
-            <a:ext cx="1828800" cy="292608"/>
+            <a:off x="3659429" y="2258568"/>
+            <a:ext cx="1581912" cy="292608"/>
           </a:xfrm>
           <a:prstGeom prst="rect">
             <a:avLst/>
@@ -31475,13 +33741,13 @@
             <a:r>
               <a:rPr lang="en-US" sz="1300" b="1" dirty="0">
                 <a:solidFill>
-                  <a:srgbClr val="9D174D"/>
+                  <a:srgbClr val="0F766E"/>
                 </a:solidFill>
                 <a:latin typeface="Trebuchet MS" pitchFamily="34" charset="0"/>
                 <a:ea typeface="Trebuchet MS" pitchFamily="34" charset="-122"/>
                 <a:cs typeface="Trebuchet MS" pitchFamily="34" charset="-120"/>
               </a:rPr>
-              <a:t>tion</a:t>
+              <a:t>dic</a:t>
             </a:r>
             <a:endParaRPr lang="en-US" sz="1300" dirty="0"/>
           </a:p>
@@ -31495,8 +33761,8 @@
         </p:nvSpPr>
         <p:spPr>
           <a:xfrm>
-            <a:off x="4370832" y="2569464"/>
-            <a:ext cx="1828800" cy="201168"/>
+            <a:off x="3659429" y="2569464"/>
+            <a:ext cx="1581912" cy="201168"/>
           </a:xfrm>
           <a:prstGeom prst="rect">
             <a:avLst/>
@@ -31520,7 +33786,7 @@
                 <a:ea typeface="Calibri" pitchFamily="34" charset="-122"/>
                 <a:cs typeface="Calibri" pitchFamily="34" charset="-120"/>
               </a:rPr>
-              <a:t>act or state of</a:t>
+              <a:t>say; speak</a:t>
             </a:r>
             <a:endParaRPr lang="en-US" sz="850" dirty="0"/>
           </a:p>
@@ -31534,8 +33800,8 @@
         </p:nvSpPr>
         <p:spPr>
           <a:xfrm>
-            <a:off x="6519672" y="2258568"/>
-            <a:ext cx="1828800" cy="292608"/>
+            <a:off x="5329123" y="2258568"/>
+            <a:ext cx="1581912" cy="292608"/>
           </a:xfrm>
           <a:prstGeom prst="rect">
             <a:avLst>
@@ -31568,8 +33834,8 @@
         </p:nvSpPr>
         <p:spPr>
           <a:xfrm>
-            <a:off x="6519672" y="2258568"/>
-            <a:ext cx="1828800" cy="292608"/>
+            <a:off x="5329123" y="2258568"/>
+            <a:ext cx="1581912" cy="292608"/>
           </a:xfrm>
           <a:prstGeom prst="rect">
             <a:avLst/>
@@ -31593,7 +33859,7 @@
                 <a:ea typeface="Trebuchet MS" pitchFamily="34" charset="-122"/>
                 <a:cs typeface="Trebuchet MS" pitchFamily="34" charset="-120"/>
               </a:rPr>
-              <a:t>ary</a:t>
+              <a:t>ate</a:t>
             </a:r>
             <a:endParaRPr lang="en-US" sz="1300" dirty="0"/>
           </a:p>
@@ -31607,8 +33873,8 @@
         </p:nvSpPr>
         <p:spPr>
           <a:xfrm>
-            <a:off x="6519672" y="2569464"/>
-            <a:ext cx="1828800" cy="201168"/>
+            <a:off x="5329123" y="2569464"/>
+            <a:ext cx="1581912" cy="201168"/>
           </a:xfrm>
           <a:prstGeom prst="rect">
             <a:avLst/>
@@ -31632,7 +33898,7 @@
                 <a:ea typeface="Calibri" pitchFamily="34" charset="-122"/>
                 <a:cs typeface="Calibri" pitchFamily="34" charset="-120"/>
               </a:rPr>
-              <a:t>relating to, a place for</a:t>
+              <a:t>to make; to become</a:t>
             </a:r>
             <a:endParaRPr lang="en-US" sz="850" dirty="0"/>
           </a:p>
@@ -31641,6 +33907,118 @@
       <p:sp>
         <p:nvSpPr>
           <p:cNvPr id="25" name="Shape 23"/>
+          <p:cNvSpPr/>
+          <p:nvPr/>
+        </p:nvSpPr>
+        <p:spPr>
+          <a:xfrm>
+            <a:off x="6998818" y="2258568"/>
+            <a:ext cx="1581912" cy="292608"/>
+          </a:xfrm>
+          <a:prstGeom prst="rect">
+            <a:avLst>
+              <a:gd name="adj" fmla="val 25000"/>
+            </a:avLst>
+          </a:prstGeom>
+          <a:solidFill>
+            <a:srgbClr val="FCE7F3"/>
+          </a:solidFill>
+          <a:ln w="19050">
+            <a:solidFill>
+              <a:srgbClr val="DB2777"/>
+            </a:solidFill>
+            <a:prstDash val="solid"/>
+          </a:ln>
+          <a:effectLst>
+            <a:outerShdw sx="100000" sy="100000" kx="0" ky="0" algn="bl" rotWithShape="0" blurRad="101600" dist="38100" dir="8100000">
+              <a:srgbClr val="000000">
+                <a:alpha val="12000"/>
+              </a:srgbClr>
+            </a:outerShdw>
+          </a:effectLst>
+        </p:spPr>
+      </p:sp>
+      <p:sp>
+        <p:nvSpPr>
+          <p:cNvPr id="26" name="Text 24"/>
+          <p:cNvSpPr/>
+          <p:nvPr/>
+        </p:nvSpPr>
+        <p:spPr>
+          <a:xfrm>
+            <a:off x="6998818" y="2258568"/>
+            <a:ext cx="1581912" cy="292608"/>
+          </a:xfrm>
+          <a:prstGeom prst="rect">
+            <a:avLst/>
+          </a:prstGeom>
+          <a:noFill/>
+          <a:ln/>
+        </p:spPr>
+        <p:txBody>
+          <a:bodyPr wrap="square" lIns="0" tIns="0" rIns="0" bIns="0" rtlCol="0" anchor="ctr"/>
+          <a:lstStyle/>
+          <a:p>
+            <a:pPr algn="ctr" indent="0" marL="0">
+              <a:buNone/>
+            </a:pPr>
+            <a:r>
+              <a:rPr lang="en-US" sz="1300" b="1" dirty="0">
+                <a:solidFill>
+                  <a:srgbClr val="9D174D"/>
+                </a:solidFill>
+                <a:latin typeface="Trebuchet MS" pitchFamily="34" charset="0"/>
+                <a:ea typeface="Trebuchet MS" pitchFamily="34" charset="-122"/>
+                <a:cs typeface="Trebuchet MS" pitchFamily="34" charset="-120"/>
+              </a:rPr>
+              <a:t>ion</a:t>
+            </a:r>
+            <a:endParaRPr lang="en-US" sz="1300" dirty="0"/>
+          </a:p>
+        </p:txBody>
+      </p:sp>
+      <p:sp>
+        <p:nvSpPr>
+          <p:cNvPr id="27" name="Text 25"/>
+          <p:cNvSpPr/>
+          <p:nvPr/>
+        </p:nvSpPr>
+        <p:spPr>
+          <a:xfrm>
+            <a:off x="6998818" y="2569464"/>
+            <a:ext cx="1581912" cy="201168"/>
+          </a:xfrm>
+          <a:prstGeom prst="rect">
+            <a:avLst/>
+          </a:prstGeom>
+          <a:noFill/>
+          <a:ln/>
+        </p:spPr>
+        <p:txBody>
+          <a:bodyPr wrap="square" lIns="0" tIns="0" rIns="0" bIns="0" rtlCol="0" anchor="t"/>
+          <a:lstStyle/>
+          <a:p>
+            <a:pPr algn="ctr" indent="0" marL="0">
+              <a:buNone/>
+            </a:pPr>
+            <a:r>
+              <a:rPr lang="en-US" sz="850" dirty="0">
+                <a:solidFill>
+                  <a:srgbClr val="475569"/>
+                </a:solidFill>
+                <a:latin typeface="Calibri" pitchFamily="34" charset="0"/>
+                <a:ea typeface="Calibri" pitchFamily="34" charset="-122"/>
+                <a:cs typeface="Calibri" pitchFamily="34" charset="-120"/>
+              </a:rPr>
+              <a:t>act or result of</a:t>
+            </a:r>
+            <a:endParaRPr lang="en-US" sz="850" dirty="0"/>
+          </a:p>
+        </p:txBody>
+      </p:sp>
+      <p:sp>
+        <p:nvSpPr>
+          <p:cNvPr id="28" name="Shape 26"/>
           <p:cNvSpPr/>
           <p:nvPr/>
         </p:nvSpPr>
@@ -31667,7 +34045,7 @@
       </p:sp>
       <p:sp>
         <p:nvSpPr>
-          <p:cNvPr id="26" name="Text 24"/>
+          <p:cNvPr id="29" name="Text 27"/>
           <p:cNvSpPr/>
           <p:nvPr/>
         </p:nvSpPr>
@@ -31706,7 +34084,7 @@
       </p:sp>
       <p:sp>
         <p:nvSpPr>
-          <p:cNvPr id="27" name="Shape 25"/>
+          <p:cNvPr id="30" name="Shape 28"/>
           <p:cNvSpPr/>
           <p:nvPr/>
         </p:nvSpPr>
@@ -31733,7 +34111,7 @@
       </p:sp>
       <p:sp>
         <p:nvSpPr>
-          <p:cNvPr id="28" name="Shape 26"/>
+          <p:cNvPr id="31" name="Shape 29"/>
           <p:cNvSpPr/>
           <p:nvPr/>
         </p:nvSpPr>
@@ -31760,7 +34138,7 @@
       </p:sp>
       <p:sp>
         <p:nvSpPr>
-          <p:cNvPr id="29" name="Text 27"/>
+          <p:cNvPr id="32" name="Text 30"/>
           <p:cNvSpPr/>
           <p:nvPr/>
         </p:nvSpPr>
@@ -31791,7 +34169,7 @@
                 <a:ea typeface="Trebuchet MS" pitchFamily="34" charset="-122"/>
                 <a:cs typeface="Trebuchet MS" pitchFamily="34" charset="-120"/>
               </a:rPr>
-              <a:t>dic</a:t>
+              <a:t>syn</a:t>
             </a:r>
             <a:endParaRPr lang="en-US" sz="1400" dirty="0"/>
           </a:p>
@@ -31799,7 +34177,7 @@
       </p:sp>
       <p:sp>
         <p:nvSpPr>
-          <p:cNvPr id="30" name="Text 28"/>
+          <p:cNvPr id="33" name="Text 31"/>
           <p:cNvSpPr/>
           <p:nvPr/>
         </p:nvSpPr>
@@ -31838,7 +34216,7 @@
       </p:sp>
       <p:sp>
         <p:nvSpPr>
-          <p:cNvPr id="31" name="Shape 29"/>
+          <p:cNvPr id="34" name="Shape 32"/>
           <p:cNvSpPr/>
           <p:nvPr/>
         </p:nvSpPr>
@@ -31865,7 +34243,7 @@
       </p:sp>
       <p:sp>
         <p:nvSpPr>
-          <p:cNvPr id="32" name="Text 30"/>
+          <p:cNvPr id="35" name="Text 33"/>
           <p:cNvSpPr/>
           <p:nvPr/>
         </p:nvSpPr>
@@ -31896,7 +34274,7 @@
                 <a:ea typeface="Trebuchet MS" pitchFamily="34" charset="-122"/>
                 <a:cs typeface="Trebuchet MS" pitchFamily="34" charset="-120"/>
               </a:rPr>
-              <a:t>tion</a:t>
+              <a:t>di</a:t>
             </a:r>
             <a:endParaRPr lang="en-US" sz="1400" dirty="0"/>
           </a:p>
@@ -31904,7 +34282,7 @@
       </p:sp>
       <p:sp>
         <p:nvSpPr>
-          <p:cNvPr id="33" name="Text 31"/>
+          <p:cNvPr id="36" name="Text 34"/>
           <p:cNvSpPr/>
           <p:nvPr/>
         </p:nvSpPr>
@@ -31943,7 +34321,7 @@
       </p:sp>
       <p:sp>
         <p:nvSpPr>
-          <p:cNvPr id="34" name="Shape 32"/>
+          <p:cNvPr id="37" name="Shape 35"/>
           <p:cNvSpPr/>
           <p:nvPr/>
         </p:nvSpPr>
@@ -31970,7 +34348,7 @@
       </p:sp>
       <p:sp>
         <p:nvSpPr>
-          <p:cNvPr id="35" name="Text 33"/>
+          <p:cNvPr id="38" name="Text 36"/>
           <p:cNvSpPr/>
           <p:nvPr/>
         </p:nvSpPr>
@@ -32001,7 +34379,7 @@
                 <a:ea typeface="Trebuchet MS" pitchFamily="34" charset="-122"/>
                 <a:cs typeface="Trebuchet MS" pitchFamily="34" charset="-120"/>
               </a:rPr>
-              <a:t>ar</a:t>
+              <a:t>ca</a:t>
             </a:r>
             <a:endParaRPr lang="en-US" sz="1400" dirty="0"/>
           </a:p>
@@ -32009,7 +34387,7 @@
       </p:sp>
       <p:sp>
         <p:nvSpPr>
-          <p:cNvPr id="36" name="Text 34"/>
+          <p:cNvPr id="39" name="Text 37"/>
           <p:cNvSpPr/>
           <p:nvPr/>
         </p:nvSpPr>
@@ -32048,7 +34426,7 @@
       </p:sp>
       <p:sp>
         <p:nvSpPr>
-          <p:cNvPr id="37" name="Shape 35"/>
+          <p:cNvPr id="40" name="Shape 38"/>
           <p:cNvSpPr/>
           <p:nvPr/>
         </p:nvSpPr>
@@ -32075,7 +34453,7 @@
       </p:sp>
       <p:sp>
         <p:nvSpPr>
-          <p:cNvPr id="38" name="Text 36"/>
+          <p:cNvPr id="41" name="Text 39"/>
           <p:cNvSpPr/>
           <p:nvPr/>
         </p:nvSpPr>
@@ -32106,7 +34484,7 @@
                 <a:ea typeface="Trebuchet MS" pitchFamily="34" charset="-122"/>
                 <a:cs typeface="Trebuchet MS" pitchFamily="34" charset="-120"/>
               </a:rPr>
-              <a:t>y</a:t>
+              <a:t>tion</a:t>
             </a:r>
             <a:endParaRPr lang="en-US" sz="1400" dirty="0"/>
           </a:p>
@@ -32114,7 +34492,7 @@
       </p:sp>
       <p:sp>
         <p:nvSpPr>
-          <p:cNvPr id="39" name="Shape 37"/>
+          <p:cNvPr id="42" name="Shape 40"/>
           <p:cNvSpPr/>
           <p:nvPr/>
         </p:nvSpPr>
@@ -32141,7 +34519,7 @@
       </p:sp>
       <p:sp>
         <p:nvSpPr>
-          <p:cNvPr id="40" name="Text 38"/>
+          <p:cNvPr id="43" name="Text 41"/>
           <p:cNvSpPr/>
           <p:nvPr/>
         </p:nvSpPr>
@@ -32180,7 +34558,7 @@
       </p:sp>
       <p:sp>
         <p:nvSpPr>
-          <p:cNvPr id="41" name="Shape 39"/>
+          <p:cNvPr id="44" name="Shape 42"/>
           <p:cNvSpPr/>
           <p:nvPr/>
         </p:nvSpPr>
@@ -32207,7 +34585,7 @@
       </p:sp>
       <p:sp>
         <p:nvSpPr>
-          <p:cNvPr id="42" name="Text 40"/>
+          <p:cNvPr id="45" name="Text 43"/>
           <p:cNvSpPr/>
           <p:nvPr/>
         </p:nvSpPr>
@@ -32530,7 +34908,7 @@
                 <a:ea typeface="Calibri" pitchFamily="34" charset="-122"/>
                 <a:cs typeface="Calibri" pitchFamily="34" charset="-120"/>
               </a:rPr>
-              <a:t>Word Labs  •  wordlabs.app  •  Root: 'dic' = say, speak, proclaim</a:t>
+              <a:t>Word Labs  •  wordlabs.app  •  Root: 'dic' = say; speak</a:t>
             </a:r>
             <a:endParaRPr lang="en-US" sz="800" dirty="0"/>
           </a:p>
@@ -32669,7 +35047,7 @@
                 <a:ea typeface="Trebuchet MS" pitchFamily="34" charset="-122"/>
                 <a:cs typeface="Trebuchet MS" pitchFamily="34" charset="-120"/>
               </a:rPr>
-              <a:t>dictionary</a:t>
+              <a:t>syndication</a:t>
             </a:r>
             <a:endParaRPr lang="en-US" sz="2800" dirty="0"/>
           </a:p>
@@ -32749,8 +35127,8 @@
         </p:nvSpPr>
         <p:spPr>
           <a:xfrm>
-            <a:off x="2221992" y="2258568"/>
-            <a:ext cx="1828800" cy="292608"/>
+            <a:off x="1989734" y="2258568"/>
+            <a:ext cx="1581912" cy="292608"/>
           </a:xfrm>
           <a:prstGeom prst="rect">
             <a:avLst>
@@ -32758,11 +35136,11 @@
             </a:avLst>
           </a:prstGeom>
           <a:solidFill>
-            <a:srgbClr val="CCFBF1"/>
+            <a:srgbClr val="DDD6FE"/>
           </a:solidFill>
           <a:ln w="19050">
             <a:solidFill>
-              <a:srgbClr val="0D9488"/>
+              <a:srgbClr val="7C3AED"/>
             </a:solidFill>
             <a:prstDash val="solid"/>
           </a:ln>
@@ -32783,8 +35161,8 @@
         </p:nvSpPr>
         <p:spPr>
           <a:xfrm>
-            <a:off x="2221992" y="2258568"/>
-            <a:ext cx="1828800" cy="292608"/>
+            <a:off x="1989734" y="2258568"/>
+            <a:ext cx="1581912" cy="292608"/>
           </a:xfrm>
           <a:prstGeom prst="rect">
             <a:avLst/>
@@ -32802,13 +35180,13 @@
             <a:r>
               <a:rPr lang="en-US" sz="1300" b="1" dirty="0">
                 <a:solidFill>
-                  <a:srgbClr val="0F766E"/>
+                  <a:srgbClr val="4C1D95"/>
                 </a:solidFill>
                 <a:latin typeface="Trebuchet MS" pitchFamily="34" charset="0"/>
                 <a:ea typeface="Trebuchet MS" pitchFamily="34" charset="-122"/>
                 <a:cs typeface="Trebuchet MS" pitchFamily="34" charset="-120"/>
               </a:rPr>
-              <a:t>dic</a:t>
+              <a:t>syn</a:t>
             </a:r>
             <a:endParaRPr lang="en-US" sz="1300" dirty="0"/>
           </a:p>
@@ -32822,8 +35200,8 @@
         </p:nvSpPr>
         <p:spPr>
           <a:xfrm>
-            <a:off x="2221992" y="2569464"/>
-            <a:ext cx="1828800" cy="201168"/>
+            <a:off x="1989734" y="2569464"/>
+            <a:ext cx="1581912" cy="201168"/>
           </a:xfrm>
           <a:prstGeom prst="rect">
             <a:avLst/>
@@ -32847,7 +35225,7 @@
                 <a:ea typeface="Calibri" pitchFamily="34" charset="-122"/>
                 <a:cs typeface="Calibri" pitchFamily="34" charset="-120"/>
               </a:rPr>
-              <a:t>say, speak</a:t>
+              <a:t>together; with; same</a:t>
             </a:r>
             <a:endParaRPr lang="en-US" sz="850" dirty="0"/>
           </a:p>
@@ -32861,8 +35239,8 @@
         </p:nvSpPr>
         <p:spPr>
           <a:xfrm>
-            <a:off x="4370832" y="2258568"/>
-            <a:ext cx="1828800" cy="292608"/>
+            <a:off x="3659429" y="2258568"/>
+            <a:ext cx="1581912" cy="292608"/>
           </a:xfrm>
           <a:prstGeom prst="rect">
             <a:avLst>
@@ -32870,11 +35248,11 @@
             </a:avLst>
           </a:prstGeom>
           <a:solidFill>
-            <a:srgbClr val="FCE7F3"/>
+            <a:srgbClr val="CCFBF1"/>
           </a:solidFill>
           <a:ln w="19050">
             <a:solidFill>
-              <a:srgbClr val="DB2777"/>
+              <a:srgbClr val="0D9488"/>
             </a:solidFill>
             <a:prstDash val="solid"/>
           </a:ln>
@@ -32895,8 +35273,8 @@
         </p:nvSpPr>
         <p:spPr>
           <a:xfrm>
-            <a:off x="4370832" y="2258568"/>
-            <a:ext cx="1828800" cy="292608"/>
+            <a:off x="3659429" y="2258568"/>
+            <a:ext cx="1581912" cy="292608"/>
           </a:xfrm>
           <a:prstGeom prst="rect">
             <a:avLst/>
@@ -32914,13 +35292,13 @@
             <a:r>
               <a:rPr lang="en-US" sz="1300" b="1" dirty="0">
                 <a:solidFill>
-                  <a:srgbClr val="9D174D"/>
+                  <a:srgbClr val="0F766E"/>
                 </a:solidFill>
                 <a:latin typeface="Trebuchet MS" pitchFamily="34" charset="0"/>
                 <a:ea typeface="Trebuchet MS" pitchFamily="34" charset="-122"/>
                 <a:cs typeface="Trebuchet MS" pitchFamily="34" charset="-120"/>
               </a:rPr>
-              <a:t>tion</a:t>
+              <a:t>dic</a:t>
             </a:r>
             <a:endParaRPr lang="en-US" sz="1300" dirty="0"/>
           </a:p>
@@ -32934,8 +35312,8 @@
         </p:nvSpPr>
         <p:spPr>
           <a:xfrm>
-            <a:off x="4370832" y="2569464"/>
-            <a:ext cx="1828800" cy="201168"/>
+            <a:off x="3659429" y="2569464"/>
+            <a:ext cx="1581912" cy="201168"/>
           </a:xfrm>
           <a:prstGeom prst="rect">
             <a:avLst/>
@@ -32959,7 +35337,7 @@
                 <a:ea typeface="Calibri" pitchFamily="34" charset="-122"/>
                 <a:cs typeface="Calibri" pitchFamily="34" charset="-120"/>
               </a:rPr>
-              <a:t>act or state of</a:t>
+              <a:t>say; speak</a:t>
             </a:r>
             <a:endParaRPr lang="en-US" sz="850" dirty="0"/>
           </a:p>
@@ -32973,8 +35351,8 @@
         </p:nvSpPr>
         <p:spPr>
           <a:xfrm>
-            <a:off x="6519672" y="2258568"/>
-            <a:ext cx="1828800" cy="292608"/>
+            <a:off x="5329123" y="2258568"/>
+            <a:ext cx="1581912" cy="292608"/>
           </a:xfrm>
           <a:prstGeom prst="rect">
             <a:avLst>
@@ -33007,8 +35385,8 @@
         </p:nvSpPr>
         <p:spPr>
           <a:xfrm>
-            <a:off x="6519672" y="2258568"/>
-            <a:ext cx="1828800" cy="292608"/>
+            <a:off x="5329123" y="2258568"/>
+            <a:ext cx="1581912" cy="292608"/>
           </a:xfrm>
           <a:prstGeom prst="rect">
             <a:avLst/>
@@ -33032,7 +35410,7 @@
                 <a:ea typeface="Trebuchet MS" pitchFamily="34" charset="-122"/>
                 <a:cs typeface="Trebuchet MS" pitchFamily="34" charset="-120"/>
               </a:rPr>
-              <a:t>ary</a:t>
+              <a:t>ate</a:t>
             </a:r>
             <a:endParaRPr lang="en-US" sz="1300" dirty="0"/>
           </a:p>
@@ -33046,8 +35424,8 @@
         </p:nvSpPr>
         <p:spPr>
           <a:xfrm>
-            <a:off x="6519672" y="2569464"/>
-            <a:ext cx="1828800" cy="201168"/>
+            <a:off x="5329123" y="2569464"/>
+            <a:ext cx="1581912" cy="201168"/>
           </a:xfrm>
           <a:prstGeom prst="rect">
             <a:avLst/>
@@ -33071,7 +35449,7 @@
                 <a:ea typeface="Calibri" pitchFamily="34" charset="-122"/>
                 <a:cs typeface="Calibri" pitchFamily="34" charset="-120"/>
               </a:rPr>
-              <a:t>relating to, a place for</a:t>
+              <a:t>to make; to become</a:t>
             </a:r>
             <a:endParaRPr lang="en-US" sz="850" dirty="0"/>
           </a:p>
@@ -33080,6 +35458,118 @@
       <p:sp>
         <p:nvSpPr>
           <p:cNvPr id="25" name="Shape 23"/>
+          <p:cNvSpPr/>
+          <p:nvPr/>
+        </p:nvSpPr>
+        <p:spPr>
+          <a:xfrm>
+            <a:off x="6998818" y="2258568"/>
+            <a:ext cx="1581912" cy="292608"/>
+          </a:xfrm>
+          <a:prstGeom prst="rect">
+            <a:avLst>
+              <a:gd name="adj" fmla="val 25000"/>
+            </a:avLst>
+          </a:prstGeom>
+          <a:solidFill>
+            <a:srgbClr val="FCE7F3"/>
+          </a:solidFill>
+          <a:ln w="19050">
+            <a:solidFill>
+              <a:srgbClr val="DB2777"/>
+            </a:solidFill>
+            <a:prstDash val="solid"/>
+          </a:ln>
+          <a:effectLst>
+            <a:outerShdw sx="100000" sy="100000" kx="0" ky="0" algn="bl" rotWithShape="0" blurRad="101600" dist="38100" dir="8100000">
+              <a:srgbClr val="000000">
+                <a:alpha val="12000"/>
+              </a:srgbClr>
+            </a:outerShdw>
+          </a:effectLst>
+        </p:spPr>
+      </p:sp>
+      <p:sp>
+        <p:nvSpPr>
+          <p:cNvPr id="26" name="Text 24"/>
+          <p:cNvSpPr/>
+          <p:nvPr/>
+        </p:nvSpPr>
+        <p:spPr>
+          <a:xfrm>
+            <a:off x="6998818" y="2258568"/>
+            <a:ext cx="1581912" cy="292608"/>
+          </a:xfrm>
+          <a:prstGeom prst="rect">
+            <a:avLst/>
+          </a:prstGeom>
+          <a:noFill/>
+          <a:ln/>
+        </p:spPr>
+        <p:txBody>
+          <a:bodyPr wrap="square" lIns="0" tIns="0" rIns="0" bIns="0" rtlCol="0" anchor="ctr"/>
+          <a:lstStyle/>
+          <a:p>
+            <a:pPr algn="ctr" indent="0" marL="0">
+              <a:buNone/>
+            </a:pPr>
+            <a:r>
+              <a:rPr lang="en-US" sz="1300" b="1" dirty="0">
+                <a:solidFill>
+                  <a:srgbClr val="9D174D"/>
+                </a:solidFill>
+                <a:latin typeface="Trebuchet MS" pitchFamily="34" charset="0"/>
+                <a:ea typeface="Trebuchet MS" pitchFamily="34" charset="-122"/>
+                <a:cs typeface="Trebuchet MS" pitchFamily="34" charset="-120"/>
+              </a:rPr>
+              <a:t>ion</a:t>
+            </a:r>
+            <a:endParaRPr lang="en-US" sz="1300" dirty="0"/>
+          </a:p>
+        </p:txBody>
+      </p:sp>
+      <p:sp>
+        <p:nvSpPr>
+          <p:cNvPr id="27" name="Text 25"/>
+          <p:cNvSpPr/>
+          <p:nvPr/>
+        </p:nvSpPr>
+        <p:spPr>
+          <a:xfrm>
+            <a:off x="6998818" y="2569464"/>
+            <a:ext cx="1581912" cy="201168"/>
+          </a:xfrm>
+          <a:prstGeom prst="rect">
+            <a:avLst/>
+          </a:prstGeom>
+          <a:noFill/>
+          <a:ln/>
+        </p:spPr>
+        <p:txBody>
+          <a:bodyPr wrap="square" lIns="0" tIns="0" rIns="0" bIns="0" rtlCol="0" anchor="t"/>
+          <a:lstStyle/>
+          <a:p>
+            <a:pPr algn="ctr" indent="0" marL="0">
+              <a:buNone/>
+            </a:pPr>
+            <a:r>
+              <a:rPr lang="en-US" sz="850" dirty="0">
+                <a:solidFill>
+                  <a:srgbClr val="475569"/>
+                </a:solidFill>
+                <a:latin typeface="Calibri" pitchFamily="34" charset="0"/>
+                <a:ea typeface="Calibri" pitchFamily="34" charset="-122"/>
+                <a:cs typeface="Calibri" pitchFamily="34" charset="-120"/>
+              </a:rPr>
+              <a:t>act or result of</a:t>
+            </a:r>
+            <a:endParaRPr lang="en-US" sz="850" dirty="0"/>
+          </a:p>
+        </p:txBody>
+      </p:sp>
+      <p:sp>
+        <p:nvSpPr>
+          <p:cNvPr id="28" name="Shape 26"/>
           <p:cNvSpPr/>
           <p:nvPr/>
         </p:nvSpPr>
@@ -33106,7 +35596,7 @@
       </p:sp>
       <p:sp>
         <p:nvSpPr>
-          <p:cNvPr id="26" name="Text 24"/>
+          <p:cNvPr id="29" name="Text 27"/>
           <p:cNvSpPr/>
           <p:nvPr/>
         </p:nvSpPr>
@@ -33145,7 +35635,7 @@
       </p:sp>
       <p:sp>
         <p:nvSpPr>
-          <p:cNvPr id="27" name="Shape 25"/>
+          <p:cNvPr id="30" name="Shape 28"/>
           <p:cNvSpPr/>
           <p:nvPr/>
         </p:nvSpPr>
@@ -33172,7 +35662,7 @@
       </p:sp>
       <p:sp>
         <p:nvSpPr>
-          <p:cNvPr id="28" name="Shape 26"/>
+          <p:cNvPr id="31" name="Shape 29"/>
           <p:cNvSpPr/>
           <p:nvPr/>
         </p:nvSpPr>
@@ -33199,7 +35689,7 @@
       </p:sp>
       <p:sp>
         <p:nvSpPr>
-          <p:cNvPr id="29" name="Text 27"/>
+          <p:cNvPr id="32" name="Text 30"/>
           <p:cNvSpPr/>
           <p:nvPr/>
         </p:nvSpPr>
@@ -33230,7 +35720,7 @@
                 <a:ea typeface="Trebuchet MS" pitchFamily="34" charset="-122"/>
                 <a:cs typeface="Trebuchet MS" pitchFamily="34" charset="-120"/>
               </a:rPr>
-              <a:t>dic</a:t>
+              <a:t>syn</a:t>
             </a:r>
             <a:endParaRPr lang="en-US" sz="1400" dirty="0"/>
           </a:p>
@@ -33238,7 +35728,7 @@
       </p:sp>
       <p:sp>
         <p:nvSpPr>
-          <p:cNvPr id="30" name="Text 28"/>
+          <p:cNvPr id="33" name="Text 31"/>
           <p:cNvSpPr/>
           <p:nvPr/>
         </p:nvSpPr>
@@ -33277,7 +35767,7 @@
       </p:sp>
       <p:sp>
         <p:nvSpPr>
-          <p:cNvPr id="31" name="Shape 29"/>
+          <p:cNvPr id="34" name="Shape 32"/>
           <p:cNvSpPr/>
           <p:nvPr/>
         </p:nvSpPr>
@@ -33304,7 +35794,7 @@
       </p:sp>
       <p:sp>
         <p:nvSpPr>
-          <p:cNvPr id="32" name="Text 30"/>
+          <p:cNvPr id="35" name="Text 33"/>
           <p:cNvSpPr/>
           <p:nvPr/>
         </p:nvSpPr>
@@ -33335,7 +35825,7 @@
                 <a:ea typeface="Trebuchet MS" pitchFamily="34" charset="-122"/>
                 <a:cs typeface="Trebuchet MS" pitchFamily="34" charset="-120"/>
               </a:rPr>
-              <a:t>tion</a:t>
+              <a:t>di</a:t>
             </a:r>
             <a:endParaRPr lang="en-US" sz="1400" dirty="0"/>
           </a:p>
@@ -33343,7 +35833,7 @@
       </p:sp>
       <p:sp>
         <p:nvSpPr>
-          <p:cNvPr id="33" name="Text 31"/>
+          <p:cNvPr id="36" name="Text 34"/>
           <p:cNvSpPr/>
           <p:nvPr/>
         </p:nvSpPr>
@@ -33382,7 +35872,7 @@
       </p:sp>
       <p:sp>
         <p:nvSpPr>
-          <p:cNvPr id="34" name="Shape 32"/>
+          <p:cNvPr id="37" name="Shape 35"/>
           <p:cNvSpPr/>
           <p:nvPr/>
         </p:nvSpPr>
@@ -33409,7 +35899,7 @@
       </p:sp>
       <p:sp>
         <p:nvSpPr>
-          <p:cNvPr id="35" name="Text 33"/>
+          <p:cNvPr id="38" name="Text 36"/>
           <p:cNvSpPr/>
           <p:nvPr/>
         </p:nvSpPr>
@@ -33440,7 +35930,7 @@
                 <a:ea typeface="Trebuchet MS" pitchFamily="34" charset="-122"/>
                 <a:cs typeface="Trebuchet MS" pitchFamily="34" charset="-120"/>
               </a:rPr>
-              <a:t>ar</a:t>
+              <a:t>ca</a:t>
             </a:r>
             <a:endParaRPr lang="en-US" sz="1400" dirty="0"/>
           </a:p>
@@ -33448,7 +35938,7 @@
       </p:sp>
       <p:sp>
         <p:nvSpPr>
-          <p:cNvPr id="36" name="Text 34"/>
+          <p:cNvPr id="39" name="Text 37"/>
           <p:cNvSpPr/>
           <p:nvPr/>
         </p:nvSpPr>
@@ -33487,7 +35977,7 @@
       </p:sp>
       <p:sp>
         <p:nvSpPr>
-          <p:cNvPr id="37" name="Shape 35"/>
+          <p:cNvPr id="40" name="Shape 38"/>
           <p:cNvSpPr/>
           <p:nvPr/>
         </p:nvSpPr>
@@ -33514,7 +36004,7 @@
       </p:sp>
       <p:sp>
         <p:nvSpPr>
-          <p:cNvPr id="38" name="Text 36"/>
+          <p:cNvPr id="41" name="Text 39"/>
           <p:cNvSpPr/>
           <p:nvPr/>
         </p:nvSpPr>
@@ -33545,7 +36035,7 @@
                 <a:ea typeface="Trebuchet MS" pitchFamily="34" charset="-122"/>
                 <a:cs typeface="Trebuchet MS" pitchFamily="34" charset="-120"/>
               </a:rPr>
-              <a:t>y</a:t>
+              <a:t>tion</a:t>
             </a:r>
             <a:endParaRPr lang="en-US" sz="1400" dirty="0"/>
           </a:p>
@@ -33553,7 +36043,7 @@
       </p:sp>
       <p:sp>
         <p:nvSpPr>
-          <p:cNvPr id="39" name="Shape 37"/>
+          <p:cNvPr id="42" name="Shape 40"/>
           <p:cNvSpPr/>
           <p:nvPr/>
         </p:nvSpPr>
@@ -33580,7 +36070,7 @@
       </p:sp>
       <p:sp>
         <p:nvSpPr>
-          <p:cNvPr id="40" name="Text 38"/>
+          <p:cNvPr id="43" name="Text 41"/>
           <p:cNvSpPr/>
           <p:nvPr/>
         </p:nvSpPr>
@@ -33619,18 +36109,18 @@
       </p:sp>
       <p:sp>
         <p:nvSpPr>
-          <p:cNvPr id="41" name="Shape 39"/>
+          <p:cNvPr id="44" name="Shape 42"/>
           <p:cNvSpPr/>
           <p:nvPr/>
         </p:nvSpPr>
         <p:spPr>
           <a:xfrm>
             <a:off x="1874520" y="4096512"/>
-            <a:ext cx="6903720" cy="804672"/>
+            <a:ext cx="6903720" cy="658368"/>
           </a:xfrm>
           <a:prstGeom prst="rect">
             <a:avLst>
-              <a:gd name="adj" fmla="val 6818"/>
+              <a:gd name="adj" fmla="val 8333"/>
             </a:avLst>
           </a:prstGeom>
           <a:solidFill>
@@ -33646,18 +36136,18 @@
       </p:sp>
       <p:sp>
         <p:nvSpPr>
-          <p:cNvPr id="42" name="Shape 40"/>
-          <p:cNvSpPr/>
-          <p:nvPr/>
-        </p:nvSpPr>
-        <p:spPr>
-          <a:xfrm>
-            <a:off x="2023872" y="4169664"/>
-            <a:ext cx="685800" cy="384048"/>
+          <p:cNvPr id="45" name="Shape 43"/>
+          <p:cNvSpPr/>
+          <p:nvPr/>
+        </p:nvSpPr>
+        <p:spPr>
+          <a:xfrm>
+            <a:off x="1951828" y="4169664"/>
+            <a:ext cx="603504" cy="475488"/>
           </a:xfrm>
           <a:prstGeom prst="rect">
             <a:avLst>
-              <a:gd name="adj" fmla="val 9524"/>
+              <a:gd name="adj" fmla="val 7692"/>
             </a:avLst>
           </a:prstGeom>
           <a:solidFill>
@@ -33673,14 +36163,14 @@
       </p:sp>
       <p:sp>
         <p:nvSpPr>
-          <p:cNvPr id="43" name="Text 41"/>
-          <p:cNvSpPr/>
-          <p:nvPr/>
-        </p:nvSpPr>
-        <p:spPr>
-          <a:xfrm>
-            <a:off x="2023872" y="4169664"/>
-            <a:ext cx="685800" cy="384048"/>
+          <p:cNvPr id="46" name="Text 44"/>
+          <p:cNvSpPr/>
+          <p:nvPr/>
+        </p:nvSpPr>
+        <p:spPr>
+          <a:xfrm>
+            <a:off x="1951828" y="4169664"/>
+            <a:ext cx="603504" cy="475488"/>
           </a:xfrm>
           <a:prstGeom prst="rect">
             <a:avLst/>
@@ -33704,7 +36194,7 @@
                 <a:ea typeface="Trebuchet MS" pitchFamily="34" charset="-122"/>
                 <a:cs typeface="Trebuchet MS" pitchFamily="34" charset="-120"/>
               </a:rPr>
-              <a:t>d</a:t>
+              <a:t>s</a:t>
             </a:r>
             <a:endParaRPr lang="en-US" sz="900" dirty="0"/>
           </a:p>
@@ -33712,18 +36202,18 @@
       </p:sp>
       <p:sp>
         <p:nvSpPr>
-          <p:cNvPr id="44" name="Shape 42"/>
-          <p:cNvSpPr/>
-          <p:nvPr/>
-        </p:nvSpPr>
-        <p:spPr>
-          <a:xfrm>
-            <a:off x="2831592" y="4169664"/>
-            <a:ext cx="685800" cy="384048"/>
+          <p:cNvPr id="47" name="Shape 45"/>
+          <p:cNvSpPr/>
+          <p:nvPr/>
+        </p:nvSpPr>
+        <p:spPr>
+          <a:xfrm>
+            <a:off x="2605209" y="4169664"/>
+            <a:ext cx="603504" cy="475488"/>
           </a:xfrm>
           <a:prstGeom prst="rect">
             <a:avLst>
-              <a:gd name="adj" fmla="val 9524"/>
+              <a:gd name="adj" fmla="val 7692"/>
             </a:avLst>
           </a:prstGeom>
           <a:solidFill>
@@ -33739,14 +36229,14 @@
       </p:sp>
       <p:sp>
         <p:nvSpPr>
-          <p:cNvPr id="45" name="Text 43"/>
-          <p:cNvSpPr/>
-          <p:nvPr/>
-        </p:nvSpPr>
-        <p:spPr>
-          <a:xfrm>
-            <a:off x="2831592" y="4169664"/>
-            <a:ext cx="685800" cy="384048"/>
+          <p:cNvPr id="48" name="Text 46"/>
+          <p:cNvSpPr/>
+          <p:nvPr/>
+        </p:nvSpPr>
+        <p:spPr>
+          <a:xfrm>
+            <a:off x="2605209" y="4169664"/>
+            <a:ext cx="603504" cy="475488"/>
           </a:xfrm>
           <a:prstGeom prst="rect">
             <a:avLst/>
@@ -33770,7 +36260,7 @@
                 <a:ea typeface="Trebuchet MS" pitchFamily="34" charset="-122"/>
                 <a:cs typeface="Trebuchet MS" pitchFamily="34" charset="-120"/>
               </a:rPr>
-              <a:t>i</a:t>
+              <a:t>y</a:t>
             </a:r>
             <a:endParaRPr lang="en-US" sz="900" dirty="0"/>
           </a:p>
@@ -33778,18 +36268,18 @@
       </p:sp>
       <p:sp>
         <p:nvSpPr>
-          <p:cNvPr id="46" name="Shape 44"/>
-          <p:cNvSpPr/>
-          <p:nvPr/>
-        </p:nvSpPr>
-        <p:spPr>
-          <a:xfrm>
-            <a:off x="3639312" y="4169664"/>
-            <a:ext cx="685800" cy="384048"/>
+          <p:cNvPr id="49" name="Shape 47"/>
+          <p:cNvSpPr/>
+          <p:nvPr/>
+        </p:nvSpPr>
+        <p:spPr>
+          <a:xfrm>
+            <a:off x="3258589" y="4169664"/>
+            <a:ext cx="603504" cy="475488"/>
           </a:xfrm>
           <a:prstGeom prst="rect">
             <a:avLst>
-              <a:gd name="adj" fmla="val 9524"/>
+              <a:gd name="adj" fmla="val 7692"/>
             </a:avLst>
           </a:prstGeom>
           <a:solidFill>
@@ -33805,14 +36295,14 @@
       </p:sp>
       <p:sp>
         <p:nvSpPr>
-          <p:cNvPr id="47" name="Text 45"/>
-          <p:cNvSpPr/>
-          <p:nvPr/>
-        </p:nvSpPr>
-        <p:spPr>
-          <a:xfrm>
-            <a:off x="3639312" y="4169664"/>
-            <a:ext cx="685800" cy="384048"/>
+          <p:cNvPr id="50" name="Text 48"/>
+          <p:cNvSpPr/>
+          <p:nvPr/>
+        </p:nvSpPr>
+        <p:spPr>
+          <a:xfrm>
+            <a:off x="3258589" y="4169664"/>
+            <a:ext cx="603504" cy="475488"/>
           </a:xfrm>
           <a:prstGeom prst="rect">
             <a:avLst/>
@@ -33836,7 +36326,7 @@
                 <a:ea typeface="Trebuchet MS" pitchFamily="34" charset="-122"/>
                 <a:cs typeface="Trebuchet MS" pitchFamily="34" charset="-120"/>
               </a:rPr>
-              <a:t>c</a:t>
+              <a:t>n</a:t>
             </a:r>
             <a:endParaRPr lang="en-US" sz="900" dirty="0"/>
           </a:p>
@@ -33844,57 +36334,18 @@
       </p:sp>
       <p:sp>
         <p:nvSpPr>
-          <p:cNvPr id="48" name="Text 46"/>
-          <p:cNvSpPr/>
-          <p:nvPr/>
-        </p:nvSpPr>
-        <p:spPr>
-          <a:xfrm>
-            <a:off x="3639312" y="4572000"/>
-            <a:ext cx="685800" cy="219456"/>
-          </a:xfrm>
-          <a:prstGeom prst="rect">
-            <a:avLst/>
-          </a:prstGeom>
-          <a:noFill/>
-          <a:ln/>
-        </p:spPr>
-        <p:txBody>
-          <a:bodyPr wrap="square" lIns="0" tIns="0" rIns="0" bIns="0" rtlCol="0" anchor="t"/>
-          <a:lstStyle/>
-          <a:p>
-            <a:pPr algn="ctr" indent="0" marL="0">
-              <a:buNone/>
-            </a:pPr>
-            <a:r>
-              <a:rPr lang="en-US" sz="750" i="1" dirty="0">
-                <a:solidFill>
-                  <a:srgbClr val="94A3B8"/>
-                </a:solidFill>
-                <a:latin typeface="Calibri" pitchFamily="34" charset="0"/>
-                <a:ea typeface="Calibri" pitchFamily="34" charset="-122"/>
-                <a:cs typeface="Calibri" pitchFamily="34" charset="-120"/>
-              </a:rPr>
-              <a:t>/k/</a:t>
-            </a:r>
-            <a:endParaRPr lang="en-US" sz="750" dirty="0"/>
-          </a:p>
-        </p:txBody>
-      </p:sp>
-      <p:sp>
-        <p:nvSpPr>
-          <p:cNvPr id="49" name="Shape 47"/>
-          <p:cNvSpPr/>
-          <p:nvPr/>
-        </p:nvSpPr>
-        <p:spPr>
-          <a:xfrm>
-            <a:off x="4447032" y="4169664"/>
-            <a:ext cx="685800" cy="384048"/>
+          <p:cNvPr id="51" name="Shape 49"/>
+          <p:cNvSpPr/>
+          <p:nvPr/>
+        </p:nvSpPr>
+        <p:spPr>
+          <a:xfrm>
+            <a:off x="3911969" y="4169664"/>
+            <a:ext cx="603504" cy="475488"/>
           </a:xfrm>
           <a:prstGeom prst="rect">
             <a:avLst>
-              <a:gd name="adj" fmla="val 9524"/>
+              <a:gd name="adj" fmla="val 7692"/>
             </a:avLst>
           </a:prstGeom>
           <a:solidFill>
@@ -33910,14 +36361,14 @@
       </p:sp>
       <p:sp>
         <p:nvSpPr>
-          <p:cNvPr id="50" name="Text 48"/>
-          <p:cNvSpPr/>
-          <p:nvPr/>
-        </p:nvSpPr>
-        <p:spPr>
-          <a:xfrm>
-            <a:off x="4447032" y="4169664"/>
-            <a:ext cx="685800" cy="384048"/>
+          <p:cNvPr id="52" name="Text 50"/>
+          <p:cNvSpPr/>
+          <p:nvPr/>
+        </p:nvSpPr>
+        <p:spPr>
+          <a:xfrm>
+            <a:off x="3911969" y="4169664"/>
+            <a:ext cx="603504" cy="475488"/>
           </a:xfrm>
           <a:prstGeom prst="rect">
             <a:avLst/>
@@ -33941,7 +36392,7 @@
                 <a:ea typeface="Trebuchet MS" pitchFamily="34" charset="-122"/>
                 <a:cs typeface="Trebuchet MS" pitchFamily="34" charset="-120"/>
               </a:rPr>
-              <a:t>t</a:t>
+              <a:t>d</a:t>
             </a:r>
             <a:endParaRPr lang="en-US" sz="900" dirty="0"/>
           </a:p>
@@ -33949,57 +36400,18 @@
       </p:sp>
       <p:sp>
         <p:nvSpPr>
-          <p:cNvPr id="51" name="Text 49"/>
-          <p:cNvSpPr/>
-          <p:nvPr/>
-        </p:nvSpPr>
-        <p:spPr>
-          <a:xfrm>
-            <a:off x="4447032" y="4572000"/>
-            <a:ext cx="685800" cy="219456"/>
-          </a:xfrm>
-          <a:prstGeom prst="rect">
-            <a:avLst/>
-          </a:prstGeom>
-          <a:noFill/>
-          <a:ln/>
-        </p:spPr>
-        <p:txBody>
-          <a:bodyPr wrap="square" lIns="0" tIns="0" rIns="0" bIns="0" rtlCol="0" anchor="t"/>
-          <a:lstStyle/>
-          <a:p>
-            <a:pPr algn="ctr" indent="0" marL="0">
-              <a:buNone/>
-            </a:pPr>
-            <a:r>
-              <a:rPr lang="en-US" sz="750" i="1" dirty="0">
-                <a:solidFill>
-                  <a:srgbClr val="94A3B8"/>
-                </a:solidFill>
-                <a:latin typeface="Calibri" pitchFamily="34" charset="0"/>
-                <a:ea typeface="Calibri" pitchFamily="34" charset="-122"/>
-                <a:cs typeface="Calibri" pitchFamily="34" charset="-120"/>
-              </a:rPr>
-              <a:t>/sh/</a:t>
-            </a:r>
-            <a:endParaRPr lang="en-US" sz="750" dirty="0"/>
-          </a:p>
-        </p:txBody>
-      </p:sp>
-      <p:sp>
-        <p:nvSpPr>
-          <p:cNvPr id="52" name="Shape 50"/>
-          <p:cNvSpPr/>
-          <p:nvPr/>
-        </p:nvSpPr>
-        <p:spPr>
-          <a:xfrm>
-            <a:off x="5254752" y="4169664"/>
-            <a:ext cx="685800" cy="384048"/>
+          <p:cNvPr id="53" name="Shape 51"/>
+          <p:cNvSpPr/>
+          <p:nvPr/>
+        </p:nvSpPr>
+        <p:spPr>
+          <a:xfrm>
+            <a:off x="4565350" y="4169664"/>
+            <a:ext cx="603504" cy="475488"/>
           </a:xfrm>
           <a:prstGeom prst="rect">
             <a:avLst>
-              <a:gd name="adj" fmla="val 9524"/>
+              <a:gd name="adj" fmla="val 7692"/>
             </a:avLst>
           </a:prstGeom>
           <a:solidFill>
@@ -34015,14 +36427,14 @@
       </p:sp>
       <p:sp>
         <p:nvSpPr>
-          <p:cNvPr id="53" name="Text 51"/>
-          <p:cNvSpPr/>
-          <p:nvPr/>
-        </p:nvSpPr>
-        <p:spPr>
-          <a:xfrm>
-            <a:off x="5254752" y="4169664"/>
-            <a:ext cx="685800" cy="384048"/>
+          <p:cNvPr id="54" name="Text 52"/>
+          <p:cNvSpPr/>
+          <p:nvPr/>
+        </p:nvSpPr>
+        <p:spPr>
+          <a:xfrm>
+            <a:off x="4565350" y="4169664"/>
+            <a:ext cx="603504" cy="475488"/>
           </a:xfrm>
           <a:prstGeom prst="rect">
             <a:avLst/>
@@ -34046,7 +36458,7 @@
                 <a:ea typeface="Trebuchet MS" pitchFamily="34" charset="-122"/>
                 <a:cs typeface="Trebuchet MS" pitchFamily="34" charset="-120"/>
               </a:rPr>
-              <a:t>io</a:t>
+              <a:t>i</a:t>
             </a:r>
             <a:endParaRPr lang="en-US" sz="900" dirty="0"/>
           </a:p>
@@ -34054,18 +36466,18 @@
       </p:sp>
       <p:sp>
         <p:nvSpPr>
-          <p:cNvPr id="54" name="Shape 52"/>
-          <p:cNvSpPr/>
-          <p:nvPr/>
-        </p:nvSpPr>
-        <p:spPr>
-          <a:xfrm>
-            <a:off x="6062472" y="4169664"/>
-            <a:ext cx="685800" cy="384048"/>
+          <p:cNvPr id="55" name="Shape 53"/>
+          <p:cNvSpPr/>
+          <p:nvPr/>
+        </p:nvSpPr>
+        <p:spPr>
+          <a:xfrm>
+            <a:off x="5218730" y="4169664"/>
+            <a:ext cx="603504" cy="475488"/>
           </a:xfrm>
           <a:prstGeom prst="rect">
             <a:avLst>
-              <a:gd name="adj" fmla="val 9524"/>
+              <a:gd name="adj" fmla="val 7692"/>
             </a:avLst>
           </a:prstGeom>
           <a:solidFill>
@@ -34081,14 +36493,14 @@
       </p:sp>
       <p:sp>
         <p:nvSpPr>
-          <p:cNvPr id="55" name="Text 53"/>
-          <p:cNvSpPr/>
-          <p:nvPr/>
-        </p:nvSpPr>
-        <p:spPr>
-          <a:xfrm>
-            <a:off x="6062472" y="4169664"/>
-            <a:ext cx="685800" cy="384048"/>
+          <p:cNvPr id="56" name="Text 54"/>
+          <p:cNvSpPr/>
+          <p:nvPr/>
+        </p:nvSpPr>
+        <p:spPr>
+          <a:xfrm>
+            <a:off x="5218730" y="4169664"/>
+            <a:ext cx="603504" cy="475488"/>
           </a:xfrm>
           <a:prstGeom prst="rect">
             <a:avLst/>
@@ -34112,7 +36524,7 @@
                 <a:ea typeface="Trebuchet MS" pitchFamily="34" charset="-122"/>
                 <a:cs typeface="Trebuchet MS" pitchFamily="34" charset="-120"/>
               </a:rPr>
-              <a:t>n</a:t>
+              <a:t>c</a:t>
             </a:r>
             <a:endParaRPr lang="en-US" sz="900" dirty="0"/>
           </a:p>
@@ -34120,18 +36532,18 @@
       </p:sp>
       <p:sp>
         <p:nvSpPr>
-          <p:cNvPr id="56" name="Shape 54"/>
-          <p:cNvSpPr/>
-          <p:nvPr/>
-        </p:nvSpPr>
-        <p:spPr>
-          <a:xfrm>
-            <a:off x="6870192" y="4169664"/>
-            <a:ext cx="685800" cy="384048"/>
+          <p:cNvPr id="57" name="Shape 55"/>
+          <p:cNvSpPr/>
+          <p:nvPr/>
+        </p:nvSpPr>
+        <p:spPr>
+          <a:xfrm>
+            <a:off x="5872111" y="4169664"/>
+            <a:ext cx="603504" cy="475488"/>
           </a:xfrm>
           <a:prstGeom prst="rect">
             <a:avLst>
-              <a:gd name="adj" fmla="val 9524"/>
+              <a:gd name="adj" fmla="val 7692"/>
             </a:avLst>
           </a:prstGeom>
           <a:solidFill>
@@ -34147,14 +36559,14 @@
       </p:sp>
       <p:sp>
         <p:nvSpPr>
-          <p:cNvPr id="57" name="Text 55"/>
-          <p:cNvSpPr/>
-          <p:nvPr/>
-        </p:nvSpPr>
-        <p:spPr>
-          <a:xfrm>
-            <a:off x="6870192" y="4169664"/>
-            <a:ext cx="685800" cy="384048"/>
+          <p:cNvPr id="58" name="Text 56"/>
+          <p:cNvSpPr/>
+          <p:nvPr/>
+        </p:nvSpPr>
+        <p:spPr>
+          <a:xfrm>
+            <a:off x="5872111" y="4169664"/>
+            <a:ext cx="603504" cy="475488"/>
           </a:xfrm>
           <a:prstGeom prst="rect">
             <a:avLst/>
@@ -34178,7 +36590,7 @@
                 <a:ea typeface="Trebuchet MS" pitchFamily="34" charset="-122"/>
                 <a:cs typeface="Trebuchet MS" pitchFamily="34" charset="-120"/>
               </a:rPr>
-              <a:t>ar</a:t>
+              <a:t>a</a:t>
             </a:r>
             <a:endParaRPr lang="en-US" sz="900" dirty="0"/>
           </a:p>
@@ -34186,18 +36598,18 @@
       </p:sp>
       <p:sp>
         <p:nvSpPr>
-          <p:cNvPr id="58" name="Shape 56"/>
-          <p:cNvSpPr/>
-          <p:nvPr/>
-        </p:nvSpPr>
-        <p:spPr>
-          <a:xfrm>
-            <a:off x="7677912" y="4169664"/>
-            <a:ext cx="685800" cy="384048"/>
+          <p:cNvPr id="59" name="Shape 57"/>
+          <p:cNvSpPr/>
+          <p:nvPr/>
+        </p:nvSpPr>
+        <p:spPr>
+          <a:xfrm>
+            <a:off x="6525491" y="4169664"/>
+            <a:ext cx="603504" cy="475488"/>
           </a:xfrm>
           <a:prstGeom prst="rect">
             <a:avLst>
-              <a:gd name="adj" fmla="val 9524"/>
+              <a:gd name="adj" fmla="val 7692"/>
             </a:avLst>
           </a:prstGeom>
           <a:solidFill>
@@ -34213,14 +36625,14 @@
       </p:sp>
       <p:sp>
         <p:nvSpPr>
-          <p:cNvPr id="59" name="Text 57"/>
-          <p:cNvSpPr/>
-          <p:nvPr/>
-        </p:nvSpPr>
-        <p:spPr>
-          <a:xfrm>
-            <a:off x="7677912" y="4169664"/>
-            <a:ext cx="685800" cy="384048"/>
+          <p:cNvPr id="60" name="Text 58"/>
+          <p:cNvSpPr/>
+          <p:nvPr/>
+        </p:nvSpPr>
+        <p:spPr>
+          <a:xfrm>
+            <a:off x="6525491" y="4169664"/>
+            <a:ext cx="603504" cy="475488"/>
           </a:xfrm>
           <a:prstGeom prst="rect">
             <a:avLst/>
@@ -34244,7 +36656,139 @@
                 <a:ea typeface="Trebuchet MS" pitchFamily="34" charset="-122"/>
                 <a:cs typeface="Trebuchet MS" pitchFamily="34" charset="-120"/>
               </a:rPr>
-              <a:t>y</a:t>
+              <a:t>ti</a:t>
+            </a:r>
+            <a:endParaRPr lang="en-US" sz="900" dirty="0"/>
+          </a:p>
+        </p:txBody>
+      </p:sp>
+      <p:sp>
+        <p:nvSpPr>
+          <p:cNvPr id="61" name="Shape 59"/>
+          <p:cNvSpPr/>
+          <p:nvPr/>
+        </p:nvSpPr>
+        <p:spPr>
+          <a:xfrm>
+            <a:off x="7178871" y="4169664"/>
+            <a:ext cx="603504" cy="475488"/>
+          </a:xfrm>
+          <a:prstGeom prst="rect">
+            <a:avLst>
+              <a:gd name="adj" fmla="val 7692"/>
+            </a:avLst>
+          </a:prstGeom>
+          <a:solidFill>
+            <a:srgbClr val="FFFFFF"/>
+          </a:solidFill>
+          <a:ln w="12700">
+            <a:solidFill>
+              <a:srgbClr val="DB2777"/>
+            </a:solidFill>
+            <a:prstDash val="solid"/>
+          </a:ln>
+        </p:spPr>
+      </p:sp>
+      <p:sp>
+        <p:nvSpPr>
+          <p:cNvPr id="62" name="Text 60"/>
+          <p:cNvSpPr/>
+          <p:nvPr/>
+        </p:nvSpPr>
+        <p:spPr>
+          <a:xfrm>
+            <a:off x="7178871" y="4169664"/>
+            <a:ext cx="603504" cy="475488"/>
+          </a:xfrm>
+          <a:prstGeom prst="rect">
+            <a:avLst/>
+          </a:prstGeom>
+          <a:noFill/>
+          <a:ln/>
+        </p:spPr>
+        <p:txBody>
+          <a:bodyPr wrap="square" lIns="0" tIns="0" rIns="0" bIns="0" rtlCol="0" anchor="ctr"/>
+          <a:lstStyle/>
+          <a:p>
+            <a:pPr algn="ctr" indent="0" marL="0">
+              <a:buNone/>
+            </a:pPr>
+            <a:r>
+              <a:rPr lang="en-US" sz="900" b="1" dirty="0">
+                <a:solidFill>
+                  <a:srgbClr val="9D174D"/>
+                </a:solidFill>
+                <a:latin typeface="Trebuchet MS" pitchFamily="34" charset="0"/>
+                <a:ea typeface="Trebuchet MS" pitchFamily="34" charset="-122"/>
+                <a:cs typeface="Trebuchet MS" pitchFamily="34" charset="-120"/>
+              </a:rPr>
+              <a:t>o</a:t>
+            </a:r>
+            <a:endParaRPr lang="en-US" sz="900" dirty="0"/>
+          </a:p>
+        </p:txBody>
+      </p:sp>
+      <p:sp>
+        <p:nvSpPr>
+          <p:cNvPr id="63" name="Shape 61"/>
+          <p:cNvSpPr/>
+          <p:nvPr/>
+        </p:nvSpPr>
+        <p:spPr>
+          <a:xfrm>
+            <a:off x="7832252" y="4169664"/>
+            <a:ext cx="603504" cy="475488"/>
+          </a:xfrm>
+          <a:prstGeom prst="rect">
+            <a:avLst>
+              <a:gd name="adj" fmla="val 7692"/>
+            </a:avLst>
+          </a:prstGeom>
+          <a:solidFill>
+            <a:srgbClr val="FFFFFF"/>
+          </a:solidFill>
+          <a:ln w="12700">
+            <a:solidFill>
+              <a:srgbClr val="DB2777"/>
+            </a:solidFill>
+            <a:prstDash val="solid"/>
+          </a:ln>
+        </p:spPr>
+      </p:sp>
+      <p:sp>
+        <p:nvSpPr>
+          <p:cNvPr id="64" name="Text 62"/>
+          <p:cNvSpPr/>
+          <p:nvPr/>
+        </p:nvSpPr>
+        <p:spPr>
+          <a:xfrm>
+            <a:off x="7832252" y="4169664"/>
+            <a:ext cx="603504" cy="475488"/>
+          </a:xfrm>
+          <a:prstGeom prst="rect">
+            <a:avLst/>
+          </a:prstGeom>
+          <a:noFill/>
+          <a:ln/>
+        </p:spPr>
+        <p:txBody>
+          <a:bodyPr wrap="square" lIns="0" tIns="0" rIns="0" bIns="0" rtlCol="0" anchor="ctr"/>
+          <a:lstStyle/>
+          <a:p>
+            <a:pPr algn="ctr" indent="0" marL="0">
+              <a:buNone/>
+            </a:pPr>
+            <a:r>
+              <a:rPr lang="en-US" sz="900" b="1" dirty="0">
+                <a:solidFill>
+                  <a:srgbClr val="9D174D"/>
+                </a:solidFill>
+                <a:latin typeface="Trebuchet MS" pitchFamily="34" charset="0"/>
+                <a:ea typeface="Trebuchet MS" pitchFamily="34" charset="-122"/>
+                <a:cs typeface="Trebuchet MS" pitchFamily="34" charset="-120"/>
+              </a:rPr>
+              <a:t>n</a:t>
             </a:r>
             <a:endParaRPr lang="en-US" sz="900" dirty="0"/>
           </a:p>
@@ -34536,7 +37080,7 @@
                 <a:ea typeface="Calibri" pitchFamily="34" charset="-122"/>
                 <a:cs typeface="Calibri" pitchFamily="34" charset="-120"/>
               </a:rPr>
-              <a:t>Word Labs  •  wordlabs.app  •  Root: 'dic' = say, speak, proclaim</a:t>
+              <a:t>Word Labs  •  wordlabs.app  •  Root: 'dic' = say; speak</a:t>
             </a:r>
             <a:endParaRPr lang="en-US" sz="800" dirty="0"/>
           </a:p>
@@ -35705,7 +38249,7 @@
                 <a:ea typeface="Calibri" pitchFamily="34" charset="-122"/>
                 <a:cs typeface="Calibri" pitchFamily="34" charset="-120"/>
               </a:rPr>
-              <a:t>Word Labs  •  wordlabs.app  •  Root: 'dic' = say, speak, proclaim</a:t>
+              <a:t>Word Labs  •  wordlabs.app  •  Root: 'dic' = say; speak</a:t>
             </a:r>
             <a:endParaRPr lang="en-US" sz="800" dirty="0"/>
           </a:p>
@@ -36006,7 +38550,7 @@
                 <a:ea typeface="Trebuchet MS" pitchFamily="34" charset="-122"/>
                 <a:cs typeface="Trebuchet MS" pitchFamily="34" charset="-120"/>
               </a:rPr>
-              <a:t>pre-</a:t>
+              <a:t>ad-</a:t>
             </a:r>
             <a:endParaRPr lang="en-US" sz="1300" dirty="0"/>
           </a:p>
@@ -36198,7 +38742,7 @@
                 <a:ea typeface="Trebuchet MS" pitchFamily="34" charset="-122"/>
                 <a:cs typeface="Trebuchet MS" pitchFamily="34" charset="-120"/>
               </a:rPr>
-              <a:t>in-</a:t>
+              <a:t>bene-</a:t>
             </a:r>
             <a:endParaRPr lang="en-US" sz="1300" dirty="0"/>
           </a:p>
@@ -36351,7 +38895,7 @@
                 <a:ea typeface="Trebuchet MS" pitchFamily="34" charset="-122"/>
                 <a:cs typeface="Trebuchet MS" pitchFamily="34" charset="-120"/>
               </a:rPr>
-              <a:t>con-</a:t>
+              <a:t>contra-</a:t>
             </a:r>
             <a:endParaRPr lang="en-US" sz="1300" dirty="0"/>
           </a:p>
@@ -36440,7 +38984,7 @@
                 <a:ea typeface="Trebuchet MS" pitchFamily="34" charset="-122"/>
                 <a:cs typeface="Trebuchet MS" pitchFamily="34" charset="-120"/>
               </a:rPr>
-              <a:t>-ator</a:t>
+              <a:t>-ation</a:t>
             </a:r>
             <a:endParaRPr lang="en-US" sz="1300" dirty="0"/>
           </a:p>
@@ -36504,7 +39048,7 @@
                 <a:ea typeface="Trebuchet MS" pitchFamily="34" charset="-122"/>
                 <a:cs typeface="Trebuchet MS" pitchFamily="34" charset="-120"/>
               </a:rPr>
-              <a:t>ab-</a:t>
+              <a:t>de-</a:t>
             </a:r>
             <a:endParaRPr lang="en-US" sz="1300" dirty="0"/>
           </a:p>
@@ -36593,7 +39137,7 @@
                 <a:ea typeface="Trebuchet MS" pitchFamily="34" charset="-122"/>
                 <a:cs typeface="Trebuchet MS" pitchFamily="34" charset="-120"/>
               </a:rPr>
-              <a:t>-tate</a:t>
+              <a:t>-es</a:t>
             </a:r>
             <a:endParaRPr lang="en-US" sz="1300" dirty="0"/>
           </a:p>
@@ -36657,7 +39201,7 @@
                 <a:ea typeface="Trebuchet MS" pitchFamily="34" charset="-122"/>
                 <a:cs typeface="Trebuchet MS" pitchFamily="34" charset="-120"/>
               </a:rPr>
-              <a:t>veri-</a:t>
+              <a:t>in-</a:t>
             </a:r>
             <a:endParaRPr lang="en-US" sz="1300" dirty="0"/>
           </a:p>
@@ -36703,7 +39247,7 @@
             <a:avLst/>
           </a:prstGeom>
           <a:solidFill>
-            <a:srgbClr val="FCE7F3"/>
+            <a:srgbClr val="F8FAFC"/>
           </a:solidFill>
           <a:ln w="12700">
             <a:solidFill>
@@ -36715,14 +39259,39 @@
       </p:sp>
       <p:sp>
         <p:nvSpPr>
-          <p:cNvPr id="42" name="Text 40"/>
-          <p:cNvSpPr/>
-          <p:nvPr/>
-        </p:nvSpPr>
-        <p:spPr>
-          <a:xfrm>
-            <a:off x="5943600" y="3246120"/>
-            <a:ext cx="2834640" cy="402336"/>
+          <p:cNvPr id="42" name="Shape 40"/>
+          <p:cNvSpPr/>
+          <p:nvPr/>
+        </p:nvSpPr>
+        <p:spPr>
+          <a:xfrm>
+            <a:off x="365760" y="3666744"/>
+            <a:ext cx="2468880" cy="402336"/>
+          </a:xfrm>
+          <a:prstGeom prst="rect">
+            <a:avLst/>
+          </a:prstGeom>
+          <a:solidFill>
+            <a:srgbClr val="DDD6FE"/>
+          </a:solidFill>
+          <a:ln w="12700">
+            <a:solidFill>
+              <a:srgbClr val="E2E8F0"/>
+            </a:solidFill>
+            <a:prstDash val="solid"/>
+          </a:ln>
+        </p:spPr>
+      </p:sp>
+      <p:sp>
+        <p:nvSpPr>
+          <p:cNvPr id="43" name="Text 41"/>
+          <p:cNvSpPr/>
+          <p:nvPr/>
+        </p:nvSpPr>
+        <p:spPr>
+          <a:xfrm>
+            <a:off x="365760" y="3666744"/>
+            <a:ext cx="2468880" cy="402336"/>
           </a:xfrm>
           <a:prstGeom prst="rect">
             <a:avLst/>
@@ -36740,13 +39309,13 @@
             <a:r>
               <a:rPr lang="en-US" sz="1300" b="1" dirty="0">
                 <a:solidFill>
-                  <a:srgbClr val="9D174D"/>
+                  <a:srgbClr val="4C1D95"/>
                 </a:solidFill>
                 <a:latin typeface="Trebuchet MS" pitchFamily="34" charset="0"/>
                 <a:ea typeface="Trebuchet MS" pitchFamily="34" charset="-122"/>
                 <a:cs typeface="Trebuchet MS" pitchFamily="34" charset="-120"/>
               </a:rPr>
-              <a:t>-tionary</a:t>
+              <a:t>pre-</a:t>
             </a:r>
             <a:endParaRPr lang="en-US" sz="1300" dirty="0"/>
           </a:p>
@@ -36754,7 +39323,57 @@
       </p:sp>
       <p:sp>
         <p:nvSpPr>
-          <p:cNvPr id="43" name="Text 41"/>
+          <p:cNvPr id="44" name="Shape 42"/>
+          <p:cNvSpPr/>
+          <p:nvPr/>
+        </p:nvSpPr>
+        <p:spPr>
+          <a:xfrm>
+            <a:off x="2971800" y="3666744"/>
+            <a:ext cx="2834640" cy="402336"/>
+          </a:xfrm>
+          <a:prstGeom prst="rect">
+            <a:avLst/>
+          </a:prstGeom>
+          <a:solidFill>
+            <a:srgbClr val="F1F5F9"/>
+          </a:solidFill>
+          <a:ln w="12700">
+            <a:solidFill>
+              <a:srgbClr val="E2E8F0"/>
+            </a:solidFill>
+            <a:prstDash val="solid"/>
+          </a:ln>
+        </p:spPr>
+      </p:sp>
+      <p:sp>
+        <p:nvSpPr>
+          <p:cNvPr id="45" name="Shape 43"/>
+          <p:cNvSpPr/>
+          <p:nvPr/>
+        </p:nvSpPr>
+        <p:spPr>
+          <a:xfrm>
+            <a:off x="5943600" y="3666744"/>
+            <a:ext cx="2834640" cy="402336"/>
+          </a:xfrm>
+          <a:prstGeom prst="rect">
+            <a:avLst/>
+          </a:prstGeom>
+          <a:solidFill>
+            <a:srgbClr val="F1F5F9"/>
+          </a:solidFill>
+          <a:ln w="12700">
+            <a:solidFill>
+              <a:srgbClr val="E2E8F0"/>
+            </a:solidFill>
+            <a:prstDash val="solid"/>
+          </a:ln>
+        </p:spPr>
+      </p:sp>
+      <p:sp>
+        <p:nvSpPr>
+          <p:cNvPr id="46" name="Text 44"/>
           <p:cNvSpPr/>
           <p:nvPr/>
         </p:nvSpPr>
@@ -36793,7 +39412,7 @@
       </p:sp>
       <p:sp>
         <p:nvSpPr>
-          <p:cNvPr id="44" name="Shape 42"/>
+          <p:cNvPr id="47" name="Shape 45"/>
           <p:cNvSpPr/>
           <p:nvPr/>
         </p:nvSpPr>
@@ -36820,7 +39439,7 @@
       </p:sp>
       <p:sp>
         <p:nvSpPr>
-          <p:cNvPr id="45" name="Text 43"/>
+          <p:cNvPr id="48" name="Text 46"/>
           <p:cNvSpPr/>
           <p:nvPr/>
         </p:nvSpPr>
@@ -36851,7 +39470,7 @@
                 <a:ea typeface="Trebuchet MS" pitchFamily="34" charset="-122"/>
                 <a:cs typeface="Trebuchet MS" pitchFamily="34" charset="-120"/>
               </a:rPr>
-              <a:t>dictate</a:t>
+              <a:t>indices</a:t>
             </a:r>
             <a:endParaRPr lang="en-US" sz="1200" dirty="0"/>
           </a:p>
@@ -36859,7 +39478,7 @@
       </p:sp>
       <p:sp>
         <p:nvSpPr>
-          <p:cNvPr id="46" name="Shape 44"/>
+          <p:cNvPr id="49" name="Shape 47"/>
           <p:cNvSpPr/>
           <p:nvPr/>
         </p:nvSpPr>
@@ -36886,7 +39505,7 @@
       </p:sp>
       <p:sp>
         <p:nvSpPr>
-          <p:cNvPr id="47" name="Text 45"/>
+          <p:cNvPr id="50" name="Text 48"/>
           <p:cNvSpPr/>
           <p:nvPr/>
         </p:nvSpPr>
@@ -36917,7 +39536,7 @@
                 <a:ea typeface="Trebuchet MS" pitchFamily="34" charset="-122"/>
                 <a:cs typeface="Trebuchet MS" pitchFamily="34" charset="-120"/>
               </a:rPr>
-              <a:t>dictionary</a:t>
+              <a:t>diction</a:t>
             </a:r>
             <a:endParaRPr lang="en-US" sz="1200" dirty="0"/>
           </a:p>
@@ -36925,7 +39544,7 @@
       </p:sp>
       <p:sp>
         <p:nvSpPr>
-          <p:cNvPr id="48" name="Shape 46"/>
+          <p:cNvPr id="51" name="Shape 49"/>
           <p:cNvSpPr/>
           <p:nvPr/>
         </p:nvSpPr>
@@ -36952,7 +39571,7 @@
       </p:sp>
       <p:sp>
         <p:nvSpPr>
-          <p:cNvPr id="49" name="Text 47"/>
+          <p:cNvPr id="52" name="Text 50"/>
           <p:cNvSpPr/>
           <p:nvPr/>
         </p:nvSpPr>
@@ -36983,7 +39602,7 @@
                 <a:ea typeface="Trebuchet MS" pitchFamily="34" charset="-122"/>
                 <a:cs typeface="Trebuchet MS" pitchFamily="34" charset="-120"/>
               </a:rPr>
-              <a:t>predict</a:t>
+              <a:t>indicate</a:t>
             </a:r>
             <a:endParaRPr lang="en-US" sz="1200" dirty="0"/>
           </a:p>
@@ -36991,7 +39610,7 @@
       </p:sp>
       <p:sp>
         <p:nvSpPr>
-          <p:cNvPr id="50" name="Shape 48"/>
+          <p:cNvPr id="53" name="Shape 51"/>
           <p:cNvSpPr/>
           <p:nvPr/>
         </p:nvSpPr>
@@ -37018,7 +39637,7 @@
       </p:sp>
       <p:sp>
         <p:nvSpPr>
-          <p:cNvPr id="51" name="Text 49"/>
+          <p:cNvPr id="54" name="Text 52"/>
           <p:cNvSpPr/>
           <p:nvPr/>
         </p:nvSpPr>
@@ -37049,7 +39668,7 @@
                 <a:ea typeface="Trebuchet MS" pitchFamily="34" charset="-122"/>
                 <a:cs typeface="Trebuchet MS" pitchFamily="34" charset="-120"/>
               </a:rPr>
-              <a:t>indicate</a:t>
+              <a:t>addiction</a:t>
             </a:r>
             <a:endParaRPr lang="en-US" sz="1200" dirty="0"/>
           </a:p>
@@ -37057,7 +39676,7 @@
       </p:sp>
       <p:sp>
         <p:nvSpPr>
-          <p:cNvPr id="52" name="Shape 50"/>
+          <p:cNvPr id="55" name="Shape 53"/>
           <p:cNvSpPr/>
           <p:nvPr/>
         </p:nvSpPr>
@@ -37084,7 +39703,7 @@
       </p:sp>
       <p:sp>
         <p:nvSpPr>
-          <p:cNvPr id="53" name="Text 51"/>
+          <p:cNvPr id="56" name="Text 54"/>
           <p:cNvSpPr/>
           <p:nvPr/>
         </p:nvSpPr>
@@ -37115,7 +39734,7 @@
                 <a:ea typeface="Trebuchet MS" pitchFamily="34" charset="-122"/>
                 <a:cs typeface="Trebuchet MS" pitchFamily="34" charset="-120"/>
               </a:rPr>
-              <a:t>verdict</a:t>
+              <a:t>dedicated</a:t>
             </a:r>
             <a:endParaRPr lang="en-US" sz="1200" dirty="0"/>
           </a:p>
@@ -37123,7 +39742,7 @@
       </p:sp>
       <p:sp>
         <p:nvSpPr>
-          <p:cNvPr id="54" name="Shape 52"/>
+          <p:cNvPr id="57" name="Shape 55"/>
           <p:cNvSpPr/>
           <p:nvPr/>
         </p:nvSpPr>
@@ -37150,7 +39769,7 @@
       </p:sp>
       <p:sp>
         <p:nvSpPr>
-          <p:cNvPr id="55" name="Text 53"/>
+          <p:cNvPr id="58" name="Text 56"/>
           <p:cNvSpPr/>
           <p:nvPr/>
         </p:nvSpPr>
@@ -37181,7 +39800,7 @@
                 <a:ea typeface="Trebuchet MS" pitchFamily="34" charset="-122"/>
                 <a:cs typeface="Trebuchet MS" pitchFamily="34" charset="-120"/>
               </a:rPr>
-              <a:t>contradict</a:t>
+              <a:t>indicated</a:t>
             </a:r>
             <a:endParaRPr lang="en-US" sz="1200" dirty="0"/>
           </a:p>
@@ -37189,7 +39808,7 @@
       </p:sp>
       <p:sp>
         <p:nvSpPr>
-          <p:cNvPr id="56" name="Shape 54"/>
+          <p:cNvPr id="59" name="Shape 57"/>
           <p:cNvSpPr/>
           <p:nvPr/>
         </p:nvSpPr>
@@ -37216,7 +39835,7 @@
       </p:sp>
       <p:sp>
         <p:nvSpPr>
-          <p:cNvPr id="57" name="Text 55"/>
+          <p:cNvPr id="60" name="Text 58"/>
           <p:cNvSpPr/>
           <p:nvPr/>
         </p:nvSpPr>
@@ -37247,73 +39866,7 @@
                 <a:ea typeface="Trebuchet MS" pitchFamily="34" charset="-122"/>
                 <a:cs typeface="Trebuchet MS" pitchFamily="34" charset="-120"/>
               </a:rPr>
-              <a:t>dedicate</a:t>
-            </a:r>
-            <a:endParaRPr lang="en-US" sz="1200" dirty="0"/>
-          </a:p>
-        </p:txBody>
-      </p:sp>
-      <p:sp>
-        <p:nvSpPr>
-          <p:cNvPr id="58" name="Shape 56"/>
-          <p:cNvSpPr/>
-          <p:nvPr/>
-        </p:nvSpPr>
-        <p:spPr>
-          <a:xfrm>
-            <a:off x="6894576" y="4498848"/>
-            <a:ext cx="2011680" cy="402336"/>
-          </a:xfrm>
-          <a:prstGeom prst="rect">
-            <a:avLst>
-              <a:gd name="adj" fmla="val 13636"/>
-            </a:avLst>
-          </a:prstGeom>
-          <a:solidFill>
-            <a:srgbClr val="EEF2FF"/>
-          </a:solidFill>
-          <a:ln w="12700">
-            <a:solidFill>
-              <a:srgbClr val="6366F1"/>
-            </a:solidFill>
-            <a:prstDash val="solid"/>
-          </a:ln>
-        </p:spPr>
-      </p:sp>
-      <p:sp>
-        <p:nvSpPr>
-          <p:cNvPr id="59" name="Text 57"/>
-          <p:cNvSpPr/>
-          <p:nvPr/>
-        </p:nvSpPr>
-        <p:spPr>
-          <a:xfrm>
-            <a:off x="6894576" y="4498848"/>
-            <a:ext cx="2011680" cy="402336"/>
-          </a:xfrm>
-          <a:prstGeom prst="rect">
-            <a:avLst/>
-          </a:prstGeom>
-          <a:noFill/>
-          <a:ln/>
-        </p:spPr>
-        <p:txBody>
-          <a:bodyPr wrap="square" lIns="0" tIns="0" rIns="0" bIns="0" rtlCol="0" anchor="ctr"/>
-          <a:lstStyle/>
-          <a:p>
-            <a:pPr algn="ctr" indent="0" marL="0">
-              <a:buNone/>
-            </a:pPr>
-            <a:r>
-              <a:rPr lang="en-US" sz="1200" b="1" dirty="0">
-                <a:solidFill>
-                  <a:srgbClr val="4338CA"/>
-                </a:solidFill>
-                <a:latin typeface="Trebuchet MS" pitchFamily="34" charset="0"/>
-                <a:ea typeface="Trebuchet MS" pitchFamily="34" charset="-122"/>
-                <a:cs typeface="Trebuchet MS" pitchFamily="34" charset="-120"/>
-              </a:rPr>
-              <a:t>abdicate</a:t>
+              <a:t>indicates</a:t>
             </a:r>
             <a:endParaRPr lang="en-US" sz="1200" dirty="0"/>
           </a:p>
@@ -37605,7 +40158,7 @@
                 <a:ea typeface="Calibri" pitchFamily="34" charset="-122"/>
                 <a:cs typeface="Calibri" pitchFamily="34" charset="-120"/>
               </a:rPr>
-              <a:t>Word Labs  •  wordlabs.app  •  Root: 'dic' = say, speak, proclaim</a:t>
+              <a:t>Word Labs  •  wordlabs.app  •  Root: 'dic' = say; speak</a:t>
             </a:r>
             <a:endParaRPr lang="en-US" sz="800" dirty="0"/>
           </a:p>
@@ -37769,7 +40322,7 @@
                 <a:ea typeface="Calibri" pitchFamily="34" charset="-122"/>
                 <a:cs typeface="Calibri" pitchFamily="34" charset="-120"/>
               </a:rPr>
-              <a:t>The core part of a word carrying its basic meaning. For example, 'dic' means 'say, speak, proclaim'.</a:t>
+              <a:t>The core part of a word carrying its basic meaning. For example, 'dic' means 'say; speak'.</a:t>
             </a:r>
             <a:endParaRPr lang="en-US" sz="1350" dirty="0"/>
           </a:p>
@@ -38389,7 +40942,7 @@
                 <a:ea typeface="Calibri" pitchFamily="34" charset="-122"/>
                 <a:cs typeface="Calibri" pitchFamily="34" charset="-120"/>
               </a:rPr>
-              <a:t>Word Labs  •  wordlabs.app  •  Root: 'dic' = say, speak, proclaim</a:t>
+              <a:t>Word Labs  •  wordlabs.app  •  Root: 'dic' = say; speak</a:t>
             </a:r>
             <a:endParaRPr lang="en-US" sz="800" dirty="0"/>
           </a:p>
@@ -38501,7 +41054,7 @@
                 <a:ea typeface="Calibri" pitchFamily="34" charset="-122"/>
                 <a:cs typeface="Calibri" pitchFamily="34" charset="-120"/>
               </a:rPr>
-              <a:t>1.  A dictionary helps us understand the meaning of words, which connects to 'dic' meaning to say or explain.</a:t>
+              <a:t>1.  'diction' means 'a thick book of word meanings'.</a:t>
             </a:r>
             <a:endParaRPr lang="en-US" sz="1300" dirty="0"/>
           </a:p>
@@ -38524,11 +41077,11 @@
             </a:avLst>
           </a:prstGeom>
           <a:solidFill>
-            <a:srgbClr val="DCFCE7"/>
-          </a:solidFill>
-          <a:ln w="12700">
-            <a:solidFill>
-              <a:srgbClr val="16A34A"/>
+            <a:srgbClr val="FEE2E2"/>
+          </a:solidFill>
+          <a:ln w="12700">
+            <a:solidFill>
+              <a:srgbClr val="DC2626"/>
             </a:solidFill>
             <a:prstDash val="solid"/>
           </a:ln>
@@ -38561,13 +41114,13 @@
             <a:r>
               <a:rPr lang="en-US" sz="1100" b="1" dirty="0">
                 <a:solidFill>
-                  <a:srgbClr val="16A34A"/>
+                  <a:srgbClr val="DC2626"/>
                 </a:solidFill>
                 <a:latin typeface="Trebuchet MS" pitchFamily="34" charset="0"/>
                 <a:ea typeface="Trebuchet MS" pitchFamily="34" charset="-122"/>
                 <a:cs typeface="Trebuchet MS" pitchFamily="34" charset="-120"/>
               </a:rPr>
-              <a:t>TRUE</a:t>
+              <a:t>FALSE</a:t>
             </a:r>
             <a:endParaRPr lang="en-US" sz="1100" dirty="0"/>
           </a:p>
@@ -38640,7 +41193,7 @@
                 <a:ea typeface="Calibri" pitchFamily="34" charset="-122"/>
                 <a:cs typeface="Calibri" pitchFamily="34" charset="-120"/>
               </a:rPr>
-              <a:t>2.  The root 'dic' comes from a Latin word meaning to say or speak.</a:t>
+              <a:t>2.  'indices' means 'lists or scales used to measure or show levels of something (plural of index)'.</a:t>
             </a:r>
             <a:endParaRPr lang="en-US" sz="1300" dirty="0"/>
           </a:p>
@@ -38779,7 +41332,7 @@
                 <a:ea typeface="Calibri" pitchFamily="34" charset="-122"/>
                 <a:cs typeface="Calibri" pitchFamily="34" charset="-120"/>
               </a:rPr>
-              <a:t>3.  The root 'dic' comes from a Greek word meaning to write.</a:t>
+              <a:t>3.  'indices' means 'small pointing fingers'.</a:t>
             </a:r>
             <a:endParaRPr lang="en-US" sz="1300" dirty="0"/>
           </a:p>
@@ -38918,7 +41471,7 @@
                 <a:ea typeface="Calibri" pitchFamily="34" charset="-122"/>
                 <a:cs typeface="Calibri" pitchFamily="34" charset="-120"/>
               </a:rPr>
-              <a:t>4.  The word 'picture' contains the root 'dic' meaning to speak.</a:t>
+              <a:t>4.  'dic' means 'say; speak'.</a:t>
             </a:r>
             <a:endParaRPr lang="en-US" sz="1300" dirty="0"/>
           </a:p>
@@ -38941,11 +41494,11 @@
             </a:avLst>
           </a:prstGeom>
           <a:solidFill>
-            <a:srgbClr val="FEE2E2"/>
-          </a:solidFill>
-          <a:ln w="12700">
-            <a:solidFill>
-              <a:srgbClr val="DC2626"/>
+            <a:srgbClr val="DCFCE7"/>
+          </a:solidFill>
+          <a:ln w="12700">
+            <a:solidFill>
+              <a:srgbClr val="16A34A"/>
             </a:solidFill>
             <a:prstDash val="solid"/>
           </a:ln>
@@ -38978,13 +41531,13 @@
             <a:r>
               <a:rPr lang="en-US" sz="1100" b="1" dirty="0">
                 <a:solidFill>
-                  <a:srgbClr val="DC2626"/>
+                  <a:srgbClr val="16A34A"/>
                 </a:solidFill>
                 <a:latin typeface="Trebuchet MS" pitchFamily="34" charset="0"/>
                 <a:ea typeface="Trebuchet MS" pitchFamily="34" charset="-122"/>
                 <a:cs typeface="Trebuchet MS" pitchFamily="34" charset="-120"/>
               </a:rPr>
-              <a:t>FALSE</a:t>
+              <a:t>TRUE</a:t>
             </a:r>
             <a:endParaRPr lang="en-US" sz="1100" dirty="0"/>
           </a:p>
@@ -39057,7 +41610,7 @@
                 <a:ea typeface="Calibri" pitchFamily="34" charset="-122"/>
                 <a:cs typeface="Calibri" pitchFamily="34" charset="-120"/>
               </a:rPr>
-              <a:t>5.  The word 'predict' uses 'dic' because it means to say something before it happens.</a:t>
+              <a:t>5.  'diction' means 'the way someone speaks or pronounces words clearly'.</a:t>
             </a:r>
             <a:endParaRPr lang="en-US" sz="1300" dirty="0"/>
           </a:p>
@@ -39415,7 +41968,7 @@
                 <a:ea typeface="Calibri" pitchFamily="34" charset="-122"/>
                 <a:cs typeface="Calibri" pitchFamily="34" charset="-120"/>
               </a:rPr>
-              <a:t>Word Labs  •  wordlabs.app  •  Root: 'dic' = say, speak, proclaim</a:t>
+              <a:t>Word Labs  •  wordlabs.app  •  Root: 'dic' = say; speak</a:t>
             </a:r>
             <a:endParaRPr lang="en-US" sz="800" dirty="0"/>
           </a:p>
@@ -39552,7 +42105,7 @@
                 <a:ea typeface="Trebuchet MS" pitchFamily="34" charset="-122"/>
                 <a:cs typeface="Trebuchet MS" pitchFamily="34" charset="-120"/>
               </a:rPr>
-              <a:t>say, speak, proclaim</a:t>
+              <a:t>say; speak</a:t>
             </a:r>
             <a:endParaRPr lang="en-US" sz="2000" dirty="0"/>
           </a:p>
@@ -39591,7 +42144,7 @@
                 <a:ea typeface="Calibri" pitchFamily="34" charset="-122"/>
                 <a:cs typeface="Calibri" pitchFamily="34" charset="-120"/>
               </a:rPr>
-              <a:t>Origin: Latin: dicere</a:t>
+              <a:t>Origin: Latin root</a:t>
             </a:r>
             <a:endParaRPr lang="en-US" sz="1100" dirty="0"/>
           </a:p>
@@ -39696,7 +42249,7 @@
                 <a:ea typeface="Trebuchet MS" pitchFamily="34" charset="-122"/>
                 <a:cs typeface="Trebuchet MS" pitchFamily="34" charset="-120"/>
               </a:rPr>
-              <a:t>dictate</a:t>
+              <a:t>indices</a:t>
             </a:r>
             <a:endParaRPr lang="en-US" sz="1300" dirty="0"/>
           </a:p>
@@ -39762,7 +42315,7 @@
                 <a:ea typeface="Trebuchet MS" pitchFamily="34" charset="-122"/>
                 <a:cs typeface="Trebuchet MS" pitchFamily="34" charset="-120"/>
               </a:rPr>
-              <a:t>dictionary</a:t>
+              <a:t>diction</a:t>
             </a:r>
             <a:endParaRPr lang="en-US" sz="1300" dirty="0"/>
           </a:p>
@@ -39828,7 +42381,7 @@
                 <a:ea typeface="Trebuchet MS" pitchFamily="34" charset="-122"/>
                 <a:cs typeface="Trebuchet MS" pitchFamily="34" charset="-120"/>
               </a:rPr>
-              <a:t>predict</a:t>
+              <a:t>indicate</a:t>
             </a:r>
             <a:endParaRPr lang="en-US" sz="1300" dirty="0"/>
           </a:p>
@@ -39894,7 +42447,7 @@
                 <a:ea typeface="Trebuchet MS" pitchFamily="34" charset="-122"/>
                 <a:cs typeface="Trebuchet MS" pitchFamily="34" charset="-120"/>
               </a:rPr>
-              <a:t>indicate</a:t>
+              <a:t>addiction</a:t>
             </a:r>
             <a:endParaRPr lang="en-US" sz="1300" dirty="0"/>
           </a:p>
@@ -39960,7 +42513,7 @@
                 <a:ea typeface="Trebuchet MS" pitchFamily="34" charset="-122"/>
                 <a:cs typeface="Trebuchet MS" pitchFamily="34" charset="-120"/>
               </a:rPr>
-              <a:t>verdict</a:t>
+              <a:t>dedicated</a:t>
             </a:r>
             <a:endParaRPr lang="en-US" sz="1300" dirty="0"/>
           </a:p>
@@ -40026,7 +42579,7 @@
                 <a:ea typeface="Trebuchet MS" pitchFamily="34" charset="-122"/>
                 <a:cs typeface="Trebuchet MS" pitchFamily="34" charset="-120"/>
               </a:rPr>
-              <a:t>contradict</a:t>
+              <a:t>indicated</a:t>
             </a:r>
             <a:endParaRPr lang="en-US" sz="1300" dirty="0"/>
           </a:p>
@@ -40092,7 +42645,7 @@
                 <a:ea typeface="Trebuchet MS" pitchFamily="34" charset="-122"/>
                 <a:cs typeface="Trebuchet MS" pitchFamily="34" charset="-120"/>
               </a:rPr>
-              <a:t>dedicate</a:t>
+              <a:t>indicates</a:t>
             </a:r>
             <a:endParaRPr lang="en-US" sz="1300" dirty="0"/>
           </a:p>
@@ -40384,7 +42937,7 @@
                 <a:ea typeface="Calibri" pitchFamily="34" charset="-122"/>
                 <a:cs typeface="Calibri" pitchFamily="34" charset="-120"/>
               </a:rPr>
-              <a:t>Word Labs  •  wordlabs.app  •  Root: 'dic' = say, speak, proclaim</a:t>
+              <a:t>Word Labs  •  wordlabs.app  •  Root: 'dic' = say; speak</a:t>
             </a:r>
             <a:endParaRPr lang="en-US" sz="800" dirty="0"/>
           </a:p>
@@ -40685,7 +43238,7 @@
                 <a:ea typeface="Trebuchet MS" pitchFamily="34" charset="-122"/>
                 <a:cs typeface="Trebuchet MS" pitchFamily="34" charset="-120"/>
               </a:rPr>
-              <a:t>pre-</a:t>
+              <a:t>ad-</a:t>
             </a:r>
             <a:endParaRPr lang="en-US" sz="1300" dirty="0"/>
           </a:p>
@@ -40877,7 +43430,7 @@
                 <a:ea typeface="Trebuchet MS" pitchFamily="34" charset="-122"/>
                 <a:cs typeface="Trebuchet MS" pitchFamily="34" charset="-120"/>
               </a:rPr>
-              <a:t>in-</a:t>
+              <a:t>bene-</a:t>
             </a:r>
             <a:endParaRPr lang="en-US" sz="1300" dirty="0"/>
           </a:p>
@@ -41030,7 +43583,7 @@
                 <a:ea typeface="Trebuchet MS" pitchFamily="34" charset="-122"/>
                 <a:cs typeface="Trebuchet MS" pitchFamily="34" charset="-120"/>
               </a:rPr>
-              <a:t>con-</a:t>
+              <a:t>contra-</a:t>
             </a:r>
             <a:endParaRPr lang="en-US" sz="1300" dirty="0"/>
           </a:p>
@@ -41119,7 +43672,7 @@
                 <a:ea typeface="Trebuchet MS" pitchFamily="34" charset="-122"/>
                 <a:cs typeface="Trebuchet MS" pitchFamily="34" charset="-120"/>
               </a:rPr>
-              <a:t>-ator</a:t>
+              <a:t>-ation</a:t>
             </a:r>
             <a:endParaRPr lang="en-US" sz="1300" dirty="0"/>
           </a:p>
@@ -41183,7 +43736,7 @@
                 <a:ea typeface="Trebuchet MS" pitchFamily="34" charset="-122"/>
                 <a:cs typeface="Trebuchet MS" pitchFamily="34" charset="-120"/>
               </a:rPr>
-              <a:t>ab-</a:t>
+              <a:t>de-</a:t>
             </a:r>
             <a:endParaRPr lang="en-US" sz="1300" dirty="0"/>
           </a:p>
@@ -41272,7 +43825,7 @@
                 <a:ea typeface="Trebuchet MS" pitchFamily="34" charset="-122"/>
                 <a:cs typeface="Trebuchet MS" pitchFamily="34" charset="-120"/>
               </a:rPr>
-              <a:t>-tate</a:t>
+              <a:t>-es</a:t>
             </a:r>
             <a:endParaRPr lang="en-US" sz="1300" dirty="0"/>
           </a:p>
@@ -41336,7 +43889,7 @@
                 <a:ea typeface="Trebuchet MS" pitchFamily="34" charset="-122"/>
                 <a:cs typeface="Trebuchet MS" pitchFamily="34" charset="-120"/>
               </a:rPr>
-              <a:t>veri-</a:t>
+              <a:t>in-</a:t>
             </a:r>
             <a:endParaRPr lang="en-US" sz="1300" dirty="0"/>
           </a:p>
@@ -41382,7 +43935,7 @@
             <a:avLst/>
           </a:prstGeom>
           <a:solidFill>
-            <a:srgbClr val="FCE7F3"/>
+            <a:srgbClr val="F8FAFC"/>
           </a:solidFill>
           <a:ln w="12700">
             <a:solidFill>
@@ -41394,18 +43947,43 @@
       </p:sp>
       <p:sp>
         <p:nvSpPr>
-          <p:cNvPr id="42" name="Text 40"/>
-          <p:cNvSpPr/>
-          <p:nvPr/>
-        </p:nvSpPr>
-        <p:spPr>
-          <a:xfrm>
-            <a:off x="5943600" y="3584448"/>
+          <p:cNvPr id="42" name="Shape 40"/>
+          <p:cNvSpPr/>
+          <p:nvPr/>
+        </p:nvSpPr>
+        <p:spPr>
+          <a:xfrm>
+            <a:off x="640080" y="4041648"/>
             <a:ext cx="1463040" cy="420624"/>
           </a:xfrm>
           <a:prstGeom prst="rect">
             <a:avLst/>
           </a:prstGeom>
+          <a:solidFill>
+            <a:srgbClr val="DDD6FE"/>
+          </a:solidFill>
+          <a:ln w="12700">
+            <a:solidFill>
+              <a:srgbClr val="E5E7EB"/>
+            </a:solidFill>
+            <a:prstDash val="solid"/>
+          </a:ln>
+        </p:spPr>
+      </p:sp>
+      <p:sp>
+        <p:nvSpPr>
+          <p:cNvPr id="43" name="Text 41"/>
+          <p:cNvSpPr/>
+          <p:nvPr/>
+        </p:nvSpPr>
+        <p:spPr>
+          <a:xfrm>
+            <a:off x="640080" y="4041648"/>
+            <a:ext cx="1463040" cy="420624"/>
+          </a:xfrm>
+          <a:prstGeom prst="rect">
+            <a:avLst/>
+          </a:prstGeom>
           <a:noFill/>
           <a:ln/>
         </p:spPr>
@@ -41419,13 +43997,13 @@
             <a:r>
               <a:rPr lang="en-US" sz="1300" b="1" dirty="0">
                 <a:solidFill>
-                  <a:srgbClr val="9D174D"/>
+                  <a:srgbClr val="4C1D95"/>
                 </a:solidFill>
                 <a:latin typeface="Trebuchet MS" pitchFamily="34" charset="0"/>
                 <a:ea typeface="Trebuchet MS" pitchFamily="34" charset="-122"/>
                 <a:cs typeface="Trebuchet MS" pitchFamily="34" charset="-120"/>
               </a:rPr>
-              <a:t>-tionary</a:t>
+              <a:t>pre-</a:t>
             </a:r>
             <a:endParaRPr lang="en-US" sz="1300" dirty="0"/>
           </a:p>
@@ -41433,13 +44011,63 @@
       </p:sp>
       <p:sp>
         <p:nvSpPr>
-          <p:cNvPr id="43" name="Text 41"/>
-          <p:cNvSpPr/>
-          <p:nvPr/>
-        </p:nvSpPr>
-        <p:spPr>
-          <a:xfrm>
-            <a:off x="365760" y="4178808"/>
+          <p:cNvPr id="44" name="Shape 42"/>
+          <p:cNvSpPr/>
+          <p:nvPr/>
+        </p:nvSpPr>
+        <p:spPr>
+          <a:xfrm>
+            <a:off x="3291840" y="4041648"/>
+            <a:ext cx="1645920" cy="420624"/>
+          </a:xfrm>
+          <a:prstGeom prst="rect">
+            <a:avLst/>
+          </a:prstGeom>
+          <a:solidFill>
+            <a:srgbClr val="F1F5F9"/>
+          </a:solidFill>
+          <a:ln w="12700">
+            <a:solidFill>
+              <a:srgbClr val="E5E7EB"/>
+            </a:solidFill>
+            <a:prstDash val="solid"/>
+          </a:ln>
+        </p:spPr>
+      </p:sp>
+      <p:sp>
+        <p:nvSpPr>
+          <p:cNvPr id="45" name="Shape 43"/>
+          <p:cNvSpPr/>
+          <p:nvPr/>
+        </p:nvSpPr>
+        <p:spPr>
+          <a:xfrm>
+            <a:off x="5943600" y="4041648"/>
+            <a:ext cx="1463040" cy="420624"/>
+          </a:xfrm>
+          <a:prstGeom prst="rect">
+            <a:avLst/>
+          </a:prstGeom>
+          <a:solidFill>
+            <a:srgbClr val="F1F5F9"/>
+          </a:solidFill>
+          <a:ln w="12700">
+            <a:solidFill>
+              <a:srgbClr val="E5E7EB"/>
+            </a:solidFill>
+            <a:prstDash val="solid"/>
+          </a:ln>
+        </p:spPr>
+      </p:sp>
+      <p:sp>
+        <p:nvSpPr>
+          <p:cNvPr id="46" name="Text 44"/>
+          <p:cNvSpPr/>
+          <p:nvPr/>
+        </p:nvSpPr>
+        <p:spPr>
+          <a:xfrm>
+            <a:off x="365760" y="4636008"/>
             <a:ext cx="1097280" cy="420624"/>
           </a:xfrm>
           <a:prstGeom prst="rect">
@@ -41472,14 +44100,14 @@
       </p:sp>
       <p:sp>
         <p:nvSpPr>
-          <p:cNvPr id="44" name="Shape 42"/>
-          <p:cNvSpPr/>
-          <p:nvPr/>
-        </p:nvSpPr>
-        <p:spPr>
-          <a:xfrm>
-            <a:off x="1508760" y="4178808"/>
-            <a:ext cx="950976" cy="420624"/>
+          <p:cNvPr id="47" name="Shape 45"/>
+          <p:cNvSpPr/>
+          <p:nvPr/>
+        </p:nvSpPr>
+        <p:spPr>
+          <a:xfrm>
+            <a:off x="1508760" y="4636008"/>
+            <a:ext cx="822960" cy="420624"/>
           </a:xfrm>
           <a:prstGeom prst="rect">
             <a:avLst>
@@ -41506,14 +44134,14 @@
       </p:sp>
       <p:sp>
         <p:nvSpPr>
-          <p:cNvPr id="45" name="Text 43"/>
-          <p:cNvSpPr/>
-          <p:nvPr/>
-        </p:nvSpPr>
-        <p:spPr>
-          <a:xfrm>
-            <a:off x="1508760" y="4178808"/>
-            <a:ext cx="950976" cy="420624"/>
+          <p:cNvPr id="48" name="Text 46"/>
+          <p:cNvSpPr/>
+          <p:nvPr/>
+        </p:nvSpPr>
+        <p:spPr>
+          <a:xfrm>
+            <a:off x="1508760" y="4636008"/>
+            <a:ext cx="822960" cy="420624"/>
           </a:xfrm>
           <a:prstGeom prst="rect">
             <a:avLst/>
@@ -41537,7 +44165,7 @@
                 <a:ea typeface="Trebuchet MS" pitchFamily="34" charset="-122"/>
                 <a:cs typeface="Trebuchet MS" pitchFamily="34" charset="-120"/>
               </a:rPr>
-              <a:t>pre-</a:t>
+              <a:t>ad-</a:t>
             </a:r>
             <a:endParaRPr lang="en-US" sz="1300" dirty="0"/>
           </a:p>
@@ -41545,13 +44173,13 @@
       </p:sp>
       <p:sp>
         <p:nvSpPr>
-          <p:cNvPr id="46" name="Text 44"/>
-          <p:cNvSpPr/>
-          <p:nvPr/>
-        </p:nvSpPr>
-        <p:spPr>
-          <a:xfrm>
-            <a:off x="2487168" y="4178808"/>
+          <p:cNvPr id="49" name="Text 47"/>
+          <p:cNvSpPr/>
+          <p:nvPr/>
+        </p:nvSpPr>
+        <p:spPr>
+          <a:xfrm>
+            <a:off x="2359152" y="4636008"/>
             <a:ext cx="320040" cy="420624"/>
           </a:xfrm>
           <a:prstGeom prst="rect">
@@ -41584,13 +44212,13 @@
       </p:sp>
       <p:sp>
         <p:nvSpPr>
-          <p:cNvPr id="47" name="Shape 45"/>
-          <p:cNvSpPr/>
-          <p:nvPr/>
-        </p:nvSpPr>
-        <p:spPr>
-          <a:xfrm>
-            <a:off x="2834640" y="4178808"/>
+          <p:cNvPr id="50" name="Shape 48"/>
+          <p:cNvSpPr/>
+          <p:nvPr/>
+        </p:nvSpPr>
+        <p:spPr>
+          <a:xfrm>
+            <a:off x="2706624" y="4636008"/>
             <a:ext cx="1097280" cy="420624"/>
           </a:xfrm>
           <a:prstGeom prst="rect">
@@ -41618,13 +44246,13 @@
       </p:sp>
       <p:sp>
         <p:nvSpPr>
-          <p:cNvPr id="48" name="Text 46"/>
-          <p:cNvSpPr/>
-          <p:nvPr/>
-        </p:nvSpPr>
-        <p:spPr>
-          <a:xfrm>
-            <a:off x="2834640" y="4178808"/>
+          <p:cNvPr id="51" name="Text 49"/>
+          <p:cNvSpPr/>
+          <p:nvPr/>
+        </p:nvSpPr>
+        <p:spPr>
+          <a:xfrm>
+            <a:off x="2706624" y="4636008"/>
             <a:ext cx="1097280" cy="420624"/>
           </a:xfrm>
           <a:prstGeom prst="rect">
@@ -41657,13 +44285,13 @@
       </p:sp>
       <p:sp>
         <p:nvSpPr>
-          <p:cNvPr id="49" name="Text 47"/>
-          <p:cNvSpPr/>
-          <p:nvPr/>
-        </p:nvSpPr>
-        <p:spPr>
-          <a:xfrm>
-            <a:off x="3959352" y="4178808"/>
+          <p:cNvPr id="52" name="Text 50"/>
+          <p:cNvSpPr/>
+          <p:nvPr/>
+        </p:nvSpPr>
+        <p:spPr>
+          <a:xfrm>
+            <a:off x="3831336" y="4636008"/>
             <a:ext cx="320040" cy="420624"/>
           </a:xfrm>
           <a:prstGeom prst="rect">
@@ -41696,13 +44324,13 @@
       </p:sp>
       <p:sp>
         <p:nvSpPr>
-          <p:cNvPr id="50" name="Shape 48"/>
-          <p:cNvSpPr/>
-          <p:nvPr/>
-        </p:nvSpPr>
-        <p:spPr>
-          <a:xfrm>
-            <a:off x="4306824" y="4178808"/>
+          <p:cNvPr id="53" name="Shape 51"/>
+          <p:cNvSpPr/>
+          <p:nvPr/>
+        </p:nvSpPr>
+        <p:spPr>
+          <a:xfrm>
+            <a:off x="4178808" y="4636008"/>
             <a:ext cx="1097280" cy="420624"/>
           </a:xfrm>
           <a:prstGeom prst="rect">
@@ -41730,13 +44358,13 @@
       </p:sp>
       <p:sp>
         <p:nvSpPr>
-          <p:cNvPr id="51" name="Text 49"/>
-          <p:cNvSpPr/>
-          <p:nvPr/>
-        </p:nvSpPr>
-        <p:spPr>
-          <a:xfrm>
-            <a:off x="4306824" y="4178808"/>
+          <p:cNvPr id="54" name="Text 52"/>
+          <p:cNvSpPr/>
+          <p:nvPr/>
+        </p:nvSpPr>
+        <p:spPr>
+          <a:xfrm>
+            <a:off x="4178808" y="4636008"/>
             <a:ext cx="1097280" cy="420624"/>
           </a:xfrm>
           <a:prstGeom prst="rect">
@@ -41769,13 +44397,13 @@
       </p:sp>
       <p:sp>
         <p:nvSpPr>
-          <p:cNvPr id="52" name="Text 50"/>
-          <p:cNvSpPr/>
-          <p:nvPr/>
-        </p:nvSpPr>
-        <p:spPr>
-          <a:xfrm>
-            <a:off x="5477256" y="4178808"/>
+          <p:cNvPr id="55" name="Text 53"/>
+          <p:cNvSpPr/>
+          <p:nvPr/>
+        </p:nvSpPr>
+        <p:spPr>
+          <a:xfrm>
+            <a:off x="5349240" y="4636008"/>
             <a:ext cx="365760" cy="420624"/>
           </a:xfrm>
           <a:prstGeom prst="rect">
@@ -41808,13 +44436,13 @@
       </p:sp>
       <p:sp>
         <p:nvSpPr>
-          <p:cNvPr id="53" name="Shape 51"/>
-          <p:cNvSpPr/>
-          <p:nvPr/>
-        </p:nvSpPr>
-        <p:spPr>
-          <a:xfrm>
-            <a:off x="5888736" y="4178808"/>
+          <p:cNvPr id="56" name="Shape 54"/>
+          <p:cNvSpPr/>
+          <p:nvPr/>
+        </p:nvSpPr>
+        <p:spPr>
+          <a:xfrm>
+            <a:off x="5760720" y="4636008"/>
             <a:ext cx="2194560" cy="420624"/>
           </a:xfrm>
           <a:prstGeom prst="rect">
@@ -41835,13 +44463,13 @@
       </p:sp>
       <p:sp>
         <p:nvSpPr>
-          <p:cNvPr id="54" name="Text 52"/>
-          <p:cNvSpPr/>
-          <p:nvPr/>
-        </p:nvSpPr>
-        <p:spPr>
-          <a:xfrm>
-            <a:off x="5888736" y="4178808"/>
+          <p:cNvPr id="57" name="Text 55"/>
+          <p:cNvSpPr/>
+          <p:nvPr/>
+        </p:nvSpPr>
+        <p:spPr>
+          <a:xfrm>
+            <a:off x="5760720" y="4636008"/>
             <a:ext cx="2194560" cy="420624"/>
           </a:xfrm>
           <a:prstGeom prst="rect">
@@ -41866,7 +44494,7 @@
                 <a:ea typeface="Trebuchet MS" pitchFamily="34" charset="-122"/>
                 <a:cs typeface="Trebuchet MS" pitchFamily="34" charset="-120"/>
               </a:rPr>
-              <a:t>dictate</a:t>
+              <a:t>indices</a:t>
             </a:r>
             <a:endParaRPr lang="en-US" sz="1400" dirty="0"/>
           </a:p>
@@ -42158,7 +44786,7 @@
                 <a:ea typeface="Calibri" pitchFamily="34" charset="-122"/>
                 <a:cs typeface="Calibri" pitchFamily="34" charset="-120"/>
               </a:rPr>
-              <a:t>Word Labs  •  wordlabs.app  •  Root: 'dic' = say, speak, proclaim</a:t>
+              <a:t>Word Labs  •  wordlabs.app  •  Root: 'dic' = say; speak</a:t>
             </a:r>
             <a:endParaRPr lang="en-US" sz="800" dirty="0"/>
           </a:p>
@@ -42270,7 +44898,7 @@
                 <a:ea typeface="Trebuchet MS" pitchFamily="34" charset="-122"/>
                 <a:cs typeface="Trebuchet MS" pitchFamily="34" charset="-120"/>
               </a:rPr>
-              <a:t>dictate</a:t>
+              <a:t>indices</a:t>
             </a:r>
             <a:endParaRPr lang="en-US" sz="1200" dirty="0"/>
           </a:p>
@@ -42336,7 +44964,7 @@
                 <a:ea typeface="Calibri" pitchFamily="34" charset="-122"/>
                 <a:cs typeface="Calibri" pitchFamily="34" charset="-120"/>
               </a:rPr>
-              <a:t>An official decision or judgement made about something, like in a court of law.</a:t>
+              <a:t>devoted to a task or purpose</a:t>
             </a:r>
             <a:endParaRPr lang="en-US" sz="1200" dirty="0"/>
           </a:p>
@@ -42409,7 +45037,7 @@
                 <a:ea typeface="Trebuchet MS" pitchFamily="34" charset="-122"/>
                 <a:cs typeface="Trebuchet MS" pitchFamily="34" charset="-120"/>
               </a:rPr>
-              <a:t>dictionary</a:t>
+              <a:t>diction</a:t>
             </a:r>
             <a:endParaRPr lang="en-US" sz="1200" dirty="0"/>
           </a:p>
@@ -42475,7 +45103,7 @@
                 <a:ea typeface="Calibri" pitchFamily="34" charset="-122"/>
                 <a:cs typeface="Calibri" pitchFamily="34" charset="-120"/>
               </a:rPr>
-              <a:t>To give your time and effort fully to a person or a special purpose.</a:t>
+              <a:t>points out or shows</a:t>
             </a:r>
             <a:endParaRPr lang="en-US" sz="1200" dirty="0"/>
           </a:p>
@@ -42548,7 +45176,7 @@
                 <a:ea typeface="Trebuchet MS" pitchFamily="34" charset="-122"/>
                 <a:cs typeface="Trebuchet MS" pitchFamily="34" charset="-120"/>
               </a:rPr>
-              <a:t>predict</a:t>
+              <a:t>indicate</a:t>
             </a:r>
             <a:endParaRPr lang="en-US" sz="1200" dirty="0"/>
           </a:p>
@@ -42614,7 +45242,7 @@
                 <a:ea typeface="Calibri" pitchFamily="34" charset="-122"/>
                 <a:cs typeface="Calibri" pitchFamily="34" charset="-120"/>
               </a:rPr>
-              <a:t>To say something out loud for someone else to write down, or to give orders that must be followed.</a:t>
+              <a:t>lists or scales used to measure or show levels of something (plural of index)</a:t>
             </a:r>
             <a:endParaRPr lang="en-US" sz="1200" dirty="0"/>
           </a:p>
@@ -42687,7 +45315,7 @@
                 <a:ea typeface="Trebuchet MS" pitchFamily="34" charset="-122"/>
                 <a:cs typeface="Trebuchet MS" pitchFamily="34" charset="-120"/>
               </a:rPr>
-              <a:t>indicate</a:t>
+              <a:t>addiction</a:t>
             </a:r>
             <a:endParaRPr lang="en-US" sz="1200" dirty="0"/>
           </a:p>
@@ -42753,7 +45381,7 @@
                 <a:ea typeface="Calibri" pitchFamily="34" charset="-122"/>
                 <a:cs typeface="Calibri" pitchFamily="34" charset="-120"/>
               </a:rPr>
-              <a:t>To say the opposite of what someone else has said, disagreeing with their words.</a:t>
+              <a:t>pointed out or showed</a:t>
             </a:r>
             <a:endParaRPr lang="en-US" sz="1200" dirty="0"/>
           </a:p>
@@ -42826,7 +45454,7 @@
                 <a:ea typeface="Trebuchet MS" pitchFamily="34" charset="-122"/>
                 <a:cs typeface="Trebuchet MS" pitchFamily="34" charset="-120"/>
               </a:rPr>
-              <a:t>verdict</a:t>
+              <a:t>dedicated</a:t>
             </a:r>
             <a:endParaRPr lang="en-US" sz="1200" dirty="0"/>
           </a:p>
@@ -42892,7 +45520,7 @@
                 <a:ea typeface="Calibri" pitchFamily="34" charset="-122"/>
                 <a:cs typeface="Calibri" pitchFamily="34" charset="-120"/>
               </a:rPr>
-              <a:t>To say what you think will happen in the future before it actually occurs.</a:t>
+              <a:t>to point out or show something</a:t>
             </a:r>
             <a:endParaRPr lang="en-US" sz="1200" dirty="0"/>
           </a:p>
@@ -42965,7 +45593,7 @@
                 <a:ea typeface="Trebuchet MS" pitchFamily="34" charset="-122"/>
                 <a:cs typeface="Trebuchet MS" pitchFamily="34" charset="-120"/>
               </a:rPr>
-              <a:t>contradict</a:t>
+              <a:t>indicated</a:t>
             </a:r>
             <a:endParaRPr lang="en-US" sz="1200" dirty="0"/>
           </a:p>
@@ -43031,7 +45659,7 @@
                 <a:ea typeface="Calibri" pitchFamily="34" charset="-122"/>
                 <a:cs typeface="Calibri" pitchFamily="34" charset="-120"/>
               </a:rPr>
-              <a:t>To point to or show something clearly so others can understand.</a:t>
+              <a:t>a strong need to keep doing or using something, even when it causes harm</a:t>
             </a:r>
             <a:endParaRPr lang="en-US" sz="1200" dirty="0"/>
           </a:p>
@@ -43104,7 +45732,7 @@
                 <a:ea typeface="Trebuchet MS" pitchFamily="34" charset="-122"/>
                 <a:cs typeface="Trebuchet MS" pitchFamily="34" charset="-120"/>
               </a:rPr>
-              <a:t>dedicate</a:t>
+              <a:t>indicates</a:t>
             </a:r>
             <a:endParaRPr lang="en-US" sz="1200" dirty="0"/>
           </a:p>
@@ -43170,7 +45798,7 @@
                 <a:ea typeface="Calibri" pitchFamily="34" charset="-122"/>
                 <a:cs typeface="Calibri" pitchFamily="34" charset="-120"/>
               </a:rPr>
-              <a:t>A book that lists words in alphabetical order and explains what they mean.</a:t>
+              <a:t>the way someone speaks or pronounces words clearly</a:t>
             </a:r>
             <a:endParaRPr lang="en-US" sz="1200" dirty="0"/>
           </a:p>
@@ -43462,7 +46090,7 @@
                 <a:ea typeface="Calibri" pitchFamily="34" charset="-122"/>
                 <a:cs typeface="Calibri" pitchFamily="34" charset="-120"/>
               </a:rPr>
-              <a:t>Word Labs  •  wordlabs.app  •  Root: 'dic' = say, speak, proclaim</a:t>
+              <a:t>Word Labs  •  wordlabs.app  •  Root: 'dic' = say; speak</a:t>
             </a:r>
             <a:endParaRPr lang="en-US" sz="800" dirty="0"/>
           </a:p>
@@ -43665,7 +46293,7 @@
                 <a:ea typeface="Calibri" pitchFamily="34" charset="-122"/>
                 <a:cs typeface="Calibri" pitchFamily="34" charset="-120"/>
               </a:rPr>
-              <a:t>The weather forecast will predict whether we need to bring an umbrella to school tomorrow.</a:t>
+              <a:t>The economic indices showed prices had risen sharply this year.</a:t>
             </a:r>
             <a:endParaRPr lang="en-US" sz="1500" dirty="0"/>
           </a:p>
@@ -43829,7 +46457,7 @@
                 <a:ea typeface="Calibri" pitchFamily="34" charset="-122"/>
                 <a:cs typeface="Calibri" pitchFamily="34" charset="-120"/>
               </a:rPr>
-              <a:t>Our teacher asked us to use a dictionary to find the meaning of any unfamiliar words in the passage.</a:t>
+              <a:t>The actor's diction was so clear that everyone in the theatre understood him.</a:t>
             </a:r>
             <a:endParaRPr lang="en-US" sz="1500" dirty="0"/>
           </a:p>
@@ -43993,7 +46621,7 @@
                 <a:ea typeface="Calibri" pitchFamily="34" charset="-122"/>
                 <a:cs typeface="Calibri" pitchFamily="34" charset="-120"/>
               </a:rPr>
-              <a:t>The captain had to dictate instructions to the crew during the storm so everyone knew what to do.</a:t>
+              <a:t>Please indicate your answer by circling the correct letter.</a:t>
             </a:r>
             <a:endParaRPr lang="en-US" sz="1500" dirty="0"/>
           </a:p>
